--- a/examples/outputs/video/dark-minimalist/visual/deck.pptx
+++ b/examples/outputs/video/dark-minimalist/visual/deck.pptx
@@ -304,10 +304,246 @@
           <c:layoutTarget val="inner"/>
           <c:xMode val="edge"/>
           <c:yMode val="edge"/>
+          <c:x val="0.0329"/>
+          <c:y val="0.0329"/>
+          <c:w val="0.9343"/>
+          <c:h val="0.9343"/>
+        </c:manualLayout>
+      </c:layout>
+      <c:doughnutChart>
+        <c:varyColors val="1"/>
+        <c:ser>
+          <c:idx val="0"/>
+          <c:order val="0"/>
+          <c:tx>
+            <c:strRef>
+              <c:f>Sheet1!$B$1</c:f>
+              <c:strCache>
+                <c:ptCount val="1"/>
+                <c:pt idx="0">
+                  <c:v>Состав</c:v>
+                </c:pt>
+              </c:strCache>
+            </c:strRef>
+          </c:tx>
+          <c:dPt>
+            <c:idx val="0"/>
+            <c:spPr>
+              <a:solidFill>
+                <a:srgbClr val="C2D076"/>
+              </a:solidFill>
+              <a:ln w="25400">
+                <a:solidFill>
+                  <a:srgbClr val="001514"/>
+                </a:solidFill>
+              </a:ln>
+            </c:spPr>
+          </c:dPt>
+          <c:dPt>
+            <c:idx val="1"/>
+            <c:spPr>
+              <a:solidFill>
+                <a:srgbClr val="E8EDCB"/>
+              </a:solidFill>
+              <a:ln w="25400">
+                <a:solidFill>
+                  <a:srgbClr val="001514"/>
+                </a:solidFill>
+              </a:ln>
+            </c:spPr>
+          </c:dPt>
+          <c:dLbls>
+            <c:dLbl>
+              <c:idx val="0"/>
+              <c:numFmt formatCode="0&quot;%&quot;;&quot;−&quot;0&quot;%&quot;;" sourceLinked="0"/>
+              <c:spPr>
+                <a:noFill/>
+                <a:ln>
+                  <a:noFill/>
+                </a:ln>
+              </c:spPr>
+              <c:txPr>
+                <a:bodyPr wrap="none"/>
+                <a:lstStyle/>
+                <a:p>
+                  <a:pPr>
+                    <a:defRPr sz="2200" b="0">
+                      <a:solidFill>
+                        <a:srgbClr val="001514"/>
+                      </a:solidFill>
+                      <a:latin typeface="Inter Light"/>
+                      <a:ea typeface="Inter Light"/>
+                      <a:cs typeface="Inter Light"/>
+                    </a:defRPr>
+                  </a:pPr>
+                  <a:endParaRPr lang="ru-RU"/>
+                </a:p>
+              </c:txPr>
+              <c:showLegendKey val="0"/>
+              <c:showVal val="1"/>
+              <c:showCatName val="0"/>
+              <c:showSerName val="0"/>
+              <c:showPercent val="0"/>
+              <c:showBubbleSize val="0"/>
+            </c:dLbl>
+            <c:dLbl>
+              <c:idx val="1"/>
+              <c:delete val="1"/>
+            </c:dLbl>
+            <c:numFmt formatCode="0&quot;%&quot;;&quot;−&quot;0&quot;%&quot;;" sourceLinked="0"/>
+            <c:spPr>
+              <a:noFill/>
+              <a:ln>
+                <a:noFill/>
+              </a:ln>
+            </c:spPr>
+            <c:txPr>
+              <a:bodyPr wrap="none"/>
+              <a:lstStyle/>
+              <a:p>
+                <a:pPr>
+                  <a:defRPr sz="2200" b="0">
+                    <a:solidFill>
+                      <a:srgbClr val="FFFFFF"/>
+                    </a:solidFill>
+                    <a:latin typeface="Inter Light"/>
+                    <a:ea typeface="Inter Light"/>
+                    <a:cs typeface="Inter Light"/>
+                  </a:defRPr>
+                </a:pPr>
+                <a:endParaRPr lang="ru-RU"/>
+              </a:p>
+            </c:txPr>
+            <c:showLegendKey val="0"/>
+            <c:showVal val="1"/>
+            <c:showCatName val="0"/>
+            <c:showSerName val="0"/>
+            <c:showPercent val="0"/>
+            <c:showBubbleSize val="0"/>
+            <c:showLeaderLines val="0"/>
+          </c:dLbls>
+          <c:cat>
+            <c:strRef>
+              <c:f>Sheet1!$A$2:$A$3</c:f>
+              <c:strCache>
+                <c:ptCount val="2"/>
+                <c:pt idx="0">
+                  <c:v>Свободные фигуры</c:v>
+                </c:pt>
+                <c:pt idx="1">
+                  <c:v>Плейсхолдеры</c:v>
+                </c:pt>
+              </c:strCache>
+            </c:strRef>
+          </c:cat>
+          <c:val>
+            <c:numRef>
+              <c:f>Sheet1!$B$2:$B$3</c:f>
+              <c:numCache>
+                <c:formatCode>General</c:formatCode>
+                <c:ptCount val="2"/>
+                <c:pt idx="0">
+                  <c:v>95.0</c:v>
+                </c:pt>
+                <c:pt idx="1">
+                  <c:v>5.0</c:v>
+                </c:pt>
+              </c:numCache>
+            </c:numRef>
+          </c:val>
+        </c:ser>
+        <c:dLbls>
+          <c:numFmt formatCode="0&quot;%&quot;;&quot;−&quot;0&quot;%&quot;;" sourceLinked="0"/>
+          <c:spPr>
+            <a:noFill/>
+            <a:ln>
+              <a:noFill/>
+            </a:ln>
+          </c:spPr>
+          <c:txPr>
+            <a:bodyPr wrap="none"/>
+            <a:lstStyle/>
+            <a:p>
+              <a:pPr>
+                <a:defRPr sz="2200" b="0">
+                  <a:solidFill>
+                    <a:srgbClr val="FFFFFF"/>
+                  </a:solidFill>
+                  <a:latin typeface="Inter Light"/>
+                  <a:ea typeface="Inter Light"/>
+                  <a:cs typeface="Inter Light"/>
+                </a:defRPr>
+              </a:pPr>
+              <a:endParaRPr lang="ru-RU"/>
+            </a:p>
+          </c:txPr>
+          <c:showLegendKey val="0"/>
+          <c:showVal val="1"/>
+          <c:showCatName val="0"/>
+          <c:showSerName val="0"/>
+          <c:showPercent val="0"/>
+          <c:showBubbleSize val="0"/>
+          <c:showLeaderLines val="0"/>
+        </c:dLbls>
+        <c:firstSliceAng val="0"/>
+        <c:holeSize val="56"/>
+      </c:doughnutChart>
+      <c:spPr>
+        <a:noFill/>
+        <a:ln>
+          <a:noFill/>
+        </a:ln>
+      </c:spPr>
+    </c:plotArea>
+    <c:plotVisOnly val="1"/>
+    <c:dispBlanksAs val="gap"/>
+    <c:showDLblsOverMax val="0"/>
+  </c:chart>
+  <c:spPr>
+    <a:noFill/>
+    <a:ln>
+      <a:noFill/>
+    </a:ln>
+  </c:spPr>
+  <c:txPr>
+    <a:bodyPr/>
+    <a:lstStyle/>
+    <a:p>
+      <a:pPr>
+        <a:defRPr sz="1800">
+          <a:solidFill>
+            <a:srgbClr val="FFFFFF"/>
+          </a:solidFill>
+          <a:latin typeface="Inter Light"/>
+          <a:ea typeface="Inter Light"/>
+          <a:cs typeface="Inter Light"/>
+        </a:defRPr>
+      </a:pPr>
+      <a:endParaRPr/>
+    </a:p>
+  </c:txPr>
+  <c:externalData r:id="rId1">
+    <c:autoUpdate val="0"/>
+  </c:externalData>
+</c:chartSpace>
+</file>
+
+<file path=ppt/charts/chart2.xml><?xml version="1.0" encoding="utf-8"?>
+<c:chartSpace xmlns:c="http://schemas.openxmlformats.org/drawingml/2006/chart" xmlns:a="http://schemas.openxmlformats.org/drawingml/2006/main" xmlns:r="http://schemas.openxmlformats.org/officeDocument/2006/relationships">
+  <c:date1904 val="0"/>
+  <c:roundedCorners val="0"/>
+  <c:chart>
+    <c:autoTitleDeleted val="1"/>
+    <c:plotArea>
+      <c:layout>
+        <c:manualLayout>
+          <c:layoutTarget val="inner"/>
+          <c:xMode val="edge"/>
+          <c:yMode val="edge"/>
           <c:x val="0.1445"/>
-          <c:y val="0.0153"/>
+          <c:y val="0.0159"/>
           <c:w val="0.8067"/>
-          <c:h val="0.9694"/>
+          <c:h val="0.9682"/>
         </c:manualLayout>
       </c:layout>
       <c:barChart>
@@ -323,7 +559,7 @@
               <c:strCache>
                 <c:ptCount val="1"/>
                 <c:pt idx="0">
-                  <c:v>Число проверок</c:v>
+                  <c:v>Проверки</c:v>
                 </c:pt>
               </c:strCache>
             </c:strRef>
@@ -454,7 +690,7 @@
           </c:val>
         </c:ser>
         <c:dLbls>
-          <c:numFmt formatCode="#,##0&quot; проверок&quot;;&quot;−&quot;#,##0&quot; проверок&quot;;" sourceLinked="0"/>
+          <c:numFmt formatCode="#,##0;&quot;−&quot;#,##0;" sourceLinked="0"/>
           <c:spPr>
             <a:noFill/>
             <a:ln>
@@ -583,7 +819,7 @@
 </c:chartSpace>
 </file>
 
-<file path=ppt/charts/chart2.xml><?xml version="1.0" encoding="utf-8"?>
+<file path=ppt/charts/chart3.xml><?xml version="1.0" encoding="utf-8"?>
 <c:chartSpace xmlns:c="http://schemas.openxmlformats.org/drawingml/2006/chart" xmlns:a="http://schemas.openxmlformats.org/drawingml/2006/main" xmlns:r="http://schemas.openxmlformats.org/officeDocument/2006/relationships">
   <c:date1904 val="0"/>
   <c:roundedCorners val="0"/>
@@ -733,7 +969,7 @@
           </c:val>
         </c:ser>
         <c:dLbls>
-          <c:numFmt formatCode="#,##0&quot; сек&quot;;&quot;−&quot;#,##0&quot; сек&quot;;" sourceLinked="0"/>
+          <c:numFmt formatCode="#,##0&quot; секунд&quot;;&quot;−&quot;#,##0&quot; секунд&quot;;" sourceLinked="0"/>
           <c:spPr>
             <a:noFill/>
             <a:ln>
@@ -1336,7 +1572,7 @@
           <a:p>
             <a:r>
               <a:rPr lang="ru-RU"/>
-              <a:t>Три основные проблемы: ручная вёрстка, ИИ, который не воспроизводит стиль компании, и шаблоны, которые не являются инструкциями.</a:t>
+              <a:t>ИИ пока не способен воспроизводить фирменный стиль, а шаблоны не дают понятной инструкции для новых слайдов.</a:t>
             </a:r>
           </a:p>
           <a:p>
@@ -1400,7 +1636,7 @@
           <a:p>
             <a:r>
               <a:rPr lang="ru-RU"/>
-              <a:t>Verstka использует шаблон как набор дизайнерских правил и на его основе генерирует три редактируемые презентации.</a:t>
+              <a:t>В реальных шаблонах 95% фигур — свободные, поэтому правила оформления приходится выводить из самих слайдов-образцов, включая палитру, кегли, сетку, поля, логотипы и колонтитулы.</a:t>
             </a:r>
           </a:p>
           <a:p>
@@ -1463,6 +1699,12 @@
           <a:lstStyle/>
           <a:p>
             <a:r>
+              <a:rPr lang="ru-RU"/>
+              <a:t>Verstka использует шаблон как набор правил, а не макетов, чтобы автоматически создать три редактируемые презентации на основе текста.</a:t>
+            </a:r>
+          </a:p>
+          <a:p>
+            <a:r>
               <a:t>[verstka:sl4]</a:t>
             </a:r>
           </a:p>
@@ -1522,7 +1764,7 @@
           <a:p>
             <a:r>
               <a:rPr lang="ru-RU"/>
-              <a:t>Одинаковое содержание, разная подача.</a:t>
+              <a:t>Агент работает на открытых моделях до 35 миллиардов параметров с лицензией Apache 2.0. Процесс включает анализ текста, проектирование, проверку и вёрстку слайдов.</a:t>
             </a:r>
           </a:p>
           <a:p>
@@ -1586,7 +1828,7 @@
           <a:p>
             <a:r>
               <a:rPr lang="ru-RU"/>
-              <a:t>На диаграмме показано распределение 41 проверки по категориям: 12 — целостность, 11 — вёрстка, 7 — шаблон, 6 — контент, 5 — плотность.</a:t>
+              <a:t>Содержание одно, подача разная. | Вариант | Подача | Когда подходит |. |---|---|---|. | Структурный | одна мысль на слайд, строгая сетка | отчёт и защита проекта |. | Визуальный | крупные цифры и наглядные схемы | питч и выступление со сцены |. | Компактный | вывод первой строкой, данные справа | рассылка руководителю |.</a:t>
             </a:r>
           </a:p>
           <a:p>
@@ -1650,7 +1892,7 @@
           <a:p>
             <a:r>
               <a:rPr lang="ru-RU"/>
-              <a:t>Каждое число плана сверяется с текстом до вёрстки и ещё раз в готовом PPTX.</a:t>
+              <a:t>Каждый слайд проходит 41 проверку: 12 на целостность, 11 на вёрстку, 7 на шаблон, 6 на контент и 5 на плотность. Найденные проблемы помечаются на слайде и исправляются автоматически.</a:t>
             </a:r>
           </a:p>
           <a:p>
@@ -1714,7 +1956,7 @@
           <a:p>
             <a:r>
               <a:rPr lang="ru-RU"/>
-              <a:t>Регрессионный корпус включает 87 чужих шаблонов и 261 презентацию на них. Средняя оценка проверки качества по корпусу — 99 из 100. Сервис поддерживает 12 форматов: pptx, potx, ppt, odp, thmx и другие.</a:t>
+              <a:t>Каждое число в презентации сверяется дважды: до вёрстки и после. Всего было подготовлено 9 демонстрационных презентаций без выдуманных чисел.</a:t>
             </a:r>
           </a:p>
           <a:p>
@@ -1778,7 +2020,7 @@
           <a:p>
             <a:r>
               <a:rPr lang="ru-RU"/>
-              <a:t>Время генерации всех шаблонов меньше 5 минут, что подтверждает высокую скорость работы системы. VK Tech генерируется за 113 секунд, VK Education — за 145 секунд, VK WorkSpace — за 175 секунд.</a:t>
+              <a:t>Сервис поддерживает 12 форматов файлов, включая pptx, potx, ppt, odp, thmx и другие. Он проверяет качество презентаций по 87 чужим шаблонам, средняя оценка качества — 99 из 100.</a:t>
             </a:r>
           </a:p>
           <a:p>
@@ -1842,7 +2084,7 @@
           <a:p>
             <a:r>
               <a:rPr lang="ru-RU"/>
-              <a:t>Все три модели используют лицензию Apache 2.0 и предназначены для разных сценариев использования: основная модель и два запасных звена.</a:t>
+              <a:t>Время генерации трёх вариантов на шаблонах датасета: VK Tech — 113 секунд, VK Education — 145 секунд, VK WorkSpace — 175 секунд. Все значения значительно ниже установленного лимита в 5 минут.</a:t>
             </a:r>
           </a:p>
           <a:p>
@@ -1906,7 +2148,7 @@
           <a:p>
             <a:r>
               <a:rPr lang="ru-RU"/>
-              <a:t>2 028 автотестов, PPTX с редактируемыми объектами, PDF и HTML, чат с агентом для правок. Дальше — генерация изображений внутри слайдов и переход на инференс VK.</a:t>
+              <a:t>После финала компания планирует три ключевых шага: переход на более мощные технологии инференса, внедрение генерации изображений в слайдах и запуск пилота на шаблонах и сценариях VK Tech.</a:t>
             </a:r>
           </a:p>
           <a:p>
@@ -4241,7 +4483,7 @@
         <p:spPr>
           <a:xfrm>
             <a:off x="619057" y="2623820"/>
-            <a:ext cx="9424071" cy="1527657"/>
+            <a:ext cx="9651876" cy="1527657"/>
           </a:xfrm>
           <a:prstGeom prst="rect">
             <a:avLst/>
@@ -4284,7 +4526,7 @@
                 <a:cs typeface="Inter Medium"/>
                 <a:sym typeface="Inter Medium"/>
               </a:rPr>
-              <a:t>Оформление отнимает больше времени, чем содержание</a:t>
+              <a:t>Вёрстка забирает больше времени, чем написание текста</a:t>
             </a:r>
             <a:endParaRPr>
               <a:latin typeface="Inter Medium"/>
@@ -4304,11 +4546,11 @@
         <p:spPr>
           <a:xfrm>
             <a:off x="1024128" y="4665827"/>
-            <a:ext cx="5120640" cy="4408442"/>
+            <a:ext cx="5120640" cy="3252823"/>
           </a:xfrm>
           <a:prstGeom prst="roundRect">
             <a:avLst>
-              <a:gd name="adj" fmla="val 2489"/>
+              <a:gd name="adj" fmla="val 3373"/>
             </a:avLst>
           </a:prstGeom>
           <a:solidFill>
@@ -4327,8 +4569,8 @@
         </p:nvSpPr>
         <p:spPr>
           <a:xfrm>
-            <a:off x="1459382" y="5101081"/>
-            <a:ext cx="4250132" cy="853440"/>
+            <a:off x="1285280" y="4926979"/>
+            <a:ext cx="4598336" cy="853440"/>
           </a:xfrm>
           <a:prstGeom prst="rect">
             <a:avLst/>
@@ -4369,268 +4611,8 @@
         </p:nvSpPr>
         <p:spPr>
           <a:xfrm>
-            <a:off x="1459382" y="6062534"/>
-            <a:ext cx="4250132" cy="2576481"/>
-          </a:xfrm>
-          <a:prstGeom prst="rect">
-            <a:avLst/>
-          </a:prstGeom>
-          <a:noFill/>
-        </p:spPr>
-        <p:txBody>
-          <a:bodyPr wrap="square" lIns="0" tIns="0" rIns="0" bIns="0" anchor="t" rtlCol="0">
-            <a:noAutofit/>
-          </a:bodyPr>
-          <a:lstStyle/>
-          <a:p>
-            <a:pPr algn="l" marL="0" indent="0">
-              <a:lnSpc>
-                <a:spcPct val="100000"/>
-              </a:lnSpc>
-              <a:spcAft>
-                <a:spcPts val="4733"/>
-              </a:spcAft>
-              <a:buNone/>
-            </a:pPr>
-            <a:r>
-              <a:rPr lang="ru-RU" sz="2799" b="0" cap="none" spc="0" baseline="0" dirty="0">
-                <a:solidFill>
-                  <a:srgbClr val="C2D076"/>
-                </a:solidFill>
-                <a:latin typeface="Inter Light"/>
-                <a:cs typeface="Inter Light"/>
-              </a:rPr>
-              <a:t>Ручная вёрстка</a:t>
-            </a:r>
-            <a:endParaRPr lang="ru-RU" sz="2799"/>
-          </a:p>
-          <a:p>
-            <a:pPr algn="l" marL="0" indent="0">
-              <a:lnSpc>
-                <a:spcPct val="100000"/>
-              </a:lnSpc>
-              <a:buNone/>
-            </a:pPr>
-            <a:r>
-              <a:rPr lang="ru-RU" sz="2499" b="0" cap="none" spc="0" baseline="0" dirty="0">
-                <a:solidFill>
-                  <a:srgbClr val="FFFFFF"/>
-                </a:solidFill>
-                <a:latin typeface="Inter Light"/>
-                <a:cs typeface="Inter Light"/>
-              </a:rPr>
-              <a:t>Подобрать макет, подвинуть блоки, подогнать цвета под фирменный стиль</a:t>
-            </a:r>
-            <a:endParaRPr lang="ru-RU" sz="2499"/>
-          </a:p>
-        </p:txBody>
-      </p:sp>
-      <p:sp>
-        <p:nvSpPr>
-          <p:cNvPr id="46" name="Card 46"/>
-          <p:cNvSpPr/>
-          <p:nvPr/>
-        </p:nvSpPr>
-        <p:spPr>
-          <a:xfrm>
-            <a:off x="6583680" y="4665827"/>
-            <a:ext cx="5120640" cy="4408442"/>
-          </a:xfrm>
-          <a:prstGeom prst="roundRect">
-            <a:avLst>
-              <a:gd name="adj" fmla="val 2489"/>
-            </a:avLst>
-          </a:prstGeom>
-          <a:solidFill>
-            <a:srgbClr val="000000"/>
-          </a:solidFill>
-          <a:ln>
-            <a:noFill/>
-          </a:ln>
-        </p:spPr>
-      </p:sp>
-      <p:sp>
-        <p:nvSpPr>
-          <p:cNvPr id="47" name="Index 47"/>
-          <p:cNvSpPr txBox="1"/>
-          <p:nvPr/>
-        </p:nvSpPr>
-        <p:spPr>
-          <a:xfrm>
-            <a:off x="7018934" y="5101081"/>
-            <a:ext cx="4250132" cy="853440"/>
-          </a:xfrm>
-          <a:prstGeom prst="rect">
-            <a:avLst/>
-          </a:prstGeom>
-          <a:noFill/>
-        </p:spPr>
-        <p:txBody>
-          <a:bodyPr wrap="square" lIns="0" tIns="0" rIns="0" bIns="0" anchor="t" rtlCol="0">
-            <a:noAutofit/>
-          </a:bodyPr>
-          <a:lstStyle/>
-          <a:p>
-            <a:pPr algn="l" marL="0" indent="0">
-              <a:lnSpc>
-                <a:spcPct val="100000"/>
-              </a:lnSpc>
-              <a:buNone/>
-            </a:pPr>
-            <a:r>
-              <a:rPr lang="ru-RU" sz="5600" b="0" cap="none" spc="0" baseline="0" dirty="0">
-                <a:solidFill>
-                  <a:srgbClr val="C2D076"/>
-                </a:solidFill>
-                <a:latin typeface="Inter Light"/>
-                <a:cs typeface="Inter Light"/>
-              </a:rPr>
-              <a:t>02</a:t>
-            </a:r>
-            <a:endParaRPr lang="ru-RU" sz="5600"/>
-          </a:p>
-        </p:txBody>
-      </p:sp>
-      <p:sp>
-        <p:nvSpPr>
-          <p:cNvPr id="48" name="Card text 48"/>
-          <p:cNvSpPr txBox="1"/>
-          <p:nvPr/>
-        </p:nvSpPr>
-        <p:spPr>
-          <a:xfrm>
-            <a:off x="7018934" y="6062534"/>
-            <a:ext cx="4250132" cy="2576481"/>
-          </a:xfrm>
-          <a:prstGeom prst="rect">
-            <a:avLst/>
-          </a:prstGeom>
-          <a:noFill/>
-        </p:spPr>
-        <p:txBody>
-          <a:bodyPr wrap="square" lIns="0" tIns="0" rIns="0" bIns="0" anchor="t" rtlCol="0">
-            <a:noAutofit/>
-          </a:bodyPr>
-          <a:lstStyle/>
-          <a:p>
-            <a:pPr algn="l" marL="0" indent="0">
-              <a:lnSpc>
-                <a:spcPct val="100000"/>
-              </a:lnSpc>
-              <a:spcAft>
-                <a:spcPts val="4733"/>
-              </a:spcAft>
-              <a:buNone/>
-            </a:pPr>
-            <a:r>
-              <a:rPr lang="ru-RU" sz="2799" b="0" cap="none" spc="0" baseline="0" dirty="0">
-                <a:solidFill>
-                  <a:srgbClr val="C2D076"/>
-                </a:solidFill>
-                <a:latin typeface="Inter Light"/>
-                <a:cs typeface="Inter Light"/>
-              </a:rPr>
-              <a:t>ИИ ломает стиль</a:t>
-            </a:r>
-            <a:endParaRPr lang="ru-RU" sz="2799"/>
-          </a:p>
-          <a:p>
-            <a:pPr algn="l" marL="0" indent="0">
-              <a:lnSpc>
-                <a:spcPct val="100000"/>
-              </a:lnSpc>
-              <a:buNone/>
-            </a:pPr>
-            <a:r>
-              <a:rPr lang="ru-RU" sz="2499" b="0" cap="none" spc="0" baseline="0" dirty="0">
-                <a:solidFill>
-                  <a:srgbClr val="FFFFFF"/>
-                </a:solidFill>
-                <a:latin typeface="Inter Light"/>
-                <a:cs typeface="Inter Light"/>
-              </a:rPr>
-              <a:t>Нейросети неплохо пишут текст, но не воспроизводят дизайн-⁠систему компании</a:t>
-            </a:r>
-            <a:endParaRPr lang="ru-RU" sz="2499"/>
-          </a:p>
-        </p:txBody>
-      </p:sp>
-      <p:sp>
-        <p:nvSpPr>
-          <p:cNvPr id="49" name="Card 49"/>
-          <p:cNvSpPr/>
-          <p:nvPr/>
-        </p:nvSpPr>
-        <p:spPr>
-          <a:xfrm>
-            <a:off x="12143232" y="4665827"/>
-            <a:ext cx="5120640" cy="4408442"/>
-          </a:xfrm>
-          <a:prstGeom prst="roundRect">
-            <a:avLst>
-              <a:gd name="adj" fmla="val 2489"/>
-            </a:avLst>
-          </a:prstGeom>
-          <a:solidFill>
-            <a:srgbClr val="000000"/>
-          </a:solidFill>
-          <a:ln>
-            <a:noFill/>
-          </a:ln>
-        </p:spPr>
-      </p:sp>
-      <p:sp>
-        <p:nvSpPr>
-          <p:cNvPr id="50" name="Index 50"/>
-          <p:cNvSpPr txBox="1"/>
-          <p:nvPr/>
-        </p:nvSpPr>
-        <p:spPr>
-          <a:xfrm>
-            <a:off x="12578486" y="5101081"/>
-            <a:ext cx="4250132" cy="853440"/>
-          </a:xfrm>
-          <a:prstGeom prst="rect">
-            <a:avLst/>
-          </a:prstGeom>
-          <a:noFill/>
-        </p:spPr>
-        <p:txBody>
-          <a:bodyPr wrap="square" lIns="0" tIns="0" rIns="0" bIns="0" anchor="t" rtlCol="0">
-            <a:noAutofit/>
-          </a:bodyPr>
-          <a:lstStyle/>
-          <a:p>
-            <a:pPr algn="l" marL="0" indent="0">
-              <a:lnSpc>
-                <a:spcPct val="100000"/>
-              </a:lnSpc>
-              <a:buNone/>
-            </a:pPr>
-            <a:r>
-              <a:rPr lang="ru-RU" sz="5600" b="0" cap="none" spc="0" baseline="0" dirty="0">
-                <a:solidFill>
-                  <a:srgbClr val="C2D076"/>
-                </a:solidFill>
-                <a:latin typeface="Inter Light"/>
-                <a:cs typeface="Inter Light"/>
-              </a:rPr>
-              <a:t>03</a:t>
-            </a:r>
-            <a:endParaRPr lang="ru-RU" sz="5600"/>
-          </a:p>
-        </p:txBody>
-      </p:sp>
-      <p:sp>
-        <p:nvSpPr>
-          <p:cNvPr id="51" name="Card text 51"/>
-          <p:cNvSpPr txBox="1"/>
-          <p:nvPr/>
-        </p:nvSpPr>
-        <p:spPr>
-          <a:xfrm>
-            <a:off x="12578486" y="6062534"/>
-            <a:ext cx="4250132" cy="2576481"/>
+            <a:off x="1285280" y="5888432"/>
+            <a:ext cx="4598336" cy="1769066"/>
           </a:xfrm>
           <a:prstGeom prst="rect">
             <a:avLst/>
@@ -4660,6 +4642,266 @@
                 <a:latin typeface="Inter Light"/>
                 <a:cs typeface="Inter Light"/>
               </a:rPr>
+              <a:t>Ручная вёрстка</a:t>
+            </a:r>
+            <a:endParaRPr lang="ru-RU" sz="2799"/>
+          </a:p>
+          <a:p>
+            <a:pPr algn="l" marL="0" indent="0">
+              <a:lnSpc>
+                <a:spcPct val="100000"/>
+              </a:lnSpc>
+              <a:buNone/>
+            </a:pPr>
+            <a:r>
+              <a:rPr lang="ru-RU" sz="2499" b="0" cap="none" spc="0" baseline="0" dirty="0">
+                <a:solidFill>
+                  <a:srgbClr val="FFFFFF"/>
+                </a:solidFill>
+                <a:latin typeface="Inter Light"/>
+                <a:cs typeface="Inter Light"/>
+              </a:rPr>
+              <a:t>Подобрать макет, подвинуть блоки, подогнать цвета под фирменный стиль</a:t>
+            </a:r>
+            <a:endParaRPr lang="ru-RU" sz="2499"/>
+          </a:p>
+        </p:txBody>
+      </p:sp>
+      <p:sp>
+        <p:nvSpPr>
+          <p:cNvPr id="46" name="Card 46"/>
+          <p:cNvSpPr/>
+          <p:nvPr/>
+        </p:nvSpPr>
+        <p:spPr>
+          <a:xfrm>
+            <a:off x="6583680" y="4665827"/>
+            <a:ext cx="5120640" cy="3252823"/>
+          </a:xfrm>
+          <a:prstGeom prst="roundRect">
+            <a:avLst>
+              <a:gd name="adj" fmla="val 3373"/>
+            </a:avLst>
+          </a:prstGeom>
+          <a:solidFill>
+            <a:srgbClr val="000000"/>
+          </a:solidFill>
+          <a:ln>
+            <a:noFill/>
+          </a:ln>
+        </p:spPr>
+      </p:sp>
+      <p:sp>
+        <p:nvSpPr>
+          <p:cNvPr id="47" name="Index 47"/>
+          <p:cNvSpPr txBox="1"/>
+          <p:nvPr/>
+        </p:nvSpPr>
+        <p:spPr>
+          <a:xfrm>
+            <a:off x="6844832" y="4926979"/>
+            <a:ext cx="4598336" cy="853440"/>
+          </a:xfrm>
+          <a:prstGeom prst="rect">
+            <a:avLst/>
+          </a:prstGeom>
+          <a:noFill/>
+        </p:spPr>
+        <p:txBody>
+          <a:bodyPr wrap="square" lIns="0" tIns="0" rIns="0" bIns="0" anchor="t" rtlCol="0">
+            <a:noAutofit/>
+          </a:bodyPr>
+          <a:lstStyle/>
+          <a:p>
+            <a:pPr algn="l" marL="0" indent="0">
+              <a:lnSpc>
+                <a:spcPct val="100000"/>
+              </a:lnSpc>
+              <a:buNone/>
+            </a:pPr>
+            <a:r>
+              <a:rPr lang="ru-RU" sz="5600" b="0" cap="none" spc="0" baseline="0" dirty="0">
+                <a:solidFill>
+                  <a:srgbClr val="C2D076"/>
+                </a:solidFill>
+                <a:latin typeface="Inter Light"/>
+                <a:cs typeface="Inter Light"/>
+              </a:rPr>
+              <a:t>02</a:t>
+            </a:r>
+            <a:endParaRPr lang="ru-RU" sz="5600"/>
+          </a:p>
+        </p:txBody>
+      </p:sp>
+      <p:sp>
+        <p:nvSpPr>
+          <p:cNvPr id="48" name="Card text 48"/>
+          <p:cNvSpPr txBox="1"/>
+          <p:nvPr/>
+        </p:nvSpPr>
+        <p:spPr>
+          <a:xfrm>
+            <a:off x="6844832" y="5888432"/>
+            <a:ext cx="4598336" cy="1769066"/>
+          </a:xfrm>
+          <a:prstGeom prst="rect">
+            <a:avLst/>
+          </a:prstGeom>
+          <a:noFill/>
+        </p:spPr>
+        <p:txBody>
+          <a:bodyPr wrap="square" lIns="0" tIns="0" rIns="0" bIns="0" anchor="t" rtlCol="0">
+            <a:noAutofit/>
+          </a:bodyPr>
+          <a:lstStyle/>
+          <a:p>
+            <a:pPr algn="l" marL="0" indent="0">
+              <a:lnSpc>
+                <a:spcPct val="100000"/>
+              </a:lnSpc>
+              <a:spcAft>
+                <a:spcPts val="1374"/>
+              </a:spcAft>
+              <a:buNone/>
+            </a:pPr>
+            <a:r>
+              <a:rPr lang="ru-RU" sz="2799" b="0" cap="none" spc="0" baseline="0" dirty="0">
+                <a:solidFill>
+                  <a:srgbClr val="C2D076"/>
+                </a:solidFill>
+                <a:latin typeface="Inter Light"/>
+                <a:cs typeface="Inter Light"/>
+              </a:rPr>
+              <a:t>ИИ ломает стиль</a:t>
+            </a:r>
+            <a:endParaRPr lang="ru-RU" sz="2799"/>
+          </a:p>
+          <a:p>
+            <a:pPr algn="l" marL="0" indent="0">
+              <a:lnSpc>
+                <a:spcPct val="100000"/>
+              </a:lnSpc>
+              <a:buNone/>
+            </a:pPr>
+            <a:r>
+              <a:rPr lang="ru-RU" sz="2499" b="0" cap="none" spc="0" baseline="0" dirty="0">
+                <a:solidFill>
+                  <a:srgbClr val="FFFFFF"/>
+                </a:solidFill>
+                <a:latin typeface="Inter Light"/>
+                <a:cs typeface="Inter Light"/>
+              </a:rPr>
+              <a:t>Нейросети пишут текст, но не воспроизводят дизайн-⁠систему</a:t>
+            </a:r>
+            <a:endParaRPr lang="ru-RU" sz="2499"/>
+          </a:p>
+        </p:txBody>
+      </p:sp>
+      <p:sp>
+        <p:nvSpPr>
+          <p:cNvPr id="49" name="Card 49"/>
+          <p:cNvSpPr/>
+          <p:nvPr/>
+        </p:nvSpPr>
+        <p:spPr>
+          <a:xfrm>
+            <a:off x="12143232" y="4665827"/>
+            <a:ext cx="5120640" cy="3252823"/>
+          </a:xfrm>
+          <a:prstGeom prst="roundRect">
+            <a:avLst>
+              <a:gd name="adj" fmla="val 3373"/>
+            </a:avLst>
+          </a:prstGeom>
+          <a:solidFill>
+            <a:srgbClr val="000000"/>
+          </a:solidFill>
+          <a:ln>
+            <a:noFill/>
+          </a:ln>
+        </p:spPr>
+      </p:sp>
+      <p:sp>
+        <p:nvSpPr>
+          <p:cNvPr id="50" name="Index 50"/>
+          <p:cNvSpPr txBox="1"/>
+          <p:nvPr/>
+        </p:nvSpPr>
+        <p:spPr>
+          <a:xfrm>
+            <a:off x="12404384" y="4926979"/>
+            <a:ext cx="4598336" cy="853440"/>
+          </a:xfrm>
+          <a:prstGeom prst="rect">
+            <a:avLst/>
+          </a:prstGeom>
+          <a:noFill/>
+        </p:spPr>
+        <p:txBody>
+          <a:bodyPr wrap="square" lIns="0" tIns="0" rIns="0" bIns="0" anchor="t" rtlCol="0">
+            <a:noAutofit/>
+          </a:bodyPr>
+          <a:lstStyle/>
+          <a:p>
+            <a:pPr algn="l" marL="0" indent="0">
+              <a:lnSpc>
+                <a:spcPct val="100000"/>
+              </a:lnSpc>
+              <a:buNone/>
+            </a:pPr>
+            <a:r>
+              <a:rPr lang="ru-RU" sz="5600" b="0" cap="none" spc="0" baseline="0" dirty="0">
+                <a:solidFill>
+                  <a:srgbClr val="C2D076"/>
+                </a:solidFill>
+                <a:latin typeface="Inter Light"/>
+                <a:cs typeface="Inter Light"/>
+              </a:rPr>
+              <a:t>03</a:t>
+            </a:r>
+            <a:endParaRPr lang="ru-RU" sz="5600"/>
+          </a:p>
+        </p:txBody>
+      </p:sp>
+      <p:sp>
+        <p:nvSpPr>
+          <p:cNvPr id="51" name="Card text 51"/>
+          <p:cNvSpPr txBox="1"/>
+          <p:nvPr/>
+        </p:nvSpPr>
+        <p:spPr>
+          <a:xfrm>
+            <a:off x="12404384" y="5888432"/>
+            <a:ext cx="4598336" cy="1769066"/>
+          </a:xfrm>
+          <a:prstGeom prst="rect">
+            <a:avLst/>
+          </a:prstGeom>
+          <a:noFill/>
+        </p:spPr>
+        <p:txBody>
+          <a:bodyPr wrap="square" lIns="0" tIns="0" rIns="0" bIns="0" anchor="t" rtlCol="0">
+            <a:noAutofit/>
+          </a:bodyPr>
+          <a:lstStyle/>
+          <a:p>
+            <a:pPr algn="l" marL="0" indent="0">
+              <a:lnSpc>
+                <a:spcPct val="100000"/>
+              </a:lnSpc>
+              <a:spcAft>
+                <a:spcPts val="1374"/>
+              </a:spcAft>
+              <a:buNone/>
+            </a:pPr>
+            <a:r>
+              <a:rPr lang="ru-RU" sz="2799" b="0" cap="none" spc="0" baseline="0" dirty="0">
+                <a:solidFill>
+                  <a:srgbClr val="C2D076"/>
+                </a:solidFill>
+                <a:latin typeface="Inter Light"/>
+                <a:cs typeface="Inter Light"/>
+              </a:rPr>
               <a:t>Шаблон — не инструкция</a:t>
             </a:r>
             <a:endParaRPr lang="ru-RU" sz="2799"/>
@@ -4679,9 +4921,97 @@
                 <a:latin typeface="Inter Light"/>
                 <a:cs typeface="Inter Light"/>
               </a:rPr>
-              <a:t>Плейсхолдеры не объясняют, как построить новый слайд</a:t>
+              <a:t>по слайдам-⁠образцам не понять, как собрать новый слайд</a:t>
             </a:r>
             <a:endParaRPr lang="ru-RU" sz="2499"/>
+          </a:p>
+        </p:txBody>
+      </p:sp>
+      <p:sp>
+        <p:nvSpPr>
+          <p:cNvPr id="52" name="Conclusion strip 52"/>
+          <p:cNvSpPr/>
+          <p:nvPr/>
+        </p:nvSpPr>
+        <p:spPr>
+          <a:xfrm>
+            <a:off x="1024128" y="8350704"/>
+            <a:ext cx="16239744" cy="892754"/>
+          </a:xfrm>
+          <a:prstGeom prst="roundRect">
+            <a:avLst>
+              <a:gd name="adj" fmla="val 12290"/>
+            </a:avLst>
+          </a:prstGeom>
+          <a:solidFill>
+            <a:srgbClr val="000000"/>
+          </a:solidFill>
+          <a:ln>
+            <a:noFill/>
+          </a:ln>
+        </p:spPr>
+      </p:sp>
+      <p:sp>
+        <p:nvSpPr>
+          <p:cNvPr id="53" name="Conclusion bar 53"/>
+          <p:cNvSpPr/>
+          <p:nvPr/>
+        </p:nvSpPr>
+        <p:spPr>
+          <a:xfrm>
+            <a:off x="1379601" y="8613754"/>
+            <a:ext cx="61722" cy="366654"/>
+          </a:xfrm>
+          <a:prstGeom prst="rect">
+            <a:avLst/>
+          </a:prstGeom>
+          <a:solidFill>
+            <a:srgbClr val="C2D076"/>
+          </a:solidFill>
+          <a:ln>
+            <a:noFill/>
+          </a:ln>
+        </p:spPr>
+      </p:sp>
+      <p:sp>
+        <p:nvSpPr>
+          <p:cNvPr id="54" name="Conclusion 54"/>
+          <p:cNvSpPr txBox="1"/>
+          <p:nvPr/>
+        </p:nvSpPr>
+        <p:spPr>
+          <a:xfrm>
+            <a:off x="1725701" y="8571097"/>
+            <a:ext cx="15182698" cy="451968"/>
+          </a:xfrm>
+          <a:prstGeom prst="rect">
+            <a:avLst/>
+          </a:prstGeom>
+          <a:noFill/>
+        </p:spPr>
+        <p:txBody>
+          <a:bodyPr wrap="square" lIns="0" tIns="0" rIns="0" bIns="0" anchor="t" rtlCol="0">
+            <a:noAutofit/>
+          </a:bodyPr>
+          <a:lstStyle/>
+          <a:p>
+            <a:pPr algn="l" marL="0" indent="0">
+              <a:lnSpc>
+                <a:spcPct val="100000"/>
+              </a:lnSpc>
+              <a:buNone/>
+            </a:pPr>
+            <a:r>
+              <a:rPr lang="ru-RU" sz="2799" b="0" cap="none" spc="0" baseline="0" dirty="0">
+                <a:solidFill>
+                  <a:srgbClr val="C2D076"/>
+                </a:solidFill>
+                <a:latin typeface="Inter Light"/>
+                <a:cs typeface="Inter Light"/>
+              </a:rPr>
+              <a:t>Ручная вёрстка, ИИ и шаблоны — три проблемы, которые тормозят</a:t>
+            </a:r>
+            <a:endParaRPr lang="ru-RU" sz="2799"/>
           </a:p>
         </p:txBody>
       </p:sp>
@@ -4719,7 +5049,7 @@
         <p:spPr>
           <a:xfrm>
             <a:off x="619057" y="2623820"/>
-            <a:ext cx="11696789" cy="1527657"/>
+            <a:ext cx="15727680" cy="944880"/>
           </a:xfrm>
           <a:prstGeom prst="rect">
             <a:avLst/>
@@ -4753,7 +5083,7 @@
               <a:buNone/>
             </a:pPr>
             <a:r>
-              <a:rPr i="0" lang="ru-RU" sz="2799" u="none" cap="none" strike="noStrike">
+              <a:rPr i="0" lang="ru-RU" sz="4712" u="none" cap="none" strike="noStrike">
                 <a:solidFill>
                   <a:srgbClr val="C2D076"/>
                 </a:solidFill>
@@ -4762,7 +5092,7 @@
                 <a:cs typeface="Inter Medium"/>
                 <a:sym typeface="Inter Medium"/>
               </a:rPr>
-              <a:t>2 028 автотестов и редактируемые объекты в форматах PPTX, PDF и HTML</a:t>
+              <a:t>Три шага развития после финала</a:t>
             </a:r>
             <a:endParaRPr>
               <a:latin typeface="Inter Medium"/>
@@ -4775,18 +5105,18 @@
       </p:sp>
       <p:sp>
         <p:nvSpPr>
-          <p:cNvPr id="43" name="Card 43"/>
+          <p:cNvPr id="52" name="Card 52"/>
           <p:cNvSpPr/>
           <p:nvPr/>
         </p:nvSpPr>
         <p:spPr>
           <a:xfrm>
-            <a:off x="1024128" y="4665827"/>
-            <a:ext cx="5120640" cy="3624592"/>
+            <a:off x="1024128" y="4137660"/>
+            <a:ext cx="5120640" cy="4868823"/>
           </a:xfrm>
           <a:prstGeom prst="roundRect">
             <a:avLst>
-              <a:gd name="adj" fmla="val 3027"/>
+              <a:gd name="adj" fmla="val 2253"/>
             </a:avLst>
           </a:prstGeom>
           <a:solidFill>
@@ -4799,14 +5129,53 @@
       </p:sp>
       <p:sp>
         <p:nvSpPr>
-          <p:cNvPr id="44" name="Index 44"/>
+          <p:cNvPr id="53" name="Badge 53"/>
+          <p:cNvSpPr/>
+          <p:nvPr/>
+        </p:nvSpPr>
+        <p:spPr>
+          <a:xfrm>
+            <a:off x="1484985" y="4598517"/>
+            <a:ext cx="771525" cy="771525"/>
+          </a:xfrm>
+          <a:prstGeom prst="ellipse">
+            <a:avLst/>
+          </a:prstGeom>
+          <a:solidFill>
+            <a:srgbClr val="C2D076"/>
+          </a:solidFill>
+          <a:ln>
+            <a:noFill/>
+          </a:ln>
+        </p:spPr>
+        <p:txBody>
+          <a:bodyPr lIns="0" tIns="0" rIns="0" bIns="0" anchor="ctr" wrap="none"/>
+          <a:lstStyle/>
+          <a:p>
+            <a:pPr algn="ctr"/>
+            <a:r>
+              <a:rPr lang="ru-RU" sz="2799" b="0" cap="none" spc="0" baseline="0">
+                <a:solidFill>
+                  <a:srgbClr val="000000"/>
+                </a:solidFill>
+                <a:latin typeface="Inter Light"/>
+                <a:cs typeface="Inter Light"/>
+              </a:rPr>
+              <a:t>1</a:t>
+            </a:r>
+          </a:p>
+        </p:txBody>
+      </p:sp>
+      <p:sp>
+        <p:nvSpPr>
+          <p:cNvPr id="54" name="Step 54"/>
           <p:cNvSpPr txBox="1"/>
           <p:nvPr/>
         </p:nvSpPr>
         <p:spPr>
           <a:xfrm>
-            <a:off x="1459382" y="5101081"/>
-            <a:ext cx="4250132" cy="1340968"/>
+            <a:off x="1484985" y="5647791"/>
+            <a:ext cx="4198926" cy="2897835"/>
           </a:xfrm>
           <a:prstGeom prst="rect">
             <a:avLst/>
@@ -4826,29 +5195,92 @@
               <a:buNone/>
             </a:pPr>
             <a:r>
-              <a:rPr lang="ru-RU" sz="8799" b="0" cap="none" spc="0" baseline="0" dirty="0">
-                <a:solidFill>
-                  <a:srgbClr val="C2D076"/>
+              <a:rPr lang="ru-RU" sz="4712" b="0" cap="none" spc="0" baseline="0" dirty="0">
+                <a:solidFill>
+                  <a:srgbClr val="FFFFFF"/>
                 </a:solidFill>
                 <a:latin typeface="Inter Light"/>
                 <a:cs typeface="Inter Light"/>
               </a:rPr>
-              <a:t>01</a:t>
+              <a:t>Переход на инференс VK и модель Qwen3.8-⁠27B</a:t>
             </a:r>
-            <a:endParaRPr lang="ru-RU" sz="8799"/>
+            <a:endParaRPr lang="ru-RU" sz="4712"/>
           </a:p>
         </p:txBody>
       </p:sp>
       <p:sp>
         <p:nvSpPr>
-          <p:cNvPr id="45" name="Card text 45"/>
+          <p:cNvPr id="55" name="Card 55"/>
+          <p:cNvSpPr/>
+          <p:nvPr/>
+        </p:nvSpPr>
+        <p:spPr>
+          <a:xfrm>
+            <a:off x="6583680" y="4137660"/>
+            <a:ext cx="5120640" cy="4868823"/>
+          </a:xfrm>
+          <a:prstGeom prst="roundRect">
+            <a:avLst>
+              <a:gd name="adj" fmla="val 2253"/>
+            </a:avLst>
+          </a:prstGeom>
+          <a:solidFill>
+            <a:srgbClr val="000000"/>
+          </a:solidFill>
+          <a:ln>
+            <a:noFill/>
+          </a:ln>
+        </p:spPr>
+      </p:sp>
+      <p:sp>
+        <p:nvSpPr>
+          <p:cNvPr id="56" name="Badge 56"/>
+          <p:cNvSpPr/>
+          <p:nvPr/>
+        </p:nvSpPr>
+        <p:spPr>
+          <a:xfrm>
+            <a:off x="7044537" y="4598517"/>
+            <a:ext cx="771525" cy="771525"/>
+          </a:xfrm>
+          <a:prstGeom prst="ellipse">
+            <a:avLst/>
+          </a:prstGeom>
+          <a:solidFill>
+            <a:srgbClr val="C2D076"/>
+          </a:solidFill>
+          <a:ln>
+            <a:noFill/>
+          </a:ln>
+        </p:spPr>
+        <p:txBody>
+          <a:bodyPr lIns="0" tIns="0" rIns="0" bIns="0" anchor="ctr" wrap="none"/>
+          <a:lstStyle/>
+          <a:p>
+            <a:pPr algn="ctr"/>
+            <a:r>
+              <a:rPr lang="ru-RU" sz="2799" b="0" cap="none" spc="0" baseline="0">
+                <a:solidFill>
+                  <a:srgbClr val="000000"/>
+                </a:solidFill>
+                <a:latin typeface="Inter Light"/>
+                <a:cs typeface="Inter Light"/>
+              </a:rPr>
+              <a:t>2</a:t>
+            </a:r>
+          </a:p>
+        </p:txBody>
+      </p:sp>
+      <p:sp>
+        <p:nvSpPr>
+          <p:cNvPr id="57" name="Step 57"/>
           <p:cNvSpPr txBox="1"/>
           <p:nvPr/>
         </p:nvSpPr>
         <p:spPr>
           <a:xfrm>
-            <a:off x="1459382" y="6550062"/>
-            <a:ext cx="4250132" cy="1305103"/>
+            <a:off x="7044537" y="5647791"/>
+            <a:ext cx="4198926" cy="2897835"/>
           </a:xfrm>
           <a:prstGeom prst="rect">
             <a:avLst/>
@@ -4868,33 +5300,33 @@
               <a:buNone/>
             </a:pPr>
             <a:r>
-              <a:rPr lang="ru-RU" sz="2799" b="0" cap="none" spc="0" baseline="0" dirty="0">
+              <a:rPr lang="ru-RU" sz="4712" b="0" cap="none" spc="0" baseline="0" dirty="0">
                 <a:solidFill>
                   <a:srgbClr val="FFFFFF"/>
                 </a:solidFill>
                 <a:latin typeface="Inter Light"/>
                 <a:cs typeface="Inter Light"/>
               </a:rPr>
-              <a:t>Чат с агентом для правок</a:t>
+              <a:t>Генерация изображений внутри слайдов</a:t>
             </a:r>
-            <a:endParaRPr lang="ru-RU" sz="2799"/>
+            <a:endParaRPr lang="ru-RU" sz="4712"/>
           </a:p>
         </p:txBody>
       </p:sp>
       <p:sp>
         <p:nvSpPr>
-          <p:cNvPr id="46" name="Card 46"/>
+          <p:cNvPr id="58" name="Card 58"/>
           <p:cNvSpPr/>
           <p:nvPr/>
         </p:nvSpPr>
         <p:spPr>
           <a:xfrm>
-            <a:off x="6583680" y="4665827"/>
-            <a:ext cx="5120640" cy="3624592"/>
+            <a:off x="12143232" y="4137660"/>
+            <a:ext cx="5120640" cy="4868823"/>
           </a:xfrm>
           <a:prstGeom prst="roundRect">
             <a:avLst>
-              <a:gd name="adj" fmla="val 3027"/>
+              <a:gd name="adj" fmla="val 2253"/>
             </a:avLst>
           </a:prstGeom>
           <a:solidFill>
@@ -4907,14 +5339,53 @@
       </p:sp>
       <p:sp>
         <p:nvSpPr>
-          <p:cNvPr id="47" name="Index 47"/>
+          <p:cNvPr id="59" name="Badge 59"/>
+          <p:cNvSpPr/>
+          <p:nvPr/>
+        </p:nvSpPr>
+        <p:spPr>
+          <a:xfrm>
+            <a:off x="12604089" y="4598517"/>
+            <a:ext cx="771525" cy="771525"/>
+          </a:xfrm>
+          <a:prstGeom prst="ellipse">
+            <a:avLst/>
+          </a:prstGeom>
+          <a:solidFill>
+            <a:srgbClr val="C2D076"/>
+          </a:solidFill>
+          <a:ln>
+            <a:noFill/>
+          </a:ln>
+        </p:spPr>
+        <p:txBody>
+          <a:bodyPr lIns="0" tIns="0" rIns="0" bIns="0" anchor="ctr" wrap="none"/>
+          <a:lstStyle/>
+          <a:p>
+            <a:pPr algn="ctr"/>
+            <a:r>
+              <a:rPr lang="ru-RU" sz="2799" b="0" cap="none" spc="0" baseline="0">
+                <a:solidFill>
+                  <a:srgbClr val="000000"/>
+                </a:solidFill>
+                <a:latin typeface="Inter Light"/>
+                <a:cs typeface="Inter Light"/>
+              </a:rPr>
+              <a:t>3</a:t>
+            </a:r>
+          </a:p>
+        </p:txBody>
+      </p:sp>
+      <p:sp>
+        <p:nvSpPr>
+          <p:cNvPr id="60" name="Step 60"/>
           <p:cNvSpPr txBox="1"/>
           <p:nvPr/>
         </p:nvSpPr>
         <p:spPr>
           <a:xfrm>
-            <a:off x="7018934" y="5101081"/>
-            <a:ext cx="4250132" cy="1340968"/>
+            <a:off x="12604089" y="5647791"/>
+            <a:ext cx="4198926" cy="2897835"/>
           </a:xfrm>
           <a:prstGeom prst="rect">
             <a:avLst/>
@@ -4934,166 +5405,16 @@
               <a:buNone/>
             </a:pPr>
             <a:r>
-              <a:rPr lang="ru-RU" sz="8799" b="0" cap="none" spc="0" baseline="0" dirty="0">
-                <a:solidFill>
-                  <a:srgbClr val="C2D076"/>
+              <a:rPr lang="ru-RU" sz="4712" b="0" cap="none" spc="0" baseline="0" dirty="0">
+                <a:solidFill>
+                  <a:srgbClr val="FFFFFF"/>
                 </a:solidFill>
                 <a:latin typeface="Inter Light"/>
                 <a:cs typeface="Inter Light"/>
               </a:rPr>
-              <a:t>02</a:t>
+              <a:t>Пилот на шаблонах и сценариях VK Tech</a:t>
             </a:r>
-            <a:endParaRPr lang="ru-RU" sz="8799"/>
-          </a:p>
-        </p:txBody>
-      </p:sp>
-      <p:sp>
-        <p:nvSpPr>
-          <p:cNvPr id="48" name="Card text 48"/>
-          <p:cNvSpPr txBox="1"/>
-          <p:nvPr/>
-        </p:nvSpPr>
-        <p:spPr>
-          <a:xfrm>
-            <a:off x="7018934" y="6550062"/>
-            <a:ext cx="4250132" cy="1305103"/>
-          </a:xfrm>
-          <a:prstGeom prst="rect">
-            <a:avLst/>
-          </a:prstGeom>
-          <a:noFill/>
-        </p:spPr>
-        <p:txBody>
-          <a:bodyPr wrap="square" lIns="0" tIns="0" rIns="0" bIns="0" anchor="t" rtlCol="0">
-            <a:noAutofit/>
-          </a:bodyPr>
-          <a:lstStyle/>
-          <a:p>
-            <a:pPr algn="l" marL="0" indent="0">
-              <a:lnSpc>
-                <a:spcPct val="100000"/>
-              </a:lnSpc>
-              <a:buNone/>
-            </a:pPr>
-            <a:r>
-              <a:rPr lang="ru-RU" sz="2799" b="0" cap="none" spc="0" baseline="0" dirty="0">
-                <a:solidFill>
-                  <a:srgbClr val="FFFFFF"/>
-                </a:solidFill>
-                <a:latin typeface="Inter Light"/>
-                <a:cs typeface="Inter Light"/>
-              </a:rPr>
-              <a:t>Генерация изображений внутри слайдов — в планах</a:t>
-            </a:r>
-            <a:endParaRPr lang="ru-RU" sz="2799"/>
-          </a:p>
-        </p:txBody>
-      </p:sp>
-      <p:sp>
-        <p:nvSpPr>
-          <p:cNvPr id="49" name="Card 49"/>
-          <p:cNvSpPr/>
-          <p:nvPr/>
-        </p:nvSpPr>
-        <p:spPr>
-          <a:xfrm>
-            <a:off x="12143232" y="4665827"/>
-            <a:ext cx="5120640" cy="3624592"/>
-          </a:xfrm>
-          <a:prstGeom prst="roundRect">
-            <a:avLst>
-              <a:gd name="adj" fmla="val 3027"/>
-            </a:avLst>
-          </a:prstGeom>
-          <a:solidFill>
-            <a:srgbClr val="000000"/>
-          </a:solidFill>
-          <a:ln>
-            <a:noFill/>
-          </a:ln>
-        </p:spPr>
-      </p:sp>
-      <p:sp>
-        <p:nvSpPr>
-          <p:cNvPr id="50" name="Index 50"/>
-          <p:cNvSpPr txBox="1"/>
-          <p:nvPr/>
-        </p:nvSpPr>
-        <p:spPr>
-          <a:xfrm>
-            <a:off x="12578486" y="5101081"/>
-            <a:ext cx="4250132" cy="1340968"/>
-          </a:xfrm>
-          <a:prstGeom prst="rect">
-            <a:avLst/>
-          </a:prstGeom>
-          <a:noFill/>
-        </p:spPr>
-        <p:txBody>
-          <a:bodyPr wrap="square" lIns="0" tIns="0" rIns="0" bIns="0" anchor="t" rtlCol="0">
-            <a:noAutofit/>
-          </a:bodyPr>
-          <a:lstStyle/>
-          <a:p>
-            <a:pPr algn="l" marL="0" indent="0">
-              <a:lnSpc>
-                <a:spcPct val="100000"/>
-              </a:lnSpc>
-              <a:buNone/>
-            </a:pPr>
-            <a:r>
-              <a:rPr lang="ru-RU" sz="8799" b="0" cap="none" spc="0" baseline="0" dirty="0">
-                <a:solidFill>
-                  <a:srgbClr val="C2D076"/>
-                </a:solidFill>
-                <a:latin typeface="Inter Light"/>
-                <a:cs typeface="Inter Light"/>
-              </a:rPr>
-              <a:t>03</a:t>
-            </a:r>
-            <a:endParaRPr lang="ru-RU" sz="8799"/>
-          </a:p>
-        </p:txBody>
-      </p:sp>
-      <p:sp>
-        <p:nvSpPr>
-          <p:cNvPr id="51" name="Card text 51"/>
-          <p:cNvSpPr txBox="1"/>
-          <p:nvPr/>
-        </p:nvSpPr>
-        <p:spPr>
-          <a:xfrm>
-            <a:off x="12578486" y="6550062"/>
-            <a:ext cx="4250132" cy="1305103"/>
-          </a:xfrm>
-          <a:prstGeom prst="rect">
-            <a:avLst/>
-          </a:prstGeom>
-          <a:noFill/>
-        </p:spPr>
-        <p:txBody>
-          <a:bodyPr wrap="square" lIns="0" tIns="0" rIns="0" bIns="0" anchor="t" rtlCol="0">
-            <a:noAutofit/>
-          </a:bodyPr>
-          <a:lstStyle/>
-          <a:p>
-            <a:pPr algn="l" marL="0" indent="0">
-              <a:lnSpc>
-                <a:spcPct val="100000"/>
-              </a:lnSpc>
-              <a:buNone/>
-            </a:pPr>
-            <a:r>
-              <a:rPr lang="ru-RU" sz="2799" b="0" cap="none" spc="0" baseline="0" dirty="0">
-                <a:solidFill>
-                  <a:srgbClr val="FFFFFF"/>
-                </a:solidFill>
-                <a:latin typeface="Inter Light"/>
-                <a:cs typeface="Inter Light"/>
-              </a:rPr>
-              <a:t>Переход на инференс VK — в планах</a:t>
-            </a:r>
-            <a:endParaRPr lang="ru-RU" sz="2799"/>
+            <a:endParaRPr lang="ru-RU" sz="4712"/>
           </a:p>
         </p:txBody>
       </p:sp>
@@ -5174,7 +5495,7 @@
                 <a:cs typeface="Inter Medium"/>
                 <a:sym typeface="Inter Medium"/>
               </a:rPr>
-              <a:t>Verstka создаёт три презентации за 2⁠–⁠3 минуты</a:t>
+              <a:t>95% фигур — свободные, 5% — плейсхолдеры</a:t>
             </a:r>
             <a:endParaRPr>
               <a:latin typeface="Inter Medium"/>
@@ -5185,79 +5506,34 @@
           </a:p>
         </p:txBody>
       </p:sp>
-      <p:sp>
-        <p:nvSpPr>
-          <p:cNvPr id="61" name="Card 61"/>
-          <p:cNvSpPr/>
-          <p:nvPr/>
-        </p:nvSpPr>
-        <p:spPr>
-          <a:xfrm>
-            <a:off x="1024128" y="3947718"/>
-            <a:ext cx="5120640" cy="4558253"/>
-          </a:xfrm>
-          <a:prstGeom prst="roundRect">
-            <a:avLst>
-              <a:gd name="adj" fmla="val 2407"/>
-            </a:avLst>
-          </a:prstGeom>
-          <a:solidFill>
-            <a:srgbClr val="000000"/>
-          </a:solidFill>
-          <a:ln>
-            <a:noFill/>
-          </a:ln>
-        </p:spPr>
-      </p:sp>
-      <p:sp>
-        <p:nvSpPr>
-          <p:cNvPr id="62" name="Badge 62"/>
-          <p:cNvSpPr/>
-          <p:nvPr/>
-        </p:nvSpPr>
-        <p:spPr>
-          <a:xfrm>
-            <a:off x="1484985" y="4408575"/>
-            <a:ext cx="771525" cy="771525"/>
-          </a:xfrm>
-          <a:prstGeom prst="ellipse">
-            <a:avLst/>
-          </a:prstGeom>
-          <a:solidFill>
-            <a:srgbClr val="C2D076"/>
-          </a:solidFill>
-          <a:ln>
-            <a:noFill/>
-          </a:ln>
-        </p:spPr>
-        <p:txBody>
-          <a:bodyPr lIns="0" tIns="0" rIns="0" bIns="0" anchor="ctr" wrap="none"/>
-          <a:lstStyle/>
-          <a:p>
-            <a:pPr algn="ctr"/>
-            <a:r>
-              <a:rPr lang="ru-RU" sz="2799" b="0" cap="none" spc="0" baseline="0">
-                <a:solidFill>
-                  <a:srgbClr val="000000"/>
-                </a:solidFill>
-                <a:latin typeface="Inter Light"/>
-                <a:cs typeface="Inter Light"/>
-              </a:rPr>
-              <a:t>1</a:t>
-            </a:r>
-          </a:p>
-        </p:txBody>
-      </p:sp>
-      <p:sp>
-        <p:nvSpPr>
-          <p:cNvPr id="63" name="Step 63"/>
+      <p:graphicFrame>
+        <p:nvGraphicFramePr>
+          <p:cNvPr id="43" name="Chart 42"/>
+          <p:cNvGraphicFramePr>
+            <a:graphicFrameLocks noGrp="1"/>
+          </p:cNvGraphicFramePr>
+          <p:nvPr/>
+        </p:nvGraphicFramePr>
+        <p:xfrm>
+          <a:off x="4204927" y="3947718"/>
+          <a:ext cx="4172586" cy="4172586"/>
+        </p:xfrm>
+        <a:graphic>
+          <a:graphicData uri="http://schemas.openxmlformats.org/drawingml/2006/chart">
+            <c:chart xmlns:c="http://schemas.openxmlformats.org/drawingml/2006/chart" r:id="rId2"/>
+          </a:graphicData>
+        </a:graphic>
+      </p:graphicFrame>
+      <p:sp>
+        <p:nvSpPr>
+          <p:cNvPr id="44" name="Legend title 44"/>
           <p:cNvSpPr txBox="1"/>
           <p:nvPr/>
         </p:nvSpPr>
         <p:spPr>
           <a:xfrm>
-            <a:off x="1484985" y="5457849"/>
-            <a:ext cx="4198926" cy="2587265"/>
+            <a:off x="9255337" y="5142775"/>
+            <a:ext cx="4827735" cy="700799"/>
           </a:xfrm>
           <a:prstGeom prst="rect">
             <a:avLst/>
@@ -5274,81 +5550,37 @@
               <a:lnSpc>
                 <a:spcPct val="100000"/>
               </a:lnSpc>
-              <a:spcAft>
-                <a:spcPts val="1100"/>
-              </a:spcAft>
               <a:buNone/>
             </a:pPr>
             <a:r>
-              <a:rPr lang="ru-RU" sz="2199" b="0" cap="none" spc="0" baseline="0" dirty="0">
-                <a:solidFill>
-                  <a:srgbClr val="C2D076"/>
+              <a:rPr lang="ru-RU" sz="2799" b="0" cap="none" spc="0" baseline="0" dirty="0">
+                <a:solidFill>
+                  <a:srgbClr val="FFFFFF"/>
                 </a:solidFill>
                 <a:latin typeface="Inter Light"/>
                 <a:cs typeface="Inter Light"/>
               </a:rPr>
-              <a:t>На входе — шаблон и текст</a:t>
+              <a:t>Состав фигур в шаблоне</a:t>
             </a:r>
-            <a:endParaRPr lang="ru-RU" sz="2199"/>
-          </a:p>
-          <a:p>
-            <a:pPr algn="l" marL="0" indent="0">
-              <a:lnSpc>
-                <a:spcPct val="100000"/>
-              </a:lnSpc>
-              <a:buNone/>
-            </a:pPr>
-            <a:r>
-              <a:rPr lang="ru-RU" sz="2000" b="0" cap="none" spc="0" baseline="0" dirty="0">
-                <a:solidFill>
-                  <a:srgbClr val="FFFFFF"/>
-                </a:solidFill>
-                <a:latin typeface="Inter Light"/>
-                <a:cs typeface="Inter Light"/>
-              </a:rPr>
-              <a:t>Шаблон и текст для генерации презентаций</a:t>
-            </a:r>
-            <a:endParaRPr lang="ru-RU" sz="2000"/>
+            <a:endParaRPr lang="ru-RU" sz="2799"/>
           </a:p>
         </p:txBody>
       </p:sp>
       <p:sp>
         <p:nvSpPr>
-          <p:cNvPr id="64" name="Card 64"/>
+          <p:cNvPr id="45" name="Swatch 45"/>
           <p:cNvSpPr/>
           <p:nvPr/>
         </p:nvSpPr>
         <p:spPr>
           <a:xfrm>
-            <a:off x="6583680" y="3947718"/>
-            <a:ext cx="5120640" cy="4558253"/>
+            <a:off x="9255337" y="5928887"/>
+            <a:ext cx="255941" cy="255941"/>
           </a:xfrm>
           <a:prstGeom prst="roundRect">
             <a:avLst>
-              <a:gd name="adj" fmla="val 2407"/>
+              <a:gd name="adj" fmla="val 24999"/>
             </a:avLst>
-          </a:prstGeom>
-          <a:solidFill>
-            <a:srgbClr val="000000"/>
-          </a:solidFill>
-          <a:ln>
-            <a:noFill/>
-          </a:ln>
-        </p:spPr>
-      </p:sp>
-      <p:sp>
-        <p:nvSpPr>
-          <p:cNvPr id="65" name="Badge 65"/>
-          <p:cNvSpPr/>
-          <p:nvPr/>
-        </p:nvSpPr>
-        <p:spPr>
-          <a:xfrm>
-            <a:off x="7044537" y="4408575"/>
-            <a:ext cx="771525" cy="771525"/>
-          </a:xfrm>
-          <a:prstGeom prst="ellipse">
-            <a:avLst/>
           </a:prstGeom>
           <a:solidFill>
             <a:srgbClr val="C2D076"/>
@@ -5357,34 +5589,17 @@
             <a:noFill/>
           </a:ln>
         </p:spPr>
-        <p:txBody>
-          <a:bodyPr lIns="0" tIns="0" rIns="0" bIns="0" anchor="ctr" wrap="none"/>
-          <a:lstStyle/>
-          <a:p>
-            <a:pPr algn="ctr"/>
-            <a:r>
-              <a:rPr lang="ru-RU" sz="2799" b="0" cap="none" spc="0" baseline="0">
-                <a:solidFill>
-                  <a:srgbClr val="000000"/>
-                </a:solidFill>
-                <a:latin typeface="Inter Light"/>
-                <a:cs typeface="Inter Light"/>
-              </a:rPr>
-              <a:t>2</a:t>
-            </a:r>
-          </a:p>
-        </p:txBody>
-      </p:sp>
-      <p:sp>
-        <p:nvSpPr>
-          <p:cNvPr id="66" name="Step 66"/>
+      </p:sp>
+      <p:sp>
+        <p:nvSpPr>
+          <p:cNvPr id="46" name="Legend 46"/>
           <p:cNvSpPr txBox="1"/>
           <p:nvPr/>
         </p:nvSpPr>
         <p:spPr>
           <a:xfrm>
-            <a:off x="7044537" y="5457849"/>
-            <a:ext cx="4198926" cy="2587265"/>
+            <a:off x="9716030" y="5843574"/>
+            <a:ext cx="3451310" cy="451968"/>
           </a:xfrm>
           <a:prstGeom prst="rect">
             <a:avLst/>
@@ -5401,62 +5616,82 @@
               <a:lnSpc>
                 <a:spcPct val="100000"/>
               </a:lnSpc>
-              <a:spcAft>
-                <a:spcPts val="1100"/>
-              </a:spcAft>
               <a:buNone/>
             </a:pPr>
             <a:r>
-              <a:rPr lang="ru-RU" sz="2199" b="0" cap="none" spc="0" baseline="0" dirty="0">
-                <a:solidFill>
-                  <a:srgbClr val="C2D076"/>
+              <a:rPr lang="ru-RU" sz="2799" b="0" cap="none" spc="0" baseline="0" dirty="0">
+                <a:solidFill>
+                  <a:srgbClr val="FFFFFF"/>
                 </a:solidFill>
                 <a:latin typeface="Inter Light"/>
                 <a:cs typeface="Inter Light"/>
               </a:rPr>
-              <a:t>Шаблон — набор правил</a:t>
+              <a:t>Свободные фигуры</a:t>
             </a:r>
-            <a:endParaRPr lang="ru-RU" sz="2199"/>
+            <a:endParaRPr lang="ru-RU" sz="2799"/>
           </a:p>
+        </p:txBody>
+      </p:sp>
+      <p:sp>
+        <p:nvSpPr>
+          <p:cNvPr id="47" name="Share 47"/>
+          <p:cNvSpPr txBox="1"/>
+          <p:nvPr/>
+        </p:nvSpPr>
+        <p:spPr>
+          <a:xfrm>
+            <a:off x="13167340" y="5843574"/>
+            <a:ext cx="915732" cy="451968"/>
+          </a:xfrm>
+          <a:prstGeom prst="rect">
+            <a:avLst/>
+          </a:prstGeom>
+          <a:noFill/>
+        </p:spPr>
+        <p:txBody>
+          <a:bodyPr wrap="square" lIns="0" tIns="0" rIns="0" bIns="0" anchor="t" rtlCol="0">
+            <a:noAutofit/>
+          </a:bodyPr>
+          <a:lstStyle/>
           <a:p>
-            <a:pPr algn="l" marL="0" indent="0">
+            <a:pPr algn="r" marL="0" indent="0">
               <a:lnSpc>
                 <a:spcPct val="100000"/>
               </a:lnSpc>
               <a:buNone/>
             </a:pPr>
             <a:r>
-              <a:rPr lang="ru-RU" sz="2000" b="0" cap="none" spc="0" baseline="0" dirty="0">
-                <a:solidFill>
-                  <a:srgbClr val="FFFFFF"/>
+              <a:rPr lang="ru-RU" sz="2799" b="1" cap="none" spc="0" baseline="0" dirty="0">
+                <a:solidFill>
+                  <a:srgbClr val="C2D076"/>
                 </a:solidFill>
                 <a:latin typeface="Inter Light"/>
                 <a:cs typeface="Inter Light"/>
               </a:rPr>
-              <a:t>Палитра, кегли, сетка, поля, логотипы и колонтитулы</a:t>
+              <a:t>95%</a:t>
             </a:r>
-            <a:endParaRPr lang="ru-RU" sz="2000"/>
+            <a:endParaRPr lang="ru-RU" sz="2799"/>
           </a:p>
         </p:txBody>
       </p:sp>
       <p:sp>
         <p:nvSpPr>
-          <p:cNvPr id="67" name="Card 67"/>
+          <p:cNvPr id="48" name="Swatch 48"/>
           <p:cNvSpPr/>
           <p:nvPr/>
         </p:nvSpPr>
         <p:spPr>
           <a:xfrm>
-            <a:off x="12143232" y="3947718"/>
-            <a:ext cx="5120640" cy="4558253"/>
+            <a:off x="9255337" y="6558591"/>
+            <a:ext cx="255941" cy="255941"/>
           </a:xfrm>
           <a:prstGeom prst="roundRect">
             <a:avLst>
-              <a:gd name="adj" fmla="val 2407"/>
+              <a:gd name="adj" fmla="val 24999"/>
             </a:avLst>
           </a:prstGeom>
           <a:solidFill>
-            <a:srgbClr val="000000"/>
+            <a:srgbClr val="E8EDCB"/>
           </a:solidFill>
           <a:ln>
             <a:noFill/>
@@ -5465,53 +5700,14 @@
       </p:sp>
       <p:sp>
         <p:nvSpPr>
-          <p:cNvPr id="68" name="Badge 68"/>
-          <p:cNvSpPr/>
-          <p:nvPr/>
-        </p:nvSpPr>
-        <p:spPr>
-          <a:xfrm>
-            <a:off x="12604089" y="4408575"/>
-            <a:ext cx="771525" cy="771525"/>
-          </a:xfrm>
-          <a:prstGeom prst="ellipse">
-            <a:avLst/>
-          </a:prstGeom>
-          <a:solidFill>
-            <a:srgbClr val="C2D076"/>
-          </a:solidFill>
-          <a:ln>
-            <a:noFill/>
-          </a:ln>
-        </p:spPr>
-        <p:txBody>
-          <a:bodyPr lIns="0" tIns="0" rIns="0" bIns="0" anchor="ctr" wrap="none"/>
-          <a:lstStyle/>
-          <a:p>
-            <a:pPr algn="ctr"/>
-            <a:r>
-              <a:rPr lang="ru-RU" sz="2799" b="0" cap="none" spc="0" baseline="0">
-                <a:solidFill>
-                  <a:srgbClr val="000000"/>
-                </a:solidFill>
-                <a:latin typeface="Inter Light"/>
-                <a:cs typeface="Inter Light"/>
-              </a:rPr>
-              <a:t>3</a:t>
-            </a:r>
-          </a:p>
-        </p:txBody>
-      </p:sp>
-      <p:sp>
-        <p:nvSpPr>
-          <p:cNvPr id="69" name="Step 69"/>
+          <p:cNvPr id="49" name="Legend 49"/>
           <p:cNvSpPr txBox="1"/>
           <p:nvPr/>
         </p:nvSpPr>
         <p:spPr>
           <a:xfrm>
-            <a:off x="12604089" y="5457849"/>
-            <a:ext cx="4198926" cy="2587265"/>
+            <a:off x="9716030" y="6473278"/>
+            <a:ext cx="3451310" cy="451968"/>
           </a:xfrm>
           <a:prstGeom prst="rect">
             <a:avLst/>
@@ -5528,41 +5724,159 @@
               <a:lnSpc>
                 <a:spcPct val="100000"/>
               </a:lnSpc>
+              <a:buNone/>
+            </a:pPr>
+            <a:r>
+              <a:rPr lang="ru-RU" sz="2799" b="0" cap="none" spc="0" baseline="0" dirty="0">
+                <a:solidFill>
+                  <a:srgbClr val="FFFFFF"/>
+                </a:solidFill>
+                <a:latin typeface="Inter Light"/>
+                <a:cs typeface="Inter Light"/>
+              </a:rPr>
+              <a:t>Плейсхолдеры</a:t>
+            </a:r>
+            <a:endParaRPr lang="ru-RU" sz="2799"/>
+          </a:p>
+        </p:txBody>
+      </p:sp>
+      <p:sp>
+        <p:nvSpPr>
+          <p:cNvPr id="50" name="Share 50"/>
+          <p:cNvSpPr txBox="1"/>
+          <p:nvPr/>
+        </p:nvSpPr>
+        <p:spPr>
+          <a:xfrm>
+            <a:off x="13167340" y="6473278"/>
+            <a:ext cx="915732" cy="451968"/>
+          </a:xfrm>
+          <a:prstGeom prst="rect">
+            <a:avLst/>
+          </a:prstGeom>
+          <a:noFill/>
+        </p:spPr>
+        <p:txBody>
+          <a:bodyPr wrap="square" lIns="0" tIns="0" rIns="0" bIns="0" anchor="t" rtlCol="0">
+            <a:noAutofit/>
+          </a:bodyPr>
+          <a:lstStyle/>
+          <a:p>
+            <a:pPr algn="r" marL="0" indent="0">
+              <a:lnSpc>
+                <a:spcPct val="100000"/>
+              </a:lnSpc>
+              <a:buNone/>
+            </a:pPr>
+            <a:r>
+              <a:rPr lang="ru-RU" sz="2799" b="1" cap="none" spc="0" baseline="0" dirty="0">
+                <a:solidFill>
+                  <a:srgbClr val="FFFFFF"/>
+                </a:solidFill>
+                <a:latin typeface="Inter Light"/>
+                <a:cs typeface="Inter Light"/>
+              </a:rPr>
+              <a:t>5%</a:t>
+            </a:r>
+            <a:endParaRPr lang="ru-RU" sz="2799"/>
+          </a:p>
+        </p:txBody>
+      </p:sp>
+      <p:sp>
+        <p:nvSpPr>
+          <p:cNvPr id="51" name="Note 51"/>
+          <p:cNvSpPr txBox="1"/>
+          <p:nvPr/>
+        </p:nvSpPr>
+        <p:spPr>
+          <a:xfrm>
+            <a:off x="1024128" y="8552358"/>
+            <a:ext cx="7680960" cy="695655"/>
+          </a:xfrm>
+          <a:prstGeom prst="rect">
+            <a:avLst/>
+          </a:prstGeom>
+          <a:noFill/>
+        </p:spPr>
+        <p:txBody>
+          <a:bodyPr wrap="square" lIns="0" tIns="0" rIns="0" bIns="0" anchor="t" rtlCol="0">
+            <a:noAutofit/>
+          </a:bodyPr>
+          <a:lstStyle/>
+          <a:p>
+            <a:pPr algn="l" marL="307200" indent="-307200">
+              <a:lnSpc>
+                <a:spcPct val="100000"/>
+              </a:lnSpc>
               <a:spcAft>
                 <a:spcPts val="1100"/>
               </a:spcAft>
-              <a:buNone/>
+              <a:buClr>
+                <a:srgbClr val="C2D076"/>
+              </a:buClr>
+              <a:buFont typeface="Arial"/>
+              <a:buChar char="•"/>
             </a:pPr>
             <a:r>
               <a:rPr lang="ru-RU" sz="2199" b="0" cap="none" spc="0" baseline="0" dirty="0">
                 <a:solidFill>
-                  <a:srgbClr val="C2D076"/>
+                  <a:srgbClr val="FFFFFF"/>
                 </a:solidFill>
                 <a:latin typeface="Inter Light"/>
                 <a:cs typeface="Inter Light"/>
               </a:rPr>
-              <a:t>На выходе — три редактируемые презентации</a:t>
+              <a:t>Правила оформления приходится выводить из образцов</a:t>
             </a:r>
             <a:endParaRPr lang="ru-RU" sz="2199"/>
           </a:p>
+        </p:txBody>
+      </p:sp>
+      <p:sp>
+        <p:nvSpPr>
+          <p:cNvPr id="52" name="Note 52"/>
+          <p:cNvSpPr txBox="1"/>
+          <p:nvPr/>
+        </p:nvSpPr>
+        <p:spPr>
+          <a:xfrm>
+            <a:off x="9582912" y="8552358"/>
+            <a:ext cx="7680960" cy="695655"/>
+          </a:xfrm>
+          <a:prstGeom prst="rect">
+            <a:avLst/>
+          </a:prstGeom>
+          <a:noFill/>
+        </p:spPr>
+        <p:txBody>
+          <a:bodyPr wrap="square" lIns="0" tIns="0" rIns="0" bIns="0" anchor="t" rtlCol="0">
+            <a:noAutofit/>
+          </a:bodyPr>
+          <a:lstStyle/>
           <a:p>
-            <a:pPr algn="l" marL="0" indent="0">
+            <a:pPr algn="l" marL="307200" indent="-307200">
               <a:lnSpc>
                 <a:spcPct val="100000"/>
               </a:lnSpc>
-              <a:buNone/>
+              <a:spcAft>
+                <a:spcPts val="1100"/>
+              </a:spcAft>
+              <a:buClr>
+                <a:srgbClr val="C2D076"/>
+              </a:buClr>
+              <a:buFont typeface="Arial"/>
+              <a:buChar char="•"/>
             </a:pPr>
             <a:r>
-              <a:rPr lang="ru-RU" sz="2000" b="0" cap="none" spc="0" baseline="0" dirty="0">
+              <a:rPr lang="ru-RU" sz="2199" b="0" cap="none" spc="0" baseline="0" dirty="0">
                 <a:solidFill>
                   <a:srgbClr val="FFFFFF"/>
                 </a:solidFill>
                 <a:latin typeface="Inter Light"/>
                 <a:cs typeface="Inter Light"/>
               </a:rPr>
-              <a:t>Готовые файлы в стиле шаблона</a:t>
+              <a:t>Палитра, кегли, сетка, поля, логотипы и колонтитулы не автоматизированы</a:t>
             </a:r>
-            <a:endParaRPr lang="ru-RU" sz="2000"/>
+            <a:endParaRPr lang="ru-RU" sz="2199"/>
           </a:p>
         </p:txBody>
       </p:sp>
@@ -5600,7 +5914,7 @@
         <p:spPr>
           <a:xfrm>
             <a:off x="619057" y="2623820"/>
-            <a:ext cx="15727680" cy="809548"/>
+            <a:ext cx="15727680" cy="944880"/>
           </a:xfrm>
           <a:prstGeom prst="rect">
             <a:avLst/>
@@ -5643,7 +5957,7 @@
                 <a:cs typeface="Inter Medium"/>
                 <a:sym typeface="Inter Medium"/>
               </a:rPr>
-              <a:t>Команда из пяти специалистов создаёт презентацию</a:t>
+              <a:t>Шаблон читается как набор правил</a:t>
             </a:r>
             <a:endParaRPr>
               <a:latin typeface="Inter Medium"/>
@@ -5662,12 +5976,12 @@
         </p:nvSpPr>
         <p:spPr>
           <a:xfrm>
-            <a:off x="1024128" y="3947718"/>
-            <a:ext cx="5120640" cy="2088037"/>
+            <a:off x="1024128" y="4137660"/>
+            <a:ext cx="5120640" cy="3415943"/>
           </a:xfrm>
           <a:prstGeom prst="roundRect">
             <a:avLst>
-              <a:gd name="adj" fmla="val 5255"/>
+              <a:gd name="adj" fmla="val 3212"/>
             </a:avLst>
           </a:prstGeom>
           <a:solidFill>
@@ -5686,8 +6000,8 @@
         </p:nvSpPr>
         <p:spPr>
           <a:xfrm>
-            <a:off x="1382572" y="4306162"/>
-            <a:ext cx="617220" cy="617220"/>
+            <a:off x="1484985" y="4598517"/>
+            <a:ext cx="771525" cy="771525"/>
           </a:xfrm>
           <a:prstGeom prst="ellipse">
             <a:avLst/>
@@ -5705,7 +6019,7 @@
           <a:p>
             <a:pPr algn="ctr"/>
             <a:r>
-              <a:rPr lang="ru-RU" sz="2499" b="0" cap="none" spc="0" baseline="0">
+              <a:rPr lang="ru-RU" sz="2799" b="0" cap="none" spc="0" baseline="0">
                 <a:solidFill>
                   <a:srgbClr val="000000"/>
                 </a:solidFill>
@@ -5725,8 +6039,8 @@
         </p:nvSpPr>
         <p:spPr>
           <a:xfrm>
-            <a:off x="2263139" y="4401488"/>
-            <a:ext cx="3523185" cy="1275823"/>
+            <a:off x="1484985" y="5647791"/>
+            <a:ext cx="4198926" cy="1444955"/>
           </a:xfrm>
           <a:prstGeom prst="rect">
             <a:avLst/>
@@ -5744,21 +6058,21 @@
                 <a:spcPct val="100000"/>
               </a:lnSpc>
               <a:spcAft>
-                <a:spcPts val="1209"/>
+                <a:spcPts val="1100"/>
               </a:spcAft>
               <a:buNone/>
             </a:pPr>
             <a:r>
-              <a:rPr lang="ru-RU" sz="2799" b="0" cap="none" spc="0" baseline="0" dirty="0">
+              <a:rPr lang="ru-RU" sz="2199" b="0" cap="none" spc="0" baseline="0" dirty="0">
                 <a:solidFill>
                   <a:srgbClr val="C2D076"/>
                 </a:solidFill>
                 <a:latin typeface="Inter Light"/>
                 <a:cs typeface="Inter Light"/>
               </a:rPr>
-              <a:t>Аналитик</a:t>
+              <a:t>На входе — шаблон и текст</a:t>
             </a:r>
-            <a:endParaRPr lang="ru-RU" sz="2799"/>
+            <a:endParaRPr lang="ru-RU" sz="2199"/>
           </a:p>
           <a:p>
             <a:pPr algn="l" marL="0" indent="0">
@@ -5768,16 +6082,16 @@
               <a:buNone/>
             </a:pPr>
             <a:r>
-              <a:rPr lang="ru-RU" sz="2199" b="0" cap="none" spc="0" baseline="0" dirty="0">
+              <a:rPr lang="ru-RU" sz="2000" b="0" cap="none" spc="0" baseline="0" dirty="0">
                 <a:solidFill>
                   <a:srgbClr val="FFFFFF"/>
                 </a:solidFill>
                 <a:latin typeface="Inter Light"/>
                 <a:cs typeface="Inter Light"/>
               </a:rPr>
-              <a:t>Находит слайды, ряды данных и просьбы</a:t>
+              <a:t>Verstka берёт шаблон и текст</a:t>
             </a:r>
-            <a:endParaRPr lang="ru-RU" sz="2199"/>
+            <a:endParaRPr lang="ru-RU" sz="2000"/>
           </a:p>
         </p:txBody>
       </p:sp>
@@ -5789,12 +6103,12 @@
         </p:nvSpPr>
         <p:spPr>
           <a:xfrm>
-            <a:off x="6583680" y="3947718"/>
-            <a:ext cx="5120640" cy="2088037"/>
+            <a:off x="6583680" y="4137660"/>
+            <a:ext cx="5120640" cy="3415943"/>
           </a:xfrm>
           <a:prstGeom prst="roundRect">
             <a:avLst>
-              <a:gd name="adj" fmla="val 5255"/>
+              <a:gd name="adj" fmla="val 3212"/>
             </a:avLst>
           </a:prstGeom>
           <a:solidFill>
@@ -5813,8 +6127,8 @@
         </p:nvSpPr>
         <p:spPr>
           <a:xfrm>
-            <a:off x="6942124" y="4306162"/>
-            <a:ext cx="617220" cy="617220"/>
+            <a:off x="7044537" y="4598517"/>
+            <a:ext cx="771525" cy="771525"/>
           </a:xfrm>
           <a:prstGeom prst="ellipse">
             <a:avLst/>
@@ -5832,7 +6146,7 @@
           <a:p>
             <a:pPr algn="ctr"/>
             <a:r>
-              <a:rPr lang="ru-RU" sz="2499" b="0" cap="none" spc="0" baseline="0">
+              <a:rPr lang="ru-RU" sz="2799" b="0" cap="none" spc="0" baseline="0">
                 <a:solidFill>
                   <a:srgbClr val="000000"/>
                 </a:solidFill>
@@ -5852,8 +6166,8 @@
         </p:nvSpPr>
         <p:spPr>
           <a:xfrm>
-            <a:off x="7822691" y="4401488"/>
-            <a:ext cx="3523185" cy="1275823"/>
+            <a:off x="7044537" y="5647791"/>
+            <a:ext cx="4198926" cy="1444955"/>
           </a:xfrm>
           <a:prstGeom prst="rect">
             <a:avLst/>
@@ -5871,21 +6185,21 @@
                 <a:spcPct val="100000"/>
               </a:lnSpc>
               <a:spcAft>
-                <a:spcPts val="1209"/>
+                <a:spcPts val="1100"/>
               </a:spcAft>
               <a:buNone/>
             </a:pPr>
             <a:r>
-              <a:rPr lang="ru-RU" sz="2799" b="0" cap="none" spc="0" baseline="0" dirty="0">
+              <a:rPr lang="ru-RU" sz="2199" b="0" cap="none" spc="0" baseline="0" dirty="0">
                 <a:solidFill>
                   <a:srgbClr val="C2D076"/>
                 </a:solidFill>
                 <a:latin typeface="Inter Light"/>
                 <a:cs typeface="Inter Light"/>
               </a:rPr>
-              <a:t>Дизайнер</a:t>
+              <a:t>Шаблон — набор правил</a:t>
             </a:r>
-            <a:endParaRPr lang="ru-RU" sz="2799"/>
+            <a:endParaRPr lang="ru-RU" sz="2199"/>
           </a:p>
           <a:p>
             <a:pPr algn="l" marL="0" indent="0">
@@ -5895,16 +6209,16 @@
               <a:buNone/>
             </a:pPr>
             <a:r>
-              <a:rPr lang="ru-RU" sz="2199" b="0" cap="none" spc="0" baseline="0" dirty="0">
+              <a:rPr lang="ru-RU" sz="2000" b="0" cap="none" spc="0" baseline="0" dirty="0">
                 <a:solidFill>
                   <a:srgbClr val="FFFFFF"/>
                 </a:solidFill>
                 <a:latin typeface="Inter Light"/>
                 <a:cs typeface="Inter Light"/>
               </a:rPr>
-              <a:t>Продумывает каждый слайд отдельно</a:t>
+              <a:t>Шаблон читается как набор правил, а не как набор макетов</a:t>
             </a:r>
-            <a:endParaRPr lang="ru-RU" sz="2199"/>
+            <a:endParaRPr lang="ru-RU" sz="2000"/>
           </a:p>
         </p:txBody>
       </p:sp>
@@ -5916,12 +6230,12 @@
         </p:nvSpPr>
         <p:spPr>
           <a:xfrm>
-            <a:off x="12143232" y="3947718"/>
-            <a:ext cx="5120640" cy="2088037"/>
+            <a:off x="12143232" y="4137660"/>
+            <a:ext cx="5120640" cy="3415943"/>
           </a:xfrm>
           <a:prstGeom prst="roundRect">
             <a:avLst>
-              <a:gd name="adj" fmla="val 5255"/>
+              <a:gd name="adj" fmla="val 3212"/>
             </a:avLst>
           </a:prstGeom>
           <a:solidFill>
@@ -5940,8 +6254,8 @@
         </p:nvSpPr>
         <p:spPr>
           <a:xfrm>
-            <a:off x="12501676" y="4306162"/>
-            <a:ext cx="617220" cy="617220"/>
+            <a:off x="12604089" y="4598517"/>
+            <a:ext cx="771525" cy="771525"/>
           </a:xfrm>
           <a:prstGeom prst="ellipse">
             <a:avLst/>
@@ -5959,7 +6273,7 @@
           <a:p>
             <a:pPr algn="ctr"/>
             <a:r>
-              <a:rPr lang="ru-RU" sz="2499" b="0" cap="none" spc="0" baseline="0">
+              <a:rPr lang="ru-RU" sz="2799" b="0" cap="none" spc="0" baseline="0">
                 <a:solidFill>
                   <a:srgbClr val="000000"/>
                 </a:solidFill>
@@ -5979,8 +6293,8 @@
         </p:nvSpPr>
         <p:spPr>
           <a:xfrm>
-            <a:off x="13382243" y="4401488"/>
-            <a:ext cx="3523185" cy="1275823"/>
+            <a:off x="12604089" y="5647791"/>
+            <a:ext cx="4198926" cy="1444955"/>
           </a:xfrm>
           <a:prstGeom prst="rect">
             <a:avLst/>
@@ -5998,21 +6312,21 @@
                 <a:spcPct val="100000"/>
               </a:lnSpc>
               <a:spcAft>
-                <a:spcPts val="1209"/>
+                <a:spcPts val="1100"/>
               </a:spcAft>
               <a:buNone/>
             </a:pPr>
             <a:r>
-              <a:rPr lang="ru-RU" sz="2799" b="0" cap="none" spc="0" baseline="0" dirty="0">
+              <a:rPr lang="ru-RU" sz="2199" b="0" cap="none" spc="0" baseline="0" dirty="0">
                 <a:solidFill>
                   <a:srgbClr val="C2D076"/>
                 </a:solidFill>
                 <a:latin typeface="Inter Light"/>
                 <a:cs typeface="Inter Light"/>
               </a:rPr>
-              <a:t>Критик</a:t>
+              <a:t>На выходе — три редактируемые презентации</a:t>
             </a:r>
-            <a:endParaRPr lang="ru-RU" sz="2799"/>
+            <a:endParaRPr lang="ru-RU" sz="2199"/>
           </a:p>
           <a:p>
             <a:pPr algn="l" marL="0" indent="0">
@@ -6022,33 +6336,33 @@
               <a:buNone/>
             </a:pPr>
             <a:r>
-              <a:rPr lang="ru-RU" sz="2199" b="0" cap="none" spc="0" baseline="0" dirty="0">
+              <a:rPr lang="ru-RU" sz="2000" b="0" cap="none" spc="0" baseline="0" dirty="0">
                 <a:solidFill>
                   <a:srgbClr val="FFFFFF"/>
                 </a:solidFill>
                 <a:latin typeface="Inter Light"/>
                 <a:cs typeface="Inter Light"/>
               </a:rPr>
-              <a:t>Сверяет план с текстом и правилами</a:t>
+              <a:t>Создаются три редактируемые презентации в стиле шаблона</a:t>
             </a:r>
-            <a:endParaRPr lang="ru-RU" sz="2199"/>
+            <a:endParaRPr lang="ru-RU" sz="2000"/>
           </a:p>
         </p:txBody>
       </p:sp>
       <p:sp>
         <p:nvSpPr>
-          <p:cNvPr id="52" name="Card 52"/>
+          <p:cNvPr id="52" name="Conclusion strip 52"/>
           <p:cNvSpPr/>
           <p:nvPr/>
         </p:nvSpPr>
         <p:spPr>
           <a:xfrm>
-            <a:off x="3803904" y="6344365"/>
-            <a:ext cx="5120640" cy="2088037"/>
+            <a:off x="1024128" y="7985657"/>
+            <a:ext cx="16239744" cy="892754"/>
           </a:xfrm>
           <a:prstGeom prst="roundRect">
             <a:avLst>
-              <a:gd name="adj" fmla="val 5255"/>
+              <a:gd name="adj" fmla="val 12290"/>
             </a:avLst>
           </a:prstGeom>
           <a:solidFill>
@@ -6061,16 +6375,16 @@
       </p:sp>
       <p:sp>
         <p:nvSpPr>
-          <p:cNvPr id="53" name="Badge 53"/>
+          <p:cNvPr id="53" name="Conclusion bar 53"/>
           <p:cNvSpPr/>
           <p:nvPr/>
         </p:nvSpPr>
         <p:spPr>
           <a:xfrm>
-            <a:off x="4162348" y="6702809"/>
-            <a:ext cx="617220" cy="617220"/>
-          </a:xfrm>
-          <a:prstGeom prst="ellipse">
+            <a:off x="1379601" y="8248707"/>
+            <a:ext cx="61722" cy="366654"/>
+          </a:xfrm>
+          <a:prstGeom prst="rect">
             <a:avLst/>
           </a:prstGeom>
           <a:solidFill>
@@ -6080,34 +6394,17 @@
             <a:noFill/>
           </a:ln>
         </p:spPr>
-        <p:txBody>
-          <a:bodyPr lIns="0" tIns="0" rIns="0" bIns="0" anchor="ctr" wrap="none"/>
-          <a:lstStyle/>
-          <a:p>
-            <a:pPr algn="ctr"/>
-            <a:r>
-              <a:rPr lang="ru-RU" sz="2499" b="0" cap="none" spc="0" baseline="0">
-                <a:solidFill>
-                  <a:srgbClr val="000000"/>
-                </a:solidFill>
-                <a:latin typeface="Inter Light"/>
-                <a:cs typeface="Inter Light"/>
-              </a:rPr>
-              <a:t>4</a:t>
-            </a:r>
-          </a:p>
-        </p:txBody>
-      </p:sp>
-      <p:sp>
-        <p:nvSpPr>
-          <p:cNvPr id="54" name="Step 54"/>
+      </p:sp>
+      <p:sp>
+        <p:nvSpPr>
+          <p:cNvPr id="54" name="Conclusion 54"/>
           <p:cNvSpPr txBox="1"/>
           <p:nvPr/>
         </p:nvSpPr>
         <p:spPr>
           <a:xfrm>
-            <a:off x="5042915" y="6798135"/>
-            <a:ext cx="3523185" cy="1275823"/>
+            <a:off x="1725701" y="8206050"/>
+            <a:ext cx="15182698" cy="451968"/>
           </a:xfrm>
           <a:prstGeom prst="rect">
             <a:avLst/>
@@ -6124,9 +6421,6 @@
               <a:lnSpc>
                 <a:spcPct val="100000"/>
               </a:lnSpc>
-              <a:spcAft>
-                <a:spcPts val="1209"/>
-              </a:spcAft>
               <a:buNone/>
             </a:pPr>
             <a:r>
@@ -6137,155 +6431,9 @@
                 <a:latin typeface="Inter Light"/>
                 <a:cs typeface="Inter Light"/>
               </a:rPr>
-              <a:t>Компилятор</a:t>
+              <a:t>Презентация в фирменном стиле без ручной вёрстки</a:t>
             </a:r>
             <a:endParaRPr lang="ru-RU" sz="2799"/>
-          </a:p>
-          <a:p>
-            <a:pPr algn="l" marL="0" indent="0">
-              <a:lnSpc>
-                <a:spcPct val="100000"/>
-              </a:lnSpc>
-              <a:buNone/>
-            </a:pPr>
-            <a:r>
-              <a:rPr lang="ru-RU" sz="2199" b="0" cap="none" spc="0" baseline="0" dirty="0">
-                <a:solidFill>
-                  <a:srgbClr val="FFFFFF"/>
-                </a:solidFill>
-                <a:latin typeface="Inter Light"/>
-                <a:cs typeface="Inter Light"/>
-              </a:rPr>
-              <a:t>Проверяет каждое число</a:t>
-            </a:r>
-            <a:endParaRPr lang="ru-RU" sz="2199"/>
-          </a:p>
-        </p:txBody>
-      </p:sp>
-      <p:sp>
-        <p:nvSpPr>
-          <p:cNvPr id="55" name="Card 55"/>
-          <p:cNvSpPr/>
-          <p:nvPr/>
-        </p:nvSpPr>
-        <p:spPr>
-          <a:xfrm>
-            <a:off x="9363456" y="6344365"/>
-            <a:ext cx="5120640" cy="2088037"/>
-          </a:xfrm>
-          <a:prstGeom prst="roundRect">
-            <a:avLst>
-              <a:gd name="adj" fmla="val 5255"/>
-            </a:avLst>
-          </a:prstGeom>
-          <a:solidFill>
-            <a:srgbClr val="000000"/>
-          </a:solidFill>
-          <a:ln>
-            <a:noFill/>
-          </a:ln>
-        </p:spPr>
-      </p:sp>
-      <p:sp>
-        <p:nvSpPr>
-          <p:cNvPr id="56" name="Badge 56"/>
-          <p:cNvSpPr/>
-          <p:nvPr/>
-        </p:nvSpPr>
-        <p:spPr>
-          <a:xfrm>
-            <a:off x="9721900" y="6702809"/>
-            <a:ext cx="617220" cy="617220"/>
-          </a:xfrm>
-          <a:prstGeom prst="ellipse">
-            <a:avLst/>
-          </a:prstGeom>
-          <a:solidFill>
-            <a:srgbClr val="C2D076"/>
-          </a:solidFill>
-          <a:ln>
-            <a:noFill/>
-          </a:ln>
-        </p:spPr>
-        <p:txBody>
-          <a:bodyPr lIns="0" tIns="0" rIns="0" bIns="0" anchor="ctr" wrap="none"/>
-          <a:lstStyle/>
-          <a:p>
-            <a:pPr algn="ctr"/>
-            <a:r>
-              <a:rPr lang="ru-RU" sz="2499" b="0" cap="none" spc="0" baseline="0">
-                <a:solidFill>
-                  <a:srgbClr val="000000"/>
-                </a:solidFill>
-                <a:latin typeface="Inter Light"/>
-                <a:cs typeface="Inter Light"/>
-              </a:rPr>
-              <a:t>5</a:t>
-            </a:r>
-          </a:p>
-        </p:txBody>
-      </p:sp>
-      <p:sp>
-        <p:nvSpPr>
-          <p:cNvPr id="57" name="Step 57"/>
-          <p:cNvSpPr txBox="1"/>
-          <p:nvPr/>
-        </p:nvSpPr>
-        <p:spPr>
-          <a:xfrm>
-            <a:off x="10602467" y="6798135"/>
-            <a:ext cx="3523185" cy="1275823"/>
-          </a:xfrm>
-          <a:prstGeom prst="rect">
-            <a:avLst/>
-          </a:prstGeom>
-          <a:noFill/>
-        </p:spPr>
-        <p:txBody>
-          <a:bodyPr wrap="square" lIns="0" tIns="0" rIns="0" bIns="0" anchor="t" rtlCol="0">
-            <a:noAutofit/>
-          </a:bodyPr>
-          <a:lstStyle/>
-          <a:p>
-            <a:pPr algn="l" marL="0" indent="0">
-              <a:lnSpc>
-                <a:spcPct val="100000"/>
-              </a:lnSpc>
-              <a:spcAft>
-                <a:spcPts val="1209"/>
-              </a:spcAft>
-              <a:buNone/>
-            </a:pPr>
-            <a:r>
-              <a:rPr lang="ru-RU" sz="2799" b="0" cap="none" spc="0" baseline="0" dirty="0">
-                <a:solidFill>
-                  <a:srgbClr val="C2D076"/>
-                </a:solidFill>
-                <a:latin typeface="Inter Light"/>
-                <a:cs typeface="Inter Light"/>
-              </a:rPr>
-              <a:t>Вёрстка</a:t>
-            </a:r>
-            <a:endParaRPr lang="ru-RU" sz="2799"/>
-          </a:p>
-          <a:p>
-            <a:pPr algn="l" marL="0" indent="0">
-              <a:lnSpc>
-                <a:spcPct val="100000"/>
-              </a:lnSpc>
-              <a:buNone/>
-            </a:pPr>
-            <a:r>
-              <a:rPr lang="ru-RU" sz="2199" b="0" cap="none" spc="0" baseline="0" dirty="0">
-                <a:solidFill>
-                  <a:srgbClr val="FFFFFF"/>
-                </a:solidFill>
-                <a:latin typeface="Inter Light"/>
-                <a:cs typeface="Inter Light"/>
-              </a:rPr>
-              <a:t>Собирает слайды по дизайн-⁠системе</a:t>
-            </a:r>
-            <a:endParaRPr lang="ru-RU" sz="2199"/>
           </a:p>
         </p:txBody>
       </p:sp>
@@ -6323,7 +6471,7 @@
         <p:spPr>
           <a:xfrm>
             <a:off x="619057" y="2623820"/>
-            <a:ext cx="15727680" cy="944880"/>
+            <a:ext cx="10417162" cy="1527657"/>
           </a:xfrm>
           <a:prstGeom prst="rect">
             <a:avLst/>
@@ -6357,7 +6505,7 @@
               <a:buNone/>
             </a:pPr>
             <a:r>
-              <a:rPr i="0" lang="ru-RU" sz="4712" u="none" cap="none" strike="noStrike">
+              <a:rPr i="0" lang="ru-RU" sz="2799" u="none" cap="none" strike="noStrike">
                 <a:solidFill>
                   <a:srgbClr val="C2D076"/>
                 </a:solidFill>
@@ -6366,7 +6514,7 @@
                 <a:cs typeface="Inter Medium"/>
                 <a:sym typeface="Inter Medium"/>
               </a:rPr>
-              <a:t>Одинаковое содержание, разная подача</a:t>
+              <a:t>Открытые модели до 35 млрд параметров создают презентации</a:t>
             </a:r>
             <a:endParaRPr>
               <a:latin typeface="Inter Medium"/>
@@ -6385,12 +6533,12 @@
         </p:nvSpPr>
         <p:spPr>
           <a:xfrm>
-            <a:off x="1024128" y="4137660"/>
-            <a:ext cx="5120640" cy="4538211"/>
+            <a:off x="1024128" y="4665827"/>
+            <a:ext cx="5120640" cy="1935922"/>
           </a:xfrm>
           <a:prstGeom prst="roundRect">
             <a:avLst>
-              <a:gd name="adj" fmla="val 2417"/>
+              <a:gd name="adj" fmla="val 5667"/>
             </a:avLst>
           </a:prstGeom>
           <a:solidFill>
@@ -6409,8 +6557,8 @@
         </p:nvSpPr>
         <p:spPr>
           <a:xfrm>
-            <a:off x="1459382" y="4572914"/>
-            <a:ext cx="4250132" cy="1340968"/>
+            <a:off x="1285280" y="4926979"/>
+            <a:ext cx="657797" cy="451968"/>
           </a:xfrm>
           <a:prstGeom prst="rect">
             <a:avLst/>
@@ -6430,7 +6578,7 @@
               <a:buNone/>
             </a:pPr>
             <a:r>
-              <a:rPr lang="ru-RU" sz="8799" b="0" cap="none" spc="0" baseline="0" dirty="0">
+              <a:rPr lang="ru-RU" sz="2799" b="0" cap="none" spc="0" baseline="0" dirty="0">
                 <a:solidFill>
                   <a:srgbClr val="C2D076"/>
                 </a:solidFill>
@@ -6439,7 +6587,7 @@
               </a:rPr>
               <a:t>01</a:t>
             </a:r>
-            <a:endParaRPr lang="ru-RU" sz="8799"/>
+            <a:endParaRPr lang="ru-RU" sz="2799"/>
           </a:p>
         </p:txBody>
       </p:sp>
@@ -6451,8 +6599,8 @@
         </p:nvSpPr>
         <p:spPr>
           <a:xfrm>
-            <a:off x="1459382" y="6021895"/>
-            <a:ext cx="4250132" cy="2218722"/>
+            <a:off x="1943077" y="4926979"/>
+            <a:ext cx="3940539" cy="451968"/>
           </a:xfrm>
           <a:prstGeom prst="rect">
             <a:avLst/>
@@ -6469,39 +6617,17 @@
               <a:lnSpc>
                 <a:spcPct val="100000"/>
               </a:lnSpc>
-              <a:spcAft>
-                <a:spcPts val="1539"/>
-              </a:spcAft>
               <a:buNone/>
             </a:pPr>
             <a:r>
-              <a:rPr lang="ru-RU" sz="4712" b="0" cap="none" spc="0" baseline="0" dirty="0">
+              <a:rPr lang="ru-RU" sz="2799" b="0" cap="none" spc="0" baseline="0" dirty="0">
                 <a:solidFill>
                   <a:srgbClr val="C2D076"/>
                 </a:solidFill>
                 <a:latin typeface="Inter Light"/>
                 <a:cs typeface="Inter Light"/>
               </a:rPr>
-              <a:t>Структурный</a:t>
-            </a:r>
-            <a:endParaRPr lang="ru-RU" sz="4712"/>
-          </a:p>
-          <a:p>
-            <a:pPr algn="l" marL="0" indent="0">
-              <a:lnSpc>
-                <a:spcPct val="100000"/>
-              </a:lnSpc>
-              <a:buNone/>
-            </a:pPr>
-            <a:r>
-              <a:rPr lang="ru-RU" sz="2799" b="0" cap="none" spc="0" baseline="0" dirty="0">
-                <a:solidFill>
-                  <a:srgbClr val="FFFFFF"/>
-                </a:solidFill>
-                <a:latin typeface="Inter Light"/>
-                <a:cs typeface="Inter Light"/>
-              </a:rPr>
-              <a:t>Одна мысль на слайде, строгая сетка</a:t>
+              <a:t>Аналитик</a:t>
             </a:r>
             <a:endParaRPr lang="ru-RU" sz="2799"/>
           </a:p>
@@ -6509,38 +6635,14 @@
       </p:sp>
       <p:sp>
         <p:nvSpPr>
-          <p:cNvPr id="46" name="Card 46"/>
-          <p:cNvSpPr/>
-          <p:nvPr/>
-        </p:nvSpPr>
-        <p:spPr>
-          <a:xfrm>
-            <a:off x="6583680" y="4137660"/>
-            <a:ext cx="5120640" cy="4538211"/>
-          </a:xfrm>
-          <a:prstGeom prst="roundRect">
-            <a:avLst>
-              <a:gd name="adj" fmla="val 2417"/>
-            </a:avLst>
-          </a:prstGeom>
-          <a:solidFill>
-            <a:srgbClr val="000000"/>
-          </a:solidFill>
-          <a:ln>
-            <a:noFill/>
-          </a:ln>
-        </p:spPr>
-      </p:sp>
-      <p:sp>
-        <p:nvSpPr>
-          <p:cNvPr id="47" name="Index 47"/>
+          <p:cNvPr id="46" name="Card text 46"/>
           <p:cNvSpPr txBox="1"/>
           <p:nvPr/>
         </p:nvSpPr>
         <p:spPr>
           <a:xfrm>
-            <a:off x="7018934" y="4572914"/>
-            <a:ext cx="4250132" cy="1340968"/>
+            <a:off x="1285280" y="5553502"/>
+            <a:ext cx="4598336" cy="787095"/>
           </a:xfrm>
           <a:prstGeom prst="rect">
             <a:avLst/>
@@ -6560,29 +6662,53 @@
               <a:buNone/>
             </a:pPr>
             <a:r>
-              <a:rPr lang="ru-RU" sz="8799" b="0" cap="none" spc="0" baseline="0" dirty="0">
-                <a:solidFill>
-                  <a:srgbClr val="C2D076"/>
+              <a:rPr lang="ru-RU" sz="2499" b="0" cap="none" spc="0" baseline="0" dirty="0">
+                <a:solidFill>
+                  <a:srgbClr val="FFFFFF"/>
                 </a:solidFill>
                 <a:latin typeface="Inter Light"/>
                 <a:cs typeface="Inter Light"/>
               </a:rPr>
-              <a:t>02</a:t>
+              <a:t>Находит слайды, ряды данных и просьбы</a:t>
             </a:r>
-            <a:endParaRPr lang="ru-RU" sz="8799"/>
+            <a:endParaRPr lang="ru-RU" sz="2499"/>
           </a:p>
         </p:txBody>
       </p:sp>
       <p:sp>
         <p:nvSpPr>
-          <p:cNvPr id="48" name="Card text 48"/>
+          <p:cNvPr id="47" name="Card 47"/>
+          <p:cNvSpPr/>
+          <p:nvPr/>
+        </p:nvSpPr>
+        <p:spPr>
+          <a:xfrm>
+            <a:off x="6583680" y="4665827"/>
+            <a:ext cx="5120640" cy="1935922"/>
+          </a:xfrm>
+          <a:prstGeom prst="roundRect">
+            <a:avLst>
+              <a:gd name="adj" fmla="val 5667"/>
+            </a:avLst>
+          </a:prstGeom>
+          <a:solidFill>
+            <a:srgbClr val="000000"/>
+          </a:solidFill>
+          <a:ln>
+            <a:noFill/>
+          </a:ln>
+        </p:spPr>
+      </p:sp>
+      <p:sp>
+        <p:nvSpPr>
+          <p:cNvPr id="48" name="Index 48"/>
           <p:cNvSpPr txBox="1"/>
           <p:nvPr/>
         </p:nvSpPr>
         <p:spPr>
           <a:xfrm>
-            <a:off x="7018934" y="6021895"/>
-            <a:ext cx="4250132" cy="2218722"/>
+            <a:off x="6844832" y="4926979"/>
+            <a:ext cx="657797" cy="451968"/>
           </a:xfrm>
           <a:prstGeom prst="rect">
             <a:avLst/>
@@ -6599,39 +6725,17 @@
               <a:lnSpc>
                 <a:spcPct val="100000"/>
               </a:lnSpc>
-              <a:spcAft>
-                <a:spcPts val="1539"/>
-              </a:spcAft>
               <a:buNone/>
             </a:pPr>
             <a:r>
-              <a:rPr lang="ru-RU" sz="4712" b="0" cap="none" spc="0" baseline="0" dirty="0">
+              <a:rPr lang="ru-RU" sz="2799" b="0" cap="none" spc="0" baseline="0" dirty="0">
                 <a:solidFill>
                   <a:srgbClr val="C2D076"/>
                 </a:solidFill>
                 <a:latin typeface="Inter Light"/>
                 <a:cs typeface="Inter Light"/>
               </a:rPr>
-              <a:t>Визуальный</a:t>
-            </a:r>
-            <a:endParaRPr lang="ru-RU" sz="4712"/>
-          </a:p>
-          <a:p>
-            <a:pPr algn="l" marL="0" indent="0">
-              <a:lnSpc>
-                <a:spcPct val="100000"/>
-              </a:lnSpc>
-              <a:buNone/>
-            </a:pPr>
-            <a:r>
-              <a:rPr lang="ru-RU" sz="2799" b="0" cap="none" spc="0" baseline="0" dirty="0">
-                <a:solidFill>
-                  <a:srgbClr val="FFFFFF"/>
-                </a:solidFill>
-                <a:latin typeface="Inter Light"/>
-                <a:cs typeface="Inter Light"/>
-              </a:rPr>
-              <a:t>Крупные цифры и наглядные схемы</a:t>
+              <a:t>02</a:t>
             </a:r>
             <a:endParaRPr lang="ru-RU" sz="2799"/>
           </a:p>
@@ -6639,38 +6743,14 @@
       </p:sp>
       <p:sp>
         <p:nvSpPr>
-          <p:cNvPr id="49" name="Card 49"/>
-          <p:cNvSpPr/>
-          <p:nvPr/>
-        </p:nvSpPr>
-        <p:spPr>
-          <a:xfrm>
-            <a:off x="12143232" y="4137660"/>
-            <a:ext cx="5120640" cy="4538211"/>
-          </a:xfrm>
-          <a:prstGeom prst="roundRect">
-            <a:avLst>
-              <a:gd name="adj" fmla="val 2417"/>
-            </a:avLst>
-          </a:prstGeom>
-          <a:solidFill>
-            <a:srgbClr val="000000"/>
-          </a:solidFill>
-          <a:ln>
-            <a:noFill/>
-          </a:ln>
-        </p:spPr>
-      </p:sp>
-      <p:sp>
-        <p:nvSpPr>
-          <p:cNvPr id="50" name="Index 50"/>
+          <p:cNvPr id="49" name="Card text 49"/>
           <p:cNvSpPr txBox="1"/>
           <p:nvPr/>
         </p:nvSpPr>
         <p:spPr>
           <a:xfrm>
-            <a:off x="12578486" y="4572914"/>
-            <a:ext cx="4250132" cy="1340968"/>
+            <a:off x="7502629" y="4926979"/>
+            <a:ext cx="3940539" cy="451968"/>
           </a:xfrm>
           <a:prstGeom prst="rect">
             <a:avLst/>
@@ -6690,29 +6770,29 @@
               <a:buNone/>
             </a:pPr>
             <a:r>
-              <a:rPr lang="ru-RU" sz="8799" b="0" cap="none" spc="0" baseline="0" dirty="0">
+              <a:rPr lang="ru-RU" sz="2799" b="0" cap="none" spc="0" baseline="0" dirty="0">
                 <a:solidFill>
                   <a:srgbClr val="C2D076"/>
                 </a:solidFill>
                 <a:latin typeface="Inter Light"/>
                 <a:cs typeface="Inter Light"/>
               </a:rPr>
-              <a:t>03</a:t>
+              <a:t>Дизайнер</a:t>
             </a:r>
-            <a:endParaRPr lang="ru-RU" sz="8799"/>
+            <a:endParaRPr lang="ru-RU" sz="2799"/>
           </a:p>
         </p:txBody>
       </p:sp>
       <p:sp>
         <p:nvSpPr>
-          <p:cNvPr id="51" name="Card text 51"/>
+          <p:cNvPr id="50" name="Card text 50"/>
           <p:cNvSpPr txBox="1"/>
           <p:nvPr/>
         </p:nvSpPr>
         <p:spPr>
           <a:xfrm>
-            <a:off x="12578486" y="6021895"/>
-            <a:ext cx="4250132" cy="2218722"/>
+            <a:off x="6844832" y="5553502"/>
+            <a:ext cx="4598336" cy="787095"/>
           </a:xfrm>
           <a:prstGeom prst="rect">
             <a:avLst/>
@@ -6729,23 +6809,67 @@
               <a:lnSpc>
                 <a:spcPct val="100000"/>
               </a:lnSpc>
-              <a:spcAft>
-                <a:spcPts val="1539"/>
-              </a:spcAft>
               <a:buNone/>
             </a:pPr>
             <a:r>
-              <a:rPr lang="ru-RU" sz="4712" b="0" cap="none" spc="0" baseline="0" dirty="0">
-                <a:solidFill>
-                  <a:srgbClr val="C2D076"/>
+              <a:rPr lang="ru-RU" sz="2499" b="0" cap="none" spc="0" baseline="0" dirty="0">
+                <a:solidFill>
+                  <a:srgbClr val="FFFFFF"/>
                 </a:solidFill>
                 <a:latin typeface="Inter Light"/>
                 <a:cs typeface="Inter Light"/>
               </a:rPr>
-              <a:t>Компактный</a:t>
+              <a:t>Продумывает каждый слайд отдельно</a:t>
             </a:r>
-            <a:endParaRPr lang="ru-RU" sz="4712"/>
+            <a:endParaRPr lang="ru-RU" sz="2499"/>
           </a:p>
+        </p:txBody>
+      </p:sp>
+      <p:sp>
+        <p:nvSpPr>
+          <p:cNvPr id="51" name="Card 51"/>
+          <p:cNvSpPr/>
+          <p:nvPr/>
+        </p:nvSpPr>
+        <p:spPr>
+          <a:xfrm>
+            <a:off x="12143232" y="4665827"/>
+            <a:ext cx="5120640" cy="1935922"/>
+          </a:xfrm>
+          <a:prstGeom prst="roundRect">
+            <a:avLst>
+              <a:gd name="adj" fmla="val 5667"/>
+            </a:avLst>
+          </a:prstGeom>
+          <a:solidFill>
+            <a:srgbClr val="000000"/>
+          </a:solidFill>
+          <a:ln>
+            <a:noFill/>
+          </a:ln>
+        </p:spPr>
+      </p:sp>
+      <p:sp>
+        <p:nvSpPr>
+          <p:cNvPr id="52" name="Index 52"/>
+          <p:cNvSpPr txBox="1"/>
+          <p:nvPr/>
+        </p:nvSpPr>
+        <p:spPr>
+          <a:xfrm>
+            <a:off x="12404384" y="4926979"/>
+            <a:ext cx="657797" cy="451968"/>
+          </a:xfrm>
+          <a:prstGeom prst="rect">
+            <a:avLst/>
+          </a:prstGeom>
+          <a:noFill/>
+        </p:spPr>
+        <p:txBody>
+          <a:bodyPr wrap="square" lIns="0" tIns="0" rIns="0" bIns="0" anchor="t" rtlCol="0">
+            <a:noAutofit/>
+          </a:bodyPr>
+          <a:lstStyle/>
           <a:p>
             <a:pPr algn="l" marL="0" indent="0">
               <a:lnSpc>
@@ -6756,14 +6880,398 @@
             <a:r>
               <a:rPr lang="ru-RU" sz="2799" b="0" cap="none" spc="0" baseline="0" dirty="0">
                 <a:solidFill>
-                  <a:srgbClr val="FFFFFF"/>
+                  <a:srgbClr val="C2D076"/>
                 </a:solidFill>
                 <a:latin typeface="Inter Light"/>
                 <a:cs typeface="Inter Light"/>
               </a:rPr>
-              <a:t>Вывод первой строкой, текст слева, данные справа</a:t>
+              <a:t>03</a:t>
             </a:r>
             <a:endParaRPr lang="ru-RU" sz="2799"/>
+          </a:p>
+        </p:txBody>
+      </p:sp>
+      <p:sp>
+        <p:nvSpPr>
+          <p:cNvPr id="53" name="Card text 53"/>
+          <p:cNvSpPr txBox="1"/>
+          <p:nvPr/>
+        </p:nvSpPr>
+        <p:spPr>
+          <a:xfrm>
+            <a:off x="13062181" y="4926979"/>
+            <a:ext cx="3940539" cy="451968"/>
+          </a:xfrm>
+          <a:prstGeom prst="rect">
+            <a:avLst/>
+          </a:prstGeom>
+          <a:noFill/>
+        </p:spPr>
+        <p:txBody>
+          <a:bodyPr wrap="square" lIns="0" tIns="0" rIns="0" bIns="0" anchor="t" rtlCol="0">
+            <a:noAutofit/>
+          </a:bodyPr>
+          <a:lstStyle/>
+          <a:p>
+            <a:pPr algn="l" marL="0" indent="0">
+              <a:lnSpc>
+                <a:spcPct val="100000"/>
+              </a:lnSpc>
+              <a:buNone/>
+            </a:pPr>
+            <a:r>
+              <a:rPr lang="ru-RU" sz="2799" b="0" cap="none" spc="0" baseline="0" dirty="0">
+                <a:solidFill>
+                  <a:srgbClr val="C2D076"/>
+                </a:solidFill>
+                <a:latin typeface="Inter Light"/>
+                <a:cs typeface="Inter Light"/>
+              </a:rPr>
+              <a:t>Критик</a:t>
+            </a:r>
+            <a:endParaRPr lang="ru-RU" sz="2799"/>
+          </a:p>
+        </p:txBody>
+      </p:sp>
+      <p:sp>
+        <p:nvSpPr>
+          <p:cNvPr id="54" name="Card text 54"/>
+          <p:cNvSpPr txBox="1"/>
+          <p:nvPr/>
+        </p:nvSpPr>
+        <p:spPr>
+          <a:xfrm>
+            <a:off x="12404384" y="5553502"/>
+            <a:ext cx="4598336" cy="787095"/>
+          </a:xfrm>
+          <a:prstGeom prst="rect">
+            <a:avLst/>
+          </a:prstGeom>
+          <a:noFill/>
+        </p:spPr>
+        <p:txBody>
+          <a:bodyPr wrap="square" lIns="0" tIns="0" rIns="0" bIns="0" anchor="t" rtlCol="0">
+            <a:noAutofit/>
+          </a:bodyPr>
+          <a:lstStyle/>
+          <a:p>
+            <a:pPr algn="l" marL="0" indent="0">
+              <a:lnSpc>
+                <a:spcPct val="100000"/>
+              </a:lnSpc>
+              <a:buNone/>
+            </a:pPr>
+            <a:r>
+              <a:rPr lang="ru-RU" sz="2499" b="0" cap="none" spc="0" baseline="0" dirty="0">
+                <a:solidFill>
+                  <a:srgbClr val="FFFFFF"/>
+                </a:solidFill>
+                <a:latin typeface="Inter Light"/>
+                <a:cs typeface="Inter Light"/>
+              </a:rPr>
+              <a:t>Сверяет план с текстом и правилами шаблона</a:t>
+            </a:r>
+            <a:endParaRPr lang="ru-RU" sz="2499"/>
+          </a:p>
+        </p:txBody>
+      </p:sp>
+      <p:sp>
+        <p:nvSpPr>
+          <p:cNvPr id="55" name="Card 55"/>
+          <p:cNvSpPr/>
+          <p:nvPr/>
+        </p:nvSpPr>
+        <p:spPr>
+          <a:xfrm>
+            <a:off x="3803904" y="6910359"/>
+            <a:ext cx="5120640" cy="1935922"/>
+          </a:xfrm>
+          <a:prstGeom prst="roundRect">
+            <a:avLst>
+              <a:gd name="adj" fmla="val 5667"/>
+            </a:avLst>
+          </a:prstGeom>
+          <a:solidFill>
+            <a:srgbClr val="000000"/>
+          </a:solidFill>
+          <a:ln>
+            <a:noFill/>
+          </a:ln>
+        </p:spPr>
+      </p:sp>
+      <p:sp>
+        <p:nvSpPr>
+          <p:cNvPr id="56" name="Index 56"/>
+          <p:cNvSpPr txBox="1"/>
+          <p:nvPr/>
+        </p:nvSpPr>
+        <p:spPr>
+          <a:xfrm>
+            <a:off x="4065056" y="7171511"/>
+            <a:ext cx="657797" cy="451968"/>
+          </a:xfrm>
+          <a:prstGeom prst="rect">
+            <a:avLst/>
+          </a:prstGeom>
+          <a:noFill/>
+        </p:spPr>
+        <p:txBody>
+          <a:bodyPr wrap="square" lIns="0" tIns="0" rIns="0" bIns="0" anchor="t" rtlCol="0">
+            <a:noAutofit/>
+          </a:bodyPr>
+          <a:lstStyle/>
+          <a:p>
+            <a:pPr algn="l" marL="0" indent="0">
+              <a:lnSpc>
+                <a:spcPct val="100000"/>
+              </a:lnSpc>
+              <a:buNone/>
+            </a:pPr>
+            <a:r>
+              <a:rPr lang="ru-RU" sz="2799" b="0" cap="none" spc="0" baseline="0" dirty="0">
+                <a:solidFill>
+                  <a:srgbClr val="C2D076"/>
+                </a:solidFill>
+                <a:latin typeface="Inter Light"/>
+                <a:cs typeface="Inter Light"/>
+              </a:rPr>
+              <a:t>04</a:t>
+            </a:r>
+            <a:endParaRPr lang="ru-RU" sz="2799"/>
+          </a:p>
+        </p:txBody>
+      </p:sp>
+      <p:sp>
+        <p:nvSpPr>
+          <p:cNvPr id="57" name="Card text 57"/>
+          <p:cNvSpPr txBox="1"/>
+          <p:nvPr/>
+        </p:nvSpPr>
+        <p:spPr>
+          <a:xfrm>
+            <a:off x="4722853" y="7171511"/>
+            <a:ext cx="3940539" cy="451968"/>
+          </a:xfrm>
+          <a:prstGeom prst="rect">
+            <a:avLst/>
+          </a:prstGeom>
+          <a:noFill/>
+        </p:spPr>
+        <p:txBody>
+          <a:bodyPr wrap="square" lIns="0" tIns="0" rIns="0" bIns="0" anchor="t" rtlCol="0">
+            <a:noAutofit/>
+          </a:bodyPr>
+          <a:lstStyle/>
+          <a:p>
+            <a:pPr algn="l" marL="0" indent="0">
+              <a:lnSpc>
+                <a:spcPct val="100000"/>
+              </a:lnSpc>
+              <a:buNone/>
+            </a:pPr>
+            <a:r>
+              <a:rPr lang="ru-RU" sz="2799" b="0" cap="none" spc="0" baseline="0" dirty="0">
+                <a:solidFill>
+                  <a:srgbClr val="C2D076"/>
+                </a:solidFill>
+                <a:latin typeface="Inter Light"/>
+                <a:cs typeface="Inter Light"/>
+              </a:rPr>
+              <a:t>Компилятор</a:t>
+            </a:r>
+            <a:endParaRPr lang="ru-RU" sz="2799"/>
+          </a:p>
+        </p:txBody>
+      </p:sp>
+      <p:sp>
+        <p:nvSpPr>
+          <p:cNvPr id="58" name="Card text 58"/>
+          <p:cNvSpPr txBox="1"/>
+          <p:nvPr/>
+        </p:nvSpPr>
+        <p:spPr>
+          <a:xfrm>
+            <a:off x="4065056" y="7798034"/>
+            <a:ext cx="4598336" cy="787095"/>
+          </a:xfrm>
+          <a:prstGeom prst="rect">
+            <a:avLst/>
+          </a:prstGeom>
+          <a:noFill/>
+        </p:spPr>
+        <p:txBody>
+          <a:bodyPr wrap="square" lIns="0" tIns="0" rIns="0" bIns="0" anchor="t" rtlCol="0">
+            <a:noAutofit/>
+          </a:bodyPr>
+          <a:lstStyle/>
+          <a:p>
+            <a:pPr algn="l" marL="0" indent="0">
+              <a:lnSpc>
+                <a:spcPct val="100000"/>
+              </a:lnSpc>
+              <a:buNone/>
+            </a:pPr>
+            <a:r>
+              <a:rPr lang="ru-RU" sz="2499" b="0" cap="none" spc="0" baseline="0" dirty="0">
+                <a:solidFill>
+                  <a:srgbClr val="FFFFFF"/>
+                </a:solidFill>
+                <a:latin typeface="Inter Light"/>
+                <a:cs typeface="Inter Light"/>
+              </a:rPr>
+              <a:t>Проверяет каждое число</a:t>
+            </a:r>
+            <a:endParaRPr lang="ru-RU" sz="2499"/>
+          </a:p>
+        </p:txBody>
+      </p:sp>
+      <p:sp>
+        <p:nvSpPr>
+          <p:cNvPr id="59" name="Card 59"/>
+          <p:cNvSpPr/>
+          <p:nvPr/>
+        </p:nvSpPr>
+        <p:spPr>
+          <a:xfrm>
+            <a:off x="9363456" y="6910359"/>
+            <a:ext cx="5120640" cy="1935922"/>
+          </a:xfrm>
+          <a:prstGeom prst="roundRect">
+            <a:avLst>
+              <a:gd name="adj" fmla="val 5667"/>
+            </a:avLst>
+          </a:prstGeom>
+          <a:solidFill>
+            <a:srgbClr val="000000"/>
+          </a:solidFill>
+          <a:ln>
+            <a:noFill/>
+          </a:ln>
+        </p:spPr>
+      </p:sp>
+      <p:sp>
+        <p:nvSpPr>
+          <p:cNvPr id="60" name="Index 60"/>
+          <p:cNvSpPr txBox="1"/>
+          <p:nvPr/>
+        </p:nvSpPr>
+        <p:spPr>
+          <a:xfrm>
+            <a:off x="9624608" y="7171511"/>
+            <a:ext cx="657797" cy="451968"/>
+          </a:xfrm>
+          <a:prstGeom prst="rect">
+            <a:avLst/>
+          </a:prstGeom>
+          <a:noFill/>
+        </p:spPr>
+        <p:txBody>
+          <a:bodyPr wrap="square" lIns="0" tIns="0" rIns="0" bIns="0" anchor="t" rtlCol="0">
+            <a:noAutofit/>
+          </a:bodyPr>
+          <a:lstStyle/>
+          <a:p>
+            <a:pPr algn="l" marL="0" indent="0">
+              <a:lnSpc>
+                <a:spcPct val="100000"/>
+              </a:lnSpc>
+              <a:buNone/>
+            </a:pPr>
+            <a:r>
+              <a:rPr lang="ru-RU" sz="2799" b="0" cap="none" spc="0" baseline="0" dirty="0">
+                <a:solidFill>
+                  <a:srgbClr val="C2D076"/>
+                </a:solidFill>
+                <a:latin typeface="Inter Light"/>
+                <a:cs typeface="Inter Light"/>
+              </a:rPr>
+              <a:t>05</a:t>
+            </a:r>
+            <a:endParaRPr lang="ru-RU" sz="2799"/>
+          </a:p>
+        </p:txBody>
+      </p:sp>
+      <p:sp>
+        <p:nvSpPr>
+          <p:cNvPr id="61" name="Card text 61"/>
+          <p:cNvSpPr txBox="1"/>
+          <p:nvPr/>
+        </p:nvSpPr>
+        <p:spPr>
+          <a:xfrm>
+            <a:off x="10282405" y="7171511"/>
+            <a:ext cx="3940539" cy="451968"/>
+          </a:xfrm>
+          <a:prstGeom prst="rect">
+            <a:avLst/>
+          </a:prstGeom>
+          <a:noFill/>
+        </p:spPr>
+        <p:txBody>
+          <a:bodyPr wrap="square" lIns="0" tIns="0" rIns="0" bIns="0" anchor="t" rtlCol="0">
+            <a:noAutofit/>
+          </a:bodyPr>
+          <a:lstStyle/>
+          <a:p>
+            <a:pPr algn="l" marL="0" indent="0">
+              <a:lnSpc>
+                <a:spcPct val="100000"/>
+              </a:lnSpc>
+              <a:buNone/>
+            </a:pPr>
+            <a:r>
+              <a:rPr lang="ru-RU" sz="2799" b="0" cap="none" spc="0" baseline="0" dirty="0">
+                <a:solidFill>
+                  <a:srgbClr val="C2D076"/>
+                </a:solidFill>
+                <a:latin typeface="Inter Light"/>
+                <a:cs typeface="Inter Light"/>
+              </a:rPr>
+              <a:t>Вёрстка</a:t>
+            </a:r>
+            <a:endParaRPr lang="ru-RU" sz="2799"/>
+          </a:p>
+        </p:txBody>
+      </p:sp>
+      <p:sp>
+        <p:nvSpPr>
+          <p:cNvPr id="62" name="Card text 62"/>
+          <p:cNvSpPr txBox="1"/>
+          <p:nvPr/>
+        </p:nvSpPr>
+        <p:spPr>
+          <a:xfrm>
+            <a:off x="9624608" y="7798034"/>
+            <a:ext cx="4598336" cy="787095"/>
+          </a:xfrm>
+          <a:prstGeom prst="rect">
+            <a:avLst/>
+          </a:prstGeom>
+          <a:noFill/>
+        </p:spPr>
+        <p:txBody>
+          <a:bodyPr wrap="square" lIns="0" tIns="0" rIns="0" bIns="0" anchor="t" rtlCol="0">
+            <a:noAutofit/>
+          </a:bodyPr>
+          <a:lstStyle/>
+          <a:p>
+            <a:pPr algn="l" marL="0" indent="0">
+              <a:lnSpc>
+                <a:spcPct val="100000"/>
+              </a:lnSpc>
+              <a:buNone/>
+            </a:pPr>
+            <a:r>
+              <a:rPr lang="ru-RU" sz="2499" b="0" cap="none" spc="0" baseline="0" dirty="0">
+                <a:solidFill>
+                  <a:srgbClr val="FFFFFF"/>
+                </a:solidFill>
+                <a:latin typeface="Inter Light"/>
+                <a:cs typeface="Inter Light"/>
+              </a:rPr>
+              <a:t>Собирает слайды по дизайн-⁠системе шаблона</a:t>
+            </a:r>
+            <a:endParaRPr lang="ru-RU" sz="2499"/>
           </a:p>
         </p:txBody>
       </p:sp>
@@ -6801,7 +7309,7 @@
         <p:spPr>
           <a:xfrm>
             <a:off x="619057" y="2623820"/>
-            <a:ext cx="15727680" cy="809548"/>
+            <a:ext cx="15727680" cy="944880"/>
           </a:xfrm>
           <a:prstGeom prst="rect">
             <a:avLst/>
@@ -6844,7 +7352,7 @@
                 <a:cs typeface="Inter Medium"/>
                 <a:sym typeface="Inter Medium"/>
               </a:rPr>
-              <a:t>Целостность — основная категория проверок</a:t>
+              <a:t>Одно содержание, три подхода к подаче</a:t>
             </a:r>
             <a:endParaRPr>
               <a:latin typeface="Inter Medium"/>
@@ -6855,190 +7363,578 @@
           </a:p>
         </p:txBody>
       </p:sp>
-      <p:sp>
-        <p:nvSpPr>
-          <p:cNvPr id="43" name="Unit 43"/>
-          <p:cNvSpPr txBox="1"/>
-          <p:nvPr/>
-        </p:nvSpPr>
-        <p:spPr>
-          <a:xfrm>
-            <a:off x="1024128" y="3947718"/>
-            <a:ext cx="10814792" cy="299720"/>
-          </a:xfrm>
-          <a:prstGeom prst="rect">
-            <a:avLst/>
-          </a:prstGeom>
-          <a:noFill/>
-        </p:spPr>
-        <p:txBody>
-          <a:bodyPr wrap="square" lIns="0" tIns="0" rIns="0" bIns="0" anchor="t" rtlCol="0">
-            <a:noAutofit/>
-          </a:bodyPr>
-          <a:lstStyle/>
-          <a:p>
-            <a:pPr algn="l" marL="0" indent="0">
-              <a:lnSpc>
-                <a:spcPct val="100000"/>
-              </a:lnSpc>
-              <a:buNone/>
-            </a:pPr>
-            <a:r>
-              <a:rPr lang="ru-RU" sz="1800" b="0" cap="none" spc="0" baseline="0" dirty="0">
-                <a:solidFill>
-                  <a:srgbClr val="FFFFFF"/>
-                </a:solidFill>
-                <a:latin typeface="Inter Light"/>
-                <a:cs typeface="Inter Light"/>
-              </a:rPr>
-              <a:t>Число проверок по категориям</a:t>
-            </a:r>
-            <a:endParaRPr lang="ru-RU" sz="1800"/>
-          </a:p>
-        </p:txBody>
-      </p:sp>
       <p:graphicFrame>
         <p:nvGraphicFramePr>
-          <p:cNvPr id="44" name="Chart 43"/>
+          <p:cNvPr id="43" name="Table"/>
           <p:cNvGraphicFramePr>
             <a:graphicFrameLocks noGrp="1"/>
           </p:cNvGraphicFramePr>
           <p:nvPr/>
         </p:nvGraphicFramePr>
         <p:xfrm>
-          <a:off x="1024128" y="4340021"/>
-          <a:ext cx="10814792" cy="4483968"/>
+          <a:off x="1024128" y="4137660"/>
+          <a:ext cx="16239744" cy="4599318"/>
         </p:xfrm>
         <a:graphic>
-          <a:graphicData uri="http://schemas.openxmlformats.org/drawingml/2006/chart">
-            <c:chart xmlns:c="http://schemas.openxmlformats.org/drawingml/2006/chart" r:id="rId2"/>
+          <a:graphicData uri="http://schemas.openxmlformats.org/drawingml/2006/table">
+            <a:tbl>
+              <a:tblPr firstRow="1" bandRow="0">
+                <a:tableStyleId>{2D5ABB26-0587-4C30-8999-92F81FD0307C}</a:tableStyleId>
+              </a:tblPr>
+              <a:tblGrid>
+                <a:gridCol w="2992235"/>
+                <a:gridCol w="7485664"/>
+                <a:gridCol w="5761845"/>
+              </a:tblGrid>
+              <a:tr h="919863">
+                <a:tc>
+                  <a:txBody>
+                    <a:bodyPr wrap="square"/>
+                    <a:lstStyle/>
+                    <a:p>
+                      <a:pPr algn="l">
+                        <a:spcBef>
+                          <a:spcPts val="0"/>
+                        </a:spcBef>
+                        <a:spcAft>
+                          <a:spcPts val="0"/>
+                        </a:spcAft>
+                      </a:pPr>
+                      <a:r>
+                        <a:rPr sz="2799" b="0" i="0" cap="none" spc="0" baseline="0" lang="ru-RU">
+                          <a:solidFill>
+                            <a:srgbClr val="000000"/>
+                          </a:solidFill>
+                          <a:latin typeface="Inter Light"/>
+                          <a:ea typeface="Inter Light"/>
+                          <a:cs typeface="Inter Light"/>
+                        </a:rPr>
+                        <a:t>Вариант</a:t>
+                      </a:r>
+                    </a:p>
+                  </a:txBody>
+                  <a:tcPr marL="177800" marR="177800" marT="76200" marB="76200" anchor="ctr">
+                    <a:lnL w="0">
+                      <a:noFill/>
+                    </a:lnL>
+                    <a:lnR w="0">
+                      <a:noFill/>
+                    </a:lnR>
+                    <a:lnT w="0">
+                      <a:noFill/>
+                    </a:lnT>
+                    <a:lnB w="0">
+                      <a:noFill/>
+                    </a:lnB>
+                    <a:solidFill>
+                      <a:srgbClr val="C2D076"/>
+                    </a:solidFill>
+                  </a:tcPr>
+                </a:tc>
+                <a:tc>
+                  <a:txBody>
+                    <a:bodyPr wrap="square"/>
+                    <a:lstStyle/>
+                    <a:p>
+                      <a:pPr algn="l">
+                        <a:spcBef>
+                          <a:spcPts val="0"/>
+                        </a:spcBef>
+                        <a:spcAft>
+                          <a:spcPts val="0"/>
+                        </a:spcAft>
+                      </a:pPr>
+                      <a:r>
+                        <a:rPr sz="2799" b="0" i="0" cap="none" spc="0" baseline="0" lang="ru-RU">
+                          <a:solidFill>
+                            <a:srgbClr val="000000"/>
+                          </a:solidFill>
+                          <a:latin typeface="Inter Light"/>
+                          <a:ea typeface="Inter Light"/>
+                          <a:cs typeface="Inter Light"/>
+                        </a:rPr>
+                        <a:t>Подача</a:t>
+                      </a:r>
+                    </a:p>
+                  </a:txBody>
+                  <a:tcPr marL="177800" marR="177800" marT="76200" marB="76200" anchor="ctr">
+                    <a:lnL w="0">
+                      <a:noFill/>
+                    </a:lnL>
+                    <a:lnR w="0">
+                      <a:noFill/>
+                    </a:lnR>
+                    <a:lnT w="0">
+                      <a:noFill/>
+                    </a:lnT>
+                    <a:lnB w="0">
+                      <a:noFill/>
+                    </a:lnB>
+                    <a:solidFill>
+                      <a:srgbClr val="C2D076"/>
+                    </a:solidFill>
+                  </a:tcPr>
+                </a:tc>
+                <a:tc>
+                  <a:txBody>
+                    <a:bodyPr wrap="square"/>
+                    <a:lstStyle/>
+                    <a:p>
+                      <a:pPr algn="l">
+                        <a:spcBef>
+                          <a:spcPts val="0"/>
+                        </a:spcBef>
+                        <a:spcAft>
+                          <a:spcPts val="0"/>
+                        </a:spcAft>
+                      </a:pPr>
+                      <a:r>
+                        <a:rPr sz="2799" b="0" i="0" cap="none" spc="0" baseline="0" lang="ru-RU">
+                          <a:solidFill>
+                            <a:srgbClr val="000000"/>
+                          </a:solidFill>
+                          <a:latin typeface="Inter Light"/>
+                          <a:ea typeface="Inter Light"/>
+                          <a:cs typeface="Inter Light"/>
+                        </a:rPr>
+                        <a:t>Когда подходит</a:t>
+                      </a:r>
+                    </a:p>
+                  </a:txBody>
+                  <a:tcPr marL="177800" marR="177800" marT="76200" marB="76200" anchor="ctr">
+                    <a:lnL w="0">
+                      <a:noFill/>
+                    </a:lnL>
+                    <a:lnR w="0">
+                      <a:noFill/>
+                    </a:lnR>
+                    <a:lnT w="0">
+                      <a:noFill/>
+                    </a:lnT>
+                    <a:lnB w="0">
+                      <a:noFill/>
+                    </a:lnB>
+                    <a:solidFill>
+                      <a:srgbClr val="C2D076"/>
+                    </a:solidFill>
+                  </a:tcPr>
+                </a:tc>
+              </a:tr>
+              <a:tr h="1226485">
+                <a:tc>
+                  <a:txBody>
+                    <a:bodyPr wrap="square"/>
+                    <a:lstStyle/>
+                    <a:p>
+                      <a:pPr algn="l">
+                        <a:spcBef>
+                          <a:spcPts val="0"/>
+                        </a:spcBef>
+                        <a:spcAft>
+                          <a:spcPts val="0"/>
+                        </a:spcAft>
+                      </a:pPr>
+                      <a:r>
+                        <a:rPr sz="2799" b="0" i="0" cap="none" spc="0" baseline="0" lang="ru-RU">
+                          <a:solidFill>
+                            <a:srgbClr val="FFFFFF"/>
+                          </a:solidFill>
+                          <a:latin typeface="Inter Light"/>
+                          <a:ea typeface="Inter Light"/>
+                          <a:cs typeface="Inter Light"/>
+                        </a:rPr>
+                        <a:t>Структурный</a:t>
+                      </a:r>
+                    </a:p>
+                  </a:txBody>
+                  <a:tcPr marL="177800" marR="177800" marT="76200" marB="76200" anchor="ctr">
+                    <a:lnL w="0">
+                      <a:noFill/>
+                    </a:lnL>
+                    <a:lnR w="0">
+                      <a:noFill/>
+                    </a:lnR>
+                    <a:lnT w="0">
+                      <a:noFill/>
+                    </a:lnT>
+                    <a:lnB w="9525" cap="flat" cmpd="sng" algn="ctr">
+                      <a:solidFill>
+                        <a:srgbClr val="384848"/>
+                      </a:solidFill>
+                      <a:prstDash val="solid"/>
+                    </a:lnB>
+                    <a:noFill/>
+                  </a:tcPr>
+                </a:tc>
+                <a:tc>
+                  <a:txBody>
+                    <a:bodyPr wrap="square"/>
+                    <a:lstStyle/>
+                    <a:p>
+                      <a:pPr algn="l">
+                        <a:spcBef>
+                          <a:spcPts val="0"/>
+                        </a:spcBef>
+                        <a:spcAft>
+                          <a:spcPts val="0"/>
+                        </a:spcAft>
+                      </a:pPr>
+                      <a:r>
+                        <a:rPr sz="2799" b="0" i="0" cap="none" spc="0" baseline="0" lang="ru-RU">
+                          <a:solidFill>
+                            <a:srgbClr val="FFFFFF"/>
+                          </a:solidFill>
+                          <a:latin typeface="Inter Light"/>
+                          <a:ea typeface="Inter Light"/>
+                          <a:cs typeface="Inter Light"/>
+                        </a:rPr>
+                        <a:t>одна мысль на слайд, строгая сетка</a:t>
+                      </a:r>
+                    </a:p>
+                  </a:txBody>
+                  <a:tcPr marL="177800" marR="177800" marT="76200" marB="76200" anchor="ctr">
+                    <a:lnL w="0">
+                      <a:noFill/>
+                    </a:lnL>
+                    <a:lnR w="0">
+                      <a:noFill/>
+                    </a:lnR>
+                    <a:lnT w="0">
+                      <a:noFill/>
+                    </a:lnT>
+                    <a:lnB w="9525" cap="flat" cmpd="sng" algn="ctr">
+                      <a:solidFill>
+                        <a:srgbClr val="384848"/>
+                      </a:solidFill>
+                      <a:prstDash val="solid"/>
+                    </a:lnB>
+                    <a:noFill/>
+                  </a:tcPr>
+                </a:tc>
+                <a:tc>
+                  <a:txBody>
+                    <a:bodyPr wrap="square"/>
+                    <a:lstStyle/>
+                    <a:p>
+                      <a:pPr algn="l">
+                        <a:spcBef>
+                          <a:spcPts val="0"/>
+                        </a:spcBef>
+                        <a:spcAft>
+                          <a:spcPts val="0"/>
+                        </a:spcAft>
+                      </a:pPr>
+                      <a:r>
+                        <a:rPr sz="2799" b="0" i="0" cap="none" spc="0" baseline="0" lang="ru-RU">
+                          <a:solidFill>
+                            <a:srgbClr val="FFFFFF"/>
+                          </a:solidFill>
+                          <a:latin typeface="Inter Light"/>
+                          <a:ea typeface="Inter Light"/>
+                          <a:cs typeface="Inter Light"/>
+                        </a:rPr>
+                        <a:t>отчёт и защита проекта</a:t>
+                      </a:r>
+                    </a:p>
+                  </a:txBody>
+                  <a:tcPr marL="177800" marR="177800" marT="76200" marB="76200" anchor="ctr">
+                    <a:lnL w="0">
+                      <a:noFill/>
+                    </a:lnL>
+                    <a:lnR w="0">
+                      <a:noFill/>
+                    </a:lnR>
+                    <a:lnT w="0">
+                      <a:noFill/>
+                    </a:lnT>
+                    <a:lnB w="9525" cap="flat" cmpd="sng" algn="ctr">
+                      <a:solidFill>
+                        <a:srgbClr val="384848"/>
+                      </a:solidFill>
+                      <a:prstDash val="solid"/>
+                    </a:lnB>
+                    <a:noFill/>
+                  </a:tcPr>
+                </a:tc>
+              </a:tr>
+              <a:tr h="1226485">
+                <a:tc>
+                  <a:txBody>
+                    <a:bodyPr wrap="square"/>
+                    <a:lstStyle/>
+                    <a:p>
+                      <a:pPr algn="l">
+                        <a:spcBef>
+                          <a:spcPts val="0"/>
+                        </a:spcBef>
+                        <a:spcAft>
+                          <a:spcPts val="0"/>
+                        </a:spcAft>
+                      </a:pPr>
+                      <a:r>
+                        <a:rPr sz="2799" b="0" i="0" cap="none" spc="0" baseline="0" lang="ru-RU">
+                          <a:solidFill>
+                            <a:srgbClr val="FFFFFF"/>
+                          </a:solidFill>
+                          <a:latin typeface="Inter Light"/>
+                          <a:ea typeface="Inter Light"/>
+                          <a:cs typeface="Inter Light"/>
+                        </a:rPr>
+                        <a:t>Визуальный</a:t>
+                      </a:r>
+                    </a:p>
+                  </a:txBody>
+                  <a:tcPr marL="177800" marR="177800" marT="76200" marB="76200" anchor="ctr">
+                    <a:lnL w="0">
+                      <a:noFill/>
+                    </a:lnL>
+                    <a:lnR w="0">
+                      <a:noFill/>
+                    </a:lnR>
+                    <a:lnT w="0">
+                      <a:noFill/>
+                    </a:lnT>
+                    <a:lnB w="9525" cap="flat" cmpd="sng" algn="ctr">
+                      <a:solidFill>
+                        <a:srgbClr val="384848"/>
+                      </a:solidFill>
+                      <a:prstDash val="solid"/>
+                    </a:lnB>
+                    <a:noFill/>
+                  </a:tcPr>
+                </a:tc>
+                <a:tc>
+                  <a:txBody>
+                    <a:bodyPr wrap="square"/>
+                    <a:lstStyle/>
+                    <a:p>
+                      <a:pPr algn="l">
+                        <a:spcBef>
+                          <a:spcPts val="0"/>
+                        </a:spcBef>
+                        <a:spcAft>
+                          <a:spcPts val="0"/>
+                        </a:spcAft>
+                      </a:pPr>
+                      <a:r>
+                        <a:rPr sz="2799" b="0" i="0" cap="none" spc="0" baseline="0" lang="ru-RU">
+                          <a:solidFill>
+                            <a:srgbClr val="FFFFFF"/>
+                          </a:solidFill>
+                          <a:latin typeface="Inter Light"/>
+                          <a:ea typeface="Inter Light"/>
+                          <a:cs typeface="Inter Light"/>
+                        </a:rPr>
+                        <a:t>крупные цифры и наглядные схемы</a:t>
+                      </a:r>
+                    </a:p>
+                  </a:txBody>
+                  <a:tcPr marL="177800" marR="177800" marT="76200" marB="76200" anchor="ctr">
+                    <a:lnL w="0">
+                      <a:noFill/>
+                    </a:lnL>
+                    <a:lnR w="0">
+                      <a:noFill/>
+                    </a:lnR>
+                    <a:lnT w="0">
+                      <a:noFill/>
+                    </a:lnT>
+                    <a:lnB w="9525" cap="flat" cmpd="sng" algn="ctr">
+                      <a:solidFill>
+                        <a:srgbClr val="384848"/>
+                      </a:solidFill>
+                      <a:prstDash val="solid"/>
+                    </a:lnB>
+                    <a:noFill/>
+                  </a:tcPr>
+                </a:tc>
+                <a:tc>
+                  <a:txBody>
+                    <a:bodyPr wrap="square"/>
+                    <a:lstStyle/>
+                    <a:p>
+                      <a:pPr algn="l">
+                        <a:spcBef>
+                          <a:spcPts val="0"/>
+                        </a:spcBef>
+                        <a:spcAft>
+                          <a:spcPts val="0"/>
+                        </a:spcAft>
+                      </a:pPr>
+                      <a:r>
+                        <a:rPr sz="2799" b="0" i="0" cap="none" spc="0" baseline="0" lang="ru-RU">
+                          <a:solidFill>
+                            <a:srgbClr val="FFFFFF"/>
+                          </a:solidFill>
+                          <a:latin typeface="Inter Light"/>
+                          <a:ea typeface="Inter Light"/>
+                          <a:cs typeface="Inter Light"/>
+                        </a:rPr>
+                        <a:t>питч и выступление со сцены</a:t>
+                      </a:r>
+                    </a:p>
+                  </a:txBody>
+                  <a:tcPr marL="177800" marR="177800" marT="76200" marB="76200" anchor="ctr">
+                    <a:lnL w="0">
+                      <a:noFill/>
+                    </a:lnL>
+                    <a:lnR w="0">
+                      <a:noFill/>
+                    </a:lnR>
+                    <a:lnT w="0">
+                      <a:noFill/>
+                    </a:lnT>
+                    <a:lnB w="9525" cap="flat" cmpd="sng" algn="ctr">
+                      <a:solidFill>
+                        <a:srgbClr val="384848"/>
+                      </a:solidFill>
+                      <a:prstDash val="solid"/>
+                    </a:lnB>
+                    <a:noFill/>
+                  </a:tcPr>
+                </a:tc>
+              </a:tr>
+              <a:tr h="1226485">
+                <a:tc>
+                  <a:txBody>
+                    <a:bodyPr wrap="square"/>
+                    <a:lstStyle/>
+                    <a:p>
+                      <a:pPr algn="l">
+                        <a:spcBef>
+                          <a:spcPts val="0"/>
+                        </a:spcBef>
+                        <a:spcAft>
+                          <a:spcPts val="0"/>
+                        </a:spcAft>
+                      </a:pPr>
+                      <a:r>
+                        <a:rPr sz="2799" b="0" i="0" cap="none" spc="0" baseline="0" lang="ru-RU">
+                          <a:solidFill>
+                            <a:srgbClr val="FFFFFF"/>
+                          </a:solidFill>
+                          <a:latin typeface="Inter Light"/>
+                          <a:ea typeface="Inter Light"/>
+                          <a:cs typeface="Inter Light"/>
+                        </a:rPr>
+                        <a:t>Компактный</a:t>
+                      </a:r>
+                    </a:p>
+                  </a:txBody>
+                  <a:tcPr marL="177800" marR="177800" marT="76200" marB="76200" anchor="ctr">
+                    <a:lnL w="0">
+                      <a:noFill/>
+                    </a:lnL>
+                    <a:lnR w="0">
+                      <a:noFill/>
+                    </a:lnR>
+                    <a:lnT w="0">
+                      <a:noFill/>
+                    </a:lnT>
+                    <a:lnB w="9525" cap="flat" cmpd="sng" algn="ctr">
+                      <a:solidFill>
+                        <a:srgbClr val="384848"/>
+                      </a:solidFill>
+                      <a:prstDash val="solid"/>
+                    </a:lnB>
+                    <a:noFill/>
+                  </a:tcPr>
+                </a:tc>
+                <a:tc>
+                  <a:txBody>
+                    <a:bodyPr wrap="square"/>
+                    <a:lstStyle/>
+                    <a:p>
+                      <a:pPr algn="l">
+                        <a:spcBef>
+                          <a:spcPts val="0"/>
+                        </a:spcBef>
+                        <a:spcAft>
+                          <a:spcPts val="0"/>
+                        </a:spcAft>
+                      </a:pPr>
+                      <a:r>
+                        <a:rPr sz="2799" b="0" i="0" cap="none" spc="0" baseline="0" lang="ru-RU">
+                          <a:solidFill>
+                            <a:srgbClr val="FFFFFF"/>
+                          </a:solidFill>
+                          <a:latin typeface="Inter Light"/>
+                          <a:ea typeface="Inter Light"/>
+                          <a:cs typeface="Inter Light"/>
+                        </a:rPr>
+                        <a:t>вывод первой строкой, данные справа</a:t>
+                      </a:r>
+                    </a:p>
+                  </a:txBody>
+                  <a:tcPr marL="177800" marR="177800" marT="76200" marB="76200" anchor="ctr">
+                    <a:lnL w="0">
+                      <a:noFill/>
+                    </a:lnL>
+                    <a:lnR w="0">
+                      <a:noFill/>
+                    </a:lnR>
+                    <a:lnT w="0">
+                      <a:noFill/>
+                    </a:lnT>
+                    <a:lnB w="9525" cap="flat" cmpd="sng" algn="ctr">
+                      <a:solidFill>
+                        <a:srgbClr val="384848"/>
+                      </a:solidFill>
+                      <a:prstDash val="solid"/>
+                    </a:lnB>
+                    <a:noFill/>
+                  </a:tcPr>
+                </a:tc>
+                <a:tc>
+                  <a:txBody>
+                    <a:bodyPr wrap="square"/>
+                    <a:lstStyle/>
+                    <a:p>
+                      <a:pPr algn="l">
+                        <a:spcBef>
+                          <a:spcPts val="0"/>
+                        </a:spcBef>
+                        <a:spcAft>
+                          <a:spcPts val="0"/>
+                        </a:spcAft>
+                      </a:pPr>
+                      <a:r>
+                        <a:rPr sz="2799" b="0" i="0" cap="none" spc="0" baseline="0" lang="ru-RU">
+                          <a:solidFill>
+                            <a:srgbClr val="FFFFFF"/>
+                          </a:solidFill>
+                          <a:latin typeface="Inter Light"/>
+                          <a:ea typeface="Inter Light"/>
+                          <a:cs typeface="Inter Light"/>
+                        </a:rPr>
+                        <a:t>рассылка руководителю</a:t>
+                      </a:r>
+                    </a:p>
+                  </a:txBody>
+                  <a:tcPr marL="177800" marR="177800" marT="76200" marB="76200" anchor="ctr">
+                    <a:lnL w="0">
+                      <a:noFill/>
+                    </a:lnL>
+                    <a:lnR w="0">
+                      <a:noFill/>
+                    </a:lnR>
+                    <a:lnT w="0">
+                      <a:noFill/>
+                    </a:lnT>
+                    <a:lnB w="9525" cap="flat" cmpd="sng" algn="ctr">
+                      <a:solidFill>
+                        <a:srgbClr val="384848"/>
+                      </a:solidFill>
+                      <a:prstDash val="solid"/>
+                    </a:lnB>
+                    <a:noFill/>
+                  </a:tcPr>
+                </a:tc>
+              </a:tr>
+            </a:tbl>
           </a:graphicData>
         </a:graphic>
       </p:graphicFrame>
-      <p:sp>
-        <p:nvSpPr>
-          <p:cNvPr id="45" name="Rule 45"/>
-          <p:cNvSpPr/>
-          <p:nvPr/>
-        </p:nvSpPr>
-        <p:spPr>
-          <a:xfrm>
-            <a:off x="12716744" y="3947718"/>
-            <a:ext cx="720090" cy="38100"/>
-          </a:xfrm>
-          <a:prstGeom prst="rect">
-            <a:avLst/>
-          </a:prstGeom>
-          <a:solidFill>
-            <a:srgbClr val="C2D076"/>
-          </a:solidFill>
-          <a:ln>
-            <a:noFill/>
-          </a:ln>
-        </p:spPr>
-      </p:sp>
-      <p:sp>
-        <p:nvSpPr>
-          <p:cNvPr id="46" name="Label 46"/>
-          <p:cNvSpPr txBox="1"/>
-          <p:nvPr/>
-        </p:nvSpPr>
-        <p:spPr>
-          <a:xfrm>
-            <a:off x="12716744" y="4263567"/>
-            <a:ext cx="4547128" cy="1305103"/>
-          </a:xfrm>
-          <a:prstGeom prst="rect">
-            <a:avLst/>
-          </a:prstGeom>
-          <a:noFill/>
-        </p:spPr>
-        <p:txBody>
-          <a:bodyPr wrap="square" lIns="0" tIns="0" rIns="0" bIns="0" anchor="t" rtlCol="0">
-            <a:noAutofit/>
-          </a:bodyPr>
-          <a:lstStyle/>
-          <a:p>
-            <a:pPr algn="l" marL="0" indent="0">
-              <a:lnSpc>
-                <a:spcPct val="100000"/>
-              </a:lnSpc>
-              <a:buNone/>
-            </a:pPr>
-            <a:r>
-              <a:rPr lang="ru-RU" sz="2799" b="0" cap="none" spc="0" baseline="0" dirty="0">
-                <a:solidFill>
-                  <a:srgbClr val="FFFFFF"/>
-                </a:solidFill>
-                <a:latin typeface="Inter Light"/>
-                <a:cs typeface="Inter Light"/>
-              </a:rPr>
-              <a:t>Всего </a:t>
-            </a:r>
-            <a:r>
-              <a:rPr lang="ru-RU" sz="2799" b="0" cap="none" spc="0" baseline="0" dirty="0">
-                <a:solidFill>
-                  <a:srgbClr val="C2D076"/>
-                </a:solidFill>
-                <a:latin typeface="Inter Light"/>
-                <a:cs typeface="Inter Light"/>
-              </a:rPr>
-              <a:t>41 </a:t>
-            </a:r>
-            <a:r>
-              <a:rPr lang="ru-RU" sz="2799" b="0" cap="none" spc="0" baseline="0" dirty="0">
-                <a:solidFill>
-                  <a:srgbClr val="FFFFFF"/>
-                </a:solidFill>
-                <a:latin typeface="Inter Light"/>
-                <a:cs typeface="Inter Light"/>
-              </a:rPr>
-              <a:t>проверка: </a:t>
-            </a:r>
-            <a:r>
-              <a:rPr lang="ru-RU" sz="2799" b="0" cap="none" spc="0" baseline="0" dirty="0">
-                <a:solidFill>
-                  <a:srgbClr val="C2D076"/>
-                </a:solidFill>
-                <a:latin typeface="Inter Light"/>
-                <a:cs typeface="Inter Light"/>
-              </a:rPr>
-              <a:t>12 </a:t>
-            </a:r>
-            <a:r>
-              <a:rPr lang="ru-RU" sz="2799" b="0" cap="none" spc="0" baseline="0" dirty="0">
-                <a:solidFill>
-                  <a:srgbClr val="FFFFFF"/>
-                </a:solidFill>
-                <a:latin typeface="Inter Light"/>
-                <a:cs typeface="Inter Light"/>
-              </a:rPr>
-              <a:t>на целостность, </a:t>
-            </a:r>
-            <a:r>
-              <a:rPr lang="ru-RU" sz="2799" b="0" cap="none" spc="0" baseline="0" dirty="0">
-                <a:solidFill>
-                  <a:srgbClr val="C2D076"/>
-                </a:solidFill>
-                <a:latin typeface="Inter Light"/>
-                <a:cs typeface="Inter Light"/>
-              </a:rPr>
-              <a:t>11 </a:t>
-            </a:r>
-            <a:r>
-              <a:rPr lang="ru-RU" sz="2799" b="0" cap="none" spc="0" baseline="0" dirty="0">
-                <a:solidFill>
-                  <a:srgbClr val="FFFFFF"/>
-                </a:solidFill>
-                <a:latin typeface="Inter Light"/>
-                <a:cs typeface="Inter Light"/>
-              </a:rPr>
-              <a:t>на вёрстку</a:t>
-            </a:r>
-            <a:endParaRPr lang="ru-RU" sz="2799"/>
-          </a:p>
-        </p:txBody>
-      </p:sp>
     </p:spTree>
   </p:cSld>
   <p:clrMapOvr>
@@ -7073,7 +7969,7 @@
         <p:spPr>
           <a:xfrm>
             <a:off x="619057" y="2623820"/>
-            <a:ext cx="15727680" cy="809548"/>
+            <a:ext cx="15727680" cy="944880"/>
           </a:xfrm>
           <a:prstGeom prst="rect">
             <a:avLst/>
@@ -7116,7 +8012,7 @@
                 <a:cs typeface="Inter Medium"/>
                 <a:sym typeface="Inter Medium"/>
               </a:rPr>
-              <a:t>9 демонстрационных презентаций без лишних чисел</a:t>
+              <a:t>41 проверка качества на слайд</a:t>
             </a:r>
             <a:endParaRPr>
               <a:latin typeface="Inter Medium"/>
@@ -7129,80 +8025,14 @@
       </p:sp>
       <p:sp>
         <p:nvSpPr>
-          <p:cNvPr id="61" name="Card 61"/>
-          <p:cNvSpPr/>
-          <p:nvPr/>
-        </p:nvSpPr>
-        <p:spPr>
-          <a:xfrm>
-            <a:off x="1024128" y="3947718"/>
-            <a:ext cx="5120640" cy="4299846"/>
-          </a:xfrm>
-          <a:prstGeom prst="roundRect">
-            <a:avLst>
-              <a:gd name="adj" fmla="val 2551"/>
-            </a:avLst>
-          </a:prstGeom>
-          <a:solidFill>
-            <a:srgbClr val="000000"/>
-          </a:solidFill>
-          <a:ln>
-            <a:noFill/>
-          </a:ln>
-        </p:spPr>
-      </p:sp>
-      <p:sp>
-        <p:nvSpPr>
-          <p:cNvPr id="62" name="Figure 62"/>
+          <p:cNvPr id="43" name="Unit 43"/>
           <p:cNvSpPr txBox="1"/>
           <p:nvPr/>
         </p:nvSpPr>
         <p:spPr>
           <a:xfrm>
-            <a:off x="1528013" y="4221957"/>
-            <a:ext cx="4104691" cy="1341120"/>
-          </a:xfrm>
-          <a:prstGeom prst="rect">
-            <a:avLst/>
-          </a:prstGeom>
-          <a:noFill/>
-        </p:spPr>
-        <p:txBody>
-          <a:bodyPr wrap="square" lIns="0" tIns="0" rIns="0" bIns="0" anchor="b" rtlCol="0">
-            <a:noAutofit/>
-          </a:bodyPr>
-          <a:lstStyle/>
-          <a:p>
-            <a:pPr algn="l" marL="0" indent="0">
-              <a:lnSpc>
-                <a:spcPct val="100000"/>
-              </a:lnSpc>
-              <a:buNone/>
-            </a:pPr>
-            <a:r>
-              <a:rPr lang="ru-RU" sz="8800" b="1" cap="none" spc="0" baseline="0" dirty="0">
-                <a:solidFill>
-                  <a:srgbClr val="C2D076"/>
-                </a:solidFill>
-                <a:latin typeface="Inter Light"/>
-                <a:cs typeface="Inter Light"/>
-              </a:rPr>
-              <a:t>9</a:t>
-            </a:r>
-            <a:endParaRPr lang="ru-RU" sz="8800"/>
-          </a:p>
-        </p:txBody>
-      </p:sp>
-      <p:sp>
-        <p:nvSpPr>
-          <p:cNvPr id="63" name="Label 63"/>
-          <p:cNvSpPr txBox="1"/>
-          <p:nvPr/>
-        </p:nvSpPr>
-        <p:spPr>
-          <a:xfrm>
-            <a:off x="1536192" y="5671090"/>
-            <a:ext cx="4096512" cy="2064410"/>
+            <a:off x="1024128" y="4137660"/>
+            <a:ext cx="10814792" cy="299720"/>
           </a:xfrm>
           <a:prstGeom prst="rect">
             <a:avLst/>
@@ -7222,37 +8052,53 @@
               <a:buNone/>
             </a:pPr>
             <a:r>
-              <a:rPr lang="ru-RU" sz="2799" b="0" cap="none" spc="0" baseline="0" dirty="0">
+              <a:rPr lang="ru-RU" sz="1800" b="0" cap="none" spc="0" baseline="0" dirty="0">
                 <a:solidFill>
                   <a:srgbClr val="FFFFFF"/>
                 </a:solidFill>
                 <a:latin typeface="Inter Light"/>
                 <a:cs typeface="Inter Light"/>
               </a:rPr>
-              <a:t>Демо-⁠презентаций</a:t>
+              <a:t>Число проверок по категориям</a:t>
             </a:r>
-            <a:endParaRPr lang="ru-RU" sz="2799"/>
+            <a:endParaRPr lang="ru-RU" sz="1800"/>
           </a:p>
         </p:txBody>
       </p:sp>
-      <p:sp>
-        <p:nvSpPr>
-          <p:cNvPr id="64" name="Card 64"/>
+      <p:graphicFrame>
+        <p:nvGraphicFramePr>
+          <p:cNvPr id="44" name="Chart 43"/>
+          <p:cNvGraphicFramePr>
+            <a:graphicFrameLocks noGrp="1"/>
+          </p:cNvGraphicFramePr>
+          <p:nvPr/>
+        </p:nvGraphicFramePr>
+        <p:xfrm>
+          <a:off x="1024128" y="4529963"/>
+          <a:ext cx="10814792" cy="4309221"/>
+        </p:xfrm>
+        <a:graphic>
+          <a:graphicData uri="http://schemas.openxmlformats.org/drawingml/2006/chart">
+            <c:chart xmlns:c="http://schemas.openxmlformats.org/drawingml/2006/chart" r:id="rId2"/>
+          </a:graphicData>
+        </a:graphic>
+      </p:graphicFrame>
+      <p:sp>
+        <p:nvSpPr>
+          <p:cNvPr id="45" name="Rule 45"/>
           <p:cNvSpPr/>
           <p:nvPr/>
         </p:nvSpPr>
         <p:spPr>
           <a:xfrm>
-            <a:off x="6583680" y="3947718"/>
-            <a:ext cx="5120640" cy="4299846"/>
-          </a:xfrm>
-          <a:prstGeom prst="roundRect">
-            <a:avLst>
-              <a:gd name="adj" fmla="val 2551"/>
-            </a:avLst>
+            <a:off x="12716744" y="4137660"/>
+            <a:ext cx="720090" cy="38100"/>
+          </a:xfrm>
+          <a:prstGeom prst="rect">
+            <a:avLst/>
           </a:prstGeom>
           <a:solidFill>
-            <a:srgbClr val="000000"/>
+            <a:srgbClr val="C2D076"/>
           </a:solidFill>
           <a:ln>
             <a:noFill/>
@@ -7261,76 +8107,14 @@
       </p:sp>
       <p:sp>
         <p:nvSpPr>
-          <p:cNvPr id="65" name="Figure 65"/>
+          <p:cNvPr id="46" name="Label 46"/>
           <p:cNvSpPr txBox="1"/>
           <p:nvPr/>
         </p:nvSpPr>
         <p:spPr>
           <a:xfrm>
-            <a:off x="7094987" y="4221957"/>
-            <a:ext cx="4097269" cy="1341120"/>
-          </a:xfrm>
-          <a:prstGeom prst="rect">
-            <a:avLst/>
-          </a:prstGeom>
-          <a:noFill/>
-        </p:spPr>
-        <p:txBody>
-          <a:bodyPr wrap="square" lIns="0" tIns="0" rIns="0" bIns="0" anchor="b" rtlCol="0">
-            <a:noAutofit/>
-          </a:bodyPr>
-          <a:lstStyle/>
-          <a:p>
-            <a:pPr algn="l" marL="0" indent="0">
-              <a:lnSpc>
-                <a:spcPct val="100000"/>
-              </a:lnSpc>
-              <a:buNone/>
-            </a:pPr>
-            <a:r>
-              <a:rPr lang="ru-RU" sz="4712" b="1" cap="none" spc="0" baseline="0" dirty="0">
-                <a:solidFill>
-                  <a:srgbClr val="FFFFFF"/>
-                </a:solidFill>
-                <a:latin typeface="Inter Light"/>
-                <a:cs typeface="Inter Light"/>
-              </a:rPr>
-              <a:t>116</a:t>
-            </a:r>
-            <a:r>
-              <a:rPr lang="ru-RU" sz="4712" b="0" cap="none" spc="0" baseline="0" dirty="0">
-                <a:solidFill>
-                  <a:srgbClr val="FFFFFF"/>
-                </a:solidFill>
-                <a:latin typeface="Inter Light"/>
-                <a:cs typeface="Inter Light"/>
-              </a:rPr>
-              <a:t> → </a:t>
-            </a:r>
-            <a:r>
-              <a:rPr lang="ru-RU" sz="8800" b="1" cap="none" spc="0" baseline="0" dirty="0">
-                <a:solidFill>
-                  <a:srgbClr val="C2D076"/>
-                </a:solidFill>
-                <a:latin typeface="Inter Light"/>
-                <a:cs typeface="Inter Light"/>
-              </a:rPr>
-              <a:t>123</a:t>
-            </a:r>
-            <a:endParaRPr lang="ru-RU" sz="8800"/>
-          </a:p>
-        </p:txBody>
-      </p:sp>
-      <p:sp>
-        <p:nvSpPr>
-          <p:cNvPr id="66" name="Label 66"/>
-          <p:cNvSpPr txBox="1"/>
-          <p:nvPr/>
-        </p:nvSpPr>
-        <p:spPr>
-          <a:xfrm>
-            <a:off x="7095744" y="5671090"/>
-            <a:ext cx="4096512" cy="2064410"/>
+            <a:off x="12716744" y="4453509"/>
+            <a:ext cx="4547128" cy="1305103"/>
           </a:xfrm>
           <a:prstGeom prst="rect">
             <a:avLst/>
@@ -7352,12 +8136,22 @@
             <a:r>
               <a:rPr lang="ru-RU" sz="2799" b="0" cap="none" spc="0" baseline="0" dirty="0">
                 <a:solidFill>
-                  <a:srgbClr val="FFFFFF"/>
+                  <a:srgbClr val="C2D076"/>
                 </a:solidFill>
                 <a:latin typeface="Inter Light"/>
                 <a:cs typeface="Inter Light"/>
               </a:rPr>
-              <a:t>Сверенных чисел</a:t>
+              <a:t>12 </a:t>
+            </a:r>
+            <a:r>
+              <a:rPr lang="ru-RU" sz="2799" b="0" cap="none" spc="0" baseline="0" dirty="0">
+                <a:solidFill>
+                  <a:srgbClr val="FFFFFF"/>
+                </a:solidFill>
+                <a:latin typeface="Inter Light"/>
+                <a:cs typeface="Inter Light"/>
+              </a:rPr>
+              <a:t>проверок на целостность — самая большая группа</a:t>
             </a:r>
             <a:endParaRPr lang="ru-RU" sz="2799"/>
           </a:p>
@@ -7365,80 +8159,14 @@
       </p:sp>
       <p:sp>
         <p:nvSpPr>
-          <p:cNvPr id="67" name="Card 67"/>
-          <p:cNvSpPr/>
-          <p:nvPr/>
-        </p:nvSpPr>
-        <p:spPr>
-          <a:xfrm>
-            <a:off x="12143232" y="3947718"/>
-            <a:ext cx="5120640" cy="4299846"/>
-          </a:xfrm>
-          <a:prstGeom prst="roundRect">
-            <a:avLst>
-              <a:gd name="adj" fmla="val 2551"/>
-            </a:avLst>
-          </a:prstGeom>
-          <a:solidFill>
-            <a:srgbClr val="000000"/>
-          </a:solidFill>
-          <a:ln>
-            <a:noFill/>
-          </a:ln>
-        </p:spPr>
-      </p:sp>
-      <p:sp>
-        <p:nvSpPr>
-          <p:cNvPr id="68" name="Figure 68"/>
+          <p:cNvPr id="47" name="Chart note 47"/>
           <p:cNvSpPr txBox="1"/>
           <p:nvPr/>
         </p:nvSpPr>
         <p:spPr>
           <a:xfrm>
-            <a:off x="12651029" y="4221957"/>
-            <a:ext cx="4100779" cy="1341120"/>
-          </a:xfrm>
-          <a:prstGeom prst="rect">
-            <a:avLst/>
-          </a:prstGeom>
-          <a:noFill/>
-        </p:spPr>
-        <p:txBody>
-          <a:bodyPr wrap="square" lIns="0" tIns="0" rIns="0" bIns="0" anchor="b" rtlCol="0">
-            <a:noAutofit/>
-          </a:bodyPr>
-          <a:lstStyle/>
-          <a:p>
-            <a:pPr algn="l" marL="0" indent="0">
-              <a:lnSpc>
-                <a:spcPct val="100000"/>
-              </a:lnSpc>
-              <a:buNone/>
-            </a:pPr>
-            <a:r>
-              <a:rPr lang="ru-RU" sz="8800" b="1" cap="none" spc="0" baseline="0" dirty="0">
-                <a:solidFill>
-                  <a:srgbClr val="C2D076"/>
-                </a:solidFill>
-                <a:latin typeface="Inter Light"/>
-                <a:cs typeface="Inter Light"/>
-              </a:rPr>
-              <a:t>0</a:t>
-            </a:r>
-            <a:endParaRPr lang="ru-RU" sz="8800"/>
-          </a:p>
-        </p:txBody>
-      </p:sp>
-      <p:sp>
-        <p:nvSpPr>
-          <p:cNvPr id="69" name="Label 69"/>
-          <p:cNvSpPr txBox="1"/>
-          <p:nvPr/>
-        </p:nvSpPr>
-        <p:spPr>
-          <a:xfrm>
-            <a:off x="12655296" y="5671090"/>
-            <a:ext cx="4096512" cy="2064410"/>
+            <a:off x="12716744" y="6113513"/>
+            <a:ext cx="4547128" cy="695655"/>
           </a:xfrm>
           <a:prstGeom prst="rect">
             <a:avLst/>
@@ -7455,19 +8183,22 @@
               <a:lnSpc>
                 <a:spcPct val="100000"/>
               </a:lnSpc>
+              <a:spcAft>
+                <a:spcPts val="1209"/>
+              </a:spcAft>
               <a:buNone/>
             </a:pPr>
             <a:r>
-              <a:rPr lang="ru-RU" sz="2799" b="0" cap="none" spc="0" baseline="0" dirty="0">
+              <a:rPr lang="ru-RU" sz="2199" b="0" cap="none" spc="0" baseline="0" dirty="0">
                 <a:solidFill>
                   <a:srgbClr val="FFFFFF"/>
                 </a:solidFill>
                 <a:latin typeface="Inter Light"/>
                 <a:cs typeface="Inter Light"/>
               </a:rPr>
-              <a:t>Лишних чисел</a:t>
+              <a:t>Найденные проблемы помечаются на слайде</a:t>
             </a:r>
-            <a:endParaRPr lang="ru-RU" sz="2799"/>
+            <a:endParaRPr lang="ru-RU" sz="2199"/>
           </a:p>
         </p:txBody>
       </p:sp>
@@ -7505,7 +8236,7 @@
         <p:spPr>
           <a:xfrm>
             <a:off x="619057" y="2623820"/>
-            <a:ext cx="15727680" cy="944880"/>
+            <a:ext cx="10495470" cy="1527657"/>
           </a:xfrm>
           <a:prstGeom prst="rect">
             <a:avLst/>
@@ -7539,7 +8270,7 @@
               <a:buNone/>
             </a:pPr>
             <a:r>
-              <a:rPr i="0" lang="ru-RU" sz="4712" u="none" cap="none" strike="noStrike">
+              <a:rPr i="0" lang="ru-RU" sz="2799" u="none" cap="none" strike="noStrike">
                 <a:solidFill>
                   <a:srgbClr val="C2D076"/>
                 </a:solidFill>
@@ -7548,7 +8279,7 @@
                 <a:cs typeface="Inter Medium"/>
                 <a:sym typeface="Inter Medium"/>
               </a:rPr>
-              <a:t>87 шаблонов и 99/100 качества</a:t>
+              <a:t>9 демонстрационных презентаций без выдуманных чисел</a:t>
             </a:r>
             <a:endParaRPr>
               <a:latin typeface="Inter Medium"/>
@@ -7567,12 +8298,12 @@
         </p:nvSpPr>
         <p:spPr>
           <a:xfrm>
-            <a:off x="1024128" y="4137660"/>
-            <a:ext cx="5120640" cy="4394903"/>
+            <a:off x="1024128" y="4665827"/>
+            <a:ext cx="5120640" cy="3818208"/>
           </a:xfrm>
           <a:prstGeom prst="roundRect">
             <a:avLst>
-              <a:gd name="adj" fmla="val 2496"/>
+              <a:gd name="adj" fmla="val 2873"/>
             </a:avLst>
           </a:prstGeom>
           <a:solidFill>
@@ -7591,7 +8322,7 @@
         </p:nvSpPr>
         <p:spPr>
           <a:xfrm>
-            <a:off x="1536192" y="4476787"/>
+            <a:off x="1536192" y="5004954"/>
             <a:ext cx="4096512" cy="975208"/>
           </a:xfrm>
           <a:prstGeom prst="rect">
@@ -7619,7 +8350,7 @@
                 <a:latin typeface="Inter Light"/>
                 <a:cs typeface="Inter Light"/>
               </a:rPr>
-              <a:t>87</a:t>
+              <a:t>9</a:t>
             </a:r>
             <a:endParaRPr lang="ru-RU" sz="6399"/>
           </a:p>
@@ -7633,8 +8364,8 @@
         </p:nvSpPr>
         <p:spPr>
           <a:xfrm>
-            <a:off x="1536192" y="5560008"/>
-            <a:ext cx="4096512" cy="2460491"/>
+            <a:off x="1536192" y="6088175"/>
+            <a:ext cx="4096512" cy="1883796"/>
           </a:xfrm>
           <a:prstGeom prst="rect">
             <a:avLst/>
@@ -7661,7 +8392,7 @@
                 <a:latin typeface="Inter Light"/>
                 <a:cs typeface="Inter Light"/>
               </a:rPr>
-              <a:t>Чужих шаблонов</a:t>
+              <a:t>Демо-⁠презентаций</a:t>
             </a:r>
             <a:endParaRPr lang="ru-RU" sz="2799"/>
           </a:p>
@@ -7675,12 +8406,12 @@
         </p:nvSpPr>
         <p:spPr>
           <a:xfrm>
-            <a:off x="6583680" y="4137660"/>
-            <a:ext cx="5120640" cy="4394903"/>
+            <a:off x="6583680" y="4665827"/>
+            <a:ext cx="5120640" cy="3818208"/>
           </a:xfrm>
           <a:prstGeom prst="roundRect">
             <a:avLst>
-              <a:gd name="adj" fmla="val 2496"/>
+              <a:gd name="adj" fmla="val 2873"/>
             </a:avLst>
           </a:prstGeom>
           <a:solidFill>
@@ -7699,8 +8430,8 @@
         </p:nvSpPr>
         <p:spPr>
           <a:xfrm>
-            <a:off x="7095744" y="4476787"/>
-            <a:ext cx="4096512" cy="975208"/>
+            <a:off x="7082239" y="5004954"/>
+            <a:ext cx="4110017" cy="975208"/>
           </a:xfrm>
           <a:prstGeom prst="rect">
             <a:avLst/>
@@ -7727,7 +8458,7 @@
                 <a:latin typeface="Inter Light"/>
                 <a:cs typeface="Inter Light"/>
               </a:rPr>
-              <a:t>99/100</a:t>
+              <a:t>116⁠–⁠123</a:t>
             </a:r>
             <a:endParaRPr lang="ru-RU" sz="6399"/>
           </a:p>
@@ -7741,8 +8472,8 @@
         </p:nvSpPr>
         <p:spPr>
           <a:xfrm>
-            <a:off x="7095744" y="5560008"/>
-            <a:ext cx="4096512" cy="2460491"/>
+            <a:off x="7095744" y="6088175"/>
+            <a:ext cx="4096512" cy="1883796"/>
           </a:xfrm>
           <a:prstGeom prst="rect">
             <a:avLst/>
@@ -7769,7 +8500,7 @@
                 <a:latin typeface="Inter Light"/>
                 <a:cs typeface="Inter Light"/>
               </a:rPr>
-              <a:t>Средняя оценка качества</a:t>
+              <a:t>Проверенных чисел</a:t>
             </a:r>
             <a:endParaRPr lang="ru-RU" sz="2799"/>
           </a:p>
@@ -7783,12 +8514,12 @@
         </p:nvSpPr>
         <p:spPr>
           <a:xfrm>
-            <a:off x="12143232" y="4137660"/>
-            <a:ext cx="5120640" cy="4394903"/>
+            <a:off x="12143232" y="4665827"/>
+            <a:ext cx="5120640" cy="3818208"/>
           </a:xfrm>
           <a:prstGeom prst="roundRect">
             <a:avLst>
-              <a:gd name="adj" fmla="val 2496"/>
+              <a:gd name="adj" fmla="val 2873"/>
             </a:avLst>
           </a:prstGeom>
           <a:solidFill>
@@ -7807,8 +8538,8 @@
         </p:nvSpPr>
         <p:spPr>
           <a:xfrm>
-            <a:off x="12641791" y="4476787"/>
-            <a:ext cx="4110017" cy="975208"/>
+            <a:off x="12655296" y="5004954"/>
+            <a:ext cx="4096512" cy="975208"/>
           </a:xfrm>
           <a:prstGeom prst="rect">
             <a:avLst/>
@@ -7835,7 +8566,7 @@
                 <a:latin typeface="Inter Light"/>
                 <a:cs typeface="Inter Light"/>
               </a:rPr>
-              <a:t>12</a:t>
+              <a:t>0</a:t>
             </a:r>
             <a:endParaRPr lang="ru-RU" sz="6399"/>
           </a:p>
@@ -7849,8 +8580,8 @@
         </p:nvSpPr>
         <p:spPr>
           <a:xfrm>
-            <a:off x="12655296" y="5560008"/>
-            <a:ext cx="4096512" cy="2460491"/>
+            <a:off x="12655296" y="6088175"/>
+            <a:ext cx="4096512" cy="1883796"/>
           </a:xfrm>
           <a:prstGeom prst="rect">
             <a:avLst/>
@@ -7877,7 +8608,7 @@
                 <a:latin typeface="Inter Light"/>
                 <a:cs typeface="Inter Light"/>
               </a:rPr>
-              <a:t>Форматов</a:t>
+              <a:t>Выдуманных чисел</a:t>
             </a:r>
             <a:endParaRPr lang="ru-RU" sz="2799"/>
           </a:p>
@@ -7917,7 +8648,7 @@
         <p:spPr>
           <a:xfrm>
             <a:off x="619057" y="2623820"/>
-            <a:ext cx="15727680" cy="809548"/>
+            <a:ext cx="15727680" cy="944880"/>
           </a:xfrm>
           <a:prstGeom prst="rect">
             <a:avLst/>
@@ -7960,7 +8691,7 @@
                 <a:cs typeface="Inter Medium"/>
                 <a:sym typeface="Inter Medium"/>
               </a:rPr>
-              <a:t>Генерация шаблонов укладывается в 5 минут</a:t>
+              <a:t>87 шаблонов, 99 из 100 и 12 форматов</a:t>
             </a:r>
             <a:endParaRPr>
               <a:latin typeface="Inter Medium"/>
@@ -7973,14 +8704,80 @@
       </p:sp>
       <p:sp>
         <p:nvSpPr>
-          <p:cNvPr id="43" name="Unit 43"/>
+          <p:cNvPr id="43" name="Card 43"/>
+          <p:cNvSpPr/>
+          <p:nvPr/>
+        </p:nvSpPr>
+        <p:spPr>
+          <a:xfrm>
+            <a:off x="1024128" y="4137660"/>
+            <a:ext cx="5120640" cy="3214270"/>
+          </a:xfrm>
+          <a:prstGeom prst="roundRect">
+            <a:avLst>
+              <a:gd name="adj" fmla="val 3413"/>
+            </a:avLst>
+          </a:prstGeom>
+          <a:solidFill>
+            <a:srgbClr val="000000"/>
+          </a:solidFill>
+          <a:ln>
+            <a:noFill/>
+          </a:ln>
+        </p:spPr>
+      </p:sp>
+      <p:sp>
+        <p:nvSpPr>
+          <p:cNvPr id="44" name="Figure 44"/>
           <p:cNvSpPr txBox="1"/>
           <p:nvPr/>
         </p:nvSpPr>
         <p:spPr>
           <a:xfrm>
-            <a:off x="1024128" y="3947718"/>
-            <a:ext cx="10814792" cy="299720"/>
+            <a:off x="1536192" y="4390278"/>
+            <a:ext cx="4096512" cy="1463040"/>
+          </a:xfrm>
+          <a:prstGeom prst="rect">
+            <a:avLst/>
+          </a:prstGeom>
+          <a:noFill/>
+        </p:spPr>
+        <p:txBody>
+          <a:bodyPr wrap="square" lIns="0" tIns="0" rIns="0" bIns="0" anchor="b" rtlCol="0">
+            <a:noAutofit/>
+          </a:bodyPr>
+          <a:lstStyle/>
+          <a:p>
+            <a:pPr algn="l" marL="0" indent="0">
+              <a:lnSpc>
+                <a:spcPct val="100000"/>
+              </a:lnSpc>
+              <a:buNone/>
+            </a:pPr>
+            <a:r>
+              <a:rPr lang="ru-RU" sz="9600" b="1" cap="none" spc="0" baseline="0" dirty="0">
+                <a:solidFill>
+                  <a:srgbClr val="C2D076"/>
+                </a:solidFill>
+                <a:latin typeface="Inter Light"/>
+                <a:cs typeface="Inter Light"/>
+              </a:rPr>
+              <a:t>87</a:t>
+            </a:r>
+            <a:endParaRPr lang="ru-RU" sz="9600"/>
+          </a:p>
+        </p:txBody>
+      </p:sp>
+      <p:sp>
+        <p:nvSpPr>
+          <p:cNvPr id="45" name="Label 45"/>
+          <p:cNvSpPr txBox="1"/>
+          <p:nvPr/>
+        </p:nvSpPr>
+        <p:spPr>
+          <a:xfrm>
+            <a:off x="1536192" y="5961331"/>
+            <a:ext cx="4096512" cy="878535"/>
           </a:xfrm>
           <a:prstGeom prst="rect">
             <a:avLst/>
@@ -8000,53 +8797,37 @@
               <a:buNone/>
             </a:pPr>
             <a:r>
-              <a:rPr lang="ru-RU" sz="1800" b="0" cap="none" spc="0" baseline="0" dirty="0">
+              <a:rPr lang="ru-RU" sz="2799" b="0" cap="none" spc="0" baseline="0" dirty="0">
                 <a:solidFill>
                   <a:srgbClr val="FFFFFF"/>
                 </a:solidFill>
                 <a:latin typeface="Inter Light"/>
                 <a:cs typeface="Inter Light"/>
               </a:rPr>
-              <a:t>Время генерации шаблонов (секунды)</a:t>
+              <a:t>Чужих шаблонов</a:t>
             </a:r>
-            <a:endParaRPr lang="ru-RU" sz="1800"/>
+            <a:endParaRPr lang="ru-RU" sz="2799"/>
           </a:p>
         </p:txBody>
       </p:sp>
-      <p:graphicFrame>
-        <p:nvGraphicFramePr>
-          <p:cNvPr id="44" name="Chart 43"/>
-          <p:cNvGraphicFramePr>
-            <a:graphicFrameLocks noGrp="1"/>
-          </p:cNvGraphicFramePr>
-          <p:nvPr/>
-        </p:nvGraphicFramePr>
-        <p:xfrm>
-          <a:off x="1024128" y="4340021"/>
-          <a:ext cx="10814792" cy="4483968"/>
-        </p:xfrm>
-        <a:graphic>
-          <a:graphicData uri="http://schemas.openxmlformats.org/drawingml/2006/chart">
-            <c:chart xmlns:c="http://schemas.openxmlformats.org/drawingml/2006/chart" r:id="rId2"/>
-          </a:graphicData>
-        </a:graphic>
-      </p:graphicFrame>
-      <p:sp>
-        <p:nvSpPr>
-          <p:cNvPr id="45" name="Rule 45"/>
+      <p:sp>
+        <p:nvSpPr>
+          <p:cNvPr id="46" name="Card 46"/>
           <p:cNvSpPr/>
           <p:nvPr/>
         </p:nvSpPr>
         <p:spPr>
           <a:xfrm>
-            <a:off x="12716744" y="3947718"/>
-            <a:ext cx="720090" cy="38100"/>
-          </a:xfrm>
-          <a:prstGeom prst="rect">
-            <a:avLst/>
+            <a:off x="6583680" y="4137660"/>
+            <a:ext cx="5120640" cy="3214270"/>
+          </a:xfrm>
+          <a:prstGeom prst="roundRect">
+            <a:avLst>
+              <a:gd name="adj" fmla="val 3413"/>
+            </a:avLst>
           </a:prstGeom>
           <a:solidFill>
-            <a:srgbClr val="C2D076"/>
+            <a:srgbClr val="000000"/>
           </a:solidFill>
           <a:ln>
             <a:noFill/>
@@ -8055,14 +8836,66 @@
       </p:sp>
       <p:sp>
         <p:nvSpPr>
-          <p:cNvPr id="46" name="Label 46"/>
+          <p:cNvPr id="47" name="Figure 47"/>
           <p:cNvSpPr txBox="1"/>
           <p:nvPr/>
         </p:nvSpPr>
         <p:spPr>
           <a:xfrm>
-            <a:off x="12716744" y="4263567"/>
-            <a:ext cx="4547128" cy="1305103"/>
+            <a:off x="7083654" y="4390278"/>
+            <a:ext cx="4108602" cy="1463040"/>
+          </a:xfrm>
+          <a:prstGeom prst="rect">
+            <a:avLst/>
+          </a:prstGeom>
+          <a:noFill/>
+        </p:spPr>
+        <p:txBody>
+          <a:bodyPr wrap="square" lIns="0" tIns="0" rIns="0" bIns="0" anchor="b" rtlCol="0">
+            <a:noAutofit/>
+          </a:bodyPr>
+          <a:lstStyle/>
+          <a:p>
+            <a:pPr algn="l" marL="0" indent="0">
+              <a:lnSpc>
+                <a:spcPct val="100000"/>
+              </a:lnSpc>
+              <a:buNone/>
+            </a:pPr>
+            <a:r>
+              <a:rPr lang="ru-RU" sz="9600" b="1" cap="none" spc="0" baseline="0" dirty="0">
+                <a:solidFill>
+                  <a:srgbClr val="C2D076"/>
+                </a:solidFill>
+                <a:latin typeface="Inter Light"/>
+                <a:cs typeface="Inter Light"/>
+              </a:rPr>
+              <a:t>99</a:t>
+            </a:r>
+            <a:r>
+              <a:rPr lang="ru-RU" sz="4712" b="1" cap="none" spc="0" baseline="0" dirty="0">
+                <a:solidFill>
+                  <a:srgbClr val="C2D076"/>
+                </a:solidFill>
+                <a:latin typeface="Inter Light"/>
+                <a:cs typeface="Inter Light"/>
+              </a:rPr>
+              <a:t> из 100</a:t>
+            </a:r>
+            <a:endParaRPr lang="ru-RU" sz="9600"/>
+          </a:p>
+        </p:txBody>
+      </p:sp>
+      <p:sp>
+        <p:nvSpPr>
+          <p:cNvPr id="48" name="Label 48"/>
+          <p:cNvSpPr txBox="1"/>
+          <p:nvPr/>
+        </p:nvSpPr>
+        <p:spPr>
+          <a:xfrm>
+            <a:off x="7095744" y="5961331"/>
+            <a:ext cx="4096512" cy="878535"/>
           </a:xfrm>
           <a:prstGeom prst="rect">
             <a:avLst/>
@@ -8089,18 +8922,106 @@
                 <a:latin typeface="Inter Light"/>
                 <a:cs typeface="Inter Light"/>
               </a:rPr>
-              <a:t>Все шаблоны укладываются в лимит </a:t>
+              <a:t>Средняя оценка качества</a:t>
             </a:r>
+            <a:endParaRPr lang="ru-RU" sz="2799"/>
+          </a:p>
+        </p:txBody>
+      </p:sp>
+      <p:sp>
+        <p:nvSpPr>
+          <p:cNvPr id="49" name="Card 49"/>
+          <p:cNvSpPr/>
+          <p:nvPr/>
+        </p:nvSpPr>
+        <p:spPr>
+          <a:xfrm>
+            <a:off x="12143232" y="4137660"/>
+            <a:ext cx="5120640" cy="3214270"/>
+          </a:xfrm>
+          <a:prstGeom prst="roundRect">
+            <a:avLst>
+              <a:gd name="adj" fmla="val 3413"/>
+            </a:avLst>
+          </a:prstGeom>
+          <a:solidFill>
+            <a:srgbClr val="000000"/>
+          </a:solidFill>
+          <a:ln>
+            <a:noFill/>
+          </a:ln>
+        </p:spPr>
+      </p:sp>
+      <p:sp>
+        <p:nvSpPr>
+          <p:cNvPr id="50" name="Figure 50"/>
+          <p:cNvSpPr txBox="1"/>
+          <p:nvPr/>
+        </p:nvSpPr>
+        <p:spPr>
+          <a:xfrm>
+            <a:off x="12617602" y="4390278"/>
+            <a:ext cx="4134206" cy="1463040"/>
+          </a:xfrm>
+          <a:prstGeom prst="rect">
+            <a:avLst/>
+          </a:prstGeom>
+          <a:noFill/>
+        </p:spPr>
+        <p:txBody>
+          <a:bodyPr wrap="square" lIns="0" tIns="0" rIns="0" bIns="0" anchor="b" rtlCol="0">
+            <a:noAutofit/>
+          </a:bodyPr>
+          <a:lstStyle/>
+          <a:p>
+            <a:pPr algn="l" marL="0" indent="0">
+              <a:lnSpc>
+                <a:spcPct val="100000"/>
+              </a:lnSpc>
+              <a:buNone/>
+            </a:pPr>
             <a:r>
-              <a:rPr lang="ru-RU" sz="2799" b="0" cap="none" spc="0" baseline="0" dirty="0">
+              <a:rPr lang="ru-RU" sz="9600" b="1" cap="none" spc="0" baseline="0" dirty="0">
                 <a:solidFill>
                   <a:srgbClr val="C2D076"/>
                 </a:solidFill>
                 <a:latin typeface="Inter Light"/>
                 <a:cs typeface="Inter Light"/>
               </a:rPr>
-              <a:t>5 минут</a:t>
+              <a:t>12</a:t>
             </a:r>
+            <a:endParaRPr lang="ru-RU" sz="9600"/>
+          </a:p>
+        </p:txBody>
+      </p:sp>
+      <p:sp>
+        <p:nvSpPr>
+          <p:cNvPr id="51" name="Label 51"/>
+          <p:cNvSpPr txBox="1"/>
+          <p:nvPr/>
+        </p:nvSpPr>
+        <p:spPr>
+          <a:xfrm>
+            <a:off x="12655296" y="5961331"/>
+            <a:ext cx="4096512" cy="878535"/>
+          </a:xfrm>
+          <a:prstGeom prst="rect">
+            <a:avLst/>
+          </a:prstGeom>
+          <a:noFill/>
+        </p:spPr>
+        <p:txBody>
+          <a:bodyPr wrap="square" lIns="0" tIns="0" rIns="0" bIns="0" anchor="t" rtlCol="0">
+            <a:noAutofit/>
+          </a:bodyPr>
+          <a:lstStyle/>
+          <a:p>
+            <a:pPr algn="l" marL="0" indent="0">
+              <a:lnSpc>
+                <a:spcPct val="100000"/>
+              </a:lnSpc>
+              <a:buNone/>
+            </a:pPr>
             <a:r>
               <a:rPr lang="ru-RU" sz="2799" b="0" cap="none" spc="0" baseline="0" dirty="0">
                 <a:solidFill>
@@ -8109,7 +9030,95 @@
                 <a:latin typeface="Inter Light"/>
                 <a:cs typeface="Inter Light"/>
               </a:rPr>
-              <a:t> с запасом</a:t>
+              <a:t>Форматов</a:t>
+            </a:r>
+            <a:endParaRPr lang="ru-RU" sz="2799"/>
+          </a:p>
+        </p:txBody>
+      </p:sp>
+      <p:sp>
+        <p:nvSpPr>
+          <p:cNvPr id="52" name="Conclusion strip 52"/>
+          <p:cNvSpPr/>
+          <p:nvPr/>
+        </p:nvSpPr>
+        <p:spPr>
+          <a:xfrm>
+            <a:off x="1024128" y="7783984"/>
+            <a:ext cx="16239744" cy="892754"/>
+          </a:xfrm>
+          <a:prstGeom prst="roundRect">
+            <a:avLst>
+              <a:gd name="adj" fmla="val 12290"/>
+            </a:avLst>
+          </a:prstGeom>
+          <a:solidFill>
+            <a:srgbClr val="000000"/>
+          </a:solidFill>
+          <a:ln>
+            <a:noFill/>
+          </a:ln>
+        </p:spPr>
+      </p:sp>
+      <p:sp>
+        <p:nvSpPr>
+          <p:cNvPr id="53" name="Conclusion bar 53"/>
+          <p:cNvSpPr/>
+          <p:nvPr/>
+        </p:nvSpPr>
+        <p:spPr>
+          <a:xfrm>
+            <a:off x="1379601" y="8047034"/>
+            <a:ext cx="61722" cy="366654"/>
+          </a:xfrm>
+          <a:prstGeom prst="rect">
+            <a:avLst/>
+          </a:prstGeom>
+          <a:solidFill>
+            <a:srgbClr val="C2D076"/>
+          </a:solidFill>
+          <a:ln>
+            <a:noFill/>
+          </a:ln>
+        </p:spPr>
+      </p:sp>
+      <p:sp>
+        <p:nvSpPr>
+          <p:cNvPr id="54" name="Conclusion 54"/>
+          <p:cNvSpPr txBox="1"/>
+          <p:nvPr/>
+        </p:nvSpPr>
+        <p:spPr>
+          <a:xfrm>
+            <a:off x="1725701" y="8004377"/>
+            <a:ext cx="15182698" cy="451968"/>
+          </a:xfrm>
+          <a:prstGeom prst="rect">
+            <a:avLst/>
+          </a:prstGeom>
+          <a:noFill/>
+        </p:spPr>
+        <p:txBody>
+          <a:bodyPr wrap="square" lIns="0" tIns="0" rIns="0" bIns="0" anchor="t" rtlCol="0">
+            <a:noAutofit/>
+          </a:bodyPr>
+          <a:lstStyle/>
+          <a:p>
+            <a:pPr algn="l" marL="0" indent="0">
+              <a:lnSpc>
+                <a:spcPct val="100000"/>
+              </a:lnSpc>
+              <a:buNone/>
+            </a:pPr>
+            <a:r>
+              <a:rPr lang="ru-RU" sz="2799" b="0" cap="none" spc="0" baseline="0" dirty="0">
+                <a:solidFill>
+                  <a:srgbClr val="C2D076"/>
+                </a:solidFill>
+                <a:latin typeface="Inter Light"/>
+                <a:cs typeface="Inter Light"/>
+              </a:rPr>
+              <a:t>Сервис работает с любыми шаблонами и форматами</a:t>
             </a:r>
             <a:endParaRPr lang="ru-RU" sz="2799"/>
           </a:p>
@@ -8192,7 +9201,7 @@
                 <a:cs typeface="Inter Medium"/>
                 <a:sym typeface="Inter Medium"/>
               </a:rPr>
-              <a:t>Три открытые модели с лицензией Apache 2.0</a:t>
+              <a:t>VK WorkSpace — самый долгий, но всё в лимите</a:t>
             </a:r>
             <a:endParaRPr>
               <a:latin typeface="Inter Medium"/>
@@ -8205,38 +9214,14 @@
       </p:sp>
       <p:sp>
         <p:nvSpPr>
-          <p:cNvPr id="43" name="Card 43"/>
-          <p:cNvSpPr/>
+          <p:cNvPr id="43" name="Unit 43"/>
+          <p:cNvSpPr txBox="1"/>
           <p:nvPr/>
         </p:nvSpPr>
         <p:spPr>
           <a:xfrm>
             <a:off x="1024128" y="3947718"/>
-            <a:ext cx="5120640" cy="3759142"/>
-          </a:xfrm>
-          <a:prstGeom prst="roundRect">
-            <a:avLst>
-              <a:gd name="adj" fmla="val 2918"/>
-            </a:avLst>
-          </a:prstGeom>
-          <a:solidFill>
-            <a:srgbClr val="000000"/>
-          </a:solidFill>
-          <a:ln>
-            <a:noFill/>
-          </a:ln>
-        </p:spPr>
-      </p:sp>
-      <p:sp>
-        <p:nvSpPr>
-          <p:cNvPr id="44" name="Index 44"/>
-          <p:cNvSpPr txBox="1"/>
-          <p:nvPr/>
-        </p:nvSpPr>
-        <p:spPr>
-          <a:xfrm>
-            <a:off x="1459382" y="4382972"/>
-            <a:ext cx="4250132" cy="853440"/>
+            <a:ext cx="10814792" cy="299720"/>
           </a:xfrm>
           <a:prstGeom prst="rect">
             <a:avLst/>
@@ -8256,29 +9241,69 @@
               <a:buNone/>
             </a:pPr>
             <a:r>
-              <a:rPr lang="ru-RU" sz="5600" b="0" cap="none" spc="0" baseline="0" dirty="0">
-                <a:solidFill>
-                  <a:srgbClr val="C2D076"/>
+              <a:rPr lang="ru-RU" sz="1800" b="0" cap="none" spc="0" baseline="0" dirty="0">
+                <a:solidFill>
+                  <a:srgbClr val="FFFFFF"/>
                 </a:solidFill>
                 <a:latin typeface="Inter Light"/>
                 <a:cs typeface="Inter Light"/>
               </a:rPr>
-              <a:t>01</a:t>
+              <a:t>Время генерации трёх вариантов на шаблонах датасета, секунд</a:t>
             </a:r>
-            <a:endParaRPr lang="ru-RU" sz="5600"/>
+            <a:endParaRPr lang="ru-RU" sz="1800"/>
           </a:p>
         </p:txBody>
       </p:sp>
-      <p:sp>
-        <p:nvSpPr>
-          <p:cNvPr id="45" name="Card text 45"/>
+      <p:graphicFrame>
+        <p:nvGraphicFramePr>
+          <p:cNvPr id="44" name="Chart 43"/>
+          <p:cNvGraphicFramePr>
+            <a:graphicFrameLocks noGrp="1"/>
+          </p:cNvGraphicFramePr>
+          <p:nvPr/>
+        </p:nvGraphicFramePr>
+        <p:xfrm>
+          <a:off x="1024128" y="4340021"/>
+          <a:ext cx="10814792" cy="4483968"/>
+        </p:xfrm>
+        <a:graphic>
+          <a:graphicData uri="http://schemas.openxmlformats.org/drawingml/2006/chart">
+            <c:chart xmlns:c="http://schemas.openxmlformats.org/drawingml/2006/chart" r:id="rId2"/>
+          </a:graphicData>
+        </a:graphic>
+      </p:graphicFrame>
+      <p:sp>
+        <p:nvSpPr>
+          <p:cNvPr id="45" name="Rule 45"/>
+          <p:cNvSpPr/>
+          <p:nvPr/>
+        </p:nvSpPr>
+        <p:spPr>
+          <a:xfrm>
+            <a:off x="12716744" y="3947718"/>
+            <a:ext cx="720090" cy="38100"/>
+          </a:xfrm>
+          <a:prstGeom prst="rect">
+            <a:avLst/>
+          </a:prstGeom>
+          <a:solidFill>
+            <a:srgbClr val="C2D076"/>
+          </a:solidFill>
+          <a:ln>
+            <a:noFill/>
+          </a:ln>
+        </p:spPr>
+      </p:sp>
+      <p:sp>
+        <p:nvSpPr>
+          <p:cNvPr id="46" name="Label 46"/>
           <p:cNvSpPr txBox="1"/>
           <p:nvPr/>
         </p:nvSpPr>
         <p:spPr>
           <a:xfrm>
-            <a:off x="1459382" y="5344425"/>
-            <a:ext cx="4250132" cy="1927181"/>
+            <a:off x="12716744" y="4263567"/>
+            <a:ext cx="4547128" cy="1305103"/>
           </a:xfrm>
           <a:prstGeom prst="rect">
             <a:avLst/>
@@ -8295,407 +9320,37 @@
               <a:lnSpc>
                 <a:spcPct val="100000"/>
               </a:lnSpc>
-              <a:spcAft>
-                <a:spcPts val="1539"/>
-              </a:spcAft>
               <a:buNone/>
             </a:pPr>
             <a:r>
               <a:rPr lang="ru-RU" sz="2799" b="0" cap="none" spc="0" baseline="0" dirty="0">
                 <a:solidFill>
-                  <a:srgbClr val="C2D076"/>
+                  <a:srgbClr val="FFFFFF"/>
                 </a:solidFill>
                 <a:latin typeface="Inter Light"/>
                 <a:cs typeface="Inter Light"/>
               </a:rPr>
-              <a:t>Qwen3.8-⁠27B</a:t>
+              <a:t>Все шаблоны укладываются в лимит </a:t>
             </a:r>
-            <a:endParaRPr lang="ru-RU" sz="2799"/>
-          </a:p>
-          <a:p>
-            <a:pPr algn="l" marL="0" indent="0">
-              <a:lnSpc>
-                <a:spcPct val="100000"/>
-              </a:lnSpc>
-              <a:buNone/>
-            </a:pPr>
             <a:r>
               <a:rPr lang="ru-RU" sz="2799" b="0" cap="none" spc="0" baseline="0" dirty="0">
                 <a:solidFill>
-                  <a:srgbClr val="FFFFFF"/>
+                  <a:srgbClr val="C2D076"/>
                 </a:solidFill>
                 <a:latin typeface="Inter Light"/>
                 <a:cs typeface="Inter Light"/>
               </a:rPr>
-              <a:t>Основная модель, инференс VK, конфиг готов</a:t>
+              <a:t>5 минут</a:t>
             </a:r>
-            <a:endParaRPr lang="ru-RU" sz="2799"/>
-          </a:p>
-        </p:txBody>
-      </p:sp>
-      <p:sp>
-        <p:nvSpPr>
-          <p:cNvPr id="46" name="Card 46"/>
-          <p:cNvSpPr/>
-          <p:nvPr/>
-        </p:nvSpPr>
-        <p:spPr>
-          <a:xfrm>
-            <a:off x="6583680" y="3947718"/>
-            <a:ext cx="5120640" cy="3759142"/>
-          </a:xfrm>
-          <a:prstGeom prst="roundRect">
-            <a:avLst>
-              <a:gd name="adj" fmla="val 2918"/>
-            </a:avLst>
-          </a:prstGeom>
-          <a:solidFill>
-            <a:srgbClr val="000000"/>
-          </a:solidFill>
-          <a:ln>
-            <a:noFill/>
-          </a:ln>
-        </p:spPr>
-      </p:sp>
-      <p:sp>
-        <p:nvSpPr>
-          <p:cNvPr id="47" name="Index 47"/>
-          <p:cNvSpPr txBox="1"/>
-          <p:nvPr/>
-        </p:nvSpPr>
-        <p:spPr>
-          <a:xfrm>
-            <a:off x="7018934" y="4382972"/>
-            <a:ext cx="4250132" cy="853440"/>
-          </a:xfrm>
-          <a:prstGeom prst="rect">
-            <a:avLst/>
-          </a:prstGeom>
-          <a:noFill/>
-        </p:spPr>
-        <p:txBody>
-          <a:bodyPr wrap="square" lIns="0" tIns="0" rIns="0" bIns="0" anchor="t" rtlCol="0">
-            <a:noAutofit/>
-          </a:bodyPr>
-          <a:lstStyle/>
-          <a:p>
-            <a:pPr algn="l" marL="0" indent="0">
-              <a:lnSpc>
-                <a:spcPct val="100000"/>
-              </a:lnSpc>
-              <a:buNone/>
-            </a:pPr>
             <a:r>
-              <a:rPr lang="ru-RU" sz="5600" b="0" cap="none" spc="0" baseline="0" dirty="0">
-                <a:solidFill>
-                  <a:srgbClr val="C2D076"/>
+              <a:rPr lang="ru-RU" sz="2799" b="0" cap="none" spc="0" baseline="0" dirty="0">
+                <a:solidFill>
+                  <a:srgbClr val="FFFFFF"/>
                 </a:solidFill>
                 <a:latin typeface="Inter Light"/>
                 <a:cs typeface="Inter Light"/>
               </a:rPr>
-              <a:t>02</a:t>
-            </a:r>
-            <a:endParaRPr lang="ru-RU" sz="5600"/>
-          </a:p>
-        </p:txBody>
-      </p:sp>
-      <p:sp>
-        <p:nvSpPr>
-          <p:cNvPr id="48" name="Card text 48"/>
-          <p:cNvSpPr txBox="1"/>
-          <p:nvPr/>
-        </p:nvSpPr>
-        <p:spPr>
-          <a:xfrm>
-            <a:off x="7018934" y="5344425"/>
-            <a:ext cx="4250132" cy="1927181"/>
-          </a:xfrm>
-          <a:prstGeom prst="rect">
-            <a:avLst/>
-          </a:prstGeom>
-          <a:noFill/>
-        </p:spPr>
-        <p:txBody>
-          <a:bodyPr wrap="square" lIns="0" tIns="0" rIns="0" bIns="0" anchor="t" rtlCol="0">
-            <a:noAutofit/>
-          </a:bodyPr>
-          <a:lstStyle/>
-          <a:p>
-            <a:pPr algn="l" marL="0" indent="0">
-              <a:lnSpc>
-                <a:spcPct val="100000"/>
-              </a:lnSpc>
-              <a:spcAft>
-                <a:spcPts val="1539"/>
-              </a:spcAft>
-              <a:buNone/>
-            </a:pPr>
-            <a:r>
-              <a:rPr lang="ru-RU" sz="2799" b="0" cap="none" spc="0" baseline="0" dirty="0">
-                <a:solidFill>
-                  <a:srgbClr val="C2D076"/>
-                </a:solidFill>
-                <a:latin typeface="Inter Light"/>
-                <a:cs typeface="Inter Light"/>
-              </a:rPr>
-              <a:t>Qwen3-⁠32B</a:t>
-            </a:r>
-            <a:endParaRPr lang="ru-RU" sz="2799"/>
-          </a:p>
-          <a:p>
-            <a:pPr algn="l" marL="0" indent="0">
-              <a:lnSpc>
-                <a:spcPct val="100000"/>
-              </a:lnSpc>
-              <a:buNone/>
-            </a:pPr>
-            <a:r>
-              <a:rPr lang="ru-RU" sz="2799" b="0" cap="none" spc="0" baseline="0" dirty="0">
-                <a:solidFill>
-                  <a:srgbClr val="FFFFFF"/>
-                </a:solidFill>
-                <a:latin typeface="Inter Light"/>
-                <a:cs typeface="Inter Light"/>
-              </a:rPr>
-              <a:t>Запасное звено на Cloud.ru</a:t>
-            </a:r>
-            <a:endParaRPr lang="ru-RU" sz="2799"/>
-          </a:p>
-        </p:txBody>
-      </p:sp>
-      <p:sp>
-        <p:nvSpPr>
-          <p:cNvPr id="49" name="Card 49"/>
-          <p:cNvSpPr/>
-          <p:nvPr/>
-        </p:nvSpPr>
-        <p:spPr>
-          <a:xfrm>
-            <a:off x="12143232" y="3947718"/>
-            <a:ext cx="5120640" cy="3759142"/>
-          </a:xfrm>
-          <a:prstGeom prst="roundRect">
-            <a:avLst>
-              <a:gd name="adj" fmla="val 2918"/>
-            </a:avLst>
-          </a:prstGeom>
-          <a:solidFill>
-            <a:srgbClr val="000000"/>
-          </a:solidFill>
-          <a:ln>
-            <a:noFill/>
-          </a:ln>
-        </p:spPr>
-      </p:sp>
-      <p:sp>
-        <p:nvSpPr>
-          <p:cNvPr id="50" name="Index 50"/>
-          <p:cNvSpPr txBox="1"/>
-          <p:nvPr/>
-        </p:nvSpPr>
-        <p:spPr>
-          <a:xfrm>
-            <a:off x="12578486" y="4382972"/>
-            <a:ext cx="4250132" cy="853440"/>
-          </a:xfrm>
-          <a:prstGeom prst="rect">
-            <a:avLst/>
-          </a:prstGeom>
-          <a:noFill/>
-        </p:spPr>
-        <p:txBody>
-          <a:bodyPr wrap="square" lIns="0" tIns="0" rIns="0" bIns="0" anchor="t" rtlCol="0">
-            <a:noAutofit/>
-          </a:bodyPr>
-          <a:lstStyle/>
-          <a:p>
-            <a:pPr algn="l" marL="0" indent="0">
-              <a:lnSpc>
-                <a:spcPct val="100000"/>
-              </a:lnSpc>
-              <a:buNone/>
-            </a:pPr>
-            <a:r>
-              <a:rPr lang="ru-RU" sz="5600" b="0" cap="none" spc="0" baseline="0" dirty="0">
-                <a:solidFill>
-                  <a:srgbClr val="C2D076"/>
-                </a:solidFill>
-                <a:latin typeface="Inter Light"/>
-                <a:cs typeface="Inter Light"/>
-              </a:rPr>
-              <a:t>03</a:t>
-            </a:r>
-            <a:endParaRPr lang="ru-RU" sz="5600"/>
-          </a:p>
-        </p:txBody>
-      </p:sp>
-      <p:sp>
-        <p:nvSpPr>
-          <p:cNvPr id="51" name="Card text 51"/>
-          <p:cNvSpPr txBox="1"/>
-          <p:nvPr/>
-        </p:nvSpPr>
-        <p:spPr>
-          <a:xfrm>
-            <a:off x="12578486" y="5344425"/>
-            <a:ext cx="4250132" cy="1927181"/>
-          </a:xfrm>
-          <a:prstGeom prst="rect">
-            <a:avLst/>
-          </a:prstGeom>
-          <a:noFill/>
-        </p:spPr>
-        <p:txBody>
-          <a:bodyPr wrap="square" lIns="0" tIns="0" rIns="0" bIns="0" anchor="t" rtlCol="0">
-            <a:noAutofit/>
-          </a:bodyPr>
-          <a:lstStyle/>
-          <a:p>
-            <a:pPr algn="l" marL="0" indent="0">
-              <a:lnSpc>
-                <a:spcPct val="100000"/>
-              </a:lnSpc>
-              <a:spcAft>
-                <a:spcPts val="1539"/>
-              </a:spcAft>
-              <a:buNone/>
-            </a:pPr>
-            <a:r>
-              <a:rPr lang="ru-RU" sz="2799" b="0" cap="none" spc="0" baseline="0" dirty="0">
-                <a:solidFill>
-                  <a:srgbClr val="C2D076"/>
-                </a:solidFill>
-                <a:latin typeface="Inter Light"/>
-                <a:cs typeface="Inter Light"/>
-              </a:rPr>
-              <a:t>Gemma 4 и Qwen3-⁠VL</a:t>
-            </a:r>
-            <a:endParaRPr lang="ru-RU" sz="2799"/>
-          </a:p>
-          <a:p>
-            <a:pPr algn="l" marL="0" indent="0">
-              <a:lnSpc>
-                <a:spcPct val="100000"/>
-              </a:lnSpc>
-              <a:buNone/>
-            </a:pPr>
-            <a:r>
-              <a:rPr lang="ru-RU" sz="2799" b="0" cap="none" spc="0" baseline="0" dirty="0">
-                <a:solidFill>
-                  <a:srgbClr val="FFFFFF"/>
-                </a:solidFill>
-                <a:latin typeface="Inter Light"/>
-                <a:cs typeface="Inter Light"/>
-              </a:rPr>
-              <a:t>Два запасных звена цепочки</a:t>
-            </a:r>
-            <a:endParaRPr lang="ru-RU" sz="2799"/>
-          </a:p>
-        </p:txBody>
-      </p:sp>
-      <p:sp>
-        <p:nvSpPr>
-          <p:cNvPr id="52" name="Conclusion strip 52"/>
-          <p:cNvSpPr/>
-          <p:nvPr/>
-        </p:nvSpPr>
-        <p:spPr>
-          <a:xfrm>
-            <a:off x="1024128" y="8138914"/>
-            <a:ext cx="16239744" cy="892754"/>
-          </a:xfrm>
-          <a:prstGeom prst="roundRect">
-            <a:avLst>
-              <a:gd name="adj" fmla="val 12290"/>
-            </a:avLst>
-          </a:prstGeom>
-          <a:solidFill>
-            <a:srgbClr val="000000"/>
-          </a:solidFill>
-          <a:ln>
-            <a:noFill/>
-          </a:ln>
-        </p:spPr>
-      </p:sp>
-      <p:sp>
-        <p:nvSpPr>
-          <p:cNvPr id="53" name="Conclusion bar 53"/>
-          <p:cNvSpPr/>
-          <p:nvPr/>
-        </p:nvSpPr>
-        <p:spPr>
-          <a:xfrm>
-            <a:off x="1379601" y="8401964"/>
-            <a:ext cx="61722" cy="366654"/>
-          </a:xfrm>
-          <a:prstGeom prst="rect">
-            <a:avLst/>
-          </a:prstGeom>
-          <a:solidFill>
-            <a:srgbClr val="C2D076"/>
-          </a:solidFill>
-          <a:ln>
-            <a:noFill/>
-          </a:ln>
-        </p:spPr>
-      </p:sp>
-      <p:sp>
-        <p:nvSpPr>
-          <p:cNvPr id="54" name="Conclusion 54"/>
-          <p:cNvSpPr txBox="1"/>
-          <p:nvPr/>
-        </p:nvSpPr>
-        <p:spPr>
-          <a:xfrm>
-            <a:off x="1725701" y="8359307"/>
-            <a:ext cx="15182698" cy="451968"/>
-          </a:xfrm>
-          <a:prstGeom prst="rect">
-            <a:avLst/>
-          </a:prstGeom>
-          <a:noFill/>
-        </p:spPr>
-        <p:txBody>
-          <a:bodyPr wrap="square" lIns="0" tIns="0" rIns="0" bIns="0" anchor="t" rtlCol="0">
-            <a:noAutofit/>
-          </a:bodyPr>
-          <a:lstStyle/>
-          <a:p>
-            <a:pPr algn="l" marL="0" indent="0">
-              <a:lnSpc>
-                <a:spcPct val="100000"/>
-              </a:lnSpc>
-              <a:buNone/>
-            </a:pPr>
-            <a:r>
-              <a:rPr lang="ru-RU" sz="2799" b="0" cap="none" spc="0" baseline="0" dirty="0">
-                <a:solidFill>
-                  <a:srgbClr val="C2D076"/>
-                </a:solidFill>
-                <a:latin typeface="Inter Light"/>
-                <a:cs typeface="Inter Light"/>
-              </a:rPr>
-              <a:t>Все модели поддерживают масштаб до </a:t>
-            </a:r>
-            <a:r>
-              <a:rPr lang="ru-RU" sz="2799" b="0" cap="none" spc="0" baseline="0" dirty="0">
-                <a:solidFill>
-                  <a:srgbClr val="C2D076"/>
-                </a:solidFill>
-                <a:latin typeface="Inter Light"/>
-                <a:cs typeface="Inter Light"/>
-              </a:rPr>
-              <a:t>35 </a:t>
-            </a:r>
-            <a:r>
-              <a:rPr lang="ru-RU" sz="2799" b="0" cap="none" spc="0" baseline="0" dirty="0">
-                <a:solidFill>
-                  <a:srgbClr val="C2D076"/>
-                </a:solidFill>
-                <a:latin typeface="Inter Light"/>
-                <a:cs typeface="Inter Light"/>
-              </a:rPr>
-              <a:t>миллиардов параметров</a:t>
+              <a:t> с запасом</a:t>
             </a:r>
             <a:endParaRPr lang="ru-RU" sz="2799"/>
           </a:p>

--- a/examples/outputs/video/dark-minimalist/visual/deck.pptx
+++ b/examples/outputs/video/dark-minimalist/visual/deck.pptx
@@ -18,6 +18,7 @@
     <p:sldId id="284" r:id="rId46"/>
     <p:sldId id="285" r:id="rId47"/>
     <p:sldId id="286" r:id="rId48"/>
+    <p:sldId id="287" r:id="rId49"/>
   </p:sldIdLst>
   <p:sldSz cy="10287000" cx="18288000"/>
   <p:notesSz cx="6858000" cy="9144000"/>
@@ -304,10 +305,10 @@
           <c:layoutTarget val="inner"/>
           <c:xMode val="edge"/>
           <c:yMode val="edge"/>
-          <c:x val="0.0329"/>
-          <c:y val="0.0329"/>
-          <c:w val="0.9343"/>
-          <c:h val="0.9343"/>
+          <c:x val="0.0304"/>
+          <c:y val="0.0304"/>
+          <c:w val="0.9391"/>
+          <c:h val="0.9391"/>
         </c:manualLayout>
       </c:layout>
       <c:doughnutChart>
@@ -321,7 +322,7 @@
               <c:strCache>
                 <c:ptCount val="1"/>
                 <c:pt idx="0">
-                  <c:v>Состав</c:v>
+                  <c:v>Доля фигур</c:v>
                 </c:pt>
               </c:strCache>
             </c:strRef>
@@ -367,7 +368,7 @@
                 <a:lstStyle/>
                 <a:p>
                   <a:pPr>
-                    <a:defRPr sz="2200" b="0">
+                    <a:defRPr sz="1800" b="0">
                       <a:solidFill>
                         <a:srgbClr val="001514"/>
                       </a:solidFill>
@@ -388,7 +389,36 @@
             </c:dLbl>
             <c:dLbl>
               <c:idx val="1"/>
-              <c:delete val="1"/>
+              <c:numFmt formatCode="0&quot;%&quot;;&quot;−&quot;0&quot;%&quot;;" sourceLinked="0"/>
+              <c:spPr>
+                <a:noFill/>
+                <a:ln>
+                  <a:noFill/>
+                </a:ln>
+              </c:spPr>
+              <c:txPr>
+                <a:bodyPr wrap="none"/>
+                <a:lstStyle/>
+                <a:p>
+                  <a:pPr>
+                    <a:defRPr sz="1800" b="0">
+                      <a:solidFill>
+                        <a:srgbClr val="001514"/>
+                      </a:solidFill>
+                      <a:latin typeface="Inter Light"/>
+                      <a:ea typeface="Inter Light"/>
+                      <a:cs typeface="Inter Light"/>
+                    </a:defRPr>
+                  </a:pPr>
+                  <a:endParaRPr lang="ru-RU"/>
+                </a:p>
+              </c:txPr>
+              <c:showLegendKey val="0"/>
+              <c:showVal val="1"/>
+              <c:showCatName val="0"/>
+              <c:showSerName val="0"/>
+              <c:showPercent val="0"/>
+              <c:showBubbleSize val="0"/>
             </c:dLbl>
             <c:numFmt formatCode="0&quot;%&quot;;&quot;−&quot;0&quot;%&quot;;" sourceLinked="0"/>
             <c:spPr>
@@ -402,7 +432,7 @@
               <a:lstStyle/>
               <a:p>
                 <a:pPr>
-                  <a:defRPr sz="2200" b="0">
+                  <a:defRPr sz="1800" b="0">
                     <a:solidFill>
                       <a:srgbClr val="FFFFFF"/>
                     </a:solidFill>
@@ -465,7 +495,7 @@
             <a:lstStyle/>
             <a:p>
               <a:pPr>
-                <a:defRPr sz="2200" b="0">
+                <a:defRPr sz="1800" b="0">
                   <a:solidFill>
                     <a:srgbClr val="FFFFFF"/>
                   </a:solidFill>
@@ -541,9 +571,9 @@
           <c:xMode val="edge"/>
           <c:yMode val="edge"/>
           <c:x val="0.1445"/>
-          <c:y val="0.0159"/>
+          <c:y val="0.0179"/>
           <c:w val="0.8067"/>
-          <c:h val="0.9682"/>
+          <c:h val="0.9641"/>
         </c:manualLayout>
       </c:layout>
       <c:barChart>
@@ -690,7 +720,7 @@
           </c:val>
         </c:ser>
         <c:dLbls>
-          <c:numFmt formatCode="#,##0;&quot;−&quot;#,##0;" sourceLinked="0"/>
+          <c:numFmt formatCode="#,##0&quot; проверок&quot;;&quot;−&quot;#,##0&quot; проверок&quot;;" sourceLinked="0"/>
           <c:spPr>
             <a:noFill/>
             <a:ln>
@@ -1572,12 +1602,12 @@
           <a:p>
             <a:r>
               <a:rPr lang="ru-RU"/>
-              <a:t>ИИ пока не способен воспроизводить фирменный стиль, а шаблоны не дают понятной инструкции для новых слайдов.</a:t>
-            </a:r>
-          </a:p>
-          <a:p>
-            <a:r>
-              <a:t>[verstka:sl2]</a:t>
+              <a:t>Verstka — цифровой дизайнер презентаций. Команда «Рекрут 2», задача № 4 VK Tech.</a:t>
+            </a:r>
+          </a:p>
+          <a:p>
+            <a:r>
+              <a:t>[verstka:sl1]</a:t>
             </a:r>
           </a:p>
         </p:txBody>
@@ -1636,12 +1666,12 @@
           <a:p>
             <a:r>
               <a:rPr lang="ru-RU"/>
-              <a:t>В реальных шаблонах 95% фигур — свободные, поэтому правила оформления приходится выводить из самих слайдов-образцов, включая палитру, кегли, сетку, поля, логотипы и колонтитулы.</a:t>
-            </a:r>
-          </a:p>
-          <a:p>
-            <a:r>
-              <a:t>[verstka:sl3]</a:t>
+              <a:t>ИИ может помочь с текстом, но не с дизайном.</a:t>
+            </a:r>
+          </a:p>
+          <a:p>
+            <a:r>
+              <a:t>[verstka:sl2]</a:t>
             </a:r>
           </a:p>
         </p:txBody>
@@ -1700,12 +1730,12 @@
           <a:p>
             <a:r>
               <a:rPr lang="ru-RU"/>
-              <a:t>Verstka использует шаблон как набор правил, а не макетов, чтобы автоматически создать три редактируемые презентации на основе текста.</a:t>
-            </a:r>
-          </a:p>
-          <a:p>
-            <a:r>
-              <a:t>[verstka:sl4]</a:t>
+              <a:t>В реальных шаблонах 95% фигур — свободные, и только 5% — плейсхолдеры. Это означает, что правила оформления нельзя просто применить, их нужно выводить из самих слайдов-образцов, включая палитру, кегли, сетку, поля, логотипы и колонтитулы.</a:t>
+            </a:r>
+          </a:p>
+          <a:p>
+            <a:r>
+              <a:t>[verstka:sl3]</a:t>
             </a:r>
           </a:p>
         </p:txBody>
@@ -1764,12 +1794,12 @@
           <a:p>
             <a:r>
               <a:rPr lang="ru-RU"/>
-              <a:t>Агент работает на открытых моделях до 35 миллиардов параметров с лицензией Apache 2.0. Процесс включает анализ текста, проектирование, проверку и вёрстку слайдов.</a:t>
-            </a:r>
-          </a:p>
-          <a:p>
-            <a:r>
-              <a:t>[verstka:sl5]</a:t>
+              <a:t>Verstka автоматически создаёт три редактируемые презентации на основе шаблона и текста, сохраняя фирменный стиль без необходимости ручной вёрстки.</a:t>
+            </a:r>
+          </a:p>
+          <a:p>
+            <a:r>
+              <a:t>[verstka:sl4]</a:t>
             </a:r>
           </a:p>
         </p:txBody>
@@ -1828,12 +1858,12 @@
           <a:p>
             <a:r>
               <a:rPr lang="ru-RU"/>
-              <a:t>Содержание одно, подача разная. | Вариант | Подача | Когда подходит |. |---|---|---|. | Структурный | одна мысль на слайд, строгая сетка | отчёт и защита проекта |. | Визуальный | крупные цифры и наглядные схемы | питч и выступление со сцены |. | Компактный | вывод первой строкой, данные справа | рассылка руководителю |.</a:t>
-            </a:r>
-          </a:p>
-          <a:p>
-            <a:r>
-              <a:t>[verstka:sl6]</a:t>
+              <a:t>Агент работает на открытых моделях до 35 миллиардов параметров с лицензией Apache 2.0. Пять шагов: аналитик находит в тексте слайды, ряды данных и просьбы; дизайнер продумывает каждый слайд отдельно; критик сверяет план с текстом и правилами шаблона; компилятор проверяет каждое число; вёрстка собирает слайды по дизайн-системе шаблона.</a:t>
+            </a:r>
+          </a:p>
+          <a:p>
+            <a:r>
+              <a:t>[verstka:sl5]</a:t>
             </a:r>
           </a:p>
         </p:txBody>
@@ -1892,12 +1922,12 @@
           <a:p>
             <a:r>
               <a:rPr lang="ru-RU"/>
-              <a:t>Каждый слайд проходит 41 проверку: 12 на целостность, 11 на вёрстку, 7 на шаблон, 6 на контент и 5 на плотность. Найденные проблемы помечаются на слайде и исправляются автоматически.</a:t>
-            </a:r>
-          </a:p>
-          <a:p>
-            <a:r>
-              <a:t>[verstka:sl7]</a:t>
+              <a:t>Содержание одно, подача разная. | Вариант | Подача | Когда подходит |. |---|---|---|. | Структурный | одна мысль на слайд, строгая сетка | отчёт и защита проекта |. | Визуальный | крупные цифры и наглядные схемы | питч и выступление со сцены |. | Компактный | вывод первой строкой, данные справа | рассылка руководителю |.</a:t>
+            </a:r>
+          </a:p>
+          <a:p>
+            <a:r>
+              <a:t>[verstka:sl6]</a:t>
             </a:r>
           </a:p>
         </p:txBody>
@@ -1956,12 +1986,12 @@
           <a:p>
             <a:r>
               <a:rPr lang="ru-RU"/>
-              <a:t>Каждое число в презентации сверяется дважды: до вёрстки и после. Всего было подготовлено 9 демонстрационных презентаций без выдуманных чисел.</a:t>
-            </a:r>
-          </a:p>
-          <a:p>
-            <a:r>
-              <a:t>[verstka:sl8]</a:t>
+              <a:t>Каждый слайд проходит 41 проверку: 12 на целостность, 11 на вёрстку, 7 на шаблон, 6 на контент и 5 на плотность. Найденные проблемы исправляются автоматически.</a:t>
+            </a:r>
+          </a:p>
+          <a:p>
+            <a:r>
+              <a:t>[verstka:sl7]</a:t>
             </a:r>
           </a:p>
         </p:txBody>
@@ -2020,12 +2050,12 @@
           <a:p>
             <a:r>
               <a:rPr lang="ru-RU"/>
-              <a:t>Сервис поддерживает 12 форматов файлов, включая pptx, potx, ppt, odp, thmx и другие. Он проверяет качество презентаций по 87 чужим шаблонам, средняя оценка качества — 99 из 100.</a:t>
-            </a:r>
-          </a:p>
-          <a:p>
-            <a:r>
-              <a:t>[verstka:sl9]</a:t>
+              <a:t>В итоге не было выдумано ни одного числа.</a:t>
+            </a:r>
+          </a:p>
+          <a:p>
+            <a:r>
+              <a:t>[verstka:sl8]</a:t>
             </a:r>
           </a:p>
         </p:txBody>
@@ -2084,12 +2114,12 @@
           <a:p>
             <a:r>
               <a:rPr lang="ru-RU"/>
-              <a:t>Время генерации трёх вариантов на шаблонах датасета: VK Tech — 113 секунд, VK Education — 145 секунд, VK WorkSpace — 175 секунд. Все значения значительно ниже установленного лимита в 5 минут.</a:t>
-            </a:r>
-          </a:p>
-          <a:p>
-            <a:r>
-              <a:t>[verstka:sl10]</a:t>
+              <a:t>Сервис поддерживает 12 форматов, включая pptx, potx, ppt, odp, thmx и другие.</a:t>
+            </a:r>
+          </a:p>
+          <a:p>
+            <a:r>
+              <a:t>[verstka:sl9]</a:t>
             </a:r>
           </a:p>
         </p:txBody>
@@ -2148,9 +2178,67 @@
           <a:p>
             <a:r>
               <a:rPr lang="ru-RU"/>
-              <a:t>После финала компания планирует три ключевых шага: переход на более мощные технологии инференса, внедрение генерации изображений в слайдах и запуск пилота на шаблонах и сценариях VK Tech.</a:t>
-            </a:r>
-          </a:p>
+              <a:t>Время генерации всех шаблонов меньше 5 минут.</a:t>
+            </a:r>
+          </a:p>
+          <a:p>
+            <a:r>
+              <a:t>[verstka:sl10]</a:t>
+            </a:r>
+          </a:p>
+        </p:txBody>
+      </p:sp>
+    </p:spTree>
+  </p:cSld>
+  <p:clrMapOvr>
+    <a:masterClrMapping/>
+  </p:clrMapOvr>
+</p:notes>
+</file>
+
+<file path=ppt/notesSlides/notesSlide32.xml><?xml version="1.0" encoding="utf-8"?>
+<p:notes xmlns:a="http://schemas.openxmlformats.org/drawingml/2006/main" xmlns:p="http://schemas.openxmlformats.org/presentationml/2006/main" xmlns:r="http://schemas.openxmlformats.org/officeDocument/2006/relationships">
+  <p:cSld>
+    <p:spTree>
+      <p:nvGrpSpPr>
+        <p:cNvPr id="1" name=""/>
+        <p:cNvGrpSpPr/>
+        <p:nvPr/>
+      </p:nvGrpSpPr>
+      <p:grpSpPr>
+        <a:xfrm>
+          <a:off x="0" y="0"/>
+          <a:ext cx="0" cy="0"/>
+          <a:chOff x="0" y="0"/>
+          <a:chExt cx="0" cy="0"/>
+        </a:xfrm>
+      </p:grpSpPr>
+      <p:sp>
+        <p:nvSpPr>
+          <p:cNvPr id="2" name="Slide Image Placeholder 1"/>
+          <p:cNvSpPr>
+            <a:spLocks noGrp="1"/>
+          </p:cNvSpPr>
+          <p:nvPr>
+            <p:ph type="sldImg" idx="2"/>
+          </p:nvPr>
+        </p:nvSpPr>
+        <p:spPr/>
+      </p:sp>
+      <p:sp>
+        <p:nvSpPr>
+          <p:cNvPr id="3" name="Notes Placeholder 2"/>
+          <p:cNvSpPr>
+            <a:spLocks noGrp="1"/>
+          </p:cNvSpPr>
+          <p:nvPr>
+            <p:ph type="body" idx="1"/>
+          </p:nvPr>
+        </p:nvSpPr>
+        <p:spPr/>
+        <p:txBody>
+          <a:bodyPr/>
+          <a:lstStyle/>
           <a:p>
             <a:r>
               <a:t>[verstka:sl11]</a:t>
@@ -4474,16 +4562,42 @@
         <p:nvPr/>
       </p:nvGrpSpPr>
       <p:grpSpPr/>
-      <p:sp>
-        <p:nvSpPr>
-          <p:cNvPr id="42" name="Google Shape;42;p8"/>
+      <p:cxnSp>
+        <p:nvCxnSpPr>
+          <p:cNvPr id="25" name="Google Shape;25;p6"/>
+          <p:cNvCxnSpPr/>
+          <p:nvPr/>
+        </p:nvCxnSpPr>
+        <p:spPr>
+          <a:xfrm>
+            <a:off x="1028700" y="9258300"/>
+            <a:ext cx="16230600" cy="0"/>
+          </a:xfrm>
+          <a:prstGeom prst="straightConnector1">
+            <a:avLst/>
+          </a:prstGeom>
+          <a:noFill/>
+          <a:ln cap="flat" cmpd="sng" w="38100">
+            <a:solidFill>
+              <a:srgbClr val="C2D076"/>
+            </a:solidFill>
+            <a:prstDash val="solid"/>
+            <a:round/>
+            <a:headEnd len="sm" w="sm" type="none"/>
+            <a:tailEnd len="sm" w="sm" type="none"/>
+          </a:ln>
+        </p:spPr>
+      </p:cxnSp>
+      <p:sp>
+        <p:nvSpPr>
+          <p:cNvPr id="26" name="Google Shape;26;p6"/>
           <p:cNvSpPr txBox="1"/>
           <p:nvPr/>
         </p:nvSpPr>
         <p:spPr>
           <a:xfrm>
-            <a:off x="619057" y="2623820"/>
-            <a:ext cx="9651876" cy="1527657"/>
+            <a:off x="1028700" y="4650572"/>
+            <a:ext cx="10740300" cy="3001517"/>
           </a:xfrm>
           <a:prstGeom prst="rect">
             <a:avLst/>
@@ -4495,13 +4609,13 @@
         </p:spPr>
         <p:txBody>
           <a:bodyPr anchorCtr="0" anchor="t" bIns="0" lIns="0" spcFirstLastPara="1" rIns="0" wrap="square" tIns="0">
-            <a:spAutoFit/>
+            <a:noAutofit/>
           </a:bodyPr>
           <a:lstStyle/>
           <a:p>
-            <a:pPr indent="0" lvl="1" marL="0" marR="0" rtl="0" algn="l">
+            <a:pPr indent="0" lvl="0" marL="0" marR="0" rtl="0" algn="l">
               <a:lnSpc>
-                <a:spcPct val="120000"/>
+                <a:spcPct val="80000"/>
               </a:lnSpc>
               <a:spcBef>
                 <a:spcPts val="0"/>
@@ -4509,15 +4623,10 @@
               <a:spcAft>
                 <a:spcPts val="0"/>
               </a:spcAft>
-              <a:buClr>
-                <a:srgbClr val="C2D076"/>
-              </a:buClr>
-              <a:buSzPts val="5600"/>
-              <a:buFont typeface="Inter Medium"/>
               <a:buNone/>
             </a:pPr>
             <a:r>
-              <a:rPr i="0" lang="ru-RU" sz="2799" u="none" cap="none" strike="noStrike">
+              <a:rPr i="0" lang="en-US" sz="7800" u="none" cap="none" strike="noStrike" b="0">
                 <a:solidFill>
                   <a:srgbClr val="C2D076"/>
                 </a:solidFill>
@@ -4526,9 +4635,55 @@
                 <a:cs typeface="Inter Medium"/>
                 <a:sym typeface="Inter Medium"/>
               </a:rPr>
-              <a:t>Вёрстка забирает больше времени, чем написание текста</a:t>
-            </a:r>
-            <a:endParaRPr>
+              <a:t>Verstka —</a:t>
+            </a:r>
+            <a:br>
+              <a:rPr i="0" lang="en-US" sz="7800" u="none" cap="none" strike="noStrike" b="0">
+                <a:solidFill>
+                  <a:srgbClr val="C2D076"/>
+                </a:solidFill>
+                <a:latin typeface="Inter Medium"/>
+                <a:ea typeface="Inter Medium"/>
+                <a:cs typeface="Inter Medium"/>
+                <a:sym typeface="Inter Medium"/>
+              </a:rPr>
+            </a:br>
+            <a:r>
+              <a:rPr i="0" lang="ru-RU" sz="7800" u="none" cap="none" strike="noStrike" b="0">
+                <a:solidFill>
+                  <a:srgbClr val="C2D076"/>
+                </a:solidFill>
+                <a:latin typeface="Inter Medium"/>
+                <a:ea typeface="Inter Medium"/>
+                <a:cs typeface="Inter Medium"/>
+                <a:sym typeface="Inter Medium"/>
+              </a:rPr>
+              <a:t>цифровой дизайнер</a:t>
+            </a:r>
+            <a:br>
+              <a:rPr i="0" lang="en-US" sz="7800" u="none" cap="none" strike="noStrike" b="0">
+                <a:solidFill>
+                  <a:srgbClr val="C2D076"/>
+                </a:solidFill>
+                <a:latin typeface="Inter Medium"/>
+                <a:ea typeface="Inter Medium"/>
+                <a:cs typeface="Inter Medium"/>
+                <a:sym typeface="Inter Medium"/>
+              </a:rPr>
+            </a:br>
+            <a:r>
+              <a:rPr i="0" lang="ru-RU" sz="7800" u="none" cap="none" strike="noStrike" b="0">
+                <a:solidFill>
+                  <a:srgbClr val="C2D076"/>
+                </a:solidFill>
+                <a:latin typeface="Inter Medium"/>
+                <a:ea typeface="Inter Medium"/>
+                <a:cs typeface="Inter Medium"/>
+                <a:sym typeface="Inter Medium"/>
+              </a:rPr>
+              <a:t>презентаций</a:t>
+            </a:r>
+            <a:endParaRPr b="0">
               <a:latin typeface="Inter Medium"/>
               <a:ea typeface="Inter Medium"/>
               <a:cs typeface="Inter Medium"/>
@@ -4539,479 +4694,60 @@
       </p:sp>
       <p:sp>
         <p:nvSpPr>
-          <p:cNvPr id="43" name="Card 43"/>
-          <p:cNvSpPr/>
-          <p:nvPr/>
-        </p:nvSpPr>
-        <p:spPr>
-          <a:xfrm>
-            <a:off x="1024128" y="4665827"/>
-            <a:ext cx="5120640" cy="3252823"/>
-          </a:xfrm>
-          <a:prstGeom prst="roundRect">
-            <a:avLst>
-              <a:gd name="adj" fmla="val 3373"/>
-            </a:avLst>
-          </a:prstGeom>
-          <a:solidFill>
-            <a:srgbClr val="000000"/>
-          </a:solidFill>
+          <p:cNvPr id="30" name="Подзаголовок"/>
+          <p:cNvSpPr txBox="1"/>
+          <p:nvPr/>
+        </p:nvSpPr>
+        <p:spPr>
+          <a:xfrm>
+            <a:off x="1028700" y="8097859"/>
+            <a:ext cx="10740300" cy="404945"/>
+          </a:xfrm>
+          <a:prstGeom prst="rect">
+            <a:avLst/>
+          </a:prstGeom>
+          <a:noFill/>
           <a:ln>
             <a:noFill/>
           </a:ln>
         </p:spPr>
-      </p:sp>
-      <p:sp>
-        <p:nvSpPr>
-          <p:cNvPr id="44" name="Index 44"/>
-          <p:cNvSpPr txBox="1"/>
-          <p:nvPr/>
-        </p:nvSpPr>
-        <p:spPr>
-          <a:xfrm>
-            <a:off x="1285280" y="4926979"/>
-            <a:ext cx="4598336" cy="853440"/>
-          </a:xfrm>
-          <a:prstGeom prst="rect">
-            <a:avLst/>
-          </a:prstGeom>
-          <a:noFill/>
-        </p:spPr>
         <p:txBody>
-          <a:bodyPr wrap="square" lIns="0" tIns="0" rIns="0" bIns="0" anchor="t" rtlCol="0">
+          <a:bodyPr anchorCtr="0" anchor="t" bIns="0" lIns="0" spcFirstLastPara="1" rIns="0" wrap="square" tIns="0">
             <a:noAutofit/>
           </a:bodyPr>
           <a:lstStyle/>
           <a:p>
-            <a:pPr algn="l" marL="0" indent="0">
+            <a:pPr indent="0" lvl="0" marL="0" marR="0" rtl="0" algn="l">
               <a:lnSpc>
                 <a:spcPct val="100000"/>
               </a:lnSpc>
+              <a:spcBef>
+                <a:spcPts val="0"/>
+              </a:spcBef>
+              <a:spcAft>
+                <a:spcPts val="0"/>
+              </a:spcAft>
               <a:buNone/>
             </a:pPr>
             <a:r>
-              <a:rPr lang="ru-RU" sz="5600" b="0" cap="none" spc="0" baseline="0" dirty="0">
+              <a:rPr i="0" lang="ru-RU" sz="2199" u="none" cap="none" strike="noStrike" b="0" spc="0">
                 <a:solidFill>
                   <a:srgbClr val="C2D076"/>
                 </a:solidFill>
-                <a:latin typeface="Inter Light"/>
-                <a:cs typeface="Inter Light"/>
+                <a:latin typeface="Inter Medium"/>
+                <a:ea typeface="Inter Medium"/>
+                <a:sym typeface="Inter Medium"/>
               </a:rPr>
-              <a:t>01</a:t>
-            </a:r>
-            <a:endParaRPr lang="ru-RU" sz="5600"/>
-          </a:p>
-        </p:txBody>
-      </p:sp>
-      <p:sp>
-        <p:nvSpPr>
-          <p:cNvPr id="45" name="Card text 45"/>
-          <p:cNvSpPr txBox="1"/>
-          <p:nvPr/>
-        </p:nvSpPr>
-        <p:spPr>
-          <a:xfrm>
-            <a:off x="1285280" y="5888432"/>
-            <a:ext cx="4598336" cy="1769066"/>
-          </a:xfrm>
-          <a:prstGeom prst="rect">
-            <a:avLst/>
-          </a:prstGeom>
-          <a:noFill/>
-        </p:spPr>
-        <p:txBody>
-          <a:bodyPr wrap="square" lIns="0" tIns="0" rIns="0" bIns="0" anchor="t" rtlCol="0">
-            <a:noAutofit/>
-          </a:bodyPr>
-          <a:lstStyle/>
-          <a:p>
-            <a:pPr algn="l" marL="0" indent="0">
-              <a:lnSpc>
-                <a:spcPct val="100000"/>
-              </a:lnSpc>
-              <a:spcAft>
-                <a:spcPts val="1374"/>
-              </a:spcAft>
-              <a:buNone/>
-            </a:pPr>
-            <a:r>
-              <a:rPr lang="ru-RU" sz="2799" b="0" cap="none" spc="0" baseline="0" dirty="0">
-                <a:solidFill>
-                  <a:srgbClr val="C2D076"/>
-                </a:solidFill>
-                <a:latin typeface="Inter Light"/>
-                <a:cs typeface="Inter Light"/>
-              </a:rPr>
-              <a:t>Ручная вёрстка</a:t>
-            </a:r>
-            <a:endParaRPr lang="ru-RU" sz="2799"/>
-          </a:p>
-          <a:p>
-            <a:pPr algn="l" marL="0" indent="0">
-              <a:lnSpc>
-                <a:spcPct val="100000"/>
-              </a:lnSpc>
-              <a:buNone/>
-            </a:pPr>
-            <a:r>
-              <a:rPr lang="ru-RU" sz="2499" b="0" cap="none" spc="0" baseline="0" dirty="0">
-                <a:solidFill>
-                  <a:srgbClr val="FFFFFF"/>
-                </a:solidFill>
-                <a:latin typeface="Inter Light"/>
-                <a:cs typeface="Inter Light"/>
-              </a:rPr>
-              <a:t>Подобрать макет, подвинуть блоки, подогнать цвета под фирменный стиль</a:t>
-            </a:r>
-            <a:endParaRPr lang="ru-RU" sz="2499"/>
-          </a:p>
-        </p:txBody>
-      </p:sp>
-      <p:sp>
-        <p:nvSpPr>
-          <p:cNvPr id="46" name="Card 46"/>
-          <p:cNvSpPr/>
-          <p:nvPr/>
-        </p:nvSpPr>
-        <p:spPr>
-          <a:xfrm>
-            <a:off x="6583680" y="4665827"/>
-            <a:ext cx="5120640" cy="3252823"/>
-          </a:xfrm>
-          <a:prstGeom prst="roundRect">
-            <a:avLst>
-              <a:gd name="adj" fmla="val 3373"/>
-            </a:avLst>
-          </a:prstGeom>
-          <a:solidFill>
-            <a:srgbClr val="000000"/>
-          </a:solidFill>
-          <a:ln>
-            <a:noFill/>
-          </a:ln>
-        </p:spPr>
-      </p:sp>
-      <p:sp>
-        <p:nvSpPr>
-          <p:cNvPr id="47" name="Index 47"/>
-          <p:cNvSpPr txBox="1"/>
-          <p:nvPr/>
-        </p:nvSpPr>
-        <p:spPr>
-          <a:xfrm>
-            <a:off x="6844832" y="4926979"/>
-            <a:ext cx="4598336" cy="853440"/>
-          </a:xfrm>
-          <a:prstGeom prst="rect">
-            <a:avLst/>
-          </a:prstGeom>
-          <a:noFill/>
-        </p:spPr>
-        <p:txBody>
-          <a:bodyPr wrap="square" lIns="0" tIns="0" rIns="0" bIns="0" anchor="t" rtlCol="0">
-            <a:noAutofit/>
-          </a:bodyPr>
-          <a:lstStyle/>
-          <a:p>
-            <a:pPr algn="l" marL="0" indent="0">
-              <a:lnSpc>
-                <a:spcPct val="100000"/>
-              </a:lnSpc>
-              <a:buNone/>
-            </a:pPr>
-            <a:r>
-              <a:rPr lang="ru-RU" sz="5600" b="0" cap="none" spc="0" baseline="0" dirty="0">
-                <a:solidFill>
-                  <a:srgbClr val="C2D076"/>
-                </a:solidFill>
-                <a:latin typeface="Inter Light"/>
-                <a:cs typeface="Inter Light"/>
-              </a:rPr>
-              <a:t>02</a:t>
-            </a:r>
-            <a:endParaRPr lang="ru-RU" sz="5600"/>
-          </a:p>
-        </p:txBody>
-      </p:sp>
-      <p:sp>
-        <p:nvSpPr>
-          <p:cNvPr id="48" name="Card text 48"/>
-          <p:cNvSpPr txBox="1"/>
-          <p:nvPr/>
-        </p:nvSpPr>
-        <p:spPr>
-          <a:xfrm>
-            <a:off x="6844832" y="5888432"/>
-            <a:ext cx="4598336" cy="1769066"/>
-          </a:xfrm>
-          <a:prstGeom prst="rect">
-            <a:avLst/>
-          </a:prstGeom>
-          <a:noFill/>
-        </p:spPr>
-        <p:txBody>
-          <a:bodyPr wrap="square" lIns="0" tIns="0" rIns="0" bIns="0" anchor="t" rtlCol="0">
-            <a:noAutofit/>
-          </a:bodyPr>
-          <a:lstStyle/>
-          <a:p>
-            <a:pPr algn="l" marL="0" indent="0">
-              <a:lnSpc>
-                <a:spcPct val="100000"/>
-              </a:lnSpc>
-              <a:spcAft>
-                <a:spcPts val="1374"/>
-              </a:spcAft>
-              <a:buNone/>
-            </a:pPr>
-            <a:r>
-              <a:rPr lang="ru-RU" sz="2799" b="0" cap="none" spc="0" baseline="0" dirty="0">
-                <a:solidFill>
-                  <a:srgbClr val="C2D076"/>
-                </a:solidFill>
-                <a:latin typeface="Inter Light"/>
-                <a:cs typeface="Inter Light"/>
-              </a:rPr>
-              <a:t>ИИ ломает стиль</a:t>
-            </a:r>
-            <a:endParaRPr lang="ru-RU" sz="2799"/>
-          </a:p>
-          <a:p>
-            <a:pPr algn="l" marL="0" indent="0">
-              <a:lnSpc>
-                <a:spcPct val="100000"/>
-              </a:lnSpc>
-              <a:buNone/>
-            </a:pPr>
-            <a:r>
-              <a:rPr lang="ru-RU" sz="2499" b="0" cap="none" spc="0" baseline="0" dirty="0">
-                <a:solidFill>
-                  <a:srgbClr val="FFFFFF"/>
-                </a:solidFill>
-                <a:latin typeface="Inter Light"/>
-                <a:cs typeface="Inter Light"/>
-              </a:rPr>
-              <a:t>Нейросети пишут текст, но не воспроизводят дизайн-⁠систему</a:t>
-            </a:r>
-            <a:endParaRPr lang="ru-RU" sz="2499"/>
-          </a:p>
-        </p:txBody>
-      </p:sp>
-      <p:sp>
-        <p:nvSpPr>
-          <p:cNvPr id="49" name="Card 49"/>
-          <p:cNvSpPr/>
-          <p:nvPr/>
-        </p:nvSpPr>
-        <p:spPr>
-          <a:xfrm>
-            <a:off x="12143232" y="4665827"/>
-            <a:ext cx="5120640" cy="3252823"/>
-          </a:xfrm>
-          <a:prstGeom prst="roundRect">
-            <a:avLst>
-              <a:gd name="adj" fmla="val 3373"/>
-            </a:avLst>
-          </a:prstGeom>
-          <a:solidFill>
-            <a:srgbClr val="000000"/>
-          </a:solidFill>
-          <a:ln>
-            <a:noFill/>
-          </a:ln>
-        </p:spPr>
-      </p:sp>
-      <p:sp>
-        <p:nvSpPr>
-          <p:cNvPr id="50" name="Index 50"/>
-          <p:cNvSpPr txBox="1"/>
-          <p:nvPr/>
-        </p:nvSpPr>
-        <p:spPr>
-          <a:xfrm>
-            <a:off x="12404384" y="4926979"/>
-            <a:ext cx="4598336" cy="853440"/>
-          </a:xfrm>
-          <a:prstGeom prst="rect">
-            <a:avLst/>
-          </a:prstGeom>
-          <a:noFill/>
-        </p:spPr>
-        <p:txBody>
-          <a:bodyPr wrap="square" lIns="0" tIns="0" rIns="0" bIns="0" anchor="t" rtlCol="0">
-            <a:noAutofit/>
-          </a:bodyPr>
-          <a:lstStyle/>
-          <a:p>
-            <a:pPr algn="l" marL="0" indent="0">
-              <a:lnSpc>
-                <a:spcPct val="100000"/>
-              </a:lnSpc>
-              <a:buNone/>
-            </a:pPr>
-            <a:r>
-              <a:rPr lang="ru-RU" sz="5600" b="0" cap="none" spc="0" baseline="0" dirty="0">
-                <a:solidFill>
-                  <a:srgbClr val="C2D076"/>
-                </a:solidFill>
-                <a:latin typeface="Inter Light"/>
-                <a:cs typeface="Inter Light"/>
-              </a:rPr>
-              <a:t>03</a:t>
-            </a:r>
-            <a:endParaRPr lang="ru-RU" sz="5600"/>
-          </a:p>
-        </p:txBody>
-      </p:sp>
-      <p:sp>
-        <p:nvSpPr>
-          <p:cNvPr id="51" name="Card text 51"/>
-          <p:cNvSpPr txBox="1"/>
-          <p:nvPr/>
-        </p:nvSpPr>
-        <p:spPr>
-          <a:xfrm>
-            <a:off x="12404384" y="5888432"/>
-            <a:ext cx="4598336" cy="1769066"/>
-          </a:xfrm>
-          <a:prstGeom prst="rect">
-            <a:avLst/>
-          </a:prstGeom>
-          <a:noFill/>
-        </p:spPr>
-        <p:txBody>
-          <a:bodyPr wrap="square" lIns="0" tIns="0" rIns="0" bIns="0" anchor="t" rtlCol="0">
-            <a:noAutofit/>
-          </a:bodyPr>
-          <a:lstStyle/>
-          <a:p>
-            <a:pPr algn="l" marL="0" indent="0">
-              <a:lnSpc>
-                <a:spcPct val="100000"/>
-              </a:lnSpc>
-              <a:spcAft>
-                <a:spcPts val="1374"/>
-              </a:spcAft>
-              <a:buNone/>
-            </a:pPr>
-            <a:r>
-              <a:rPr lang="ru-RU" sz="2799" b="0" cap="none" spc="0" baseline="0" dirty="0">
-                <a:solidFill>
-                  <a:srgbClr val="C2D076"/>
-                </a:solidFill>
-                <a:latin typeface="Inter Light"/>
-                <a:cs typeface="Inter Light"/>
-              </a:rPr>
-              <a:t>Шаблон — не инструкция</a:t>
-            </a:r>
-            <a:endParaRPr lang="ru-RU" sz="2799"/>
-          </a:p>
-          <a:p>
-            <a:pPr algn="l" marL="0" indent="0">
-              <a:lnSpc>
-                <a:spcPct val="100000"/>
-              </a:lnSpc>
-              <a:buNone/>
-            </a:pPr>
-            <a:r>
-              <a:rPr lang="ru-RU" sz="2499" b="0" cap="none" spc="0" baseline="0" dirty="0">
-                <a:solidFill>
-                  <a:srgbClr val="FFFFFF"/>
-                </a:solidFill>
-                <a:latin typeface="Inter Light"/>
-                <a:cs typeface="Inter Light"/>
-              </a:rPr>
-              <a:t>по слайдам-⁠образцам не понять, как собрать новый слайд</a:t>
-            </a:r>
-            <a:endParaRPr lang="ru-RU" sz="2499"/>
-          </a:p>
-        </p:txBody>
-      </p:sp>
-      <p:sp>
-        <p:nvSpPr>
-          <p:cNvPr id="52" name="Conclusion strip 52"/>
-          <p:cNvSpPr/>
-          <p:nvPr/>
-        </p:nvSpPr>
-        <p:spPr>
-          <a:xfrm>
-            <a:off x="1024128" y="8350704"/>
-            <a:ext cx="16239744" cy="892754"/>
-          </a:xfrm>
-          <a:prstGeom prst="roundRect">
-            <a:avLst>
-              <a:gd name="adj" fmla="val 12290"/>
-            </a:avLst>
-          </a:prstGeom>
-          <a:solidFill>
-            <a:srgbClr val="000000"/>
-          </a:solidFill>
-          <a:ln>
-            <a:noFill/>
-          </a:ln>
-        </p:spPr>
-      </p:sp>
-      <p:sp>
-        <p:nvSpPr>
-          <p:cNvPr id="53" name="Conclusion bar 53"/>
-          <p:cNvSpPr/>
-          <p:nvPr/>
-        </p:nvSpPr>
-        <p:spPr>
-          <a:xfrm>
-            <a:off x="1379601" y="8613754"/>
-            <a:ext cx="61722" cy="366654"/>
-          </a:xfrm>
-          <a:prstGeom prst="rect">
-            <a:avLst/>
-          </a:prstGeom>
-          <a:solidFill>
-            <a:srgbClr val="C2D076"/>
-          </a:solidFill>
-          <a:ln>
-            <a:noFill/>
-          </a:ln>
-        </p:spPr>
-      </p:sp>
-      <p:sp>
-        <p:nvSpPr>
-          <p:cNvPr id="54" name="Conclusion 54"/>
-          <p:cNvSpPr txBox="1"/>
-          <p:nvPr/>
-        </p:nvSpPr>
-        <p:spPr>
-          <a:xfrm>
-            <a:off x="1725701" y="8571097"/>
-            <a:ext cx="15182698" cy="451968"/>
-          </a:xfrm>
-          <a:prstGeom prst="rect">
-            <a:avLst/>
-          </a:prstGeom>
-          <a:noFill/>
-        </p:spPr>
-        <p:txBody>
-          <a:bodyPr wrap="square" lIns="0" tIns="0" rIns="0" bIns="0" anchor="t" rtlCol="0">
-            <a:noAutofit/>
-          </a:bodyPr>
-          <a:lstStyle/>
-          <a:p>
-            <a:pPr algn="l" marL="0" indent="0">
-              <a:lnSpc>
-                <a:spcPct val="100000"/>
-              </a:lnSpc>
-              <a:buNone/>
-            </a:pPr>
-            <a:r>
-              <a:rPr lang="ru-RU" sz="2799" b="0" cap="none" spc="0" baseline="0" dirty="0">
-                <a:solidFill>
-                  <a:srgbClr val="C2D076"/>
-                </a:solidFill>
-                <a:latin typeface="Inter Light"/>
-                <a:cs typeface="Inter Light"/>
-              </a:rPr>
-              <a:t>Ручная вёрстка, ИИ и шаблоны — три проблемы, которые тормозят</a:t>
-            </a:r>
-            <a:endParaRPr lang="ru-RU" sz="2799"/>
+              <a:t>Команда «Рекрут 2» · задача № 4 VK Tech · ЛЦТ 2026</a:t>
+            </a:r>
+            <a:endParaRPr b="0" cap="none" spc="0">
+              <a:solidFill>
+                <a:srgbClr val="C2D076"/>
+              </a:solidFill>
+              <a:latin typeface="Inter Medium"/>
+              <a:ea typeface="Inter Medium"/>
+              <a:sym typeface="Inter Medium"/>
+            </a:endParaRPr>
           </a:p>
         </p:txBody>
       </p:sp>
@@ -5049,7 +4785,7 @@
         <p:spPr>
           <a:xfrm>
             <a:off x="619057" y="2623820"/>
-            <a:ext cx="15727680" cy="944880"/>
+            <a:ext cx="15727680" cy="809548"/>
           </a:xfrm>
           <a:prstGeom prst="rect">
             <a:avLst/>
@@ -5092,7 +4828,7 @@
                 <a:cs typeface="Inter Medium"/>
                 <a:sym typeface="Inter Medium"/>
               </a:rPr>
-              <a:t>Три шага развития после финала</a:t>
+              <a:t>VK WorkSpace — самый долгий, но всё в лимите</a:t>
             </a:r>
             <a:endParaRPr>
               <a:latin typeface="Inter Medium"/>
@@ -5105,18 +4841,250 @@
       </p:sp>
       <p:sp>
         <p:nvSpPr>
-          <p:cNvPr id="52" name="Card 52"/>
+          <p:cNvPr id="43" name="Unit 43"/>
+          <p:cNvSpPr txBox="1"/>
+          <p:nvPr/>
+        </p:nvSpPr>
+        <p:spPr>
+          <a:xfrm>
+            <a:off x="1024128" y="3947718"/>
+            <a:ext cx="10814792" cy="299720"/>
+          </a:xfrm>
+          <a:prstGeom prst="rect">
+            <a:avLst/>
+          </a:prstGeom>
+          <a:noFill/>
+        </p:spPr>
+        <p:txBody>
+          <a:bodyPr wrap="square" lIns="0" tIns="0" rIns="0" bIns="0" anchor="t" rtlCol="0">
+            <a:noAutofit/>
+          </a:bodyPr>
+          <a:lstStyle/>
+          <a:p>
+            <a:pPr algn="l" marL="0" indent="0">
+              <a:lnSpc>
+                <a:spcPct val="100000"/>
+              </a:lnSpc>
+              <a:buNone/>
+            </a:pPr>
+            <a:r>
+              <a:rPr lang="ru-RU" sz="1800" b="0" cap="none" spc="0" baseline="0" dirty="0">
+                <a:solidFill>
+                  <a:srgbClr val="FFFFFF"/>
+                </a:solidFill>
+                <a:latin typeface="Inter Light"/>
+                <a:cs typeface="Inter Light"/>
+              </a:rPr>
+              <a:t>Время генерации трёх вариантов на шаблонах датасета, секунд</a:t>
+            </a:r>
+            <a:endParaRPr lang="ru-RU" sz="1800"/>
+          </a:p>
+        </p:txBody>
+      </p:sp>
+      <p:graphicFrame>
+        <p:nvGraphicFramePr>
+          <p:cNvPr id="44" name="Chart 43"/>
+          <p:cNvGraphicFramePr>
+            <a:graphicFrameLocks noGrp="1"/>
+          </p:cNvGraphicFramePr>
+          <p:nvPr/>
+        </p:nvGraphicFramePr>
+        <p:xfrm>
+          <a:off x="1024128" y="4340021"/>
+          <a:ext cx="10814792" cy="4483968"/>
+        </p:xfrm>
+        <a:graphic>
+          <a:graphicData uri="http://schemas.openxmlformats.org/drawingml/2006/chart">
+            <c:chart xmlns:c="http://schemas.openxmlformats.org/drawingml/2006/chart" r:id="rId2"/>
+          </a:graphicData>
+        </a:graphic>
+      </p:graphicFrame>
+      <p:sp>
+        <p:nvSpPr>
+          <p:cNvPr id="45" name="Rule 45"/>
           <p:cNvSpPr/>
           <p:nvPr/>
         </p:nvSpPr>
         <p:spPr>
           <a:xfrm>
+            <a:off x="12716744" y="3947718"/>
+            <a:ext cx="720090" cy="38100"/>
+          </a:xfrm>
+          <a:prstGeom prst="rect">
+            <a:avLst/>
+          </a:prstGeom>
+          <a:solidFill>
+            <a:srgbClr val="C2D076"/>
+          </a:solidFill>
+          <a:ln>
+            <a:noFill/>
+          </a:ln>
+        </p:spPr>
+      </p:sp>
+      <p:sp>
+        <p:nvSpPr>
+          <p:cNvPr id="46" name="Label 46"/>
+          <p:cNvSpPr txBox="1"/>
+          <p:nvPr/>
+        </p:nvSpPr>
+        <p:spPr>
+          <a:xfrm>
+            <a:off x="12716744" y="4263567"/>
+            <a:ext cx="4547128" cy="1305103"/>
+          </a:xfrm>
+          <a:prstGeom prst="rect">
+            <a:avLst/>
+          </a:prstGeom>
+          <a:noFill/>
+        </p:spPr>
+        <p:txBody>
+          <a:bodyPr wrap="square" lIns="0" tIns="0" rIns="0" bIns="0" anchor="t" rtlCol="0">
+            <a:noAutofit/>
+          </a:bodyPr>
+          <a:lstStyle/>
+          <a:p>
+            <a:pPr algn="l" marL="0" indent="0">
+              <a:lnSpc>
+                <a:spcPct val="100000"/>
+              </a:lnSpc>
+              <a:buNone/>
+            </a:pPr>
+            <a:r>
+              <a:rPr lang="ru-RU" sz="2799" b="0" cap="none" spc="0" baseline="0" dirty="0">
+                <a:solidFill>
+                  <a:srgbClr val="FFFFFF"/>
+                </a:solidFill>
+                <a:latin typeface="Inter Light"/>
+                <a:cs typeface="Inter Light"/>
+              </a:rPr>
+              <a:t>Все шаблоны укладываются в лимит </a:t>
+            </a:r>
+            <a:r>
+              <a:rPr lang="ru-RU" sz="2799" b="0" cap="none" spc="0" baseline="0" dirty="0">
+                <a:solidFill>
+                  <a:srgbClr val="C2D076"/>
+                </a:solidFill>
+                <a:latin typeface="Inter Light"/>
+                <a:cs typeface="Inter Light"/>
+              </a:rPr>
+              <a:t>5 минут</a:t>
+            </a:r>
+            <a:r>
+              <a:rPr lang="ru-RU" sz="2799" b="0" cap="none" spc="0" baseline="0" dirty="0">
+                <a:solidFill>
+                  <a:srgbClr val="FFFFFF"/>
+                </a:solidFill>
+                <a:latin typeface="Inter Light"/>
+                <a:cs typeface="Inter Light"/>
+              </a:rPr>
+              <a:t> с запасом</a:t>
+            </a:r>
+            <a:endParaRPr lang="ru-RU" sz="2799"/>
+          </a:p>
+        </p:txBody>
+      </p:sp>
+    </p:spTree>
+  </p:cSld>
+  <p:clrMapOvr>
+    <a:masterClrMapping/>
+  </p:clrMapOvr>
+</p:sld>
+</file>
+
+<file path=ppt/slides/slide11.xml><?xml version="1.0" encoding="utf-8"?>
+<p:sld xmlns:a="http://schemas.openxmlformats.org/drawingml/2006/main" xmlns:p="http://schemas.openxmlformats.org/presentationml/2006/main" xmlns:r="http://schemas.openxmlformats.org/officeDocument/2006/relationships">
+  <p:cSld>
+    <p:bg>
+      <p:bgPr>
+        <a:solidFill>
+          <a:srgbClr val="001514"/>
+        </a:solidFill>
+      </p:bgPr>
+    </p:bg>
+    <p:spTree>
+      <p:nvGrpSpPr>
+        <p:cNvPr id="1" name=""/>
+        <p:cNvGrpSpPr/>
+        <p:nvPr/>
+      </p:nvGrpSpPr>
+      <p:grpSpPr/>
+      <p:sp>
+        <p:nvSpPr>
+          <p:cNvPr id="42" name="Google Shape;42;p8"/>
+          <p:cNvSpPr txBox="1"/>
+          <p:nvPr/>
+        </p:nvSpPr>
+        <p:spPr>
+          <a:xfrm>
+            <a:off x="619057" y="2623820"/>
+            <a:ext cx="15727680" cy="944880"/>
+          </a:xfrm>
+          <a:prstGeom prst="rect">
+            <a:avLst/>
+          </a:prstGeom>
+          <a:noFill/>
+          <a:ln>
+            <a:noFill/>
+          </a:ln>
+        </p:spPr>
+        <p:txBody>
+          <a:bodyPr anchorCtr="0" anchor="t" bIns="0" lIns="0" spcFirstLastPara="1" rIns="0" wrap="square" tIns="0">
+            <a:spAutoFit/>
+          </a:bodyPr>
+          <a:lstStyle/>
+          <a:p>
+            <a:pPr indent="0" lvl="1" marL="0" marR="0" rtl="0" algn="l">
+              <a:lnSpc>
+                <a:spcPct val="120000"/>
+              </a:lnSpc>
+              <a:spcBef>
+                <a:spcPts val="0"/>
+              </a:spcBef>
+              <a:spcAft>
+                <a:spcPts val="0"/>
+              </a:spcAft>
+              <a:buClr>
+                <a:srgbClr val="C2D076"/>
+              </a:buClr>
+              <a:buSzPts val="5600"/>
+              <a:buFont typeface="Inter Medium"/>
+              <a:buNone/>
+            </a:pPr>
+            <a:r>
+              <a:rPr i="0" lang="ru-RU" sz="4712" u="none" cap="none" strike="noStrike">
+                <a:solidFill>
+                  <a:srgbClr val="C2D076"/>
+                </a:solidFill>
+                <a:latin typeface="Inter Medium"/>
+                <a:ea typeface="Inter Medium"/>
+                <a:cs typeface="Inter Medium"/>
+                <a:sym typeface="Inter Medium"/>
+              </a:rPr>
+              <a:t>Три шага после финала</a:t>
+            </a:r>
+            <a:endParaRPr>
+              <a:latin typeface="Inter Medium"/>
+              <a:ea typeface="Inter Medium"/>
+              <a:cs typeface="Inter Medium"/>
+              <a:sym typeface="Inter Medium"/>
+            </a:endParaRPr>
+          </a:p>
+        </p:txBody>
+      </p:sp>
+      <p:sp>
+        <p:nvSpPr>
+          <p:cNvPr id="61" name="Card 61"/>
+          <p:cNvSpPr/>
+          <p:nvPr/>
+        </p:nvSpPr>
+        <p:spPr>
+          <a:xfrm>
             <a:off x="1024128" y="4137660"/>
-            <a:ext cx="5120640" cy="4868823"/>
+            <a:ext cx="5120640" cy="4394903"/>
           </a:xfrm>
           <a:prstGeom prst="roundRect">
             <a:avLst>
-              <a:gd name="adj" fmla="val 2253"/>
+              <a:gd name="adj" fmla="val 2496"/>
             </a:avLst>
           </a:prstGeom>
           <a:solidFill>
@@ -5129,53 +5097,14 @@
       </p:sp>
       <p:sp>
         <p:nvSpPr>
-          <p:cNvPr id="53" name="Badge 53"/>
-          <p:cNvSpPr/>
-          <p:nvPr/>
-        </p:nvSpPr>
-        <p:spPr>
-          <a:xfrm>
-            <a:off x="1484985" y="4598517"/>
-            <a:ext cx="771525" cy="771525"/>
-          </a:xfrm>
-          <a:prstGeom prst="ellipse">
-            <a:avLst/>
-          </a:prstGeom>
-          <a:solidFill>
-            <a:srgbClr val="C2D076"/>
-          </a:solidFill>
-          <a:ln>
-            <a:noFill/>
-          </a:ln>
-        </p:spPr>
-        <p:txBody>
-          <a:bodyPr lIns="0" tIns="0" rIns="0" bIns="0" anchor="ctr" wrap="none"/>
-          <a:lstStyle/>
-          <a:p>
-            <a:pPr algn="ctr"/>
-            <a:r>
-              <a:rPr lang="ru-RU" sz="2799" b="0" cap="none" spc="0" baseline="0">
-                <a:solidFill>
-                  <a:srgbClr val="000000"/>
-                </a:solidFill>
-                <a:latin typeface="Inter Light"/>
-                <a:cs typeface="Inter Light"/>
-              </a:rPr>
-              <a:t>1</a:t>
-            </a:r>
-          </a:p>
-        </p:txBody>
-      </p:sp>
-      <p:sp>
-        <p:nvSpPr>
-          <p:cNvPr id="54" name="Step 54"/>
+          <p:cNvPr id="62" name="Index 62"/>
           <p:cNvSpPr txBox="1"/>
           <p:nvPr/>
         </p:nvSpPr>
         <p:spPr>
           <a:xfrm>
-            <a:off x="1484985" y="5647791"/>
-            <a:ext cx="4198926" cy="2897835"/>
+            <a:off x="1459382" y="4572914"/>
+            <a:ext cx="4250132" cy="1340968"/>
           </a:xfrm>
           <a:prstGeom prst="rect">
             <a:avLst/>
@@ -5195,7 +5124,49 @@
               <a:buNone/>
             </a:pPr>
             <a:r>
-              <a:rPr lang="ru-RU" sz="4712" b="0" cap="none" spc="0" baseline="0" dirty="0">
+              <a:rPr lang="ru-RU" sz="8799" b="0" cap="none" spc="0" baseline="0" dirty="0">
+                <a:solidFill>
+                  <a:srgbClr val="C2D076"/>
+                </a:solidFill>
+                <a:latin typeface="Inter Light"/>
+                <a:cs typeface="Inter Light"/>
+              </a:rPr>
+              <a:t>01</a:t>
+            </a:r>
+            <a:endParaRPr lang="ru-RU" sz="8799"/>
+          </a:p>
+        </p:txBody>
+      </p:sp>
+      <p:sp>
+        <p:nvSpPr>
+          <p:cNvPr id="63" name="Card text 63"/>
+          <p:cNvSpPr txBox="1"/>
+          <p:nvPr/>
+        </p:nvSpPr>
+        <p:spPr>
+          <a:xfrm>
+            <a:off x="1459382" y="6021895"/>
+            <a:ext cx="4250132" cy="2075414"/>
+          </a:xfrm>
+          <a:prstGeom prst="rect">
+            <a:avLst/>
+          </a:prstGeom>
+          <a:noFill/>
+        </p:spPr>
+        <p:txBody>
+          <a:bodyPr wrap="square" lIns="0" tIns="0" rIns="0" bIns="0" anchor="t" rtlCol="0">
+            <a:noAutofit/>
+          </a:bodyPr>
+          <a:lstStyle/>
+          <a:p>
+            <a:pPr algn="l" marL="0" indent="0">
+              <a:lnSpc>
+                <a:spcPct val="100000"/>
+              </a:lnSpc>
+              <a:buNone/>
+            </a:pPr>
+            <a:r>
+              <a:rPr lang="ru-RU" sz="2799" b="0" cap="none" spc="0" baseline="0" dirty="0">
                 <a:solidFill>
                   <a:srgbClr val="FFFFFF"/>
                 </a:solidFill>
@@ -5204,24 +5175,24 @@
               </a:rPr>
               <a:t>Переход на инференс VK и модель Qwen3.8-⁠27B</a:t>
             </a:r>
-            <a:endParaRPr lang="ru-RU" sz="4712"/>
+            <a:endParaRPr lang="ru-RU" sz="2799"/>
           </a:p>
         </p:txBody>
       </p:sp>
       <p:sp>
         <p:nvSpPr>
-          <p:cNvPr id="55" name="Card 55"/>
+          <p:cNvPr id="64" name="Card 64"/>
           <p:cNvSpPr/>
           <p:nvPr/>
         </p:nvSpPr>
         <p:spPr>
           <a:xfrm>
             <a:off x="6583680" y="4137660"/>
-            <a:ext cx="5120640" cy="4868823"/>
+            <a:ext cx="5120640" cy="4394903"/>
           </a:xfrm>
           <a:prstGeom prst="roundRect">
             <a:avLst>
-              <a:gd name="adj" fmla="val 2253"/>
+              <a:gd name="adj" fmla="val 2496"/>
             </a:avLst>
           </a:prstGeom>
           <a:solidFill>
@@ -5234,53 +5205,14 @@
       </p:sp>
       <p:sp>
         <p:nvSpPr>
-          <p:cNvPr id="56" name="Badge 56"/>
-          <p:cNvSpPr/>
-          <p:nvPr/>
-        </p:nvSpPr>
-        <p:spPr>
-          <a:xfrm>
-            <a:off x="7044537" y="4598517"/>
-            <a:ext cx="771525" cy="771525"/>
-          </a:xfrm>
-          <a:prstGeom prst="ellipse">
-            <a:avLst/>
-          </a:prstGeom>
-          <a:solidFill>
-            <a:srgbClr val="C2D076"/>
-          </a:solidFill>
-          <a:ln>
-            <a:noFill/>
-          </a:ln>
-        </p:spPr>
-        <p:txBody>
-          <a:bodyPr lIns="0" tIns="0" rIns="0" bIns="0" anchor="ctr" wrap="none"/>
-          <a:lstStyle/>
-          <a:p>
-            <a:pPr algn="ctr"/>
-            <a:r>
-              <a:rPr lang="ru-RU" sz="2799" b="0" cap="none" spc="0" baseline="0">
-                <a:solidFill>
-                  <a:srgbClr val="000000"/>
-                </a:solidFill>
-                <a:latin typeface="Inter Light"/>
-                <a:cs typeface="Inter Light"/>
-              </a:rPr>
-              <a:t>2</a:t>
-            </a:r>
-          </a:p>
-        </p:txBody>
-      </p:sp>
-      <p:sp>
-        <p:nvSpPr>
-          <p:cNvPr id="57" name="Step 57"/>
+          <p:cNvPr id="65" name="Index 65"/>
           <p:cNvSpPr txBox="1"/>
           <p:nvPr/>
         </p:nvSpPr>
         <p:spPr>
           <a:xfrm>
-            <a:off x="7044537" y="5647791"/>
-            <a:ext cx="4198926" cy="2897835"/>
+            <a:off x="7018934" y="4572914"/>
+            <a:ext cx="4250132" cy="1340968"/>
           </a:xfrm>
           <a:prstGeom prst="rect">
             <a:avLst/>
@@ -5300,7 +5232,49 @@
               <a:buNone/>
             </a:pPr>
             <a:r>
-              <a:rPr lang="ru-RU" sz="4712" b="0" cap="none" spc="0" baseline="0" dirty="0">
+              <a:rPr lang="ru-RU" sz="8799" b="0" cap="none" spc="0" baseline="0" dirty="0">
+                <a:solidFill>
+                  <a:srgbClr val="C2D076"/>
+                </a:solidFill>
+                <a:latin typeface="Inter Light"/>
+                <a:cs typeface="Inter Light"/>
+              </a:rPr>
+              <a:t>02</a:t>
+            </a:r>
+            <a:endParaRPr lang="ru-RU" sz="8799"/>
+          </a:p>
+        </p:txBody>
+      </p:sp>
+      <p:sp>
+        <p:nvSpPr>
+          <p:cNvPr id="66" name="Card text 66"/>
+          <p:cNvSpPr txBox="1"/>
+          <p:nvPr/>
+        </p:nvSpPr>
+        <p:spPr>
+          <a:xfrm>
+            <a:off x="7018934" y="6021895"/>
+            <a:ext cx="4250132" cy="2075414"/>
+          </a:xfrm>
+          <a:prstGeom prst="rect">
+            <a:avLst/>
+          </a:prstGeom>
+          <a:noFill/>
+        </p:spPr>
+        <p:txBody>
+          <a:bodyPr wrap="square" lIns="0" tIns="0" rIns="0" bIns="0" anchor="t" rtlCol="0">
+            <a:noAutofit/>
+          </a:bodyPr>
+          <a:lstStyle/>
+          <a:p>
+            <a:pPr algn="l" marL="0" indent="0">
+              <a:lnSpc>
+                <a:spcPct val="100000"/>
+              </a:lnSpc>
+              <a:buNone/>
+            </a:pPr>
+            <a:r>
+              <a:rPr lang="ru-RU" sz="2799" b="0" cap="none" spc="0" baseline="0" dirty="0">
                 <a:solidFill>
                   <a:srgbClr val="FFFFFF"/>
                 </a:solidFill>
@@ -5309,24 +5283,24 @@
               </a:rPr>
               <a:t>Генерация изображений внутри слайдов</a:t>
             </a:r>
-            <a:endParaRPr lang="ru-RU" sz="4712"/>
+            <a:endParaRPr lang="ru-RU" sz="2799"/>
           </a:p>
         </p:txBody>
       </p:sp>
       <p:sp>
         <p:nvSpPr>
-          <p:cNvPr id="58" name="Card 58"/>
+          <p:cNvPr id="67" name="Card 67"/>
           <p:cNvSpPr/>
           <p:nvPr/>
         </p:nvSpPr>
         <p:spPr>
           <a:xfrm>
             <a:off x="12143232" y="4137660"/>
-            <a:ext cx="5120640" cy="4868823"/>
+            <a:ext cx="5120640" cy="4394903"/>
           </a:xfrm>
           <a:prstGeom prst="roundRect">
             <a:avLst>
-              <a:gd name="adj" fmla="val 2253"/>
+              <a:gd name="adj" fmla="val 2496"/>
             </a:avLst>
           </a:prstGeom>
           <a:solidFill>
@@ -5339,53 +5313,14 @@
       </p:sp>
       <p:sp>
         <p:nvSpPr>
-          <p:cNvPr id="59" name="Badge 59"/>
-          <p:cNvSpPr/>
-          <p:nvPr/>
-        </p:nvSpPr>
-        <p:spPr>
-          <a:xfrm>
-            <a:off x="12604089" y="4598517"/>
-            <a:ext cx="771525" cy="771525"/>
-          </a:xfrm>
-          <a:prstGeom prst="ellipse">
-            <a:avLst/>
-          </a:prstGeom>
-          <a:solidFill>
-            <a:srgbClr val="C2D076"/>
-          </a:solidFill>
-          <a:ln>
-            <a:noFill/>
-          </a:ln>
-        </p:spPr>
-        <p:txBody>
-          <a:bodyPr lIns="0" tIns="0" rIns="0" bIns="0" anchor="ctr" wrap="none"/>
-          <a:lstStyle/>
-          <a:p>
-            <a:pPr algn="ctr"/>
-            <a:r>
-              <a:rPr lang="ru-RU" sz="2799" b="0" cap="none" spc="0" baseline="0">
-                <a:solidFill>
-                  <a:srgbClr val="000000"/>
-                </a:solidFill>
-                <a:latin typeface="Inter Light"/>
-                <a:cs typeface="Inter Light"/>
-              </a:rPr>
-              <a:t>3</a:t>
-            </a:r>
-          </a:p>
-        </p:txBody>
-      </p:sp>
-      <p:sp>
-        <p:nvSpPr>
-          <p:cNvPr id="60" name="Step 60"/>
+          <p:cNvPr id="68" name="Index 68"/>
           <p:cNvSpPr txBox="1"/>
           <p:nvPr/>
         </p:nvSpPr>
         <p:spPr>
           <a:xfrm>
-            <a:off x="12604089" y="5647791"/>
-            <a:ext cx="4198926" cy="2897835"/>
+            <a:off x="12578486" y="4572914"/>
+            <a:ext cx="4250132" cy="1340968"/>
           </a:xfrm>
           <a:prstGeom prst="rect">
             <a:avLst/>
@@ -5405,7 +5340,49 @@
               <a:buNone/>
             </a:pPr>
             <a:r>
-              <a:rPr lang="ru-RU" sz="4712" b="0" cap="none" spc="0" baseline="0" dirty="0">
+              <a:rPr lang="ru-RU" sz="8799" b="0" cap="none" spc="0" baseline="0" dirty="0">
+                <a:solidFill>
+                  <a:srgbClr val="C2D076"/>
+                </a:solidFill>
+                <a:latin typeface="Inter Light"/>
+                <a:cs typeface="Inter Light"/>
+              </a:rPr>
+              <a:t>03</a:t>
+            </a:r>
+            <a:endParaRPr lang="ru-RU" sz="8799"/>
+          </a:p>
+        </p:txBody>
+      </p:sp>
+      <p:sp>
+        <p:nvSpPr>
+          <p:cNvPr id="69" name="Card text 69"/>
+          <p:cNvSpPr txBox="1"/>
+          <p:nvPr/>
+        </p:nvSpPr>
+        <p:spPr>
+          <a:xfrm>
+            <a:off x="12578486" y="6021895"/>
+            <a:ext cx="4250132" cy="2075414"/>
+          </a:xfrm>
+          <a:prstGeom prst="rect">
+            <a:avLst/>
+          </a:prstGeom>
+          <a:noFill/>
+        </p:spPr>
+        <p:txBody>
+          <a:bodyPr wrap="square" lIns="0" tIns="0" rIns="0" bIns="0" anchor="t" rtlCol="0">
+            <a:noAutofit/>
+          </a:bodyPr>
+          <a:lstStyle/>
+          <a:p>
+            <a:pPr algn="l" marL="0" indent="0">
+              <a:lnSpc>
+                <a:spcPct val="100000"/>
+              </a:lnSpc>
+              <a:buNone/>
+            </a:pPr>
+            <a:r>
+              <a:rPr lang="ru-RU" sz="2799" b="0" cap="none" spc="0" baseline="0" dirty="0">
                 <a:solidFill>
                   <a:srgbClr val="FFFFFF"/>
                 </a:solidFill>
@@ -5414,7 +5391,7 @@
               </a:rPr>
               <a:t>Пилот на шаблонах и сценариях VK Tech</a:t>
             </a:r>
-            <a:endParaRPr lang="ru-RU" sz="4712"/>
+            <a:endParaRPr lang="ru-RU" sz="2799"/>
           </a:p>
         </p:txBody>
       </p:sp>
@@ -5452,7 +5429,7 @@
         <p:spPr>
           <a:xfrm>
             <a:off x="619057" y="2623820"/>
-            <a:ext cx="15727680" cy="809548"/>
+            <a:ext cx="9215842" cy="1527657"/>
           </a:xfrm>
           <a:prstGeom prst="rect">
             <a:avLst/>
@@ -5486,7 +5463,7 @@
               <a:buNone/>
             </a:pPr>
             <a:r>
-              <a:rPr i="0" lang="ru-RU" sz="4712" u="none" cap="none" strike="noStrike">
+              <a:rPr i="0" lang="ru-RU" sz="2799" u="none" cap="none" strike="noStrike">
                 <a:solidFill>
                   <a:srgbClr val="C2D076"/>
                 </a:solidFill>
@@ -5495,7 +5472,7 @@
                 <a:cs typeface="Inter Medium"/>
                 <a:sym typeface="Inter Medium"/>
               </a:rPr>
-              <a:t>95% фигур — свободные, 5% — плейсхолдеры</a:t>
+              <a:t>Вёрстка занимает больше времени, чем создание текста</a:t>
             </a:r>
             <a:endParaRPr>
               <a:latin typeface="Inter Medium"/>
@@ -5506,34 +5483,40 @@
           </a:p>
         </p:txBody>
       </p:sp>
-      <p:graphicFrame>
-        <p:nvGraphicFramePr>
-          <p:cNvPr id="43" name="Chart 42"/>
-          <p:cNvGraphicFramePr>
-            <a:graphicFrameLocks noGrp="1"/>
-          </p:cNvGraphicFramePr>
-          <p:nvPr/>
-        </p:nvGraphicFramePr>
-        <p:xfrm>
-          <a:off x="4204927" y="3947718"/>
-          <a:ext cx="4172586" cy="4172586"/>
-        </p:xfrm>
-        <a:graphic>
-          <a:graphicData uri="http://schemas.openxmlformats.org/drawingml/2006/chart">
-            <c:chart xmlns:c="http://schemas.openxmlformats.org/drawingml/2006/chart" r:id="rId2"/>
-          </a:graphicData>
-        </a:graphic>
-      </p:graphicFrame>
-      <p:sp>
-        <p:nvSpPr>
-          <p:cNvPr id="44" name="Legend title 44"/>
+      <p:sp>
+        <p:nvSpPr>
+          <p:cNvPr id="43" name="Card 43"/>
+          <p:cNvSpPr/>
+          <p:nvPr/>
+        </p:nvSpPr>
+        <p:spPr>
+          <a:xfrm>
+            <a:off x="1024128" y="4665827"/>
+            <a:ext cx="5120640" cy="4185709"/>
+          </a:xfrm>
+          <a:prstGeom prst="roundRect">
+            <a:avLst>
+              <a:gd name="adj" fmla="val 2621"/>
+            </a:avLst>
+          </a:prstGeom>
+          <a:solidFill>
+            <a:srgbClr val="000000"/>
+          </a:solidFill>
+          <a:ln>
+            <a:noFill/>
+          </a:ln>
+        </p:spPr>
+      </p:sp>
+      <p:sp>
+        <p:nvSpPr>
+          <p:cNvPr id="44" name="Index 44"/>
           <p:cNvSpPr txBox="1"/>
           <p:nvPr/>
         </p:nvSpPr>
         <p:spPr>
           <a:xfrm>
-            <a:off x="9255337" y="5142775"/>
-            <a:ext cx="4827735" cy="700799"/>
+            <a:off x="1459382" y="5101081"/>
+            <a:ext cx="4250132" cy="853440"/>
           </a:xfrm>
           <a:prstGeom prst="rect">
             <a:avLst/>
@@ -5553,53 +5536,29 @@
               <a:buNone/>
             </a:pPr>
             <a:r>
-              <a:rPr lang="ru-RU" sz="2799" b="0" cap="none" spc="0" baseline="0" dirty="0">
-                <a:solidFill>
-                  <a:srgbClr val="FFFFFF"/>
+              <a:rPr lang="ru-RU" sz="5600" b="0" cap="none" spc="0" baseline="0" dirty="0">
+                <a:solidFill>
+                  <a:srgbClr val="C2D076"/>
                 </a:solidFill>
                 <a:latin typeface="Inter Light"/>
                 <a:cs typeface="Inter Light"/>
               </a:rPr>
-              <a:t>Состав фигур в шаблоне</a:t>
-            </a:r>
-            <a:endParaRPr lang="ru-RU" sz="2799"/>
+              <a:t>01</a:t>
+            </a:r>
+            <a:endParaRPr lang="ru-RU" sz="5600"/>
           </a:p>
         </p:txBody>
       </p:sp>
       <p:sp>
         <p:nvSpPr>
-          <p:cNvPr id="45" name="Swatch 45"/>
-          <p:cNvSpPr/>
-          <p:nvPr/>
-        </p:nvSpPr>
-        <p:spPr>
-          <a:xfrm>
-            <a:off x="9255337" y="5928887"/>
-            <a:ext cx="255941" cy="255941"/>
-          </a:xfrm>
-          <a:prstGeom prst="roundRect">
-            <a:avLst>
-              <a:gd name="adj" fmla="val 24999"/>
-            </a:avLst>
-          </a:prstGeom>
-          <a:solidFill>
-            <a:srgbClr val="C2D076"/>
-          </a:solidFill>
-          <a:ln>
-            <a:noFill/>
-          </a:ln>
-        </p:spPr>
-      </p:sp>
-      <p:sp>
-        <p:nvSpPr>
-          <p:cNvPr id="46" name="Legend 46"/>
+          <p:cNvPr id="45" name="Card text 45"/>
           <p:cNvSpPr txBox="1"/>
           <p:nvPr/>
         </p:nvSpPr>
         <p:spPr>
           <a:xfrm>
-            <a:off x="9716030" y="5843574"/>
-            <a:ext cx="3451310" cy="451968"/>
+            <a:off x="1459382" y="6062534"/>
+            <a:ext cx="4250132" cy="2353748"/>
           </a:xfrm>
           <a:prstGeom prst="rect">
             <a:avLst/>
@@ -5616,32 +5575,78 @@
               <a:lnSpc>
                 <a:spcPct val="100000"/>
               </a:lnSpc>
+              <a:spcAft>
+                <a:spcPts val="4898"/>
+              </a:spcAft>
               <a:buNone/>
             </a:pPr>
             <a:r>
               <a:rPr lang="ru-RU" sz="2799" b="0" cap="none" spc="0" baseline="0" dirty="0">
                 <a:solidFill>
-                  <a:srgbClr val="FFFFFF"/>
+                  <a:srgbClr val="C2D076"/>
                 </a:solidFill>
                 <a:latin typeface="Inter Light"/>
                 <a:cs typeface="Inter Light"/>
               </a:rPr>
-              <a:t>Свободные фигуры</a:t>
+              <a:t>Ручная вёрстка</a:t>
             </a:r>
             <a:endParaRPr lang="ru-RU" sz="2799"/>
           </a:p>
+          <a:p>
+            <a:pPr algn="l" marL="0" indent="0">
+              <a:lnSpc>
+                <a:spcPct val="100000"/>
+              </a:lnSpc>
+              <a:buNone/>
+            </a:pPr>
+            <a:r>
+              <a:rPr lang="ru-RU" sz="2799" b="0" cap="none" spc="0" baseline="0" dirty="0">
+                <a:solidFill>
+                  <a:srgbClr val="FFFFFF"/>
+                </a:solidFill>
+                <a:latin typeface="Inter Light"/>
+                <a:cs typeface="Inter Light"/>
+              </a:rPr>
+              <a:t>Подбор макета, подгонка цветов и блоков</a:t>
+            </a:r>
+            <a:endParaRPr lang="ru-RU" sz="2799"/>
+          </a:p>
         </p:txBody>
       </p:sp>
       <p:sp>
         <p:nvSpPr>
-          <p:cNvPr id="47" name="Share 47"/>
+          <p:cNvPr id="46" name="Card 46"/>
+          <p:cNvSpPr/>
+          <p:nvPr/>
+        </p:nvSpPr>
+        <p:spPr>
+          <a:xfrm>
+            <a:off x="6583680" y="4665827"/>
+            <a:ext cx="5120640" cy="4185709"/>
+          </a:xfrm>
+          <a:prstGeom prst="roundRect">
+            <a:avLst>
+              <a:gd name="adj" fmla="val 2621"/>
+            </a:avLst>
+          </a:prstGeom>
+          <a:solidFill>
+            <a:srgbClr val="000000"/>
+          </a:solidFill>
+          <a:ln>
+            <a:noFill/>
+          </a:ln>
+        </p:spPr>
+      </p:sp>
+      <p:sp>
+        <p:nvSpPr>
+          <p:cNvPr id="47" name="Index 47"/>
           <p:cNvSpPr txBox="1"/>
           <p:nvPr/>
         </p:nvSpPr>
         <p:spPr>
           <a:xfrm>
-            <a:off x="13167340" y="5843574"/>
-            <a:ext cx="915732" cy="451968"/>
+            <a:off x="7018934" y="5101081"/>
+            <a:ext cx="4250132" cy="853440"/>
           </a:xfrm>
           <a:prstGeom prst="rect">
             <a:avLst/>
@@ -5654,60 +5659,36 @@
           </a:bodyPr>
           <a:lstStyle/>
           <a:p>
-            <a:pPr algn="r" marL="0" indent="0">
+            <a:pPr algn="l" marL="0" indent="0">
               <a:lnSpc>
                 <a:spcPct val="100000"/>
               </a:lnSpc>
               <a:buNone/>
             </a:pPr>
             <a:r>
-              <a:rPr lang="ru-RU" sz="2799" b="1" cap="none" spc="0" baseline="0" dirty="0">
+              <a:rPr lang="ru-RU" sz="5600" b="0" cap="none" spc="0" baseline="0" dirty="0">
                 <a:solidFill>
                   <a:srgbClr val="C2D076"/>
                 </a:solidFill>
                 <a:latin typeface="Inter Light"/>
                 <a:cs typeface="Inter Light"/>
               </a:rPr>
-              <a:t>95%</a:t>
-            </a:r>
-            <a:endParaRPr lang="ru-RU" sz="2799"/>
+              <a:t>02</a:t>
+            </a:r>
+            <a:endParaRPr lang="ru-RU" sz="5600"/>
           </a:p>
         </p:txBody>
       </p:sp>
       <p:sp>
         <p:nvSpPr>
-          <p:cNvPr id="48" name="Swatch 48"/>
-          <p:cNvSpPr/>
-          <p:nvPr/>
-        </p:nvSpPr>
-        <p:spPr>
-          <a:xfrm>
-            <a:off x="9255337" y="6558591"/>
-            <a:ext cx="255941" cy="255941"/>
-          </a:xfrm>
-          <a:prstGeom prst="roundRect">
-            <a:avLst>
-              <a:gd name="adj" fmla="val 24999"/>
-            </a:avLst>
-          </a:prstGeom>
-          <a:solidFill>
-            <a:srgbClr val="E8EDCB"/>
-          </a:solidFill>
-          <a:ln>
-            <a:noFill/>
-          </a:ln>
-        </p:spPr>
-      </p:sp>
-      <p:sp>
-        <p:nvSpPr>
-          <p:cNvPr id="49" name="Legend 49"/>
+          <p:cNvPr id="48" name="Card text 48"/>
           <p:cNvSpPr txBox="1"/>
           <p:nvPr/>
         </p:nvSpPr>
         <p:spPr>
           <a:xfrm>
-            <a:off x="9716030" y="6473278"/>
-            <a:ext cx="3451310" cy="451968"/>
+            <a:off x="7018934" y="6062534"/>
+            <a:ext cx="4250132" cy="2353748"/>
           </a:xfrm>
           <a:prstGeom prst="rect">
             <a:avLst/>
@@ -5724,32 +5705,78 @@
               <a:lnSpc>
                 <a:spcPct val="100000"/>
               </a:lnSpc>
+              <a:spcAft>
+                <a:spcPts val="4898"/>
+              </a:spcAft>
               <a:buNone/>
             </a:pPr>
             <a:r>
               <a:rPr lang="ru-RU" sz="2799" b="0" cap="none" spc="0" baseline="0" dirty="0">
                 <a:solidFill>
-                  <a:srgbClr val="FFFFFF"/>
+                  <a:srgbClr val="C2D076"/>
                 </a:solidFill>
                 <a:latin typeface="Inter Light"/>
                 <a:cs typeface="Inter Light"/>
               </a:rPr>
-              <a:t>Плейсхолдеры</a:t>
+              <a:t>ИИ ломает стиль</a:t>
             </a:r>
             <a:endParaRPr lang="ru-RU" sz="2799"/>
           </a:p>
+          <a:p>
+            <a:pPr algn="l" marL="0" indent="0">
+              <a:lnSpc>
+                <a:spcPct val="100000"/>
+              </a:lnSpc>
+              <a:buNone/>
+            </a:pPr>
+            <a:r>
+              <a:rPr lang="ru-RU" sz="2799" b="0" cap="none" spc="0" baseline="0" dirty="0">
+                <a:solidFill>
+                  <a:srgbClr val="FFFFFF"/>
+                </a:solidFill>
+                <a:latin typeface="Inter Light"/>
+                <a:cs typeface="Inter Light"/>
+              </a:rPr>
+              <a:t>Нейросети пишут текст, но не воспроизводят дизайн</a:t>
+            </a:r>
+            <a:endParaRPr lang="ru-RU" sz="2799"/>
+          </a:p>
         </p:txBody>
       </p:sp>
       <p:sp>
         <p:nvSpPr>
-          <p:cNvPr id="50" name="Share 50"/>
+          <p:cNvPr id="49" name="Card 49"/>
+          <p:cNvSpPr/>
+          <p:nvPr/>
+        </p:nvSpPr>
+        <p:spPr>
+          <a:xfrm>
+            <a:off x="12143232" y="4665827"/>
+            <a:ext cx="5120640" cy="4185709"/>
+          </a:xfrm>
+          <a:prstGeom prst="roundRect">
+            <a:avLst>
+              <a:gd name="adj" fmla="val 2621"/>
+            </a:avLst>
+          </a:prstGeom>
+          <a:solidFill>
+            <a:srgbClr val="000000"/>
+          </a:solidFill>
+          <a:ln>
+            <a:noFill/>
+          </a:ln>
+        </p:spPr>
+      </p:sp>
+      <p:sp>
+        <p:nvSpPr>
+          <p:cNvPr id="50" name="Index 50"/>
           <p:cNvSpPr txBox="1"/>
           <p:nvPr/>
         </p:nvSpPr>
         <p:spPr>
           <a:xfrm>
-            <a:off x="13167340" y="6473278"/>
-            <a:ext cx="915732" cy="451968"/>
+            <a:off x="12578486" y="5101081"/>
+            <a:ext cx="4250132" cy="853440"/>
           </a:xfrm>
           <a:prstGeom prst="rect">
             <a:avLst/>
@@ -5762,36 +5789,36 @@
           </a:bodyPr>
           <a:lstStyle/>
           <a:p>
-            <a:pPr algn="r" marL="0" indent="0">
+            <a:pPr algn="l" marL="0" indent="0">
               <a:lnSpc>
                 <a:spcPct val="100000"/>
               </a:lnSpc>
               <a:buNone/>
             </a:pPr>
             <a:r>
-              <a:rPr lang="ru-RU" sz="2799" b="1" cap="none" spc="0" baseline="0" dirty="0">
-                <a:solidFill>
-                  <a:srgbClr val="FFFFFF"/>
+              <a:rPr lang="ru-RU" sz="5600" b="0" cap="none" spc="0" baseline="0" dirty="0">
+                <a:solidFill>
+                  <a:srgbClr val="C2D076"/>
                 </a:solidFill>
                 <a:latin typeface="Inter Light"/>
                 <a:cs typeface="Inter Light"/>
               </a:rPr>
-              <a:t>5%</a:t>
-            </a:r>
-            <a:endParaRPr lang="ru-RU" sz="2799"/>
+              <a:t>03</a:t>
+            </a:r>
+            <a:endParaRPr lang="ru-RU" sz="5600"/>
           </a:p>
         </p:txBody>
       </p:sp>
       <p:sp>
         <p:nvSpPr>
-          <p:cNvPr id="51" name="Note 51"/>
+          <p:cNvPr id="51" name="Card text 51"/>
           <p:cNvSpPr txBox="1"/>
           <p:nvPr/>
         </p:nvSpPr>
         <p:spPr>
           <a:xfrm>
-            <a:off x="1024128" y="8552358"/>
-            <a:ext cx="7680960" cy="695655"/>
+            <a:off x="12578486" y="6062534"/>
+            <a:ext cx="4250132" cy="2353748"/>
           </a:xfrm>
           <a:prstGeom prst="rect">
             <a:avLst/>
@@ -5804,79 +5831,45 @@
           </a:bodyPr>
           <a:lstStyle/>
           <a:p>
-            <a:pPr algn="l" marL="307200" indent="-307200">
+            <a:pPr algn="l" marL="0" indent="0">
               <a:lnSpc>
                 <a:spcPct val="100000"/>
               </a:lnSpc>
               <a:spcAft>
-                <a:spcPts val="1100"/>
+                <a:spcPts val="1539"/>
               </a:spcAft>
-              <a:buClr>
-                <a:srgbClr val="C2D076"/>
-              </a:buClr>
-              <a:buFont typeface="Arial"/>
-              <a:buChar char="•"/>
+              <a:buNone/>
             </a:pPr>
             <a:r>
-              <a:rPr lang="ru-RU" sz="2199" b="0" cap="none" spc="0" baseline="0" dirty="0">
-                <a:solidFill>
-                  <a:srgbClr val="FFFFFF"/>
+              <a:rPr lang="ru-RU" sz="2799" b="0" cap="none" spc="0" baseline="0" dirty="0">
+                <a:solidFill>
+                  <a:srgbClr val="C2D076"/>
                 </a:solidFill>
                 <a:latin typeface="Inter Light"/>
                 <a:cs typeface="Inter Light"/>
               </a:rPr>
-              <a:t>Правила оформления приходится выводить из образцов</a:t>
-            </a:r>
-            <a:endParaRPr lang="ru-RU" sz="2199"/>
-          </a:p>
-        </p:txBody>
-      </p:sp>
-      <p:sp>
-        <p:nvSpPr>
-          <p:cNvPr id="52" name="Note 52"/>
-          <p:cNvSpPr txBox="1"/>
-          <p:nvPr/>
-        </p:nvSpPr>
-        <p:spPr>
-          <a:xfrm>
-            <a:off x="9582912" y="8552358"/>
-            <a:ext cx="7680960" cy="695655"/>
-          </a:xfrm>
-          <a:prstGeom prst="rect">
-            <a:avLst/>
-          </a:prstGeom>
-          <a:noFill/>
-        </p:spPr>
-        <p:txBody>
-          <a:bodyPr wrap="square" lIns="0" tIns="0" rIns="0" bIns="0" anchor="t" rtlCol="0">
-            <a:noAutofit/>
-          </a:bodyPr>
-          <a:lstStyle/>
-          <a:p>
-            <a:pPr algn="l" marL="307200" indent="-307200">
+              <a:t>Шаблон — не инструкция</a:t>
+            </a:r>
+            <a:endParaRPr lang="ru-RU" sz="2799"/>
+          </a:p>
+          <a:p>
+            <a:pPr algn="l" marL="0" indent="0">
               <a:lnSpc>
                 <a:spcPct val="100000"/>
               </a:lnSpc>
-              <a:spcAft>
-                <a:spcPts val="1100"/>
-              </a:spcAft>
-              <a:buClr>
-                <a:srgbClr val="C2D076"/>
-              </a:buClr>
-              <a:buFont typeface="Arial"/>
-              <a:buChar char="•"/>
+              <a:buNone/>
             </a:pPr>
             <a:r>
-              <a:rPr lang="ru-RU" sz="2199" b="0" cap="none" spc="0" baseline="0" dirty="0">
+              <a:rPr lang="ru-RU" sz="2799" b="0" cap="none" spc="0" baseline="0" dirty="0">
                 <a:solidFill>
                   <a:srgbClr val="FFFFFF"/>
                 </a:solidFill>
                 <a:latin typeface="Inter Light"/>
                 <a:cs typeface="Inter Light"/>
               </a:rPr>
-              <a:t>Палитра, кегли, сетка, поля, логотипы и колонтитулы не автоматизированы</a:t>
-            </a:r>
-            <a:endParaRPr lang="ru-RU" sz="2199"/>
+              <a:t>Слайды-⁠образцы не показывают, как собрать новый слайд</a:t>
+            </a:r>
+            <a:endParaRPr lang="ru-RU" sz="2799"/>
           </a:p>
         </p:txBody>
       </p:sp>
@@ -5914,7 +5907,7 @@
         <p:spPr>
           <a:xfrm>
             <a:off x="619057" y="2623820"/>
-            <a:ext cx="15727680" cy="944880"/>
+            <a:ext cx="15727680" cy="809548"/>
           </a:xfrm>
           <a:prstGeom prst="rect">
             <a:avLst/>
@@ -5957,7 +5950,7 @@
                 <a:cs typeface="Inter Medium"/>
                 <a:sym typeface="Inter Medium"/>
               </a:rPr>
-              <a:t>Шаблон читается как набор правил</a:t>
+              <a:t>95% фигур — свободные, 5% — плейсхолдеры</a:t>
             </a:r>
             <a:endParaRPr>
               <a:latin typeface="Inter Medium"/>
@@ -5968,43 +5961,81 @@
           </a:p>
         </p:txBody>
       </p:sp>
-      <p:sp>
-        <p:nvSpPr>
-          <p:cNvPr id="43" name="Card 43"/>
+      <p:graphicFrame>
+        <p:nvGraphicFramePr>
+          <p:cNvPr id="43" name="Chart 42"/>
+          <p:cNvGraphicFramePr>
+            <a:graphicFrameLocks noGrp="1"/>
+          </p:cNvGraphicFramePr>
+          <p:nvPr/>
+        </p:nvGraphicFramePr>
+        <p:xfrm>
+          <a:off x="4037364" y="3947718"/>
+          <a:ext cx="4507713" cy="4507713"/>
+        </p:xfrm>
+        <a:graphic>
+          <a:graphicData uri="http://schemas.openxmlformats.org/drawingml/2006/chart">
+            <c:chart xmlns:c="http://schemas.openxmlformats.org/drawingml/2006/chart" r:id="rId2"/>
+          </a:graphicData>
+        </a:graphic>
+      </p:graphicFrame>
+      <p:sp>
+        <p:nvSpPr>
+          <p:cNvPr id="44" name="Legend title 44"/>
+          <p:cNvSpPr txBox="1"/>
+          <p:nvPr/>
+        </p:nvSpPr>
+        <p:spPr>
+          <a:xfrm>
+            <a:off x="9422901" y="5310339"/>
+            <a:ext cx="4827735" cy="700799"/>
+          </a:xfrm>
+          <a:prstGeom prst="rect">
+            <a:avLst/>
+          </a:prstGeom>
+          <a:noFill/>
+        </p:spPr>
+        <p:txBody>
+          <a:bodyPr wrap="square" lIns="0" tIns="0" rIns="0" bIns="0" anchor="t" rtlCol="0">
+            <a:noAutofit/>
+          </a:bodyPr>
+          <a:lstStyle/>
+          <a:p>
+            <a:pPr algn="l" marL="0" indent="0">
+              <a:lnSpc>
+                <a:spcPct val="100000"/>
+              </a:lnSpc>
+              <a:buNone/>
+            </a:pPr>
+            <a:r>
+              <a:rPr lang="ru-RU" sz="2799" b="0" cap="none" spc="0" baseline="0" dirty="0">
+                <a:solidFill>
+                  <a:srgbClr val="FFFFFF"/>
+                </a:solidFill>
+                <a:latin typeface="Inter Light"/>
+                <a:cs typeface="Inter Light"/>
+              </a:rPr>
+              <a:t>Состав фигур в шаблонах</a:t>
+            </a:r>
+            <a:endParaRPr lang="ru-RU" sz="2799"/>
+          </a:p>
+        </p:txBody>
+      </p:sp>
+      <p:sp>
+        <p:nvSpPr>
+          <p:cNvPr id="45" name="Swatch 45"/>
           <p:cNvSpPr/>
           <p:nvPr/>
         </p:nvSpPr>
         <p:spPr>
           <a:xfrm>
-            <a:off x="1024128" y="4137660"/>
-            <a:ext cx="5120640" cy="3415943"/>
+            <a:off x="9422901" y="6096451"/>
+            <a:ext cx="255941" cy="255941"/>
           </a:xfrm>
           <a:prstGeom prst="roundRect">
             <a:avLst>
-              <a:gd name="adj" fmla="val 3212"/>
+              <a:gd name="adj" fmla="val 24999"/>
             </a:avLst>
-          </a:prstGeom>
-          <a:solidFill>
-            <a:srgbClr val="000000"/>
-          </a:solidFill>
-          <a:ln>
-            <a:noFill/>
-          </a:ln>
-        </p:spPr>
-      </p:sp>
-      <p:sp>
-        <p:nvSpPr>
-          <p:cNvPr id="44" name="Badge 44"/>
-          <p:cNvSpPr/>
-          <p:nvPr/>
-        </p:nvSpPr>
-        <p:spPr>
-          <a:xfrm>
-            <a:off x="1484985" y="4598517"/>
-            <a:ext cx="771525" cy="771525"/>
-          </a:xfrm>
-          <a:prstGeom prst="ellipse">
-            <a:avLst/>
           </a:prstGeom>
           <a:solidFill>
             <a:srgbClr val="C2D076"/>
@@ -6013,34 +6044,17 @@
             <a:noFill/>
           </a:ln>
         </p:spPr>
-        <p:txBody>
-          <a:bodyPr lIns="0" tIns="0" rIns="0" bIns="0" anchor="ctr" wrap="none"/>
-          <a:lstStyle/>
-          <a:p>
-            <a:pPr algn="ctr"/>
-            <a:r>
-              <a:rPr lang="ru-RU" sz="2799" b="0" cap="none" spc="0" baseline="0">
-                <a:solidFill>
-                  <a:srgbClr val="000000"/>
-                </a:solidFill>
-                <a:latin typeface="Inter Light"/>
-                <a:cs typeface="Inter Light"/>
-              </a:rPr>
-              <a:t>1</a:t>
-            </a:r>
-          </a:p>
-        </p:txBody>
-      </p:sp>
-      <p:sp>
-        <p:nvSpPr>
-          <p:cNvPr id="45" name="Step 45"/>
+      </p:sp>
+      <p:sp>
+        <p:nvSpPr>
+          <p:cNvPr id="46" name="Legend 46"/>
           <p:cNvSpPr txBox="1"/>
           <p:nvPr/>
         </p:nvSpPr>
         <p:spPr>
           <a:xfrm>
-            <a:off x="1484985" y="5647791"/>
-            <a:ext cx="4198926" cy="1444955"/>
+            <a:off x="9883594" y="6011138"/>
+            <a:ext cx="3451310" cy="451968"/>
           </a:xfrm>
           <a:prstGeom prst="rect">
             <a:avLst/>
@@ -6054,386 +6068,221 @@
           <a:lstStyle/>
           <a:p>
             <a:pPr algn="l" marL="0" indent="0">
+              <a:lnSpc>
+                <a:spcPct val="100000"/>
+              </a:lnSpc>
+              <a:buNone/>
+            </a:pPr>
+            <a:r>
+              <a:rPr lang="ru-RU" sz="2799" b="0" cap="none" spc="0" baseline="0" dirty="0">
+                <a:solidFill>
+                  <a:srgbClr val="FFFFFF"/>
+                </a:solidFill>
+                <a:latin typeface="Inter Light"/>
+                <a:cs typeface="Inter Light"/>
+              </a:rPr>
+              <a:t>Свободные фигуры</a:t>
+            </a:r>
+            <a:endParaRPr lang="ru-RU" sz="2799"/>
+          </a:p>
+        </p:txBody>
+      </p:sp>
+      <p:sp>
+        <p:nvSpPr>
+          <p:cNvPr id="47" name="Share 47"/>
+          <p:cNvSpPr txBox="1"/>
+          <p:nvPr/>
+        </p:nvSpPr>
+        <p:spPr>
+          <a:xfrm>
+            <a:off x="13334904" y="6011138"/>
+            <a:ext cx="915732" cy="451968"/>
+          </a:xfrm>
+          <a:prstGeom prst="rect">
+            <a:avLst/>
+          </a:prstGeom>
+          <a:noFill/>
+        </p:spPr>
+        <p:txBody>
+          <a:bodyPr wrap="square" lIns="0" tIns="0" rIns="0" bIns="0" anchor="t" rtlCol="0">
+            <a:noAutofit/>
+          </a:bodyPr>
+          <a:lstStyle/>
+          <a:p>
+            <a:pPr algn="r" marL="0" indent="0">
+              <a:lnSpc>
+                <a:spcPct val="100000"/>
+              </a:lnSpc>
+              <a:buNone/>
+            </a:pPr>
+            <a:r>
+              <a:rPr lang="ru-RU" sz="2799" b="1" cap="none" spc="0" baseline="0" dirty="0">
+                <a:solidFill>
+                  <a:srgbClr val="C2D076"/>
+                </a:solidFill>
+                <a:latin typeface="Inter Light"/>
+                <a:cs typeface="Inter Light"/>
+              </a:rPr>
+              <a:t>95%</a:t>
+            </a:r>
+            <a:endParaRPr lang="ru-RU" sz="2799"/>
+          </a:p>
+        </p:txBody>
+      </p:sp>
+      <p:sp>
+        <p:nvSpPr>
+          <p:cNvPr id="48" name="Swatch 48"/>
+          <p:cNvSpPr/>
+          <p:nvPr/>
+        </p:nvSpPr>
+        <p:spPr>
+          <a:xfrm>
+            <a:off x="9422901" y="6726155"/>
+            <a:ext cx="255941" cy="255941"/>
+          </a:xfrm>
+          <a:prstGeom prst="roundRect">
+            <a:avLst>
+              <a:gd name="adj" fmla="val 24999"/>
+            </a:avLst>
+          </a:prstGeom>
+          <a:solidFill>
+            <a:srgbClr val="E8EDCB"/>
+          </a:solidFill>
+          <a:ln>
+            <a:noFill/>
+          </a:ln>
+        </p:spPr>
+      </p:sp>
+      <p:sp>
+        <p:nvSpPr>
+          <p:cNvPr id="49" name="Legend 49"/>
+          <p:cNvSpPr txBox="1"/>
+          <p:nvPr/>
+        </p:nvSpPr>
+        <p:spPr>
+          <a:xfrm>
+            <a:off x="9883594" y="6640842"/>
+            <a:ext cx="3451310" cy="451968"/>
+          </a:xfrm>
+          <a:prstGeom prst="rect">
+            <a:avLst/>
+          </a:prstGeom>
+          <a:noFill/>
+        </p:spPr>
+        <p:txBody>
+          <a:bodyPr wrap="square" lIns="0" tIns="0" rIns="0" bIns="0" anchor="t" rtlCol="0">
+            <a:noAutofit/>
+          </a:bodyPr>
+          <a:lstStyle/>
+          <a:p>
+            <a:pPr algn="l" marL="0" indent="0">
+              <a:lnSpc>
+                <a:spcPct val="100000"/>
+              </a:lnSpc>
+              <a:buNone/>
+            </a:pPr>
+            <a:r>
+              <a:rPr lang="ru-RU" sz="2799" b="0" cap="none" spc="0" baseline="0" dirty="0">
+                <a:solidFill>
+                  <a:srgbClr val="FFFFFF"/>
+                </a:solidFill>
+                <a:latin typeface="Inter Light"/>
+                <a:cs typeface="Inter Light"/>
+              </a:rPr>
+              <a:t>Плейсхолдеры</a:t>
+            </a:r>
+            <a:endParaRPr lang="ru-RU" sz="2799"/>
+          </a:p>
+        </p:txBody>
+      </p:sp>
+      <p:sp>
+        <p:nvSpPr>
+          <p:cNvPr id="50" name="Share 50"/>
+          <p:cNvSpPr txBox="1"/>
+          <p:nvPr/>
+        </p:nvSpPr>
+        <p:spPr>
+          <a:xfrm>
+            <a:off x="13334904" y="6640842"/>
+            <a:ext cx="915732" cy="451968"/>
+          </a:xfrm>
+          <a:prstGeom prst="rect">
+            <a:avLst/>
+          </a:prstGeom>
+          <a:noFill/>
+        </p:spPr>
+        <p:txBody>
+          <a:bodyPr wrap="square" lIns="0" tIns="0" rIns="0" bIns="0" anchor="t" rtlCol="0">
+            <a:noAutofit/>
+          </a:bodyPr>
+          <a:lstStyle/>
+          <a:p>
+            <a:pPr algn="r" marL="0" indent="0">
+              <a:lnSpc>
+                <a:spcPct val="100000"/>
+              </a:lnSpc>
+              <a:buNone/>
+            </a:pPr>
+            <a:r>
+              <a:rPr lang="ru-RU" sz="2799" b="1" cap="none" spc="0" baseline="0" dirty="0">
+                <a:solidFill>
+                  <a:srgbClr val="FFFFFF"/>
+                </a:solidFill>
+                <a:latin typeface="Inter Light"/>
+                <a:cs typeface="Inter Light"/>
+              </a:rPr>
+              <a:t>5%</a:t>
+            </a:r>
+            <a:endParaRPr lang="ru-RU" sz="2799"/>
+          </a:p>
+        </p:txBody>
+      </p:sp>
+      <p:sp>
+        <p:nvSpPr>
+          <p:cNvPr id="51" name="Note 51"/>
+          <p:cNvSpPr txBox="1"/>
+          <p:nvPr/>
+        </p:nvSpPr>
+        <p:spPr>
+          <a:xfrm>
+            <a:off x="1024128" y="8887485"/>
+            <a:ext cx="12991795" cy="360528"/>
+          </a:xfrm>
+          <a:prstGeom prst="rect">
+            <a:avLst/>
+          </a:prstGeom>
+          <a:noFill/>
+        </p:spPr>
+        <p:txBody>
+          <a:bodyPr wrap="square" lIns="0" tIns="0" rIns="0" bIns="0" anchor="t" rtlCol="0">
+            <a:noAutofit/>
+          </a:bodyPr>
+          <a:lstStyle/>
+          <a:p>
+            <a:pPr algn="l" marL="307200" indent="-307200">
               <a:lnSpc>
                 <a:spcPct val="100000"/>
               </a:lnSpc>
               <a:spcAft>
                 <a:spcPts val="1100"/>
               </a:spcAft>
-              <a:buNone/>
+              <a:buClr>
+                <a:srgbClr val="C2D076"/>
+              </a:buClr>
+              <a:buFont typeface="Arial"/>
+              <a:buChar char="•"/>
             </a:pPr>
             <a:r>
               <a:rPr lang="ru-RU" sz="2199" b="0" cap="none" spc="0" baseline="0" dirty="0">
                 <a:solidFill>
-                  <a:srgbClr val="C2D076"/>
+                  <a:srgbClr val="FFFFFF"/>
                 </a:solidFill>
                 <a:latin typeface="Inter Light"/>
                 <a:cs typeface="Inter Light"/>
               </a:rPr>
-              <a:t>На входе — шаблон и текст</a:t>
+              <a:t>Правила оформления нужно выводить из образцов</a:t>
             </a:r>
             <a:endParaRPr lang="ru-RU" sz="2199"/>
-          </a:p>
-          <a:p>
-            <a:pPr algn="l" marL="0" indent="0">
-              <a:lnSpc>
-                <a:spcPct val="100000"/>
-              </a:lnSpc>
-              <a:buNone/>
-            </a:pPr>
-            <a:r>
-              <a:rPr lang="ru-RU" sz="2000" b="0" cap="none" spc="0" baseline="0" dirty="0">
-                <a:solidFill>
-                  <a:srgbClr val="FFFFFF"/>
-                </a:solidFill>
-                <a:latin typeface="Inter Light"/>
-                <a:cs typeface="Inter Light"/>
-              </a:rPr>
-              <a:t>Verstka берёт шаблон и текст</a:t>
-            </a:r>
-            <a:endParaRPr lang="ru-RU" sz="2000"/>
-          </a:p>
-        </p:txBody>
-      </p:sp>
-      <p:sp>
-        <p:nvSpPr>
-          <p:cNvPr id="46" name="Card 46"/>
-          <p:cNvSpPr/>
-          <p:nvPr/>
-        </p:nvSpPr>
-        <p:spPr>
-          <a:xfrm>
-            <a:off x="6583680" y="4137660"/>
-            <a:ext cx="5120640" cy="3415943"/>
-          </a:xfrm>
-          <a:prstGeom prst="roundRect">
-            <a:avLst>
-              <a:gd name="adj" fmla="val 3212"/>
-            </a:avLst>
-          </a:prstGeom>
-          <a:solidFill>
-            <a:srgbClr val="000000"/>
-          </a:solidFill>
-          <a:ln>
-            <a:noFill/>
-          </a:ln>
-        </p:spPr>
-      </p:sp>
-      <p:sp>
-        <p:nvSpPr>
-          <p:cNvPr id="47" name="Badge 47"/>
-          <p:cNvSpPr/>
-          <p:nvPr/>
-        </p:nvSpPr>
-        <p:spPr>
-          <a:xfrm>
-            <a:off x="7044537" y="4598517"/>
-            <a:ext cx="771525" cy="771525"/>
-          </a:xfrm>
-          <a:prstGeom prst="ellipse">
-            <a:avLst/>
-          </a:prstGeom>
-          <a:solidFill>
-            <a:srgbClr val="C2D076"/>
-          </a:solidFill>
-          <a:ln>
-            <a:noFill/>
-          </a:ln>
-        </p:spPr>
-        <p:txBody>
-          <a:bodyPr lIns="0" tIns="0" rIns="0" bIns="0" anchor="ctr" wrap="none"/>
-          <a:lstStyle/>
-          <a:p>
-            <a:pPr algn="ctr"/>
-            <a:r>
-              <a:rPr lang="ru-RU" sz="2799" b="0" cap="none" spc="0" baseline="0">
-                <a:solidFill>
-                  <a:srgbClr val="000000"/>
-                </a:solidFill>
-                <a:latin typeface="Inter Light"/>
-                <a:cs typeface="Inter Light"/>
-              </a:rPr>
-              <a:t>2</a:t>
-            </a:r>
-          </a:p>
-        </p:txBody>
-      </p:sp>
-      <p:sp>
-        <p:nvSpPr>
-          <p:cNvPr id="48" name="Step 48"/>
-          <p:cNvSpPr txBox="1"/>
-          <p:nvPr/>
-        </p:nvSpPr>
-        <p:spPr>
-          <a:xfrm>
-            <a:off x="7044537" y="5647791"/>
-            <a:ext cx="4198926" cy="1444955"/>
-          </a:xfrm>
-          <a:prstGeom prst="rect">
-            <a:avLst/>
-          </a:prstGeom>
-          <a:noFill/>
-        </p:spPr>
-        <p:txBody>
-          <a:bodyPr wrap="square" lIns="0" tIns="0" rIns="0" bIns="0" anchor="t" rtlCol="0">
-            <a:noAutofit/>
-          </a:bodyPr>
-          <a:lstStyle/>
-          <a:p>
-            <a:pPr algn="l" marL="0" indent="0">
-              <a:lnSpc>
-                <a:spcPct val="100000"/>
-              </a:lnSpc>
-              <a:spcAft>
-                <a:spcPts val="1100"/>
-              </a:spcAft>
-              <a:buNone/>
-            </a:pPr>
-            <a:r>
-              <a:rPr lang="ru-RU" sz="2199" b="0" cap="none" spc="0" baseline="0" dirty="0">
-                <a:solidFill>
-                  <a:srgbClr val="C2D076"/>
-                </a:solidFill>
-                <a:latin typeface="Inter Light"/>
-                <a:cs typeface="Inter Light"/>
-              </a:rPr>
-              <a:t>Шаблон — набор правил</a:t>
-            </a:r>
-            <a:endParaRPr lang="ru-RU" sz="2199"/>
-          </a:p>
-          <a:p>
-            <a:pPr algn="l" marL="0" indent="0">
-              <a:lnSpc>
-                <a:spcPct val="100000"/>
-              </a:lnSpc>
-              <a:buNone/>
-            </a:pPr>
-            <a:r>
-              <a:rPr lang="ru-RU" sz="2000" b="0" cap="none" spc="0" baseline="0" dirty="0">
-                <a:solidFill>
-                  <a:srgbClr val="FFFFFF"/>
-                </a:solidFill>
-                <a:latin typeface="Inter Light"/>
-                <a:cs typeface="Inter Light"/>
-              </a:rPr>
-              <a:t>Шаблон читается как набор правил, а не как набор макетов</a:t>
-            </a:r>
-            <a:endParaRPr lang="ru-RU" sz="2000"/>
-          </a:p>
-        </p:txBody>
-      </p:sp>
-      <p:sp>
-        <p:nvSpPr>
-          <p:cNvPr id="49" name="Card 49"/>
-          <p:cNvSpPr/>
-          <p:nvPr/>
-        </p:nvSpPr>
-        <p:spPr>
-          <a:xfrm>
-            <a:off x="12143232" y="4137660"/>
-            <a:ext cx="5120640" cy="3415943"/>
-          </a:xfrm>
-          <a:prstGeom prst="roundRect">
-            <a:avLst>
-              <a:gd name="adj" fmla="val 3212"/>
-            </a:avLst>
-          </a:prstGeom>
-          <a:solidFill>
-            <a:srgbClr val="000000"/>
-          </a:solidFill>
-          <a:ln>
-            <a:noFill/>
-          </a:ln>
-        </p:spPr>
-      </p:sp>
-      <p:sp>
-        <p:nvSpPr>
-          <p:cNvPr id="50" name="Badge 50"/>
-          <p:cNvSpPr/>
-          <p:nvPr/>
-        </p:nvSpPr>
-        <p:spPr>
-          <a:xfrm>
-            <a:off x="12604089" y="4598517"/>
-            <a:ext cx="771525" cy="771525"/>
-          </a:xfrm>
-          <a:prstGeom prst="ellipse">
-            <a:avLst/>
-          </a:prstGeom>
-          <a:solidFill>
-            <a:srgbClr val="C2D076"/>
-          </a:solidFill>
-          <a:ln>
-            <a:noFill/>
-          </a:ln>
-        </p:spPr>
-        <p:txBody>
-          <a:bodyPr lIns="0" tIns="0" rIns="0" bIns="0" anchor="ctr" wrap="none"/>
-          <a:lstStyle/>
-          <a:p>
-            <a:pPr algn="ctr"/>
-            <a:r>
-              <a:rPr lang="ru-RU" sz="2799" b="0" cap="none" spc="0" baseline="0">
-                <a:solidFill>
-                  <a:srgbClr val="000000"/>
-                </a:solidFill>
-                <a:latin typeface="Inter Light"/>
-                <a:cs typeface="Inter Light"/>
-              </a:rPr>
-              <a:t>3</a:t>
-            </a:r>
-          </a:p>
-        </p:txBody>
-      </p:sp>
-      <p:sp>
-        <p:nvSpPr>
-          <p:cNvPr id="51" name="Step 51"/>
-          <p:cNvSpPr txBox="1"/>
-          <p:nvPr/>
-        </p:nvSpPr>
-        <p:spPr>
-          <a:xfrm>
-            <a:off x="12604089" y="5647791"/>
-            <a:ext cx="4198926" cy="1444955"/>
-          </a:xfrm>
-          <a:prstGeom prst="rect">
-            <a:avLst/>
-          </a:prstGeom>
-          <a:noFill/>
-        </p:spPr>
-        <p:txBody>
-          <a:bodyPr wrap="square" lIns="0" tIns="0" rIns="0" bIns="0" anchor="t" rtlCol="0">
-            <a:noAutofit/>
-          </a:bodyPr>
-          <a:lstStyle/>
-          <a:p>
-            <a:pPr algn="l" marL="0" indent="0">
-              <a:lnSpc>
-                <a:spcPct val="100000"/>
-              </a:lnSpc>
-              <a:spcAft>
-                <a:spcPts val="1100"/>
-              </a:spcAft>
-              <a:buNone/>
-            </a:pPr>
-            <a:r>
-              <a:rPr lang="ru-RU" sz="2199" b="0" cap="none" spc="0" baseline="0" dirty="0">
-                <a:solidFill>
-                  <a:srgbClr val="C2D076"/>
-                </a:solidFill>
-                <a:latin typeface="Inter Light"/>
-                <a:cs typeface="Inter Light"/>
-              </a:rPr>
-              <a:t>На выходе — три редактируемые презентации</a:t>
-            </a:r>
-            <a:endParaRPr lang="ru-RU" sz="2199"/>
-          </a:p>
-          <a:p>
-            <a:pPr algn="l" marL="0" indent="0">
-              <a:lnSpc>
-                <a:spcPct val="100000"/>
-              </a:lnSpc>
-              <a:buNone/>
-            </a:pPr>
-            <a:r>
-              <a:rPr lang="ru-RU" sz="2000" b="0" cap="none" spc="0" baseline="0" dirty="0">
-                <a:solidFill>
-                  <a:srgbClr val="FFFFFF"/>
-                </a:solidFill>
-                <a:latin typeface="Inter Light"/>
-                <a:cs typeface="Inter Light"/>
-              </a:rPr>
-              <a:t>Создаются три редактируемые презентации в стиле шаблона</a:t>
-            </a:r>
-            <a:endParaRPr lang="ru-RU" sz="2000"/>
-          </a:p>
-        </p:txBody>
-      </p:sp>
-      <p:sp>
-        <p:nvSpPr>
-          <p:cNvPr id="52" name="Conclusion strip 52"/>
-          <p:cNvSpPr/>
-          <p:nvPr/>
-        </p:nvSpPr>
-        <p:spPr>
-          <a:xfrm>
-            <a:off x="1024128" y="7985657"/>
-            <a:ext cx="16239744" cy="892754"/>
-          </a:xfrm>
-          <a:prstGeom prst="roundRect">
-            <a:avLst>
-              <a:gd name="adj" fmla="val 12290"/>
-            </a:avLst>
-          </a:prstGeom>
-          <a:solidFill>
-            <a:srgbClr val="000000"/>
-          </a:solidFill>
-          <a:ln>
-            <a:noFill/>
-          </a:ln>
-        </p:spPr>
-      </p:sp>
-      <p:sp>
-        <p:nvSpPr>
-          <p:cNvPr id="53" name="Conclusion bar 53"/>
-          <p:cNvSpPr/>
-          <p:nvPr/>
-        </p:nvSpPr>
-        <p:spPr>
-          <a:xfrm>
-            <a:off x="1379601" y="8248707"/>
-            <a:ext cx="61722" cy="366654"/>
-          </a:xfrm>
-          <a:prstGeom prst="rect">
-            <a:avLst/>
-          </a:prstGeom>
-          <a:solidFill>
-            <a:srgbClr val="C2D076"/>
-          </a:solidFill>
-          <a:ln>
-            <a:noFill/>
-          </a:ln>
-        </p:spPr>
-      </p:sp>
-      <p:sp>
-        <p:nvSpPr>
-          <p:cNvPr id="54" name="Conclusion 54"/>
-          <p:cNvSpPr txBox="1"/>
-          <p:nvPr/>
-        </p:nvSpPr>
-        <p:spPr>
-          <a:xfrm>
-            <a:off x="1725701" y="8206050"/>
-            <a:ext cx="15182698" cy="451968"/>
-          </a:xfrm>
-          <a:prstGeom prst="rect">
-            <a:avLst/>
-          </a:prstGeom>
-          <a:noFill/>
-        </p:spPr>
-        <p:txBody>
-          <a:bodyPr wrap="square" lIns="0" tIns="0" rIns="0" bIns="0" anchor="t" rtlCol="0">
-            <a:noAutofit/>
-          </a:bodyPr>
-          <a:lstStyle/>
-          <a:p>
-            <a:pPr algn="l" marL="0" indent="0">
-              <a:lnSpc>
-                <a:spcPct val="100000"/>
-              </a:lnSpc>
-              <a:buNone/>
-            </a:pPr>
-            <a:r>
-              <a:rPr lang="ru-RU" sz="2799" b="0" cap="none" spc="0" baseline="0" dirty="0">
-                <a:solidFill>
-                  <a:srgbClr val="C2D076"/>
-                </a:solidFill>
-                <a:latin typeface="Inter Light"/>
-                <a:cs typeface="Inter Light"/>
-              </a:rPr>
-              <a:t>Презентация в фирменном стиле без ручной вёрстки</a:t>
-            </a:r>
-            <a:endParaRPr lang="ru-RU" sz="2799"/>
           </a:p>
         </p:txBody>
       </p:sp>
@@ -6471,7 +6320,7 @@
         <p:spPr>
           <a:xfrm>
             <a:off x="619057" y="2623820"/>
-            <a:ext cx="10417162" cy="1527657"/>
+            <a:ext cx="15727680" cy="944880"/>
           </a:xfrm>
           <a:prstGeom prst="rect">
             <a:avLst/>
@@ -6505,7 +6354,7 @@
               <a:buNone/>
             </a:pPr>
             <a:r>
-              <a:rPr i="0" lang="ru-RU" sz="2799" u="none" cap="none" strike="noStrike">
+              <a:rPr i="0" lang="ru-RU" sz="4712" u="none" cap="none" strike="noStrike">
                 <a:solidFill>
                   <a:srgbClr val="C2D076"/>
                 </a:solidFill>
@@ -6514,7 +6363,7 @@
                 <a:cs typeface="Inter Medium"/>
                 <a:sym typeface="Inter Medium"/>
               </a:rPr>
-              <a:t>Открытые модели до 35 млрд параметров создают презентации</a:t>
+              <a:t>Решение</a:t>
             </a:r>
             <a:endParaRPr>
               <a:latin typeface="Inter Medium"/>
@@ -6533,12 +6382,12 @@
         </p:nvSpPr>
         <p:spPr>
           <a:xfrm>
-            <a:off x="1024128" y="4665827"/>
-            <a:ext cx="5120640" cy="1935922"/>
+            <a:off x="1024128" y="4137660"/>
+            <a:ext cx="5120640" cy="3720743"/>
           </a:xfrm>
           <a:prstGeom prst="roundRect">
             <a:avLst>
-              <a:gd name="adj" fmla="val 5667"/>
+              <a:gd name="adj" fmla="val 2949"/>
             </a:avLst>
           </a:prstGeom>
           <a:solidFill>
@@ -6551,14 +6400,53 @@
       </p:sp>
       <p:sp>
         <p:nvSpPr>
-          <p:cNvPr id="44" name="Index 44"/>
+          <p:cNvPr id="44" name="Badge 44"/>
+          <p:cNvSpPr/>
+          <p:nvPr/>
+        </p:nvSpPr>
+        <p:spPr>
+          <a:xfrm>
+            <a:off x="1484985" y="4598517"/>
+            <a:ext cx="771525" cy="771525"/>
+          </a:xfrm>
+          <a:prstGeom prst="ellipse">
+            <a:avLst/>
+          </a:prstGeom>
+          <a:solidFill>
+            <a:srgbClr val="C2D076"/>
+          </a:solidFill>
+          <a:ln>
+            <a:noFill/>
+          </a:ln>
+        </p:spPr>
+        <p:txBody>
+          <a:bodyPr lIns="0" tIns="0" rIns="0" bIns="0" anchor="ctr" wrap="none"/>
+          <a:lstStyle/>
+          <a:p>
+            <a:pPr algn="ctr"/>
+            <a:r>
+              <a:rPr lang="ru-RU" sz="2799" b="0" cap="none" spc="0" baseline="0">
+                <a:solidFill>
+                  <a:srgbClr val="000000"/>
+                </a:solidFill>
+                <a:latin typeface="Inter Light"/>
+                <a:cs typeface="Inter Light"/>
+              </a:rPr>
+              <a:t>1</a:t>
+            </a:r>
+          </a:p>
+        </p:txBody>
+      </p:sp>
+      <p:sp>
+        <p:nvSpPr>
+          <p:cNvPr id="45" name="Step 45"/>
           <p:cNvSpPr txBox="1"/>
           <p:nvPr/>
         </p:nvSpPr>
         <p:spPr>
           <a:xfrm>
-            <a:off x="1285280" y="4926979"/>
-            <a:ext cx="657797" cy="451968"/>
+            <a:off x="1484985" y="5647791"/>
+            <a:ext cx="4198926" cy="1749755"/>
           </a:xfrm>
           <a:prstGeom prst="rect">
             <a:avLst/>
@@ -6575,43 +6463,23 @@
               <a:lnSpc>
                 <a:spcPct val="100000"/>
               </a:lnSpc>
+              <a:spcAft>
+                <a:spcPts val="1100"/>
+              </a:spcAft>
               <a:buNone/>
             </a:pPr>
             <a:r>
-              <a:rPr lang="ru-RU" sz="2799" b="0" cap="none" spc="0" baseline="0" dirty="0">
+              <a:rPr lang="ru-RU" sz="2199" b="0" cap="none" spc="0" baseline="0" dirty="0">
                 <a:solidFill>
                   <a:srgbClr val="C2D076"/>
                 </a:solidFill>
                 <a:latin typeface="Inter Light"/>
                 <a:cs typeface="Inter Light"/>
               </a:rPr>
-              <a:t>01</a:t>
-            </a:r>
-            <a:endParaRPr lang="ru-RU" sz="2799"/>
-          </a:p>
-        </p:txBody>
-      </p:sp>
-      <p:sp>
-        <p:nvSpPr>
-          <p:cNvPr id="45" name="Card text 45"/>
-          <p:cNvSpPr txBox="1"/>
-          <p:nvPr/>
-        </p:nvSpPr>
-        <p:spPr>
-          <a:xfrm>
-            <a:off x="1943077" y="4926979"/>
-            <a:ext cx="3940539" cy="451968"/>
-          </a:xfrm>
-          <a:prstGeom prst="rect">
-            <a:avLst/>
-          </a:prstGeom>
-          <a:noFill/>
-        </p:spPr>
-        <p:txBody>
-          <a:bodyPr wrap="square" lIns="0" tIns="0" rIns="0" bIns="0" anchor="t" rtlCol="0">
-            <a:noAutofit/>
-          </a:bodyPr>
-          <a:lstStyle/>
+              <a:t>На входе — шаблон и текст</a:t>
+            </a:r>
+            <a:endParaRPr lang="ru-RU" sz="2199"/>
+          </a:p>
           <a:p>
             <a:pPr algn="l" marL="0" indent="0">
               <a:lnSpc>
@@ -6620,75 +6488,33 @@
               <a:buNone/>
             </a:pPr>
             <a:r>
-              <a:rPr lang="ru-RU" sz="2799" b="0" cap="none" spc="0" baseline="0" dirty="0">
-                <a:solidFill>
-                  <a:srgbClr val="C2D076"/>
+              <a:rPr lang="ru-RU" sz="2000" b="0" cap="none" spc="0" baseline="0" dirty="0">
+                <a:solidFill>
+                  <a:srgbClr val="FFFFFF"/>
                 </a:solidFill>
                 <a:latin typeface="Inter Light"/>
                 <a:cs typeface="Inter Light"/>
               </a:rPr>
-              <a:t>Аналитик</a:t>
-            </a:r>
-            <a:endParaRPr lang="ru-RU" sz="2799"/>
+              <a:t>Verstka использует любой шаблон PowerPoint и текст для создания презентации.</a:t>
+            </a:r>
+            <a:endParaRPr lang="ru-RU" sz="2000"/>
           </a:p>
         </p:txBody>
       </p:sp>
       <p:sp>
         <p:nvSpPr>
-          <p:cNvPr id="46" name="Card text 46"/>
-          <p:cNvSpPr txBox="1"/>
-          <p:nvPr/>
-        </p:nvSpPr>
-        <p:spPr>
-          <a:xfrm>
-            <a:off x="1285280" y="5553502"/>
-            <a:ext cx="4598336" cy="787095"/>
-          </a:xfrm>
-          <a:prstGeom prst="rect">
-            <a:avLst/>
-          </a:prstGeom>
-          <a:noFill/>
-        </p:spPr>
-        <p:txBody>
-          <a:bodyPr wrap="square" lIns="0" tIns="0" rIns="0" bIns="0" anchor="t" rtlCol="0">
-            <a:noAutofit/>
-          </a:bodyPr>
-          <a:lstStyle/>
-          <a:p>
-            <a:pPr algn="l" marL="0" indent="0">
-              <a:lnSpc>
-                <a:spcPct val="100000"/>
-              </a:lnSpc>
-              <a:buNone/>
-            </a:pPr>
-            <a:r>
-              <a:rPr lang="ru-RU" sz="2499" b="0" cap="none" spc="0" baseline="0" dirty="0">
-                <a:solidFill>
-                  <a:srgbClr val="FFFFFF"/>
-                </a:solidFill>
-                <a:latin typeface="Inter Light"/>
-                <a:cs typeface="Inter Light"/>
-              </a:rPr>
-              <a:t>Находит слайды, ряды данных и просьбы</a:t>
-            </a:r>
-            <a:endParaRPr lang="ru-RU" sz="2499"/>
-          </a:p>
-        </p:txBody>
-      </p:sp>
-      <p:sp>
-        <p:nvSpPr>
-          <p:cNvPr id="47" name="Card 47"/>
+          <p:cNvPr id="46" name="Card 46"/>
           <p:cNvSpPr/>
           <p:nvPr/>
         </p:nvSpPr>
         <p:spPr>
           <a:xfrm>
-            <a:off x="6583680" y="4665827"/>
-            <a:ext cx="5120640" cy="1935922"/>
+            <a:off x="6583680" y="4137660"/>
+            <a:ext cx="5120640" cy="3720743"/>
           </a:xfrm>
           <a:prstGeom prst="roundRect">
             <a:avLst>
-              <a:gd name="adj" fmla="val 5667"/>
+              <a:gd name="adj" fmla="val 2949"/>
             </a:avLst>
           </a:prstGeom>
           <a:solidFill>
@@ -6701,14 +6527,53 @@
       </p:sp>
       <p:sp>
         <p:nvSpPr>
-          <p:cNvPr id="48" name="Index 48"/>
+          <p:cNvPr id="47" name="Badge 47"/>
+          <p:cNvSpPr/>
+          <p:nvPr/>
+        </p:nvSpPr>
+        <p:spPr>
+          <a:xfrm>
+            <a:off x="7044537" y="4598517"/>
+            <a:ext cx="771525" cy="771525"/>
+          </a:xfrm>
+          <a:prstGeom prst="ellipse">
+            <a:avLst/>
+          </a:prstGeom>
+          <a:solidFill>
+            <a:srgbClr val="C2D076"/>
+          </a:solidFill>
+          <a:ln>
+            <a:noFill/>
+          </a:ln>
+        </p:spPr>
+        <p:txBody>
+          <a:bodyPr lIns="0" tIns="0" rIns="0" bIns="0" anchor="ctr" wrap="none"/>
+          <a:lstStyle/>
+          <a:p>
+            <a:pPr algn="ctr"/>
+            <a:r>
+              <a:rPr lang="ru-RU" sz="2799" b="0" cap="none" spc="0" baseline="0">
+                <a:solidFill>
+                  <a:srgbClr val="000000"/>
+                </a:solidFill>
+                <a:latin typeface="Inter Light"/>
+                <a:cs typeface="Inter Light"/>
+              </a:rPr>
+              <a:t>2</a:t>
+            </a:r>
+          </a:p>
+        </p:txBody>
+      </p:sp>
+      <p:sp>
+        <p:nvSpPr>
+          <p:cNvPr id="48" name="Step 48"/>
           <p:cNvSpPr txBox="1"/>
           <p:nvPr/>
         </p:nvSpPr>
         <p:spPr>
           <a:xfrm>
-            <a:off x="6844832" y="4926979"/>
-            <a:ext cx="657797" cy="451968"/>
+            <a:off x="7044537" y="5647791"/>
+            <a:ext cx="4198926" cy="1749755"/>
           </a:xfrm>
           <a:prstGeom prst="rect">
             <a:avLst/>
@@ -6725,43 +6590,23 @@
               <a:lnSpc>
                 <a:spcPct val="100000"/>
               </a:lnSpc>
+              <a:spcAft>
+                <a:spcPts val="1100"/>
+              </a:spcAft>
               <a:buNone/>
             </a:pPr>
             <a:r>
-              <a:rPr lang="ru-RU" sz="2799" b="0" cap="none" spc="0" baseline="0" dirty="0">
+              <a:rPr lang="ru-RU" sz="2199" b="0" cap="none" spc="0" baseline="0" dirty="0">
                 <a:solidFill>
                   <a:srgbClr val="C2D076"/>
                 </a:solidFill>
                 <a:latin typeface="Inter Light"/>
                 <a:cs typeface="Inter Light"/>
               </a:rPr>
-              <a:t>02</a:t>
-            </a:r>
-            <a:endParaRPr lang="ru-RU" sz="2799"/>
-          </a:p>
-        </p:txBody>
-      </p:sp>
-      <p:sp>
-        <p:nvSpPr>
-          <p:cNvPr id="49" name="Card text 49"/>
-          <p:cNvSpPr txBox="1"/>
-          <p:nvPr/>
-        </p:nvSpPr>
-        <p:spPr>
-          <a:xfrm>
-            <a:off x="7502629" y="4926979"/>
-            <a:ext cx="3940539" cy="451968"/>
-          </a:xfrm>
-          <a:prstGeom prst="rect">
-            <a:avLst/>
-          </a:prstGeom>
-          <a:noFill/>
-        </p:spPr>
-        <p:txBody>
-          <a:bodyPr wrap="square" lIns="0" tIns="0" rIns="0" bIns="0" anchor="t" rtlCol="0">
-            <a:noAutofit/>
-          </a:bodyPr>
-          <a:lstStyle/>
+              <a:t>Шаблон — набор правил</a:t>
+            </a:r>
+            <a:endParaRPr lang="ru-RU" sz="2199"/>
+          </a:p>
           <a:p>
             <a:pPr algn="l" marL="0" indent="0">
               <a:lnSpc>
@@ -6770,75 +6615,33 @@
               <a:buNone/>
             </a:pPr>
             <a:r>
-              <a:rPr lang="ru-RU" sz="2799" b="0" cap="none" spc="0" baseline="0" dirty="0">
-                <a:solidFill>
-                  <a:srgbClr val="C2D076"/>
+              <a:rPr lang="ru-RU" sz="2000" b="0" cap="none" spc="0" baseline="0" dirty="0">
+                <a:solidFill>
+                  <a:srgbClr val="FFFFFF"/>
                 </a:solidFill>
                 <a:latin typeface="Inter Light"/>
                 <a:cs typeface="Inter Light"/>
               </a:rPr>
-              <a:t>Дизайнер</a:t>
-            </a:r>
-            <a:endParaRPr lang="ru-RU" sz="2799"/>
+              <a:t>Шаблон интерпретируется как набор правил, а не макетов.</a:t>
+            </a:r>
+            <a:endParaRPr lang="ru-RU" sz="2000"/>
           </a:p>
         </p:txBody>
       </p:sp>
       <p:sp>
         <p:nvSpPr>
-          <p:cNvPr id="50" name="Card text 50"/>
-          <p:cNvSpPr txBox="1"/>
-          <p:nvPr/>
-        </p:nvSpPr>
-        <p:spPr>
-          <a:xfrm>
-            <a:off x="6844832" y="5553502"/>
-            <a:ext cx="4598336" cy="787095"/>
-          </a:xfrm>
-          <a:prstGeom prst="rect">
-            <a:avLst/>
-          </a:prstGeom>
-          <a:noFill/>
-        </p:spPr>
-        <p:txBody>
-          <a:bodyPr wrap="square" lIns="0" tIns="0" rIns="0" bIns="0" anchor="t" rtlCol="0">
-            <a:noAutofit/>
-          </a:bodyPr>
-          <a:lstStyle/>
-          <a:p>
-            <a:pPr algn="l" marL="0" indent="0">
-              <a:lnSpc>
-                <a:spcPct val="100000"/>
-              </a:lnSpc>
-              <a:buNone/>
-            </a:pPr>
-            <a:r>
-              <a:rPr lang="ru-RU" sz="2499" b="0" cap="none" spc="0" baseline="0" dirty="0">
-                <a:solidFill>
-                  <a:srgbClr val="FFFFFF"/>
-                </a:solidFill>
-                <a:latin typeface="Inter Light"/>
-                <a:cs typeface="Inter Light"/>
-              </a:rPr>
-              <a:t>Продумывает каждый слайд отдельно</a:t>
-            </a:r>
-            <a:endParaRPr lang="ru-RU" sz="2499"/>
-          </a:p>
-        </p:txBody>
-      </p:sp>
-      <p:sp>
-        <p:nvSpPr>
-          <p:cNvPr id="51" name="Card 51"/>
+          <p:cNvPr id="49" name="Card 49"/>
           <p:cNvSpPr/>
           <p:nvPr/>
         </p:nvSpPr>
         <p:spPr>
           <a:xfrm>
-            <a:off x="12143232" y="4665827"/>
-            <a:ext cx="5120640" cy="1935922"/>
+            <a:off x="12143232" y="4137660"/>
+            <a:ext cx="5120640" cy="3720743"/>
           </a:xfrm>
           <a:prstGeom prst="roundRect">
             <a:avLst>
-              <a:gd name="adj" fmla="val 5667"/>
+              <a:gd name="adj" fmla="val 2949"/>
             </a:avLst>
           </a:prstGeom>
           <a:solidFill>
@@ -6851,14 +6654,53 @@
       </p:sp>
       <p:sp>
         <p:nvSpPr>
-          <p:cNvPr id="52" name="Index 52"/>
+          <p:cNvPr id="50" name="Badge 50"/>
+          <p:cNvSpPr/>
+          <p:nvPr/>
+        </p:nvSpPr>
+        <p:spPr>
+          <a:xfrm>
+            <a:off x="12604089" y="4598517"/>
+            <a:ext cx="771525" cy="771525"/>
+          </a:xfrm>
+          <a:prstGeom prst="ellipse">
+            <a:avLst/>
+          </a:prstGeom>
+          <a:solidFill>
+            <a:srgbClr val="C2D076"/>
+          </a:solidFill>
+          <a:ln>
+            <a:noFill/>
+          </a:ln>
+        </p:spPr>
+        <p:txBody>
+          <a:bodyPr lIns="0" tIns="0" rIns="0" bIns="0" anchor="ctr" wrap="none"/>
+          <a:lstStyle/>
+          <a:p>
+            <a:pPr algn="ctr"/>
+            <a:r>
+              <a:rPr lang="ru-RU" sz="2799" b="0" cap="none" spc="0" baseline="0">
+                <a:solidFill>
+                  <a:srgbClr val="000000"/>
+                </a:solidFill>
+                <a:latin typeface="Inter Light"/>
+                <a:cs typeface="Inter Light"/>
+              </a:rPr>
+              <a:t>3</a:t>
+            </a:r>
+          </a:p>
+        </p:txBody>
+      </p:sp>
+      <p:sp>
+        <p:nvSpPr>
+          <p:cNvPr id="51" name="Step 51"/>
           <p:cNvSpPr txBox="1"/>
           <p:nvPr/>
         </p:nvSpPr>
         <p:spPr>
           <a:xfrm>
-            <a:off x="12404384" y="4926979"/>
-            <a:ext cx="657797" cy="451968"/>
+            <a:off x="12604089" y="5647791"/>
+            <a:ext cx="4198926" cy="1749755"/>
           </a:xfrm>
           <a:prstGeom prst="rect">
             <a:avLst/>
@@ -6875,43 +6717,23 @@
               <a:lnSpc>
                 <a:spcPct val="100000"/>
               </a:lnSpc>
+              <a:spcAft>
+                <a:spcPts val="1100"/>
+              </a:spcAft>
               <a:buNone/>
             </a:pPr>
             <a:r>
-              <a:rPr lang="ru-RU" sz="2799" b="0" cap="none" spc="0" baseline="0" dirty="0">
+              <a:rPr lang="ru-RU" sz="2199" b="0" cap="none" spc="0" baseline="0" dirty="0">
                 <a:solidFill>
                   <a:srgbClr val="C2D076"/>
                 </a:solidFill>
                 <a:latin typeface="Inter Light"/>
                 <a:cs typeface="Inter Light"/>
               </a:rPr>
-              <a:t>03</a:t>
-            </a:r>
-            <a:endParaRPr lang="ru-RU" sz="2799"/>
-          </a:p>
-        </p:txBody>
-      </p:sp>
-      <p:sp>
-        <p:nvSpPr>
-          <p:cNvPr id="53" name="Card text 53"/>
-          <p:cNvSpPr txBox="1"/>
-          <p:nvPr/>
-        </p:nvSpPr>
-        <p:spPr>
-          <a:xfrm>
-            <a:off x="13062181" y="4926979"/>
-            <a:ext cx="3940539" cy="451968"/>
-          </a:xfrm>
-          <a:prstGeom prst="rect">
-            <a:avLst/>
-          </a:prstGeom>
-          <a:noFill/>
-        </p:spPr>
-        <p:txBody>
-          <a:bodyPr wrap="square" lIns="0" tIns="0" rIns="0" bIns="0" anchor="t" rtlCol="0">
-            <a:noAutofit/>
-          </a:bodyPr>
-          <a:lstStyle/>
+              <a:t>На выходе — три редактируемые презентации</a:t>
+            </a:r>
+            <a:endParaRPr lang="ru-RU" sz="2199"/>
+          </a:p>
           <a:p>
             <a:pPr algn="l" marL="0" indent="0">
               <a:lnSpc>
@@ -6920,75 +6742,33 @@
               <a:buNone/>
             </a:pPr>
             <a:r>
-              <a:rPr lang="ru-RU" sz="2799" b="0" cap="none" spc="0" baseline="0" dirty="0">
-                <a:solidFill>
-                  <a:srgbClr val="C2D076"/>
+              <a:rPr lang="ru-RU" sz="2000" b="0" cap="none" spc="0" baseline="0" dirty="0">
+                <a:solidFill>
+                  <a:srgbClr val="FFFFFF"/>
                 </a:solidFill>
                 <a:latin typeface="Inter Light"/>
                 <a:cs typeface="Inter Light"/>
               </a:rPr>
-              <a:t>Критик</a:t>
-            </a:r>
-            <a:endParaRPr lang="ru-RU" sz="2799"/>
+              <a:t>Результат — три презентации в стиле шаблона, готовые к редактированию.</a:t>
+            </a:r>
+            <a:endParaRPr lang="ru-RU" sz="2000"/>
           </a:p>
         </p:txBody>
       </p:sp>
       <p:sp>
         <p:nvSpPr>
-          <p:cNvPr id="54" name="Card text 54"/>
-          <p:cNvSpPr txBox="1"/>
-          <p:nvPr/>
-        </p:nvSpPr>
-        <p:spPr>
-          <a:xfrm>
-            <a:off x="12404384" y="5553502"/>
-            <a:ext cx="4598336" cy="787095"/>
-          </a:xfrm>
-          <a:prstGeom prst="rect">
-            <a:avLst/>
-          </a:prstGeom>
-          <a:noFill/>
-        </p:spPr>
-        <p:txBody>
-          <a:bodyPr wrap="square" lIns="0" tIns="0" rIns="0" bIns="0" anchor="t" rtlCol="0">
-            <a:noAutofit/>
-          </a:bodyPr>
-          <a:lstStyle/>
-          <a:p>
-            <a:pPr algn="l" marL="0" indent="0">
-              <a:lnSpc>
-                <a:spcPct val="100000"/>
-              </a:lnSpc>
-              <a:buNone/>
-            </a:pPr>
-            <a:r>
-              <a:rPr lang="ru-RU" sz="2499" b="0" cap="none" spc="0" baseline="0" dirty="0">
-                <a:solidFill>
-                  <a:srgbClr val="FFFFFF"/>
-                </a:solidFill>
-                <a:latin typeface="Inter Light"/>
-                <a:cs typeface="Inter Light"/>
-              </a:rPr>
-              <a:t>Сверяет план с текстом и правилами шаблона</a:t>
-            </a:r>
-            <a:endParaRPr lang="ru-RU" sz="2499"/>
-          </a:p>
-        </p:txBody>
-      </p:sp>
-      <p:sp>
-        <p:nvSpPr>
-          <p:cNvPr id="55" name="Card 55"/>
+          <p:cNvPr id="52" name="Conclusion strip 52"/>
           <p:cNvSpPr/>
           <p:nvPr/>
         </p:nvSpPr>
         <p:spPr>
           <a:xfrm>
-            <a:off x="3803904" y="6910359"/>
-            <a:ext cx="5120640" cy="1935922"/>
+            <a:off x="1024128" y="8290457"/>
+            <a:ext cx="16239744" cy="892754"/>
           </a:xfrm>
           <a:prstGeom prst="roundRect">
             <a:avLst>
-              <a:gd name="adj" fmla="val 5667"/>
+              <a:gd name="adj" fmla="val 12290"/>
             </a:avLst>
           </a:prstGeom>
           <a:solidFill>
@@ -7001,14 +6781,36 @@
       </p:sp>
       <p:sp>
         <p:nvSpPr>
-          <p:cNvPr id="56" name="Index 56"/>
+          <p:cNvPr id="53" name="Conclusion bar 53"/>
+          <p:cNvSpPr/>
+          <p:nvPr/>
+        </p:nvSpPr>
+        <p:spPr>
+          <a:xfrm>
+            <a:off x="1379601" y="8553507"/>
+            <a:ext cx="61722" cy="366654"/>
+          </a:xfrm>
+          <a:prstGeom prst="rect">
+            <a:avLst/>
+          </a:prstGeom>
+          <a:solidFill>
+            <a:srgbClr val="C2D076"/>
+          </a:solidFill>
+          <a:ln>
+            <a:noFill/>
+          </a:ln>
+        </p:spPr>
+      </p:sp>
+      <p:sp>
+        <p:nvSpPr>
+          <p:cNvPr id="54" name="Conclusion 54"/>
           <p:cNvSpPr txBox="1"/>
           <p:nvPr/>
         </p:nvSpPr>
         <p:spPr>
           <a:xfrm>
-            <a:off x="4065056" y="7171511"/>
-            <a:ext cx="657797" cy="451968"/>
+            <a:off x="1725701" y="8510850"/>
+            <a:ext cx="15182698" cy="451968"/>
           </a:xfrm>
           <a:prstGeom prst="rect">
             <a:avLst/>
@@ -7035,243 +6837,9 @@
                 <a:latin typeface="Inter Light"/>
                 <a:cs typeface="Inter Light"/>
               </a:rPr>
-              <a:t>04</a:t>
+              <a:t>Презентация в фирменном стиле без ручной вёрстки</a:t>
             </a:r>
             <a:endParaRPr lang="ru-RU" sz="2799"/>
-          </a:p>
-        </p:txBody>
-      </p:sp>
-      <p:sp>
-        <p:nvSpPr>
-          <p:cNvPr id="57" name="Card text 57"/>
-          <p:cNvSpPr txBox="1"/>
-          <p:nvPr/>
-        </p:nvSpPr>
-        <p:spPr>
-          <a:xfrm>
-            <a:off x="4722853" y="7171511"/>
-            <a:ext cx="3940539" cy="451968"/>
-          </a:xfrm>
-          <a:prstGeom prst="rect">
-            <a:avLst/>
-          </a:prstGeom>
-          <a:noFill/>
-        </p:spPr>
-        <p:txBody>
-          <a:bodyPr wrap="square" lIns="0" tIns="0" rIns="0" bIns="0" anchor="t" rtlCol="0">
-            <a:noAutofit/>
-          </a:bodyPr>
-          <a:lstStyle/>
-          <a:p>
-            <a:pPr algn="l" marL="0" indent="0">
-              <a:lnSpc>
-                <a:spcPct val="100000"/>
-              </a:lnSpc>
-              <a:buNone/>
-            </a:pPr>
-            <a:r>
-              <a:rPr lang="ru-RU" sz="2799" b="0" cap="none" spc="0" baseline="0" dirty="0">
-                <a:solidFill>
-                  <a:srgbClr val="C2D076"/>
-                </a:solidFill>
-                <a:latin typeface="Inter Light"/>
-                <a:cs typeface="Inter Light"/>
-              </a:rPr>
-              <a:t>Компилятор</a:t>
-            </a:r>
-            <a:endParaRPr lang="ru-RU" sz="2799"/>
-          </a:p>
-        </p:txBody>
-      </p:sp>
-      <p:sp>
-        <p:nvSpPr>
-          <p:cNvPr id="58" name="Card text 58"/>
-          <p:cNvSpPr txBox="1"/>
-          <p:nvPr/>
-        </p:nvSpPr>
-        <p:spPr>
-          <a:xfrm>
-            <a:off x="4065056" y="7798034"/>
-            <a:ext cx="4598336" cy="787095"/>
-          </a:xfrm>
-          <a:prstGeom prst="rect">
-            <a:avLst/>
-          </a:prstGeom>
-          <a:noFill/>
-        </p:spPr>
-        <p:txBody>
-          <a:bodyPr wrap="square" lIns="0" tIns="0" rIns="0" bIns="0" anchor="t" rtlCol="0">
-            <a:noAutofit/>
-          </a:bodyPr>
-          <a:lstStyle/>
-          <a:p>
-            <a:pPr algn="l" marL="0" indent="0">
-              <a:lnSpc>
-                <a:spcPct val="100000"/>
-              </a:lnSpc>
-              <a:buNone/>
-            </a:pPr>
-            <a:r>
-              <a:rPr lang="ru-RU" sz="2499" b="0" cap="none" spc="0" baseline="0" dirty="0">
-                <a:solidFill>
-                  <a:srgbClr val="FFFFFF"/>
-                </a:solidFill>
-                <a:latin typeface="Inter Light"/>
-                <a:cs typeface="Inter Light"/>
-              </a:rPr>
-              <a:t>Проверяет каждое число</a:t>
-            </a:r>
-            <a:endParaRPr lang="ru-RU" sz="2499"/>
-          </a:p>
-        </p:txBody>
-      </p:sp>
-      <p:sp>
-        <p:nvSpPr>
-          <p:cNvPr id="59" name="Card 59"/>
-          <p:cNvSpPr/>
-          <p:nvPr/>
-        </p:nvSpPr>
-        <p:spPr>
-          <a:xfrm>
-            <a:off x="9363456" y="6910359"/>
-            <a:ext cx="5120640" cy="1935922"/>
-          </a:xfrm>
-          <a:prstGeom prst="roundRect">
-            <a:avLst>
-              <a:gd name="adj" fmla="val 5667"/>
-            </a:avLst>
-          </a:prstGeom>
-          <a:solidFill>
-            <a:srgbClr val="000000"/>
-          </a:solidFill>
-          <a:ln>
-            <a:noFill/>
-          </a:ln>
-        </p:spPr>
-      </p:sp>
-      <p:sp>
-        <p:nvSpPr>
-          <p:cNvPr id="60" name="Index 60"/>
-          <p:cNvSpPr txBox="1"/>
-          <p:nvPr/>
-        </p:nvSpPr>
-        <p:spPr>
-          <a:xfrm>
-            <a:off x="9624608" y="7171511"/>
-            <a:ext cx="657797" cy="451968"/>
-          </a:xfrm>
-          <a:prstGeom prst="rect">
-            <a:avLst/>
-          </a:prstGeom>
-          <a:noFill/>
-        </p:spPr>
-        <p:txBody>
-          <a:bodyPr wrap="square" lIns="0" tIns="0" rIns="0" bIns="0" anchor="t" rtlCol="0">
-            <a:noAutofit/>
-          </a:bodyPr>
-          <a:lstStyle/>
-          <a:p>
-            <a:pPr algn="l" marL="0" indent="0">
-              <a:lnSpc>
-                <a:spcPct val="100000"/>
-              </a:lnSpc>
-              <a:buNone/>
-            </a:pPr>
-            <a:r>
-              <a:rPr lang="ru-RU" sz="2799" b="0" cap="none" spc="0" baseline="0" dirty="0">
-                <a:solidFill>
-                  <a:srgbClr val="C2D076"/>
-                </a:solidFill>
-                <a:latin typeface="Inter Light"/>
-                <a:cs typeface="Inter Light"/>
-              </a:rPr>
-              <a:t>05</a:t>
-            </a:r>
-            <a:endParaRPr lang="ru-RU" sz="2799"/>
-          </a:p>
-        </p:txBody>
-      </p:sp>
-      <p:sp>
-        <p:nvSpPr>
-          <p:cNvPr id="61" name="Card text 61"/>
-          <p:cNvSpPr txBox="1"/>
-          <p:nvPr/>
-        </p:nvSpPr>
-        <p:spPr>
-          <a:xfrm>
-            <a:off x="10282405" y="7171511"/>
-            <a:ext cx="3940539" cy="451968"/>
-          </a:xfrm>
-          <a:prstGeom prst="rect">
-            <a:avLst/>
-          </a:prstGeom>
-          <a:noFill/>
-        </p:spPr>
-        <p:txBody>
-          <a:bodyPr wrap="square" lIns="0" tIns="0" rIns="0" bIns="0" anchor="t" rtlCol="0">
-            <a:noAutofit/>
-          </a:bodyPr>
-          <a:lstStyle/>
-          <a:p>
-            <a:pPr algn="l" marL="0" indent="0">
-              <a:lnSpc>
-                <a:spcPct val="100000"/>
-              </a:lnSpc>
-              <a:buNone/>
-            </a:pPr>
-            <a:r>
-              <a:rPr lang="ru-RU" sz="2799" b="0" cap="none" spc="0" baseline="0" dirty="0">
-                <a:solidFill>
-                  <a:srgbClr val="C2D076"/>
-                </a:solidFill>
-                <a:latin typeface="Inter Light"/>
-                <a:cs typeface="Inter Light"/>
-              </a:rPr>
-              <a:t>Вёрстка</a:t>
-            </a:r>
-            <a:endParaRPr lang="ru-RU" sz="2799"/>
-          </a:p>
-        </p:txBody>
-      </p:sp>
-      <p:sp>
-        <p:nvSpPr>
-          <p:cNvPr id="62" name="Card text 62"/>
-          <p:cNvSpPr txBox="1"/>
-          <p:nvPr/>
-        </p:nvSpPr>
-        <p:spPr>
-          <a:xfrm>
-            <a:off x="9624608" y="7798034"/>
-            <a:ext cx="4598336" cy="787095"/>
-          </a:xfrm>
-          <a:prstGeom prst="rect">
-            <a:avLst/>
-          </a:prstGeom>
-          <a:noFill/>
-        </p:spPr>
-        <p:txBody>
-          <a:bodyPr wrap="square" lIns="0" tIns="0" rIns="0" bIns="0" anchor="t" rtlCol="0">
-            <a:noAutofit/>
-          </a:bodyPr>
-          <a:lstStyle/>
-          <a:p>
-            <a:pPr algn="l" marL="0" indent="0">
-              <a:lnSpc>
-                <a:spcPct val="100000"/>
-              </a:lnSpc>
-              <a:buNone/>
-            </a:pPr>
-            <a:r>
-              <a:rPr lang="ru-RU" sz="2499" b="0" cap="none" spc="0" baseline="0" dirty="0">
-                <a:solidFill>
-                  <a:srgbClr val="FFFFFF"/>
-                </a:solidFill>
-                <a:latin typeface="Inter Light"/>
-                <a:cs typeface="Inter Light"/>
-              </a:rPr>
-              <a:t>Собирает слайды по дизайн-⁠системе шаблона</a:t>
-            </a:r>
-            <a:endParaRPr lang="ru-RU" sz="2499"/>
           </a:p>
         </p:txBody>
       </p:sp>
@@ -7309,7 +6877,7 @@
         <p:spPr>
           <a:xfrm>
             <a:off x="619057" y="2623820"/>
-            <a:ext cx="15727680" cy="944880"/>
+            <a:ext cx="12707676" cy="1527657"/>
           </a:xfrm>
           <a:prstGeom prst="rect">
             <a:avLst/>
@@ -7343,7 +6911,7 @@
               <a:buNone/>
             </a:pPr>
             <a:r>
-              <a:rPr i="0" lang="ru-RU" sz="4712" u="none" cap="none" strike="noStrike">
+              <a:rPr i="0" lang="ru-RU" sz="2799" u="none" cap="none" strike="noStrike">
                 <a:solidFill>
                   <a:srgbClr val="C2D076"/>
                 </a:solidFill>
@@ -7352,7 +6920,833 @@
                 <a:cs typeface="Inter Medium"/>
                 <a:sym typeface="Inter Medium"/>
               </a:rPr>
-              <a:t>Одно содержание, три подхода к подаче</a:t>
+              <a:t>Открытые модели до 35 млрд параметров создают презентации по правилам</a:t>
+            </a:r>
+            <a:endParaRPr>
+              <a:latin typeface="Inter Medium"/>
+              <a:ea typeface="Inter Medium"/>
+              <a:cs typeface="Inter Medium"/>
+              <a:sym typeface="Inter Medium"/>
+            </a:endParaRPr>
+          </a:p>
+        </p:txBody>
+      </p:sp>
+      <p:sp>
+        <p:nvSpPr>
+          <p:cNvPr id="43" name="Card 43"/>
+          <p:cNvSpPr/>
+          <p:nvPr/>
+        </p:nvSpPr>
+        <p:spPr>
+          <a:xfrm>
+            <a:off x="1024128" y="4665827"/>
+            <a:ext cx="2896819" cy="2563602"/>
+          </a:xfrm>
+          <a:prstGeom prst="roundRect">
+            <a:avLst>
+              <a:gd name="adj" fmla="val 4280"/>
+            </a:avLst>
+          </a:prstGeom>
+          <a:solidFill>
+            <a:srgbClr val="000000"/>
+          </a:solidFill>
+          <a:ln>
+            <a:noFill/>
+          </a:ln>
+        </p:spPr>
+      </p:sp>
+      <p:sp>
+        <p:nvSpPr>
+          <p:cNvPr id="44" name="Index 44"/>
+          <p:cNvSpPr txBox="1"/>
+          <p:nvPr/>
+        </p:nvSpPr>
+        <p:spPr>
+          <a:xfrm>
+            <a:off x="1250442" y="4892141"/>
+            <a:ext cx="2444191" cy="853440"/>
+          </a:xfrm>
+          <a:prstGeom prst="rect">
+            <a:avLst/>
+          </a:prstGeom>
+          <a:noFill/>
+        </p:spPr>
+        <p:txBody>
+          <a:bodyPr wrap="square" lIns="0" tIns="0" rIns="0" bIns="0" anchor="t" rtlCol="0">
+            <a:noAutofit/>
+          </a:bodyPr>
+          <a:lstStyle/>
+          <a:p>
+            <a:pPr algn="l" marL="0" indent="0">
+              <a:lnSpc>
+                <a:spcPct val="100000"/>
+              </a:lnSpc>
+              <a:buNone/>
+            </a:pPr>
+            <a:r>
+              <a:rPr lang="ru-RU" sz="5600" b="0" cap="none" spc="0" baseline="0" dirty="0">
+                <a:solidFill>
+                  <a:srgbClr val="C2D076"/>
+                </a:solidFill>
+                <a:latin typeface="Inter Light"/>
+                <a:cs typeface="Inter Light"/>
+              </a:rPr>
+              <a:t>01</a:t>
+            </a:r>
+            <a:endParaRPr lang="ru-RU" sz="5600"/>
+          </a:p>
+        </p:txBody>
+      </p:sp>
+      <p:sp>
+        <p:nvSpPr>
+          <p:cNvPr id="45" name="Card text 45"/>
+          <p:cNvSpPr txBox="1"/>
+          <p:nvPr/>
+        </p:nvSpPr>
+        <p:spPr>
+          <a:xfrm>
+            <a:off x="1250442" y="5853594"/>
+            <a:ext cx="2444191" cy="1149521"/>
+          </a:xfrm>
+          <a:prstGeom prst="rect">
+            <a:avLst/>
+          </a:prstGeom>
+          <a:noFill/>
+        </p:spPr>
+        <p:txBody>
+          <a:bodyPr wrap="square" lIns="0" tIns="0" rIns="0" bIns="0" anchor="t" rtlCol="0">
+            <a:noAutofit/>
+          </a:bodyPr>
+          <a:lstStyle/>
+          <a:p>
+            <a:pPr algn="l" marL="0" indent="0">
+              <a:lnSpc>
+                <a:spcPct val="100000"/>
+              </a:lnSpc>
+              <a:spcAft>
+                <a:spcPts val="823"/>
+              </a:spcAft>
+              <a:buNone/>
+            </a:pPr>
+            <a:r>
+              <a:rPr lang="ru-RU" sz="2199" b="0" cap="none" spc="0" baseline="0" dirty="0">
+                <a:solidFill>
+                  <a:srgbClr val="C2D076"/>
+                </a:solidFill>
+                <a:latin typeface="Inter Light"/>
+                <a:cs typeface="Inter Light"/>
+              </a:rPr>
+              <a:t>Аналитик</a:t>
+            </a:r>
+            <a:endParaRPr lang="ru-RU" sz="2199"/>
+          </a:p>
+          <a:p>
+            <a:pPr algn="l" marL="0" indent="0">
+              <a:lnSpc>
+                <a:spcPct val="100000"/>
+              </a:lnSpc>
+              <a:buNone/>
+            </a:pPr>
+            <a:r>
+              <a:rPr lang="ru-RU" sz="1497" b="0" cap="none" spc="0" baseline="0" dirty="0">
+                <a:solidFill>
+                  <a:srgbClr val="FFFFFF"/>
+                </a:solidFill>
+                <a:latin typeface="Inter Light"/>
+                <a:cs typeface="Inter Light"/>
+              </a:rPr>
+              <a:t>Находит в тексте слайды, ряды данных и просьбы</a:t>
+            </a:r>
+            <a:endParaRPr lang="ru-RU" sz="1497"/>
+          </a:p>
+        </p:txBody>
+      </p:sp>
+      <p:sp>
+        <p:nvSpPr>
+          <p:cNvPr id="46" name="Card 46"/>
+          <p:cNvSpPr/>
+          <p:nvPr/>
+        </p:nvSpPr>
+        <p:spPr>
+          <a:xfrm>
+            <a:off x="4359859" y="4665827"/>
+            <a:ext cx="2896819" cy="2563602"/>
+          </a:xfrm>
+          <a:prstGeom prst="roundRect">
+            <a:avLst>
+              <a:gd name="adj" fmla="val 4280"/>
+            </a:avLst>
+          </a:prstGeom>
+          <a:solidFill>
+            <a:srgbClr val="000000"/>
+          </a:solidFill>
+          <a:ln>
+            <a:noFill/>
+          </a:ln>
+        </p:spPr>
+      </p:sp>
+      <p:sp>
+        <p:nvSpPr>
+          <p:cNvPr id="47" name="Index 47"/>
+          <p:cNvSpPr txBox="1"/>
+          <p:nvPr/>
+        </p:nvSpPr>
+        <p:spPr>
+          <a:xfrm>
+            <a:off x="4586173" y="4892141"/>
+            <a:ext cx="2444191" cy="853440"/>
+          </a:xfrm>
+          <a:prstGeom prst="rect">
+            <a:avLst/>
+          </a:prstGeom>
+          <a:noFill/>
+        </p:spPr>
+        <p:txBody>
+          <a:bodyPr wrap="square" lIns="0" tIns="0" rIns="0" bIns="0" anchor="t" rtlCol="0">
+            <a:noAutofit/>
+          </a:bodyPr>
+          <a:lstStyle/>
+          <a:p>
+            <a:pPr algn="l" marL="0" indent="0">
+              <a:lnSpc>
+                <a:spcPct val="100000"/>
+              </a:lnSpc>
+              <a:buNone/>
+            </a:pPr>
+            <a:r>
+              <a:rPr lang="ru-RU" sz="5600" b="0" cap="none" spc="0" baseline="0" dirty="0">
+                <a:solidFill>
+                  <a:srgbClr val="C2D076"/>
+                </a:solidFill>
+                <a:latin typeface="Inter Light"/>
+                <a:cs typeface="Inter Light"/>
+              </a:rPr>
+              <a:t>02</a:t>
+            </a:r>
+            <a:endParaRPr lang="ru-RU" sz="5600"/>
+          </a:p>
+        </p:txBody>
+      </p:sp>
+      <p:sp>
+        <p:nvSpPr>
+          <p:cNvPr id="48" name="Card text 48"/>
+          <p:cNvSpPr txBox="1"/>
+          <p:nvPr/>
+        </p:nvSpPr>
+        <p:spPr>
+          <a:xfrm>
+            <a:off x="4586173" y="5853594"/>
+            <a:ext cx="2444191" cy="1149521"/>
+          </a:xfrm>
+          <a:prstGeom prst="rect">
+            <a:avLst/>
+          </a:prstGeom>
+          <a:noFill/>
+        </p:spPr>
+        <p:txBody>
+          <a:bodyPr wrap="square" lIns="0" tIns="0" rIns="0" bIns="0" anchor="t" rtlCol="0">
+            <a:noAutofit/>
+          </a:bodyPr>
+          <a:lstStyle/>
+          <a:p>
+            <a:pPr algn="l" marL="0" indent="0">
+              <a:lnSpc>
+                <a:spcPct val="100000"/>
+              </a:lnSpc>
+              <a:spcAft>
+                <a:spcPts val="823"/>
+              </a:spcAft>
+              <a:buNone/>
+            </a:pPr>
+            <a:r>
+              <a:rPr lang="ru-RU" sz="2199" b="0" cap="none" spc="0" baseline="0" dirty="0">
+                <a:solidFill>
+                  <a:srgbClr val="C2D076"/>
+                </a:solidFill>
+                <a:latin typeface="Inter Light"/>
+                <a:cs typeface="Inter Light"/>
+              </a:rPr>
+              <a:t>Дизайнер</a:t>
+            </a:r>
+            <a:endParaRPr lang="ru-RU" sz="2199"/>
+          </a:p>
+          <a:p>
+            <a:pPr algn="l" marL="0" indent="0">
+              <a:lnSpc>
+                <a:spcPct val="100000"/>
+              </a:lnSpc>
+              <a:buNone/>
+            </a:pPr>
+            <a:r>
+              <a:rPr lang="ru-RU" sz="1497" b="0" cap="none" spc="0" baseline="0" dirty="0">
+                <a:solidFill>
+                  <a:srgbClr val="FFFFFF"/>
+                </a:solidFill>
+                <a:latin typeface="Inter Light"/>
+                <a:cs typeface="Inter Light"/>
+              </a:rPr>
+              <a:t>Продумывает каждый слайд отдельно</a:t>
+            </a:r>
+            <a:endParaRPr lang="ru-RU" sz="1497"/>
+          </a:p>
+        </p:txBody>
+      </p:sp>
+      <p:sp>
+        <p:nvSpPr>
+          <p:cNvPr id="49" name="Card 49"/>
+          <p:cNvSpPr/>
+          <p:nvPr/>
+        </p:nvSpPr>
+        <p:spPr>
+          <a:xfrm>
+            <a:off x="7695590" y="4665827"/>
+            <a:ext cx="2896819" cy="2563602"/>
+          </a:xfrm>
+          <a:prstGeom prst="roundRect">
+            <a:avLst>
+              <a:gd name="adj" fmla="val 4280"/>
+            </a:avLst>
+          </a:prstGeom>
+          <a:solidFill>
+            <a:srgbClr val="000000"/>
+          </a:solidFill>
+          <a:ln>
+            <a:noFill/>
+          </a:ln>
+        </p:spPr>
+      </p:sp>
+      <p:sp>
+        <p:nvSpPr>
+          <p:cNvPr id="50" name="Index 50"/>
+          <p:cNvSpPr txBox="1"/>
+          <p:nvPr/>
+        </p:nvSpPr>
+        <p:spPr>
+          <a:xfrm>
+            <a:off x="7921904" y="4892141"/>
+            <a:ext cx="2444191" cy="853440"/>
+          </a:xfrm>
+          <a:prstGeom prst="rect">
+            <a:avLst/>
+          </a:prstGeom>
+          <a:noFill/>
+        </p:spPr>
+        <p:txBody>
+          <a:bodyPr wrap="square" lIns="0" tIns="0" rIns="0" bIns="0" anchor="t" rtlCol="0">
+            <a:noAutofit/>
+          </a:bodyPr>
+          <a:lstStyle/>
+          <a:p>
+            <a:pPr algn="l" marL="0" indent="0">
+              <a:lnSpc>
+                <a:spcPct val="100000"/>
+              </a:lnSpc>
+              <a:buNone/>
+            </a:pPr>
+            <a:r>
+              <a:rPr lang="ru-RU" sz="5600" b="0" cap="none" spc="0" baseline="0" dirty="0">
+                <a:solidFill>
+                  <a:srgbClr val="C2D076"/>
+                </a:solidFill>
+                <a:latin typeface="Inter Light"/>
+                <a:cs typeface="Inter Light"/>
+              </a:rPr>
+              <a:t>03</a:t>
+            </a:r>
+            <a:endParaRPr lang="ru-RU" sz="5600"/>
+          </a:p>
+        </p:txBody>
+      </p:sp>
+      <p:sp>
+        <p:nvSpPr>
+          <p:cNvPr id="51" name="Card text 51"/>
+          <p:cNvSpPr txBox="1"/>
+          <p:nvPr/>
+        </p:nvSpPr>
+        <p:spPr>
+          <a:xfrm>
+            <a:off x="7921904" y="5853594"/>
+            <a:ext cx="2444191" cy="1149521"/>
+          </a:xfrm>
+          <a:prstGeom prst="rect">
+            <a:avLst/>
+          </a:prstGeom>
+          <a:noFill/>
+        </p:spPr>
+        <p:txBody>
+          <a:bodyPr wrap="square" lIns="0" tIns="0" rIns="0" bIns="0" anchor="t" rtlCol="0">
+            <a:noAutofit/>
+          </a:bodyPr>
+          <a:lstStyle/>
+          <a:p>
+            <a:pPr algn="l" marL="0" indent="0">
+              <a:lnSpc>
+                <a:spcPct val="100000"/>
+              </a:lnSpc>
+              <a:spcAft>
+                <a:spcPts val="823"/>
+              </a:spcAft>
+              <a:buNone/>
+            </a:pPr>
+            <a:r>
+              <a:rPr lang="ru-RU" sz="2199" b="0" cap="none" spc="0" baseline="0" dirty="0">
+                <a:solidFill>
+                  <a:srgbClr val="C2D076"/>
+                </a:solidFill>
+                <a:latin typeface="Inter Light"/>
+                <a:cs typeface="Inter Light"/>
+              </a:rPr>
+              <a:t>Критик</a:t>
+            </a:r>
+            <a:endParaRPr lang="ru-RU" sz="2199"/>
+          </a:p>
+          <a:p>
+            <a:pPr algn="l" marL="0" indent="0">
+              <a:lnSpc>
+                <a:spcPct val="100000"/>
+              </a:lnSpc>
+              <a:buNone/>
+            </a:pPr>
+            <a:r>
+              <a:rPr lang="ru-RU" sz="1497" b="0" cap="none" spc="0" baseline="0" dirty="0">
+                <a:solidFill>
+                  <a:srgbClr val="FFFFFF"/>
+                </a:solidFill>
+                <a:latin typeface="Inter Light"/>
+                <a:cs typeface="Inter Light"/>
+              </a:rPr>
+              <a:t>Сверяет план с текстом и правилами шаблона</a:t>
+            </a:r>
+            <a:endParaRPr lang="ru-RU" sz="1497"/>
+          </a:p>
+        </p:txBody>
+      </p:sp>
+      <p:sp>
+        <p:nvSpPr>
+          <p:cNvPr id="52" name="Card 52"/>
+          <p:cNvSpPr/>
+          <p:nvPr/>
+        </p:nvSpPr>
+        <p:spPr>
+          <a:xfrm>
+            <a:off x="11031321" y="4665827"/>
+            <a:ext cx="2896819" cy="2563602"/>
+          </a:xfrm>
+          <a:prstGeom prst="roundRect">
+            <a:avLst>
+              <a:gd name="adj" fmla="val 4280"/>
+            </a:avLst>
+          </a:prstGeom>
+          <a:solidFill>
+            <a:srgbClr val="000000"/>
+          </a:solidFill>
+          <a:ln>
+            <a:noFill/>
+          </a:ln>
+        </p:spPr>
+      </p:sp>
+      <p:sp>
+        <p:nvSpPr>
+          <p:cNvPr id="53" name="Index 53"/>
+          <p:cNvSpPr txBox="1"/>
+          <p:nvPr/>
+        </p:nvSpPr>
+        <p:spPr>
+          <a:xfrm>
+            <a:off x="11257635" y="4892141"/>
+            <a:ext cx="2444191" cy="853440"/>
+          </a:xfrm>
+          <a:prstGeom prst="rect">
+            <a:avLst/>
+          </a:prstGeom>
+          <a:noFill/>
+        </p:spPr>
+        <p:txBody>
+          <a:bodyPr wrap="square" lIns="0" tIns="0" rIns="0" bIns="0" anchor="t" rtlCol="0">
+            <a:noAutofit/>
+          </a:bodyPr>
+          <a:lstStyle/>
+          <a:p>
+            <a:pPr algn="l" marL="0" indent="0">
+              <a:lnSpc>
+                <a:spcPct val="100000"/>
+              </a:lnSpc>
+              <a:buNone/>
+            </a:pPr>
+            <a:r>
+              <a:rPr lang="ru-RU" sz="5600" b="0" cap="none" spc="0" baseline="0" dirty="0">
+                <a:solidFill>
+                  <a:srgbClr val="C2D076"/>
+                </a:solidFill>
+                <a:latin typeface="Inter Light"/>
+                <a:cs typeface="Inter Light"/>
+              </a:rPr>
+              <a:t>04</a:t>
+            </a:r>
+            <a:endParaRPr lang="ru-RU" sz="5600"/>
+          </a:p>
+        </p:txBody>
+      </p:sp>
+      <p:sp>
+        <p:nvSpPr>
+          <p:cNvPr id="54" name="Card text 54"/>
+          <p:cNvSpPr txBox="1"/>
+          <p:nvPr/>
+        </p:nvSpPr>
+        <p:spPr>
+          <a:xfrm>
+            <a:off x="11257635" y="5853594"/>
+            <a:ext cx="2444191" cy="1149521"/>
+          </a:xfrm>
+          <a:prstGeom prst="rect">
+            <a:avLst/>
+          </a:prstGeom>
+          <a:noFill/>
+        </p:spPr>
+        <p:txBody>
+          <a:bodyPr wrap="square" lIns="0" tIns="0" rIns="0" bIns="0" anchor="t" rtlCol="0">
+            <a:noAutofit/>
+          </a:bodyPr>
+          <a:lstStyle/>
+          <a:p>
+            <a:pPr algn="l" marL="0" indent="0">
+              <a:lnSpc>
+                <a:spcPct val="100000"/>
+              </a:lnSpc>
+              <a:spcAft>
+                <a:spcPts val="823"/>
+              </a:spcAft>
+              <a:buNone/>
+            </a:pPr>
+            <a:r>
+              <a:rPr lang="ru-RU" sz="2199" b="0" cap="none" spc="0" baseline="0" dirty="0">
+                <a:solidFill>
+                  <a:srgbClr val="C2D076"/>
+                </a:solidFill>
+                <a:latin typeface="Inter Light"/>
+                <a:cs typeface="Inter Light"/>
+              </a:rPr>
+              <a:t>Компилятор</a:t>
+            </a:r>
+            <a:endParaRPr lang="ru-RU" sz="2199"/>
+          </a:p>
+          <a:p>
+            <a:pPr algn="l" marL="0" indent="0">
+              <a:lnSpc>
+                <a:spcPct val="100000"/>
+              </a:lnSpc>
+              <a:buNone/>
+            </a:pPr>
+            <a:r>
+              <a:rPr lang="ru-RU" sz="1497" b="0" cap="none" spc="0" baseline="0" dirty="0">
+                <a:solidFill>
+                  <a:srgbClr val="FFFFFF"/>
+                </a:solidFill>
+                <a:latin typeface="Inter Light"/>
+                <a:cs typeface="Inter Light"/>
+              </a:rPr>
+              <a:t>Проверяет каждое число</a:t>
+            </a:r>
+            <a:endParaRPr lang="ru-RU" sz="1497"/>
+          </a:p>
+        </p:txBody>
+      </p:sp>
+      <p:sp>
+        <p:nvSpPr>
+          <p:cNvPr id="55" name="Card 55"/>
+          <p:cNvSpPr/>
+          <p:nvPr/>
+        </p:nvSpPr>
+        <p:spPr>
+          <a:xfrm>
+            <a:off x="14367052" y="4665827"/>
+            <a:ext cx="2896819" cy="2563602"/>
+          </a:xfrm>
+          <a:prstGeom prst="roundRect">
+            <a:avLst>
+              <a:gd name="adj" fmla="val 4280"/>
+            </a:avLst>
+          </a:prstGeom>
+          <a:solidFill>
+            <a:srgbClr val="000000"/>
+          </a:solidFill>
+          <a:ln>
+            <a:noFill/>
+          </a:ln>
+        </p:spPr>
+      </p:sp>
+      <p:sp>
+        <p:nvSpPr>
+          <p:cNvPr id="56" name="Index 56"/>
+          <p:cNvSpPr txBox="1"/>
+          <p:nvPr/>
+        </p:nvSpPr>
+        <p:spPr>
+          <a:xfrm>
+            <a:off x="14593366" y="4892141"/>
+            <a:ext cx="2444191" cy="853440"/>
+          </a:xfrm>
+          <a:prstGeom prst="rect">
+            <a:avLst/>
+          </a:prstGeom>
+          <a:noFill/>
+        </p:spPr>
+        <p:txBody>
+          <a:bodyPr wrap="square" lIns="0" tIns="0" rIns="0" bIns="0" anchor="t" rtlCol="0">
+            <a:noAutofit/>
+          </a:bodyPr>
+          <a:lstStyle/>
+          <a:p>
+            <a:pPr algn="l" marL="0" indent="0">
+              <a:lnSpc>
+                <a:spcPct val="100000"/>
+              </a:lnSpc>
+              <a:buNone/>
+            </a:pPr>
+            <a:r>
+              <a:rPr lang="ru-RU" sz="5600" b="0" cap="none" spc="0" baseline="0" dirty="0">
+                <a:solidFill>
+                  <a:srgbClr val="C2D076"/>
+                </a:solidFill>
+                <a:latin typeface="Inter Light"/>
+                <a:cs typeface="Inter Light"/>
+              </a:rPr>
+              <a:t>05</a:t>
+            </a:r>
+            <a:endParaRPr lang="ru-RU" sz="5600"/>
+          </a:p>
+        </p:txBody>
+      </p:sp>
+      <p:sp>
+        <p:nvSpPr>
+          <p:cNvPr id="57" name="Card text 57"/>
+          <p:cNvSpPr txBox="1"/>
+          <p:nvPr/>
+        </p:nvSpPr>
+        <p:spPr>
+          <a:xfrm>
+            <a:off x="14593366" y="5853594"/>
+            <a:ext cx="2444191" cy="1149521"/>
+          </a:xfrm>
+          <a:prstGeom prst="rect">
+            <a:avLst/>
+          </a:prstGeom>
+          <a:noFill/>
+        </p:spPr>
+        <p:txBody>
+          <a:bodyPr wrap="square" lIns="0" tIns="0" rIns="0" bIns="0" anchor="t" rtlCol="0">
+            <a:noAutofit/>
+          </a:bodyPr>
+          <a:lstStyle/>
+          <a:p>
+            <a:pPr algn="l" marL="0" indent="0">
+              <a:lnSpc>
+                <a:spcPct val="100000"/>
+              </a:lnSpc>
+              <a:spcAft>
+                <a:spcPts val="823"/>
+              </a:spcAft>
+              <a:buNone/>
+            </a:pPr>
+            <a:r>
+              <a:rPr lang="ru-RU" sz="2199" b="0" cap="none" spc="0" baseline="0" dirty="0">
+                <a:solidFill>
+                  <a:srgbClr val="C2D076"/>
+                </a:solidFill>
+                <a:latin typeface="Inter Light"/>
+                <a:cs typeface="Inter Light"/>
+              </a:rPr>
+              <a:t>Вёрстка</a:t>
+            </a:r>
+            <a:endParaRPr lang="ru-RU" sz="2199"/>
+          </a:p>
+          <a:p>
+            <a:pPr algn="l" marL="0" indent="0">
+              <a:lnSpc>
+                <a:spcPct val="100000"/>
+              </a:lnSpc>
+              <a:buNone/>
+            </a:pPr>
+            <a:r>
+              <a:rPr lang="ru-RU" sz="1497" b="0" cap="none" spc="0" baseline="0" dirty="0">
+                <a:solidFill>
+                  <a:srgbClr val="FFFFFF"/>
+                </a:solidFill>
+                <a:latin typeface="Inter Light"/>
+                <a:cs typeface="Inter Light"/>
+              </a:rPr>
+              <a:t>Собирает слайды по дизайн-⁠системе шаблона</a:t>
+            </a:r>
+            <a:endParaRPr lang="ru-RU" sz="1497"/>
+          </a:p>
+        </p:txBody>
+      </p:sp>
+      <p:sp>
+        <p:nvSpPr>
+          <p:cNvPr id="58" name="Conclusion strip 58"/>
+          <p:cNvSpPr/>
+          <p:nvPr/>
+        </p:nvSpPr>
+        <p:spPr>
+          <a:xfrm>
+            <a:off x="1024128" y="7661483"/>
+            <a:ext cx="16239744" cy="892754"/>
+          </a:xfrm>
+          <a:prstGeom prst="roundRect">
+            <a:avLst>
+              <a:gd name="adj" fmla="val 12290"/>
+            </a:avLst>
+          </a:prstGeom>
+          <a:solidFill>
+            <a:srgbClr val="000000"/>
+          </a:solidFill>
+          <a:ln>
+            <a:noFill/>
+          </a:ln>
+        </p:spPr>
+      </p:sp>
+      <p:sp>
+        <p:nvSpPr>
+          <p:cNvPr id="59" name="Conclusion bar 59"/>
+          <p:cNvSpPr/>
+          <p:nvPr/>
+        </p:nvSpPr>
+        <p:spPr>
+          <a:xfrm>
+            <a:off x="1379601" y="7924533"/>
+            <a:ext cx="61722" cy="366654"/>
+          </a:xfrm>
+          <a:prstGeom prst="rect">
+            <a:avLst/>
+          </a:prstGeom>
+          <a:solidFill>
+            <a:srgbClr val="C2D076"/>
+          </a:solidFill>
+          <a:ln>
+            <a:noFill/>
+          </a:ln>
+        </p:spPr>
+      </p:sp>
+      <p:sp>
+        <p:nvSpPr>
+          <p:cNvPr id="60" name="Conclusion 60"/>
+          <p:cNvSpPr txBox="1"/>
+          <p:nvPr/>
+        </p:nvSpPr>
+        <p:spPr>
+          <a:xfrm>
+            <a:off x="1725701" y="7881876"/>
+            <a:ext cx="15182698" cy="451968"/>
+          </a:xfrm>
+          <a:prstGeom prst="rect">
+            <a:avLst/>
+          </a:prstGeom>
+          <a:noFill/>
+        </p:spPr>
+        <p:txBody>
+          <a:bodyPr wrap="square" lIns="0" tIns="0" rIns="0" bIns="0" anchor="t" rtlCol="0">
+            <a:noAutofit/>
+          </a:bodyPr>
+          <a:lstStyle/>
+          <a:p>
+            <a:pPr algn="l" marL="0" indent="0">
+              <a:lnSpc>
+                <a:spcPct val="100000"/>
+              </a:lnSpc>
+              <a:buNone/>
+            </a:pPr>
+            <a:r>
+              <a:rPr lang="ru-RU" sz="2799" b="0" cap="none" spc="0" baseline="0" dirty="0">
+                <a:solidFill>
+                  <a:srgbClr val="C2D076"/>
+                </a:solidFill>
+                <a:latin typeface="Inter Light"/>
+                <a:cs typeface="Inter Light"/>
+              </a:rPr>
+              <a:t>Работа агента включает анализ, проектирование, проверку и сборку слайдов</a:t>
+            </a:r>
+            <a:endParaRPr lang="ru-RU" sz="2799"/>
+          </a:p>
+        </p:txBody>
+      </p:sp>
+    </p:spTree>
+  </p:cSld>
+  <p:clrMapOvr>
+    <a:masterClrMapping/>
+  </p:clrMapOvr>
+</p:sld>
+</file>
+
+<file path=ppt/slides/slide6.xml><?xml version="1.0" encoding="utf-8"?>
+<p:sld xmlns:a="http://schemas.openxmlformats.org/drawingml/2006/main" xmlns:p="http://schemas.openxmlformats.org/presentationml/2006/main" xmlns:r="http://schemas.openxmlformats.org/officeDocument/2006/relationships">
+  <p:cSld>
+    <p:bg>
+      <p:bgPr>
+        <a:solidFill>
+          <a:srgbClr val="001514"/>
+        </a:solidFill>
+      </p:bgPr>
+    </p:bg>
+    <p:spTree>
+      <p:nvGrpSpPr>
+        <p:cNvPr id="1" name=""/>
+        <p:cNvGrpSpPr/>
+        <p:nvPr/>
+      </p:nvGrpSpPr>
+      <p:grpSpPr/>
+      <p:sp>
+        <p:nvSpPr>
+          <p:cNvPr id="42" name="Google Shape;42;p8"/>
+          <p:cNvSpPr txBox="1"/>
+          <p:nvPr/>
+        </p:nvSpPr>
+        <p:spPr>
+          <a:xfrm>
+            <a:off x="619057" y="2623820"/>
+            <a:ext cx="15727680" cy="944880"/>
+          </a:xfrm>
+          <a:prstGeom prst="rect">
+            <a:avLst/>
+          </a:prstGeom>
+          <a:noFill/>
+          <a:ln>
+            <a:noFill/>
+          </a:ln>
+        </p:spPr>
+        <p:txBody>
+          <a:bodyPr anchorCtr="0" anchor="t" bIns="0" lIns="0" spcFirstLastPara="1" rIns="0" wrap="square" tIns="0">
+            <a:spAutoFit/>
+          </a:bodyPr>
+          <a:lstStyle/>
+          <a:p>
+            <a:pPr indent="0" lvl="1" marL="0" marR="0" rtl="0" algn="l">
+              <a:lnSpc>
+                <a:spcPct val="120000"/>
+              </a:lnSpc>
+              <a:spcBef>
+                <a:spcPts val="0"/>
+              </a:spcBef>
+              <a:spcAft>
+                <a:spcPts val="0"/>
+              </a:spcAft>
+              <a:buClr>
+                <a:srgbClr val="C2D076"/>
+              </a:buClr>
+              <a:buSzPts val="5600"/>
+              <a:buFont typeface="Inter Medium"/>
+              <a:buNone/>
+            </a:pPr>
+            <a:r>
+              <a:rPr i="0" lang="ru-RU" sz="4712" u="none" cap="none" strike="noStrike">
+                <a:solidFill>
+                  <a:srgbClr val="C2D076"/>
+                </a:solidFill>
+                <a:latin typeface="Inter Medium"/>
+                <a:ea typeface="Inter Medium"/>
+                <a:cs typeface="Inter Medium"/>
+                <a:sym typeface="Inter Medium"/>
+              </a:rPr>
+              <a:t>Содержание одно, подача разная</a:t>
             </a:r>
             <a:endParaRPr>
               <a:latin typeface="Inter Medium"/>
@@ -7943,273 +8337,6 @@
 </p:sld>
 </file>
 
-<file path=ppt/slides/slide6.xml><?xml version="1.0" encoding="utf-8"?>
-<p:sld xmlns:a="http://schemas.openxmlformats.org/drawingml/2006/main" xmlns:p="http://schemas.openxmlformats.org/presentationml/2006/main" xmlns:r="http://schemas.openxmlformats.org/officeDocument/2006/relationships">
-  <p:cSld>
-    <p:bg>
-      <p:bgPr>
-        <a:solidFill>
-          <a:srgbClr val="001514"/>
-        </a:solidFill>
-      </p:bgPr>
-    </p:bg>
-    <p:spTree>
-      <p:nvGrpSpPr>
-        <p:cNvPr id="1" name=""/>
-        <p:cNvGrpSpPr/>
-        <p:nvPr/>
-      </p:nvGrpSpPr>
-      <p:grpSpPr/>
-      <p:sp>
-        <p:nvSpPr>
-          <p:cNvPr id="42" name="Google Shape;42;p8"/>
-          <p:cNvSpPr txBox="1"/>
-          <p:nvPr/>
-        </p:nvSpPr>
-        <p:spPr>
-          <a:xfrm>
-            <a:off x="619057" y="2623820"/>
-            <a:ext cx="15727680" cy="944880"/>
-          </a:xfrm>
-          <a:prstGeom prst="rect">
-            <a:avLst/>
-          </a:prstGeom>
-          <a:noFill/>
-          <a:ln>
-            <a:noFill/>
-          </a:ln>
-        </p:spPr>
-        <p:txBody>
-          <a:bodyPr anchorCtr="0" anchor="t" bIns="0" lIns="0" spcFirstLastPara="1" rIns="0" wrap="square" tIns="0">
-            <a:spAutoFit/>
-          </a:bodyPr>
-          <a:lstStyle/>
-          <a:p>
-            <a:pPr indent="0" lvl="1" marL="0" marR="0" rtl="0" algn="l">
-              <a:lnSpc>
-                <a:spcPct val="120000"/>
-              </a:lnSpc>
-              <a:spcBef>
-                <a:spcPts val="0"/>
-              </a:spcBef>
-              <a:spcAft>
-                <a:spcPts val="0"/>
-              </a:spcAft>
-              <a:buClr>
-                <a:srgbClr val="C2D076"/>
-              </a:buClr>
-              <a:buSzPts val="5600"/>
-              <a:buFont typeface="Inter Medium"/>
-              <a:buNone/>
-            </a:pPr>
-            <a:r>
-              <a:rPr i="0" lang="ru-RU" sz="4712" u="none" cap="none" strike="noStrike">
-                <a:solidFill>
-                  <a:srgbClr val="C2D076"/>
-                </a:solidFill>
-                <a:latin typeface="Inter Medium"/>
-                <a:ea typeface="Inter Medium"/>
-                <a:cs typeface="Inter Medium"/>
-                <a:sym typeface="Inter Medium"/>
-              </a:rPr>
-              <a:t>41 проверка качества на слайд</a:t>
-            </a:r>
-            <a:endParaRPr>
-              <a:latin typeface="Inter Medium"/>
-              <a:ea typeface="Inter Medium"/>
-              <a:cs typeface="Inter Medium"/>
-              <a:sym typeface="Inter Medium"/>
-            </a:endParaRPr>
-          </a:p>
-        </p:txBody>
-      </p:sp>
-      <p:sp>
-        <p:nvSpPr>
-          <p:cNvPr id="43" name="Unit 43"/>
-          <p:cNvSpPr txBox="1"/>
-          <p:nvPr/>
-        </p:nvSpPr>
-        <p:spPr>
-          <a:xfrm>
-            <a:off x="1024128" y="4137660"/>
-            <a:ext cx="10814792" cy="299720"/>
-          </a:xfrm>
-          <a:prstGeom prst="rect">
-            <a:avLst/>
-          </a:prstGeom>
-          <a:noFill/>
-        </p:spPr>
-        <p:txBody>
-          <a:bodyPr wrap="square" lIns="0" tIns="0" rIns="0" bIns="0" anchor="t" rtlCol="0">
-            <a:noAutofit/>
-          </a:bodyPr>
-          <a:lstStyle/>
-          <a:p>
-            <a:pPr algn="l" marL="0" indent="0">
-              <a:lnSpc>
-                <a:spcPct val="100000"/>
-              </a:lnSpc>
-              <a:buNone/>
-            </a:pPr>
-            <a:r>
-              <a:rPr lang="ru-RU" sz="1800" b="0" cap="none" spc="0" baseline="0" dirty="0">
-                <a:solidFill>
-                  <a:srgbClr val="FFFFFF"/>
-                </a:solidFill>
-                <a:latin typeface="Inter Light"/>
-                <a:cs typeface="Inter Light"/>
-              </a:rPr>
-              <a:t>Число проверок по категориям</a:t>
-            </a:r>
-            <a:endParaRPr lang="ru-RU" sz="1800"/>
-          </a:p>
-        </p:txBody>
-      </p:sp>
-      <p:graphicFrame>
-        <p:nvGraphicFramePr>
-          <p:cNvPr id="44" name="Chart 43"/>
-          <p:cNvGraphicFramePr>
-            <a:graphicFrameLocks noGrp="1"/>
-          </p:cNvGraphicFramePr>
-          <p:nvPr/>
-        </p:nvGraphicFramePr>
-        <p:xfrm>
-          <a:off x="1024128" y="4529963"/>
-          <a:ext cx="10814792" cy="4309221"/>
-        </p:xfrm>
-        <a:graphic>
-          <a:graphicData uri="http://schemas.openxmlformats.org/drawingml/2006/chart">
-            <c:chart xmlns:c="http://schemas.openxmlformats.org/drawingml/2006/chart" r:id="rId2"/>
-          </a:graphicData>
-        </a:graphic>
-      </p:graphicFrame>
-      <p:sp>
-        <p:nvSpPr>
-          <p:cNvPr id="45" name="Rule 45"/>
-          <p:cNvSpPr/>
-          <p:nvPr/>
-        </p:nvSpPr>
-        <p:spPr>
-          <a:xfrm>
-            <a:off x="12716744" y="4137660"/>
-            <a:ext cx="720090" cy="38100"/>
-          </a:xfrm>
-          <a:prstGeom prst="rect">
-            <a:avLst/>
-          </a:prstGeom>
-          <a:solidFill>
-            <a:srgbClr val="C2D076"/>
-          </a:solidFill>
-          <a:ln>
-            <a:noFill/>
-          </a:ln>
-        </p:spPr>
-      </p:sp>
-      <p:sp>
-        <p:nvSpPr>
-          <p:cNvPr id="46" name="Label 46"/>
-          <p:cNvSpPr txBox="1"/>
-          <p:nvPr/>
-        </p:nvSpPr>
-        <p:spPr>
-          <a:xfrm>
-            <a:off x="12716744" y="4453509"/>
-            <a:ext cx="4547128" cy="1305103"/>
-          </a:xfrm>
-          <a:prstGeom prst="rect">
-            <a:avLst/>
-          </a:prstGeom>
-          <a:noFill/>
-        </p:spPr>
-        <p:txBody>
-          <a:bodyPr wrap="square" lIns="0" tIns="0" rIns="0" bIns="0" anchor="t" rtlCol="0">
-            <a:noAutofit/>
-          </a:bodyPr>
-          <a:lstStyle/>
-          <a:p>
-            <a:pPr algn="l" marL="0" indent="0">
-              <a:lnSpc>
-                <a:spcPct val="100000"/>
-              </a:lnSpc>
-              <a:buNone/>
-            </a:pPr>
-            <a:r>
-              <a:rPr lang="ru-RU" sz="2799" b="0" cap="none" spc="0" baseline="0" dirty="0">
-                <a:solidFill>
-                  <a:srgbClr val="C2D076"/>
-                </a:solidFill>
-                <a:latin typeface="Inter Light"/>
-                <a:cs typeface="Inter Light"/>
-              </a:rPr>
-              <a:t>12 </a:t>
-            </a:r>
-            <a:r>
-              <a:rPr lang="ru-RU" sz="2799" b="0" cap="none" spc="0" baseline="0" dirty="0">
-                <a:solidFill>
-                  <a:srgbClr val="FFFFFF"/>
-                </a:solidFill>
-                <a:latin typeface="Inter Light"/>
-                <a:cs typeface="Inter Light"/>
-              </a:rPr>
-              <a:t>проверок на целостность — самая большая группа</a:t>
-            </a:r>
-            <a:endParaRPr lang="ru-RU" sz="2799"/>
-          </a:p>
-        </p:txBody>
-      </p:sp>
-      <p:sp>
-        <p:nvSpPr>
-          <p:cNvPr id="47" name="Chart note 47"/>
-          <p:cNvSpPr txBox="1"/>
-          <p:nvPr/>
-        </p:nvSpPr>
-        <p:spPr>
-          <a:xfrm>
-            <a:off x="12716744" y="6113513"/>
-            <a:ext cx="4547128" cy="695655"/>
-          </a:xfrm>
-          <a:prstGeom prst="rect">
-            <a:avLst/>
-          </a:prstGeom>
-          <a:noFill/>
-        </p:spPr>
-        <p:txBody>
-          <a:bodyPr wrap="square" lIns="0" tIns="0" rIns="0" bIns="0" anchor="t" rtlCol="0">
-            <a:noAutofit/>
-          </a:bodyPr>
-          <a:lstStyle/>
-          <a:p>
-            <a:pPr algn="l" marL="0" indent="0">
-              <a:lnSpc>
-                <a:spcPct val="100000"/>
-              </a:lnSpc>
-              <a:spcAft>
-                <a:spcPts val="1209"/>
-              </a:spcAft>
-              <a:buNone/>
-            </a:pPr>
-            <a:r>
-              <a:rPr lang="ru-RU" sz="2199" b="0" cap="none" spc="0" baseline="0" dirty="0">
-                <a:solidFill>
-                  <a:srgbClr val="FFFFFF"/>
-                </a:solidFill>
-                <a:latin typeface="Inter Light"/>
-                <a:cs typeface="Inter Light"/>
-              </a:rPr>
-              <a:t>Найденные проблемы помечаются на слайде</a:t>
-            </a:r>
-            <a:endParaRPr lang="ru-RU" sz="2199"/>
-          </a:p>
-        </p:txBody>
-      </p:sp>
-    </p:spTree>
-  </p:cSld>
-  <p:clrMapOvr>
-    <a:masterClrMapping/>
-  </p:clrMapOvr>
-</p:sld>
-</file>
-
 <file path=ppt/slides/slide7.xml><?xml version="1.0" encoding="utf-8"?>
 <p:sld xmlns:a="http://schemas.openxmlformats.org/drawingml/2006/main" xmlns:p="http://schemas.openxmlformats.org/presentationml/2006/main" xmlns:r="http://schemas.openxmlformats.org/officeDocument/2006/relationships">
   <p:cSld>
@@ -8236,7 +8363,7 @@
         <p:spPr>
           <a:xfrm>
             <a:off x="619057" y="2623820"/>
-            <a:ext cx="10495470" cy="1527657"/>
+            <a:ext cx="8911509" cy="1527657"/>
           </a:xfrm>
           <a:prstGeom prst="rect">
             <a:avLst/>
@@ -8279,7 +8406,7 @@
                 <a:cs typeface="Inter Medium"/>
                 <a:sym typeface="Inter Medium"/>
               </a:rPr>
-              <a:t>9 демонстрационных презентаций без выдуманных чисел</a:t>
+              <a:t>Все проблемы исправляются автоматически в пайплайне</a:t>
             </a:r>
             <a:endParaRPr>
               <a:latin typeface="Inter Medium"/>
@@ -8292,22 +8419,80 @@
       </p:sp>
       <p:sp>
         <p:nvSpPr>
-          <p:cNvPr id="61" name="Card 61"/>
+          <p:cNvPr id="43" name="Unit 43"/>
+          <p:cNvSpPr txBox="1"/>
+          <p:nvPr/>
+        </p:nvSpPr>
+        <p:spPr>
+          <a:xfrm>
+            <a:off x="1024128" y="4665827"/>
+            <a:ext cx="10814792" cy="299720"/>
+          </a:xfrm>
+          <a:prstGeom prst="rect">
+            <a:avLst/>
+          </a:prstGeom>
+          <a:noFill/>
+        </p:spPr>
+        <p:txBody>
+          <a:bodyPr wrap="square" lIns="0" tIns="0" rIns="0" bIns="0" anchor="t" rtlCol="0">
+            <a:noAutofit/>
+          </a:bodyPr>
+          <a:lstStyle/>
+          <a:p>
+            <a:pPr algn="l" marL="0" indent="0">
+              <a:lnSpc>
+                <a:spcPct val="100000"/>
+              </a:lnSpc>
+              <a:buNone/>
+            </a:pPr>
+            <a:r>
+              <a:rPr lang="ru-RU" sz="1800" b="0" cap="none" spc="0" baseline="0" dirty="0">
+                <a:solidFill>
+                  <a:srgbClr val="FFFFFF"/>
+                </a:solidFill>
+                <a:latin typeface="Inter Light"/>
+                <a:cs typeface="Inter Light"/>
+              </a:rPr>
+              <a:t>Проверки, проверок</a:t>
+            </a:r>
+            <a:endParaRPr lang="ru-RU" sz="1800"/>
+          </a:p>
+        </p:txBody>
+      </p:sp>
+      <p:graphicFrame>
+        <p:nvGraphicFramePr>
+          <p:cNvPr id="44" name="Chart 43"/>
+          <p:cNvGraphicFramePr>
+            <a:graphicFrameLocks noGrp="1"/>
+          </p:cNvGraphicFramePr>
+          <p:nvPr/>
+        </p:nvGraphicFramePr>
+        <p:xfrm>
+          <a:off x="1024128" y="5058130"/>
+          <a:ext cx="10814792" cy="3823308"/>
+        </p:xfrm>
+        <a:graphic>
+          <a:graphicData uri="http://schemas.openxmlformats.org/drawingml/2006/chart">
+            <c:chart xmlns:c="http://schemas.openxmlformats.org/drawingml/2006/chart" r:id="rId2"/>
+          </a:graphicData>
+        </a:graphic>
+      </p:graphicFrame>
+      <p:sp>
+        <p:nvSpPr>
+          <p:cNvPr id="45" name="Rule 45"/>
           <p:cNvSpPr/>
           <p:nvPr/>
         </p:nvSpPr>
         <p:spPr>
           <a:xfrm>
-            <a:off x="1024128" y="4665827"/>
-            <a:ext cx="5120640" cy="3818208"/>
-          </a:xfrm>
-          <a:prstGeom prst="roundRect">
-            <a:avLst>
-              <a:gd name="adj" fmla="val 2873"/>
-            </a:avLst>
+            <a:off x="12716744" y="4665827"/>
+            <a:ext cx="720090" cy="38100"/>
+          </a:xfrm>
+          <a:prstGeom prst="rect">
+            <a:avLst/>
           </a:prstGeom>
           <a:solidFill>
-            <a:srgbClr val="000000"/>
+            <a:srgbClr val="C2D076"/>
           </a:solidFill>
           <a:ln>
             <a:noFill/>
@@ -8316,14 +8501,98 @@
       </p:sp>
       <p:sp>
         <p:nvSpPr>
-          <p:cNvPr id="62" name="Figure 62"/>
+          <p:cNvPr id="46" name="Label 46"/>
           <p:cNvSpPr txBox="1"/>
           <p:nvPr/>
         </p:nvSpPr>
         <p:spPr>
           <a:xfrm>
-            <a:off x="1536192" y="5004954"/>
-            <a:ext cx="4096512" cy="975208"/>
+            <a:off x="12716744" y="4981676"/>
+            <a:ext cx="4547128" cy="1305103"/>
+          </a:xfrm>
+          <a:prstGeom prst="rect">
+            <a:avLst/>
+          </a:prstGeom>
+          <a:noFill/>
+        </p:spPr>
+        <p:txBody>
+          <a:bodyPr wrap="square" lIns="0" tIns="0" rIns="0" bIns="0" anchor="t" rtlCol="0">
+            <a:noAutofit/>
+          </a:bodyPr>
+          <a:lstStyle/>
+          <a:p>
+            <a:pPr algn="l" marL="0" indent="0">
+              <a:lnSpc>
+                <a:spcPct val="100000"/>
+              </a:lnSpc>
+              <a:buNone/>
+            </a:pPr>
+            <a:r>
+              <a:rPr lang="ru-RU" sz="2799" b="0" cap="none" spc="0" baseline="0" dirty="0">
+                <a:solidFill>
+                  <a:srgbClr val="FFFFFF"/>
+                </a:solidFill>
+                <a:latin typeface="Inter Light"/>
+                <a:cs typeface="Inter Light"/>
+              </a:rPr>
+              <a:t>Наибольшее число проверок — на целостность (</a:t>
+            </a:r>
+            <a:r>
+              <a:rPr lang="ru-RU" sz="2799" b="0" cap="none" spc="0" baseline="0" dirty="0">
+                <a:solidFill>
+                  <a:srgbClr val="C2D076"/>
+                </a:solidFill>
+                <a:latin typeface="Inter Light"/>
+                <a:cs typeface="Inter Light"/>
+              </a:rPr>
+              <a:t>12</a:t>
+            </a:r>
+            <a:r>
+              <a:rPr lang="ru-RU" sz="2799" b="0" cap="none" spc="0" baseline="0" dirty="0">
+                <a:solidFill>
+                  <a:srgbClr val="FFFFFF"/>
+                </a:solidFill>
+                <a:latin typeface="Inter Light"/>
+                <a:cs typeface="Inter Light"/>
+              </a:rPr>
+              <a:t>)</a:t>
+            </a:r>
+            <a:endParaRPr lang="ru-RU" sz="2799"/>
+          </a:p>
+        </p:txBody>
+      </p:sp>
+      <p:sp>
+        <p:nvSpPr>
+          <p:cNvPr id="47" name="Rule 47"/>
+          <p:cNvSpPr/>
+          <p:nvPr/>
+        </p:nvSpPr>
+        <p:spPr>
+          <a:xfrm>
+            <a:off x="12716744" y="6641680"/>
+            <a:ext cx="720090" cy="38100"/>
+          </a:xfrm>
+          <a:prstGeom prst="rect">
+            <a:avLst/>
+          </a:prstGeom>
+          <a:solidFill>
+            <a:srgbClr val="C2D076"/>
+          </a:solidFill>
+          <a:ln>
+            <a:noFill/>
+          </a:ln>
+        </p:spPr>
+      </p:sp>
+      <p:sp>
+        <p:nvSpPr>
+          <p:cNvPr id="48" name="Figure 48"/>
+          <p:cNvSpPr txBox="1"/>
+          <p:nvPr/>
+        </p:nvSpPr>
+        <p:spPr>
+          <a:xfrm>
+            <a:off x="12716744" y="6806186"/>
+            <a:ext cx="4547128" cy="853440"/>
           </a:xfrm>
           <a:prstGeom prst="rect">
             <a:avLst/>
@@ -8343,29 +8612,29 @@
               <a:buNone/>
             </a:pPr>
             <a:r>
-              <a:rPr lang="ru-RU" sz="6399" b="1" cap="none" spc="0" baseline="0" dirty="0">
+              <a:rPr lang="ru-RU" sz="5600" b="1" cap="none" spc="0" baseline="0" dirty="0">
                 <a:solidFill>
                   <a:srgbClr val="C2D076"/>
                 </a:solidFill>
                 <a:latin typeface="Inter Light"/>
                 <a:cs typeface="Inter Light"/>
               </a:rPr>
-              <a:t>9</a:t>
-            </a:r>
-            <a:endParaRPr lang="ru-RU" sz="6399"/>
+              <a:t>41</a:t>
+            </a:r>
+            <a:endParaRPr lang="ru-RU" sz="5600"/>
           </a:p>
         </p:txBody>
       </p:sp>
       <p:sp>
         <p:nvSpPr>
-          <p:cNvPr id="63" name="Label 63"/>
+          <p:cNvPr id="49" name="Label 49"/>
           <p:cNvSpPr txBox="1"/>
           <p:nvPr/>
         </p:nvSpPr>
         <p:spPr>
           <a:xfrm>
-            <a:off x="1536192" y="6088175"/>
-            <a:ext cx="4096512" cy="1883796"/>
+            <a:off x="12716744" y="7752209"/>
+            <a:ext cx="4547128" cy="360528"/>
           </a:xfrm>
           <a:prstGeom prst="rect">
             <a:avLst/>
@@ -8385,95 +8654,29 @@
               <a:buNone/>
             </a:pPr>
             <a:r>
-              <a:rPr lang="ru-RU" sz="2799" b="0" cap="none" spc="0" baseline="0" dirty="0">
+              <a:rPr lang="ru-RU" sz="2199" b="0" cap="none" spc="0" baseline="0" dirty="0">
                 <a:solidFill>
                   <a:srgbClr val="FFFFFF"/>
                 </a:solidFill>
                 <a:latin typeface="Inter Light"/>
                 <a:cs typeface="Inter Light"/>
               </a:rPr>
-              <a:t>Демо-⁠презентаций</a:t>
-            </a:r>
-            <a:endParaRPr lang="ru-RU" sz="2799"/>
+              <a:t>Проверка на каждый слайд</a:t>
+            </a:r>
+            <a:endParaRPr lang="ru-RU" sz="2199"/>
           </a:p>
         </p:txBody>
       </p:sp>
       <p:sp>
         <p:nvSpPr>
-          <p:cNvPr id="64" name="Card 64"/>
-          <p:cNvSpPr/>
-          <p:nvPr/>
-        </p:nvSpPr>
-        <p:spPr>
-          <a:xfrm>
-            <a:off x="6583680" y="4665827"/>
-            <a:ext cx="5120640" cy="3818208"/>
-          </a:xfrm>
-          <a:prstGeom prst="roundRect">
-            <a:avLst>
-              <a:gd name="adj" fmla="val 2873"/>
-            </a:avLst>
-          </a:prstGeom>
-          <a:solidFill>
-            <a:srgbClr val="000000"/>
-          </a:solidFill>
-          <a:ln>
-            <a:noFill/>
-          </a:ln>
-        </p:spPr>
-      </p:sp>
-      <p:sp>
-        <p:nvSpPr>
-          <p:cNvPr id="65" name="Figure 65"/>
+          <p:cNvPr id="50" name="Chart note 50"/>
           <p:cNvSpPr txBox="1"/>
           <p:nvPr/>
         </p:nvSpPr>
         <p:spPr>
           <a:xfrm>
-            <a:off x="7082239" y="5004954"/>
-            <a:ext cx="4110017" cy="975208"/>
-          </a:xfrm>
-          <a:prstGeom prst="rect">
-            <a:avLst/>
-          </a:prstGeom>
-          <a:noFill/>
-        </p:spPr>
-        <p:txBody>
-          <a:bodyPr wrap="square" lIns="0" tIns="0" rIns="0" bIns="0" anchor="b" rtlCol="0">
-            <a:noAutofit/>
-          </a:bodyPr>
-          <a:lstStyle/>
-          <a:p>
-            <a:pPr algn="l" marL="0" indent="0">
-              <a:lnSpc>
-                <a:spcPct val="100000"/>
-              </a:lnSpc>
-              <a:buNone/>
-            </a:pPr>
-            <a:r>
-              <a:rPr lang="ru-RU" sz="6399" b="1" cap="none" spc="0" baseline="0" dirty="0">
-                <a:solidFill>
-                  <a:srgbClr val="C2D076"/>
-                </a:solidFill>
-                <a:latin typeface="Inter Light"/>
-                <a:cs typeface="Inter Light"/>
-              </a:rPr>
-              <a:t>116⁠–⁠123</a:t>
-            </a:r>
-            <a:endParaRPr lang="ru-RU" sz="6399"/>
-          </a:p>
-        </p:txBody>
-      </p:sp>
-      <p:sp>
-        <p:nvSpPr>
-          <p:cNvPr id="66" name="Label 66"/>
-          <p:cNvSpPr txBox="1"/>
-          <p:nvPr/>
-        </p:nvSpPr>
-        <p:spPr>
-          <a:xfrm>
-            <a:off x="7095744" y="6088175"/>
-            <a:ext cx="4096512" cy="1883796"/>
+            <a:off x="12716744" y="8467638"/>
+            <a:ext cx="4547128" cy="695655"/>
           </a:xfrm>
           <a:prstGeom prst="rect">
             <a:avLst/>
@@ -8490,127 +8693,22 @@
               <a:lnSpc>
                 <a:spcPct val="100000"/>
               </a:lnSpc>
+              <a:spcAft>
+                <a:spcPts val="1209"/>
+              </a:spcAft>
               <a:buNone/>
             </a:pPr>
             <a:r>
-              <a:rPr lang="ru-RU" sz="2799" b="0" cap="none" spc="0" baseline="0" dirty="0">
+              <a:rPr lang="ru-RU" sz="2199" b="0" cap="none" spc="0" baseline="0" dirty="0">
                 <a:solidFill>
                   <a:srgbClr val="FFFFFF"/>
                 </a:solidFill>
                 <a:latin typeface="Inter Light"/>
                 <a:cs typeface="Inter Light"/>
               </a:rPr>
-              <a:t>Проверенных чисел</a:t>
-            </a:r>
-            <a:endParaRPr lang="ru-RU" sz="2799"/>
-          </a:p>
-        </p:txBody>
-      </p:sp>
-      <p:sp>
-        <p:nvSpPr>
-          <p:cNvPr id="67" name="Card 67"/>
-          <p:cNvSpPr/>
-          <p:nvPr/>
-        </p:nvSpPr>
-        <p:spPr>
-          <a:xfrm>
-            <a:off x="12143232" y="4665827"/>
-            <a:ext cx="5120640" cy="3818208"/>
-          </a:xfrm>
-          <a:prstGeom prst="roundRect">
-            <a:avLst>
-              <a:gd name="adj" fmla="val 2873"/>
-            </a:avLst>
-          </a:prstGeom>
-          <a:solidFill>
-            <a:srgbClr val="000000"/>
-          </a:solidFill>
-          <a:ln>
-            <a:noFill/>
-          </a:ln>
-        </p:spPr>
-      </p:sp>
-      <p:sp>
-        <p:nvSpPr>
-          <p:cNvPr id="68" name="Figure 68"/>
-          <p:cNvSpPr txBox="1"/>
-          <p:nvPr/>
-        </p:nvSpPr>
-        <p:spPr>
-          <a:xfrm>
-            <a:off x="12655296" y="5004954"/>
-            <a:ext cx="4096512" cy="975208"/>
-          </a:xfrm>
-          <a:prstGeom prst="rect">
-            <a:avLst/>
-          </a:prstGeom>
-          <a:noFill/>
-        </p:spPr>
-        <p:txBody>
-          <a:bodyPr wrap="square" lIns="0" tIns="0" rIns="0" bIns="0" anchor="b" rtlCol="0">
-            <a:noAutofit/>
-          </a:bodyPr>
-          <a:lstStyle/>
-          <a:p>
-            <a:pPr algn="l" marL="0" indent="0">
-              <a:lnSpc>
-                <a:spcPct val="100000"/>
-              </a:lnSpc>
-              <a:buNone/>
-            </a:pPr>
-            <a:r>
-              <a:rPr lang="ru-RU" sz="6399" b="1" cap="none" spc="0" baseline="0" dirty="0">
-                <a:solidFill>
-                  <a:srgbClr val="C2D076"/>
-                </a:solidFill>
-                <a:latin typeface="Inter Light"/>
-                <a:cs typeface="Inter Light"/>
-              </a:rPr>
-              <a:t>0</a:t>
-            </a:r>
-            <a:endParaRPr lang="ru-RU" sz="6399"/>
-          </a:p>
-        </p:txBody>
-      </p:sp>
-      <p:sp>
-        <p:nvSpPr>
-          <p:cNvPr id="69" name="Label 69"/>
-          <p:cNvSpPr txBox="1"/>
-          <p:nvPr/>
-        </p:nvSpPr>
-        <p:spPr>
-          <a:xfrm>
-            <a:off x="12655296" y="6088175"/>
-            <a:ext cx="4096512" cy="1883796"/>
-          </a:xfrm>
-          <a:prstGeom prst="rect">
-            <a:avLst/>
-          </a:prstGeom>
-          <a:noFill/>
-        </p:spPr>
-        <p:txBody>
-          <a:bodyPr wrap="square" lIns="0" tIns="0" rIns="0" bIns="0" anchor="t" rtlCol="0">
-            <a:noAutofit/>
-          </a:bodyPr>
-          <a:lstStyle/>
-          <a:p>
-            <a:pPr algn="l" marL="0" indent="0">
-              <a:lnSpc>
-                <a:spcPct val="100000"/>
-              </a:lnSpc>
-              <a:buNone/>
-            </a:pPr>
-            <a:r>
-              <a:rPr lang="ru-RU" sz="2799" b="0" cap="none" spc="0" baseline="0" dirty="0">
-                <a:solidFill>
-                  <a:srgbClr val="FFFFFF"/>
-                </a:solidFill>
-                <a:latin typeface="Inter Light"/>
-                <a:cs typeface="Inter Light"/>
-              </a:rPr>
-              <a:t>Выдуманных чисел</a:t>
-            </a:r>
-            <a:endParaRPr lang="ru-RU" sz="2799"/>
+              <a:t>Найденные проблемы помечаются и исправляются</a:t>
+            </a:r>
+            <a:endParaRPr lang="ru-RU" sz="2199"/>
           </a:p>
         </p:txBody>
       </p:sp>
@@ -8648,7 +8746,7 @@
         <p:spPr>
           <a:xfrm>
             <a:off x="619057" y="2623820"/>
-            <a:ext cx="15727680" cy="944880"/>
+            <a:ext cx="15727680" cy="809548"/>
           </a:xfrm>
           <a:prstGeom prst="rect">
             <a:avLst/>
@@ -8691,7 +8789,7 @@
                 <a:cs typeface="Inter Medium"/>
                 <a:sym typeface="Inter Medium"/>
               </a:rPr>
-              <a:t>87 шаблонов, 99 из 100 и 12 форматов</a:t>
+              <a:t>9 готовых презентаций без выдуманных чисел</a:t>
             </a:r>
             <a:endParaRPr>
               <a:latin typeface="Inter Medium"/>
@@ -8704,18 +8802,18 @@
       </p:sp>
       <p:sp>
         <p:nvSpPr>
-          <p:cNvPr id="43" name="Card 43"/>
+          <p:cNvPr id="61" name="Card 61"/>
           <p:cNvSpPr/>
           <p:nvPr/>
         </p:nvSpPr>
         <p:spPr>
           <a:xfrm>
-            <a:off x="1024128" y="4137660"/>
-            <a:ext cx="5120640" cy="3214270"/>
+            <a:off x="1024128" y="3947718"/>
+            <a:ext cx="5120640" cy="2949747"/>
           </a:xfrm>
           <a:prstGeom prst="roundRect">
             <a:avLst>
-              <a:gd name="adj" fmla="val 3413"/>
+              <a:gd name="adj" fmla="val 3719"/>
             </a:avLst>
           </a:prstGeom>
           <a:solidFill>
@@ -8728,14 +8826,14 @@
       </p:sp>
       <p:sp>
         <p:nvSpPr>
-          <p:cNvPr id="44" name="Figure 44"/>
+          <p:cNvPr id="62" name="Figure 62"/>
           <p:cNvSpPr txBox="1"/>
           <p:nvPr/>
         </p:nvSpPr>
         <p:spPr>
           <a:xfrm>
-            <a:off x="1536192" y="4390278"/>
-            <a:ext cx="4096512" cy="1463040"/>
+            <a:off x="1536192" y="4384137"/>
+            <a:ext cx="4096512" cy="426568"/>
           </a:xfrm>
           <a:prstGeom prst="rect">
             <a:avLst/>
@@ -8755,29 +8853,29 @@
               <a:buNone/>
             </a:pPr>
             <a:r>
-              <a:rPr lang="ru-RU" sz="9600" b="1" cap="none" spc="0" baseline="0" dirty="0">
+              <a:rPr lang="ru-RU" sz="2799" b="1" cap="none" spc="0" baseline="0" dirty="0">
                 <a:solidFill>
                   <a:srgbClr val="C2D076"/>
                 </a:solidFill>
                 <a:latin typeface="Inter Light"/>
                 <a:cs typeface="Inter Light"/>
               </a:rPr>
-              <a:t>87</a:t>
-            </a:r>
-            <a:endParaRPr lang="ru-RU" sz="9600"/>
+              <a:t>9</a:t>
+            </a:r>
+            <a:endParaRPr lang="ru-RU" sz="2799"/>
           </a:p>
         </p:txBody>
       </p:sp>
       <p:sp>
         <p:nvSpPr>
-          <p:cNvPr id="45" name="Label 45"/>
+          <p:cNvPr id="63" name="Label 63"/>
           <p:cNvSpPr txBox="1"/>
           <p:nvPr/>
         </p:nvSpPr>
         <p:spPr>
           <a:xfrm>
-            <a:off x="1536192" y="5961331"/>
-            <a:ext cx="4096512" cy="878535"/>
+            <a:off x="1536192" y="4918718"/>
+            <a:ext cx="4096512" cy="1466683"/>
           </a:xfrm>
           <a:prstGeom prst="rect">
             <a:avLst/>
@@ -8797,33 +8895,33 @@
               <a:buNone/>
             </a:pPr>
             <a:r>
-              <a:rPr lang="ru-RU" sz="2799" b="0" cap="none" spc="0" baseline="0" dirty="0">
+              <a:rPr lang="ru-RU" sz="2199" b="0" cap="none" spc="0" baseline="0" dirty="0">
                 <a:solidFill>
                   <a:srgbClr val="FFFFFF"/>
                 </a:solidFill>
                 <a:latin typeface="Inter Light"/>
                 <a:cs typeface="Inter Light"/>
               </a:rPr>
-              <a:t>Чужих шаблонов</a:t>
-            </a:r>
-            <a:endParaRPr lang="ru-RU" sz="2799"/>
+              <a:t>Демо-⁠презентаций</a:t>
+            </a:r>
+            <a:endParaRPr lang="ru-RU" sz="2199"/>
           </a:p>
         </p:txBody>
       </p:sp>
       <p:sp>
         <p:nvSpPr>
-          <p:cNvPr id="46" name="Card 46"/>
+          <p:cNvPr id="64" name="Card 64"/>
           <p:cNvSpPr/>
           <p:nvPr/>
         </p:nvSpPr>
         <p:spPr>
           <a:xfrm>
-            <a:off x="6583680" y="4137660"/>
-            <a:ext cx="5120640" cy="3214270"/>
+            <a:off x="6583680" y="3947718"/>
+            <a:ext cx="5120640" cy="2949747"/>
           </a:xfrm>
           <a:prstGeom prst="roundRect">
             <a:avLst>
-              <a:gd name="adj" fmla="val 3413"/>
+              <a:gd name="adj" fmla="val 3719"/>
             </a:avLst>
           </a:prstGeom>
           <a:solidFill>
@@ -8836,14 +8934,14 @@
       </p:sp>
       <p:sp>
         <p:nvSpPr>
-          <p:cNvPr id="47" name="Figure 47"/>
+          <p:cNvPr id="65" name="Figure 65"/>
           <p:cNvSpPr txBox="1"/>
           <p:nvPr/>
         </p:nvSpPr>
         <p:spPr>
           <a:xfrm>
-            <a:off x="7083654" y="4390278"/>
-            <a:ext cx="4108602" cy="1463040"/>
+            <a:off x="7095744" y="4384137"/>
+            <a:ext cx="4096512" cy="426568"/>
           </a:xfrm>
           <a:prstGeom prst="rect">
             <a:avLst/>
@@ -8863,39 +8961,29 @@
               <a:buNone/>
             </a:pPr>
             <a:r>
-              <a:rPr lang="ru-RU" sz="9600" b="1" cap="none" spc="0" baseline="0" dirty="0">
+              <a:rPr lang="ru-RU" sz="2799" b="1" cap="none" spc="0" baseline="0" dirty="0">
                 <a:solidFill>
                   <a:srgbClr val="C2D076"/>
                 </a:solidFill>
                 <a:latin typeface="Inter Light"/>
                 <a:cs typeface="Inter Light"/>
               </a:rPr>
-              <a:t>99</a:t>
-            </a:r>
-            <a:r>
-              <a:rPr lang="ru-RU" sz="4712" b="1" cap="none" spc="0" baseline="0" dirty="0">
-                <a:solidFill>
-                  <a:srgbClr val="C2D076"/>
-                </a:solidFill>
-                <a:latin typeface="Inter Light"/>
-                <a:cs typeface="Inter Light"/>
-              </a:rPr>
-              <a:t> из 100</a:t>
-            </a:r>
-            <a:endParaRPr lang="ru-RU" sz="9600"/>
+              <a:t>от 116 до 123</a:t>
+            </a:r>
+            <a:endParaRPr lang="ru-RU" sz="2799"/>
           </a:p>
         </p:txBody>
       </p:sp>
       <p:sp>
         <p:nvSpPr>
-          <p:cNvPr id="48" name="Label 48"/>
+          <p:cNvPr id="66" name="Label 66"/>
           <p:cNvSpPr txBox="1"/>
           <p:nvPr/>
         </p:nvSpPr>
         <p:spPr>
           <a:xfrm>
-            <a:off x="7095744" y="5961331"/>
-            <a:ext cx="4096512" cy="878535"/>
+            <a:off x="7095744" y="4918718"/>
+            <a:ext cx="4096512" cy="1466683"/>
           </a:xfrm>
           <a:prstGeom prst="rect">
             <a:avLst/>
@@ -8915,33 +9003,33 @@
               <a:buNone/>
             </a:pPr>
             <a:r>
-              <a:rPr lang="ru-RU" sz="2799" b="0" cap="none" spc="0" baseline="0" dirty="0">
+              <a:rPr lang="ru-RU" sz="2199" b="0" cap="none" spc="0" baseline="0" dirty="0">
                 <a:solidFill>
                   <a:srgbClr val="FFFFFF"/>
                 </a:solidFill>
                 <a:latin typeface="Inter Light"/>
                 <a:cs typeface="Inter Light"/>
               </a:rPr>
-              <a:t>Средняя оценка качества</a:t>
-            </a:r>
-            <a:endParaRPr lang="ru-RU" sz="2799"/>
+              <a:t>Проверенных чисел</a:t>
+            </a:r>
+            <a:endParaRPr lang="ru-RU" sz="2199"/>
           </a:p>
         </p:txBody>
       </p:sp>
       <p:sp>
         <p:nvSpPr>
-          <p:cNvPr id="49" name="Card 49"/>
+          <p:cNvPr id="67" name="Card 67"/>
           <p:cNvSpPr/>
           <p:nvPr/>
         </p:nvSpPr>
         <p:spPr>
           <a:xfrm>
-            <a:off x="12143232" y="4137660"/>
-            <a:ext cx="5120640" cy="3214270"/>
+            <a:off x="12143232" y="3947718"/>
+            <a:ext cx="5120640" cy="2949747"/>
           </a:xfrm>
           <a:prstGeom prst="roundRect">
             <a:avLst>
-              <a:gd name="adj" fmla="val 3413"/>
+              <a:gd name="adj" fmla="val 3719"/>
             </a:avLst>
           </a:prstGeom>
           <a:solidFill>
@@ -8954,14 +9042,14 @@
       </p:sp>
       <p:sp>
         <p:nvSpPr>
-          <p:cNvPr id="50" name="Figure 50"/>
+          <p:cNvPr id="68" name="Figure 68"/>
           <p:cNvSpPr txBox="1"/>
           <p:nvPr/>
         </p:nvSpPr>
         <p:spPr>
           <a:xfrm>
-            <a:off x="12617602" y="4390278"/>
-            <a:ext cx="4134206" cy="1463040"/>
+            <a:off x="12655296" y="4384137"/>
+            <a:ext cx="4096512" cy="426568"/>
           </a:xfrm>
           <a:prstGeom prst="rect">
             <a:avLst/>
@@ -8981,29 +9069,29 @@
               <a:buNone/>
             </a:pPr>
             <a:r>
-              <a:rPr lang="ru-RU" sz="9600" b="1" cap="none" spc="0" baseline="0" dirty="0">
+              <a:rPr lang="ru-RU" sz="2799" b="1" cap="none" spc="0" baseline="0" dirty="0">
                 <a:solidFill>
                   <a:srgbClr val="C2D076"/>
                 </a:solidFill>
                 <a:latin typeface="Inter Light"/>
                 <a:cs typeface="Inter Light"/>
               </a:rPr>
-              <a:t>12</a:t>
-            </a:r>
-            <a:endParaRPr lang="ru-RU" sz="9600"/>
+              <a:t>0</a:t>
+            </a:r>
+            <a:endParaRPr lang="ru-RU" sz="2799"/>
           </a:p>
         </p:txBody>
       </p:sp>
       <p:sp>
         <p:nvSpPr>
-          <p:cNvPr id="51" name="Label 51"/>
+          <p:cNvPr id="69" name="Label 69"/>
           <p:cNvSpPr txBox="1"/>
           <p:nvPr/>
         </p:nvSpPr>
         <p:spPr>
           <a:xfrm>
-            <a:off x="12655296" y="5961331"/>
-            <a:ext cx="4096512" cy="878535"/>
+            <a:off x="12655296" y="4918718"/>
+            <a:ext cx="4096512" cy="1466683"/>
           </a:xfrm>
           <a:prstGeom prst="rect">
             <a:avLst/>
@@ -9023,28 +9111,28 @@
               <a:buNone/>
             </a:pPr>
             <a:r>
-              <a:rPr lang="ru-RU" sz="2799" b="0" cap="none" spc="0" baseline="0" dirty="0">
+              <a:rPr lang="ru-RU" sz="2199" b="0" cap="none" spc="0" baseline="0" dirty="0">
                 <a:solidFill>
                   <a:srgbClr val="FFFFFF"/>
                 </a:solidFill>
                 <a:latin typeface="Inter Light"/>
                 <a:cs typeface="Inter Light"/>
               </a:rPr>
-              <a:t>Форматов</a:t>
-            </a:r>
-            <a:endParaRPr lang="ru-RU" sz="2799"/>
+              <a:t>Выдуманных чисел</a:t>
+            </a:r>
+            <a:endParaRPr lang="ru-RU" sz="2199"/>
           </a:p>
         </p:txBody>
       </p:sp>
       <p:sp>
         <p:nvSpPr>
-          <p:cNvPr id="52" name="Conclusion strip 52"/>
+          <p:cNvPr id="70" name="Conclusion strip 70"/>
           <p:cNvSpPr/>
           <p:nvPr/>
         </p:nvSpPr>
         <p:spPr>
           <a:xfrm>
-            <a:off x="1024128" y="7783984"/>
+            <a:off x="1024128" y="7329519"/>
             <a:ext cx="16239744" cy="892754"/>
           </a:xfrm>
           <a:prstGeom prst="roundRect">
@@ -9062,13 +9150,13 @@
       </p:sp>
       <p:sp>
         <p:nvSpPr>
-          <p:cNvPr id="53" name="Conclusion bar 53"/>
+          <p:cNvPr id="71" name="Conclusion bar 71"/>
           <p:cNvSpPr/>
           <p:nvPr/>
         </p:nvSpPr>
         <p:spPr>
           <a:xfrm>
-            <a:off x="1379601" y="8047034"/>
+            <a:off x="1379601" y="7592569"/>
             <a:ext cx="61722" cy="366654"/>
           </a:xfrm>
           <a:prstGeom prst="rect">
@@ -9084,13 +9172,13 @@
       </p:sp>
       <p:sp>
         <p:nvSpPr>
-          <p:cNvPr id="54" name="Conclusion 54"/>
+          <p:cNvPr id="72" name="Conclusion 72"/>
           <p:cNvSpPr txBox="1"/>
           <p:nvPr/>
         </p:nvSpPr>
         <p:spPr>
           <a:xfrm>
-            <a:off x="1725701" y="8004377"/>
+            <a:off x="1725701" y="7549912"/>
             <a:ext cx="15182698" cy="451968"/>
           </a:xfrm>
           <a:prstGeom prst="rect">
@@ -9118,7 +9206,7 @@
                 <a:latin typeface="Inter Light"/>
                 <a:cs typeface="Inter Light"/>
               </a:rPr>
-              <a:t>Сервис работает с любыми шаблонами и форматами</a:t>
+              <a:t>Все числа проверены дважды — до и после вёрстки</a:t>
             </a:r>
             <a:endParaRPr lang="ru-RU" sz="2799"/>
           </a:p>
@@ -9158,7 +9246,7 @@
         <p:spPr>
           <a:xfrm>
             <a:off x="619057" y="2623820"/>
-            <a:ext cx="15727680" cy="809548"/>
+            <a:ext cx="12440716" cy="1527657"/>
           </a:xfrm>
           <a:prstGeom prst="rect">
             <a:avLst/>
@@ -9192,7 +9280,7 @@
               <a:buNone/>
             </a:pPr>
             <a:r>
-              <a:rPr i="0" lang="ru-RU" sz="4712" u="none" cap="none" strike="noStrike">
+              <a:rPr i="0" lang="ru-RU" sz="2799" u="none" cap="none" strike="noStrike">
                 <a:solidFill>
                   <a:srgbClr val="C2D076"/>
                 </a:solidFill>
@@ -9201,7 +9289,7 @@
                 <a:cs typeface="Inter Medium"/>
                 <a:sym typeface="Inter Medium"/>
               </a:rPr>
-              <a:t>VK WorkSpace — самый долгий, но всё в лимите</a:t>
+              <a:t>87 шаблонов, 99 из 100 и 12 форматов — универсальный инструмент</a:t>
             </a:r>
             <a:endParaRPr>
               <a:latin typeface="Inter Medium"/>
@@ -9214,14 +9302,80 @@
       </p:sp>
       <p:sp>
         <p:nvSpPr>
-          <p:cNvPr id="43" name="Unit 43"/>
+          <p:cNvPr id="43" name="Card 43"/>
+          <p:cNvSpPr/>
+          <p:nvPr/>
+        </p:nvSpPr>
+        <p:spPr>
+          <a:xfrm>
+            <a:off x="1024128" y="4665827"/>
+            <a:ext cx="5120640" cy="3214270"/>
+          </a:xfrm>
+          <a:prstGeom prst="roundRect">
+            <a:avLst>
+              <a:gd name="adj" fmla="val 3413"/>
+            </a:avLst>
+          </a:prstGeom>
+          <a:solidFill>
+            <a:srgbClr val="000000"/>
+          </a:solidFill>
+          <a:ln>
+            <a:noFill/>
+          </a:ln>
+        </p:spPr>
+      </p:sp>
+      <p:sp>
+        <p:nvSpPr>
+          <p:cNvPr id="44" name="Figure 44"/>
           <p:cNvSpPr txBox="1"/>
           <p:nvPr/>
         </p:nvSpPr>
         <p:spPr>
           <a:xfrm>
-            <a:off x="1024128" y="3947718"/>
-            <a:ext cx="10814792" cy="299720"/>
+            <a:off x="1536192" y="4918445"/>
+            <a:ext cx="4096512" cy="1463040"/>
+          </a:xfrm>
+          <a:prstGeom prst="rect">
+            <a:avLst/>
+          </a:prstGeom>
+          <a:noFill/>
+        </p:spPr>
+        <p:txBody>
+          <a:bodyPr wrap="square" lIns="0" tIns="0" rIns="0" bIns="0" anchor="b" rtlCol="0">
+            <a:noAutofit/>
+          </a:bodyPr>
+          <a:lstStyle/>
+          <a:p>
+            <a:pPr algn="l" marL="0" indent="0">
+              <a:lnSpc>
+                <a:spcPct val="100000"/>
+              </a:lnSpc>
+              <a:buNone/>
+            </a:pPr>
+            <a:r>
+              <a:rPr lang="ru-RU" sz="9600" b="1" cap="none" spc="0" baseline="0" dirty="0">
+                <a:solidFill>
+                  <a:srgbClr val="C2D076"/>
+                </a:solidFill>
+                <a:latin typeface="Inter Light"/>
+                <a:cs typeface="Inter Light"/>
+              </a:rPr>
+              <a:t>87</a:t>
+            </a:r>
+            <a:endParaRPr lang="ru-RU" sz="9600"/>
+          </a:p>
+        </p:txBody>
+      </p:sp>
+      <p:sp>
+        <p:nvSpPr>
+          <p:cNvPr id="45" name="Label 45"/>
+          <p:cNvSpPr txBox="1"/>
+          <p:nvPr/>
+        </p:nvSpPr>
+        <p:spPr>
+          <a:xfrm>
+            <a:off x="1536192" y="6489498"/>
+            <a:ext cx="4096512" cy="878535"/>
           </a:xfrm>
           <a:prstGeom prst="rect">
             <a:avLst/>
@@ -9241,47 +9395,279 @@
               <a:buNone/>
             </a:pPr>
             <a:r>
-              <a:rPr lang="ru-RU" sz="1800" b="0" cap="none" spc="0" baseline="0" dirty="0">
+              <a:rPr lang="ru-RU" sz="2799" b="0" cap="none" spc="0" baseline="0" dirty="0">
                 <a:solidFill>
                   <a:srgbClr val="FFFFFF"/>
                 </a:solidFill>
                 <a:latin typeface="Inter Light"/>
                 <a:cs typeface="Inter Light"/>
               </a:rPr>
-              <a:t>Время генерации трёх вариантов на шаблонах датасета, секунд</a:t>
-            </a:r>
-            <a:endParaRPr lang="ru-RU" sz="1800"/>
+              <a:t>Чужих шаблонов</a:t>
+            </a:r>
+            <a:endParaRPr lang="ru-RU" sz="2799"/>
           </a:p>
         </p:txBody>
       </p:sp>
-      <p:graphicFrame>
-        <p:nvGraphicFramePr>
-          <p:cNvPr id="44" name="Chart 43"/>
-          <p:cNvGraphicFramePr>
-            <a:graphicFrameLocks noGrp="1"/>
-          </p:cNvGraphicFramePr>
-          <p:nvPr/>
-        </p:nvGraphicFramePr>
-        <p:xfrm>
-          <a:off x="1024128" y="4340021"/>
-          <a:ext cx="10814792" cy="4483968"/>
-        </p:xfrm>
-        <a:graphic>
-          <a:graphicData uri="http://schemas.openxmlformats.org/drawingml/2006/chart">
-            <c:chart xmlns:c="http://schemas.openxmlformats.org/drawingml/2006/chart" r:id="rId2"/>
-          </a:graphicData>
-        </a:graphic>
-      </p:graphicFrame>
-      <p:sp>
-        <p:nvSpPr>
-          <p:cNvPr id="45" name="Rule 45"/>
+      <p:sp>
+        <p:nvSpPr>
+          <p:cNvPr id="46" name="Card 46"/>
           <p:cNvSpPr/>
           <p:nvPr/>
         </p:nvSpPr>
         <p:spPr>
           <a:xfrm>
-            <a:off x="12716744" y="3947718"/>
-            <a:ext cx="720090" cy="38100"/>
+            <a:off x="6583680" y="4665827"/>
+            <a:ext cx="5120640" cy="3214270"/>
+          </a:xfrm>
+          <a:prstGeom prst="roundRect">
+            <a:avLst>
+              <a:gd name="adj" fmla="val 3413"/>
+            </a:avLst>
+          </a:prstGeom>
+          <a:solidFill>
+            <a:srgbClr val="000000"/>
+          </a:solidFill>
+          <a:ln>
+            <a:noFill/>
+          </a:ln>
+        </p:spPr>
+      </p:sp>
+      <p:sp>
+        <p:nvSpPr>
+          <p:cNvPr id="47" name="Figure 47"/>
+          <p:cNvSpPr txBox="1"/>
+          <p:nvPr/>
+        </p:nvSpPr>
+        <p:spPr>
+          <a:xfrm>
+            <a:off x="7083654" y="4918445"/>
+            <a:ext cx="4108602" cy="1463040"/>
+          </a:xfrm>
+          <a:prstGeom prst="rect">
+            <a:avLst/>
+          </a:prstGeom>
+          <a:noFill/>
+        </p:spPr>
+        <p:txBody>
+          <a:bodyPr wrap="square" lIns="0" tIns="0" rIns="0" bIns="0" anchor="b" rtlCol="0">
+            <a:noAutofit/>
+          </a:bodyPr>
+          <a:lstStyle/>
+          <a:p>
+            <a:pPr algn="l" marL="0" indent="0">
+              <a:lnSpc>
+                <a:spcPct val="100000"/>
+              </a:lnSpc>
+              <a:buNone/>
+            </a:pPr>
+            <a:r>
+              <a:rPr lang="ru-RU" sz="9600" b="1" cap="none" spc="0" baseline="0" dirty="0">
+                <a:solidFill>
+                  <a:srgbClr val="C2D076"/>
+                </a:solidFill>
+                <a:latin typeface="Inter Light"/>
+                <a:cs typeface="Inter Light"/>
+              </a:rPr>
+              <a:t>99</a:t>
+            </a:r>
+            <a:r>
+              <a:rPr lang="ru-RU" sz="4712" b="1" cap="none" spc="0" baseline="0" dirty="0">
+                <a:solidFill>
+                  <a:srgbClr val="C2D076"/>
+                </a:solidFill>
+                <a:latin typeface="Inter Light"/>
+                <a:cs typeface="Inter Light"/>
+              </a:rPr>
+              <a:t> из 100</a:t>
+            </a:r>
+            <a:endParaRPr lang="ru-RU" sz="9600"/>
+          </a:p>
+        </p:txBody>
+      </p:sp>
+      <p:sp>
+        <p:nvSpPr>
+          <p:cNvPr id="48" name="Label 48"/>
+          <p:cNvSpPr txBox="1"/>
+          <p:nvPr/>
+        </p:nvSpPr>
+        <p:spPr>
+          <a:xfrm>
+            <a:off x="7095744" y="6489498"/>
+            <a:ext cx="4096512" cy="878535"/>
+          </a:xfrm>
+          <a:prstGeom prst="rect">
+            <a:avLst/>
+          </a:prstGeom>
+          <a:noFill/>
+        </p:spPr>
+        <p:txBody>
+          <a:bodyPr wrap="square" lIns="0" tIns="0" rIns="0" bIns="0" anchor="t" rtlCol="0">
+            <a:noAutofit/>
+          </a:bodyPr>
+          <a:lstStyle/>
+          <a:p>
+            <a:pPr algn="l" marL="0" indent="0">
+              <a:lnSpc>
+                <a:spcPct val="100000"/>
+              </a:lnSpc>
+              <a:buNone/>
+            </a:pPr>
+            <a:r>
+              <a:rPr lang="ru-RU" sz="2799" b="0" cap="none" spc="0" baseline="0" dirty="0">
+                <a:solidFill>
+                  <a:srgbClr val="FFFFFF"/>
+                </a:solidFill>
+                <a:latin typeface="Inter Light"/>
+                <a:cs typeface="Inter Light"/>
+              </a:rPr>
+              <a:t>Средняя оценка качества</a:t>
+            </a:r>
+            <a:endParaRPr lang="ru-RU" sz="2799"/>
+          </a:p>
+        </p:txBody>
+      </p:sp>
+      <p:sp>
+        <p:nvSpPr>
+          <p:cNvPr id="49" name="Card 49"/>
+          <p:cNvSpPr/>
+          <p:nvPr/>
+        </p:nvSpPr>
+        <p:spPr>
+          <a:xfrm>
+            <a:off x="12143232" y="4665827"/>
+            <a:ext cx="5120640" cy="3214270"/>
+          </a:xfrm>
+          <a:prstGeom prst="roundRect">
+            <a:avLst>
+              <a:gd name="adj" fmla="val 3413"/>
+            </a:avLst>
+          </a:prstGeom>
+          <a:solidFill>
+            <a:srgbClr val="000000"/>
+          </a:solidFill>
+          <a:ln>
+            <a:noFill/>
+          </a:ln>
+        </p:spPr>
+      </p:sp>
+      <p:sp>
+        <p:nvSpPr>
+          <p:cNvPr id="50" name="Figure 50"/>
+          <p:cNvSpPr txBox="1"/>
+          <p:nvPr/>
+        </p:nvSpPr>
+        <p:spPr>
+          <a:xfrm>
+            <a:off x="12617602" y="4918445"/>
+            <a:ext cx="4134206" cy="1463040"/>
+          </a:xfrm>
+          <a:prstGeom prst="rect">
+            <a:avLst/>
+          </a:prstGeom>
+          <a:noFill/>
+        </p:spPr>
+        <p:txBody>
+          <a:bodyPr wrap="square" lIns="0" tIns="0" rIns="0" bIns="0" anchor="b" rtlCol="0">
+            <a:noAutofit/>
+          </a:bodyPr>
+          <a:lstStyle/>
+          <a:p>
+            <a:pPr algn="l" marL="0" indent="0">
+              <a:lnSpc>
+                <a:spcPct val="100000"/>
+              </a:lnSpc>
+              <a:buNone/>
+            </a:pPr>
+            <a:r>
+              <a:rPr lang="ru-RU" sz="9600" b="1" cap="none" spc="0" baseline="0" dirty="0">
+                <a:solidFill>
+                  <a:srgbClr val="C2D076"/>
+                </a:solidFill>
+                <a:latin typeface="Inter Light"/>
+                <a:cs typeface="Inter Light"/>
+              </a:rPr>
+              <a:t>12</a:t>
+            </a:r>
+            <a:endParaRPr lang="ru-RU" sz="9600"/>
+          </a:p>
+        </p:txBody>
+      </p:sp>
+      <p:sp>
+        <p:nvSpPr>
+          <p:cNvPr id="51" name="Label 51"/>
+          <p:cNvSpPr txBox="1"/>
+          <p:nvPr/>
+        </p:nvSpPr>
+        <p:spPr>
+          <a:xfrm>
+            <a:off x="12655296" y="6489498"/>
+            <a:ext cx="4096512" cy="878535"/>
+          </a:xfrm>
+          <a:prstGeom prst="rect">
+            <a:avLst/>
+          </a:prstGeom>
+          <a:noFill/>
+        </p:spPr>
+        <p:txBody>
+          <a:bodyPr wrap="square" lIns="0" tIns="0" rIns="0" bIns="0" anchor="t" rtlCol="0">
+            <a:noAutofit/>
+          </a:bodyPr>
+          <a:lstStyle/>
+          <a:p>
+            <a:pPr algn="l" marL="0" indent="0">
+              <a:lnSpc>
+                <a:spcPct val="100000"/>
+              </a:lnSpc>
+              <a:buNone/>
+            </a:pPr>
+            <a:r>
+              <a:rPr lang="ru-RU" sz="2799" b="0" cap="none" spc="0" baseline="0" dirty="0">
+                <a:solidFill>
+                  <a:srgbClr val="FFFFFF"/>
+                </a:solidFill>
+                <a:latin typeface="Inter Light"/>
+                <a:cs typeface="Inter Light"/>
+              </a:rPr>
+              <a:t>Форматов поддержки</a:t>
+            </a:r>
+            <a:endParaRPr lang="ru-RU" sz="2799"/>
+          </a:p>
+        </p:txBody>
+      </p:sp>
+      <p:sp>
+        <p:nvSpPr>
+          <p:cNvPr id="52" name="Conclusion strip 52"/>
+          <p:cNvSpPr/>
+          <p:nvPr/>
+        </p:nvSpPr>
+        <p:spPr>
+          <a:xfrm>
+            <a:off x="1024128" y="8312151"/>
+            <a:ext cx="16239744" cy="892754"/>
+          </a:xfrm>
+          <a:prstGeom prst="roundRect">
+            <a:avLst>
+              <a:gd name="adj" fmla="val 12290"/>
+            </a:avLst>
+          </a:prstGeom>
+          <a:solidFill>
+            <a:srgbClr val="000000"/>
+          </a:solidFill>
+          <a:ln>
+            <a:noFill/>
+          </a:ln>
+        </p:spPr>
+      </p:sp>
+      <p:sp>
+        <p:nvSpPr>
+          <p:cNvPr id="53" name="Conclusion bar 53"/>
+          <p:cNvSpPr/>
+          <p:nvPr/>
+        </p:nvSpPr>
+        <p:spPr>
+          <a:xfrm>
+            <a:off x="1379601" y="8575201"/>
+            <a:ext cx="61722" cy="366654"/>
           </a:xfrm>
           <a:prstGeom prst="rect">
             <a:avLst/>
@@ -9296,14 +9682,14 @@
       </p:sp>
       <p:sp>
         <p:nvSpPr>
-          <p:cNvPr id="46" name="Label 46"/>
+          <p:cNvPr id="54" name="Conclusion 54"/>
           <p:cNvSpPr txBox="1"/>
           <p:nvPr/>
         </p:nvSpPr>
         <p:spPr>
           <a:xfrm>
-            <a:off x="12716744" y="4263567"/>
-            <a:ext cx="4547128" cy="1305103"/>
+            <a:off x="1725701" y="8532544"/>
+            <a:ext cx="15182698" cy="451968"/>
           </a:xfrm>
           <a:prstGeom prst="rect">
             <a:avLst/>
@@ -9325,32 +9711,12 @@
             <a:r>
               <a:rPr lang="ru-RU" sz="2799" b="0" cap="none" spc="0" baseline="0" dirty="0">
                 <a:solidFill>
-                  <a:srgbClr val="FFFFFF"/>
+                  <a:srgbClr val="C2D076"/>
                 </a:solidFill>
                 <a:latin typeface="Inter Light"/>
                 <a:cs typeface="Inter Light"/>
               </a:rPr>
-              <a:t>Все шаблоны укладываются в лимит </a:t>
-            </a:r>
-            <a:r>
-              <a:rPr lang="ru-RU" sz="2799" b="0" cap="none" spc="0" baseline="0" dirty="0">
-                <a:solidFill>
-                  <a:srgbClr val="C2D076"/>
-                </a:solidFill>
-                <a:latin typeface="Inter Light"/>
-                <a:cs typeface="Inter Light"/>
-              </a:rPr>
-              <a:t>5 минут</a:t>
-            </a:r>
-            <a:r>
-              <a:rPr lang="ru-RU" sz="2799" b="0" cap="none" spc="0" baseline="0" dirty="0">
-                <a:solidFill>
-                  <a:srgbClr val="FFFFFF"/>
-                </a:solidFill>
-                <a:latin typeface="Inter Light"/>
-                <a:cs typeface="Inter Light"/>
-              </a:rPr>
-              <a:t> с запасом</a:t>
+              <a:t>Сервис работает с любыми шаблонами и форматами</a:t>
             </a:r>
             <a:endParaRPr lang="ru-RU" sz="2799"/>
           </a:p>
